--- a/美术作品.pptx
+++ b/美术作品.pptx
@@ -5,7 +5,7 @@
     <p:sldMasterId id="2147483648" r:id="rId1"/>
   </p:sldMasterIdLst>
   <p:notesMasterIdLst>
-    <p:notesMasterId r:id="rId8"/>
+    <p:notesMasterId r:id="rId11"/>
   </p:notesMasterIdLst>
   <p:sldIdLst>
     <p:sldId id="256" r:id="rId2"/>
@@ -14,6 +14,9 @@
     <p:sldId id="259" r:id="rId5"/>
     <p:sldId id="260" r:id="rId6"/>
     <p:sldId id="261" r:id="rId7"/>
+    <p:sldId id="262" r:id="rId8"/>
+    <p:sldId id="263" r:id="rId9"/>
+    <p:sldId id="264" r:id="rId10"/>
   </p:sldIdLst>
   <p:sldSz cx="12192000" cy="6858000"/>
   <p:notesSz cx="6858000" cy="9144000"/>
@@ -418,7 +421,7 @@
           <a:p>
             <a:fld id="{1F5AD5B5-6CBB-4946-BB99-91A038EC83D0}" type="datetimeFigureOut">
               <a:rPr lang="zh-CN" altLang="en-US" smtClean="0"/>
-              <a:t>2026/3/1</a:t>
+              <a:t>2026/3/11</a:t>
             </a:fld>
             <a:endParaRPr lang="zh-CN" altLang="en-US"/>
           </a:p>
@@ -932,7 +935,7 @@
           <a:p>
             <a:fld id="{D997B5FA-0921-464F-AAE1-844C04324D75}" type="datetimeFigureOut">
               <a:rPr lang="zh-CN" altLang="en-US" smtClean="0"/>
-              <a:t>2026/3/1</a:t>
+              <a:t>2026/3/11</a:t>
             </a:fld>
             <a:endParaRPr lang="zh-CN" altLang="en-US"/>
           </a:p>
@@ -1095,7 +1098,7 @@
           <a:p>
             <a:fld id="{D997B5FA-0921-464F-AAE1-844C04324D75}" type="datetimeFigureOut">
               <a:rPr lang="zh-CN" altLang="en-US" smtClean="0"/>
-              <a:t>2026/3/1</a:t>
+              <a:t>2026/3/11</a:t>
             </a:fld>
             <a:endParaRPr lang="zh-CN" altLang="en-US"/>
           </a:p>
@@ -1268,7 +1271,7 @@
           <a:p>
             <a:fld id="{D997B5FA-0921-464F-AAE1-844C04324D75}" type="datetimeFigureOut">
               <a:rPr lang="zh-CN" altLang="en-US" smtClean="0"/>
-              <a:t>2026/3/1</a:t>
+              <a:t>2026/3/11</a:t>
             </a:fld>
             <a:endParaRPr lang="zh-CN" altLang="en-US"/>
           </a:p>
@@ -1431,7 +1434,7 @@
           <a:p>
             <a:fld id="{D997B5FA-0921-464F-AAE1-844C04324D75}" type="datetimeFigureOut">
               <a:rPr lang="zh-CN" altLang="en-US" smtClean="0"/>
-              <a:t>2026/3/1</a:t>
+              <a:t>2026/3/11</a:t>
             </a:fld>
             <a:endParaRPr lang="zh-CN" altLang="en-US"/>
           </a:p>
@@ -1671,7 +1674,7 @@
           <a:p>
             <a:fld id="{D997B5FA-0921-464F-AAE1-844C04324D75}" type="datetimeFigureOut">
               <a:rPr lang="zh-CN" altLang="en-US" smtClean="0"/>
-              <a:t>2026/3/1</a:t>
+              <a:t>2026/3/11</a:t>
             </a:fld>
             <a:endParaRPr lang="zh-CN" altLang="en-US"/>
           </a:p>
@@ -1895,7 +1898,7 @@
           <a:p>
             <a:fld id="{D997B5FA-0921-464F-AAE1-844C04324D75}" type="datetimeFigureOut">
               <a:rPr lang="zh-CN" altLang="en-US" smtClean="0"/>
-              <a:t>2026/3/1</a:t>
+              <a:t>2026/3/11</a:t>
             </a:fld>
             <a:endParaRPr lang="zh-CN" altLang="en-US"/>
           </a:p>
@@ -2254,7 +2257,7 @@
           <a:p>
             <a:fld id="{D997B5FA-0921-464F-AAE1-844C04324D75}" type="datetimeFigureOut">
               <a:rPr lang="zh-CN" altLang="en-US" smtClean="0"/>
-              <a:t>2026/3/1</a:t>
+              <a:t>2026/3/11</a:t>
             </a:fld>
             <a:endParaRPr lang="zh-CN" altLang="en-US"/>
           </a:p>
@@ -2366,7 +2369,7 @@
           <a:p>
             <a:fld id="{D997B5FA-0921-464F-AAE1-844C04324D75}" type="datetimeFigureOut">
               <a:rPr lang="zh-CN" altLang="en-US" smtClean="0"/>
-              <a:t>2026/3/1</a:t>
+              <a:t>2026/3/11</a:t>
             </a:fld>
             <a:endParaRPr lang="zh-CN" altLang="en-US"/>
           </a:p>
@@ -2456,7 +2459,7 @@
           <a:p>
             <a:fld id="{D997B5FA-0921-464F-AAE1-844C04324D75}" type="datetimeFigureOut">
               <a:rPr lang="zh-CN" altLang="en-US" smtClean="0"/>
-              <a:t>2026/3/1</a:t>
+              <a:t>2026/3/11</a:t>
             </a:fld>
             <a:endParaRPr lang="zh-CN" altLang="en-US"/>
           </a:p>
@@ -2726,7 +2729,7 @@
           <a:p>
             <a:fld id="{D997B5FA-0921-464F-AAE1-844C04324D75}" type="datetimeFigureOut">
               <a:rPr lang="zh-CN" altLang="en-US" smtClean="0"/>
-              <a:t>2026/3/1</a:t>
+              <a:t>2026/3/11</a:t>
             </a:fld>
             <a:endParaRPr lang="zh-CN" altLang="en-US"/>
           </a:p>
@@ -2973,7 +2976,7 @@
           <a:p>
             <a:fld id="{D997B5FA-0921-464F-AAE1-844C04324D75}" type="datetimeFigureOut">
               <a:rPr lang="zh-CN" altLang="en-US" smtClean="0"/>
-              <a:t>2026/3/1</a:t>
+              <a:t>2026/3/11</a:t>
             </a:fld>
             <a:endParaRPr lang="zh-CN" altLang="en-US"/>
           </a:p>
@@ -3179,7 +3182,7 @@
           <a:p>
             <a:fld id="{D997B5FA-0921-464F-AAE1-844C04324D75}" type="datetimeFigureOut">
               <a:rPr lang="zh-CN" altLang="en-US" smtClean="0"/>
-              <a:t>2026/3/1</a:t>
+              <a:t>2026/3/11</a:t>
             </a:fld>
             <a:endParaRPr lang="zh-CN" altLang="en-US"/>
           </a:p>
@@ -13320,6 +13323,2850 @@
 </p:sld>
 </file>
 
+<file path=ppt/slides/slide7.xml><?xml version="1.0" encoding="utf-8"?>
+<p:sld xmlns:a="http://schemas.openxmlformats.org/drawingml/2006/main" xmlns:r="http://schemas.openxmlformats.org/officeDocument/2006/relationships" xmlns:p="http://schemas.openxmlformats.org/presentationml/2006/main">
+  <p:cSld>
+    <p:spTree>
+      <p:nvGrpSpPr>
+        <p:cNvPr id="1" name=""/>
+        <p:cNvGrpSpPr/>
+        <p:nvPr/>
+      </p:nvGrpSpPr>
+      <p:grpSpPr>
+        <a:xfrm>
+          <a:off x="0" y="0"/>
+          <a:ext cx="0" cy="0"/>
+          <a:chOff x="0" y="0"/>
+          <a:chExt cx="0" cy="0"/>
+        </a:xfrm>
+      </p:grpSpPr>
+      <p:grpSp>
+        <p:nvGrpSpPr>
+          <p:cNvPr id="55" name="组合 54">
+            <a:extLst>
+              <a:ext uri="{FF2B5EF4-FFF2-40B4-BE49-F238E27FC236}">
+                <a16:creationId xmlns:a16="http://schemas.microsoft.com/office/drawing/2014/main" id="{105E23F7-02E9-DB2B-77F0-94AD7616FF3C}"/>
+              </a:ext>
+            </a:extLst>
+          </p:cNvPr>
+          <p:cNvGrpSpPr/>
+          <p:nvPr/>
+        </p:nvGrpSpPr>
+        <p:grpSpPr>
+          <a:xfrm>
+            <a:off x="1119618" y="1806398"/>
+            <a:ext cx="9952764" cy="4371812"/>
+            <a:chOff x="424180" y="1438098"/>
+            <a:chExt cx="9952764" cy="4371812"/>
+          </a:xfrm>
+        </p:grpSpPr>
+        <p:sp>
+          <p:nvSpPr>
+            <p:cNvPr id="51" name="Shape 18">
+              <a:extLst>
+                <a:ext uri="{FF2B5EF4-FFF2-40B4-BE49-F238E27FC236}">
+                  <a16:creationId xmlns:a16="http://schemas.microsoft.com/office/drawing/2014/main" id="{4F6BA580-F30E-0860-0468-0002783715B1}"/>
+                </a:ext>
+              </a:extLst>
+            </p:cNvPr>
+            <p:cNvSpPr/>
+            <p:nvPr/>
+          </p:nvSpPr>
+          <p:spPr>
+            <a:xfrm>
+              <a:off x="497691" y="1651987"/>
+              <a:ext cx="5782609" cy="2363479"/>
+            </a:xfrm>
+            <a:prstGeom prst="rect">
+              <a:avLst/>
+            </a:prstGeom>
+            <a:solidFill>
+              <a:srgbClr val="F8FAFC"/>
+            </a:solidFill>
+            <a:ln w="25400">
+              <a:solidFill>
+                <a:srgbClr val="000000"/>
+              </a:solidFill>
+              <a:prstDash val="solid"/>
+            </a:ln>
+          </p:spPr>
+          <p:txBody>
+            <a:bodyPr/>
+            <a:lstStyle/>
+            <a:p>
+              <a:pPr algn="ctr">
+                <a:spcBef>
+                  <a:spcPts val="2000"/>
+                </a:spcBef>
+              </a:pPr>
+              <a:endParaRPr lang="en-US" altLang="zh-CN" sz="2400" b="1" dirty="0"/>
+            </a:p>
+          </p:txBody>
+        </p:sp>
+        <p:pic>
+          <p:nvPicPr>
+            <p:cNvPr id="5" name="Image 0" descr="preencoded.png">
+              <a:extLst>
+                <a:ext uri="{FF2B5EF4-FFF2-40B4-BE49-F238E27FC236}">
+                  <a16:creationId xmlns:a16="http://schemas.microsoft.com/office/drawing/2014/main" id="{7F5FD1C6-5A5C-CECB-D298-9366BD131081}"/>
+                </a:ext>
+              </a:extLst>
+            </p:cNvPr>
+            <p:cNvPicPr>
+              <a:picLocks noChangeAspect="1"/>
+            </p:cNvPicPr>
+            <p:nvPr/>
+          </p:nvPicPr>
+          <p:blipFill>
+            <a:blip r:embed="rId2">
+              <a:extLst>
+                <a:ext uri="{96DAC541-7B7A-43D3-8B79-37D633B846F1}">
+                  <asvg:svgBlip xmlns:asvg="http://schemas.microsoft.com/office/drawing/2016/SVG/main" r:embed="rId3"/>
+                </a:ext>
+              </a:extLst>
+            </a:blip>
+            <a:stretch>
+              <a:fillRect/>
+            </a:stretch>
+          </p:blipFill>
+          <p:spPr>
+            <a:xfrm>
+              <a:off x="7588024" y="1693630"/>
+              <a:ext cx="2788920" cy="1600200"/>
+            </a:xfrm>
+            <a:prstGeom prst="rect">
+              <a:avLst/>
+            </a:prstGeom>
+          </p:spPr>
+        </p:pic>
+        <p:sp>
+          <p:nvSpPr>
+            <p:cNvPr id="6" name="Text 1">
+              <a:extLst>
+                <a:ext uri="{FF2B5EF4-FFF2-40B4-BE49-F238E27FC236}">
+                  <a16:creationId xmlns:a16="http://schemas.microsoft.com/office/drawing/2014/main" id="{377595D1-0E29-BD79-3F56-2B2B6111CAC0}"/>
+                </a:ext>
+              </a:extLst>
+            </p:cNvPr>
+            <p:cNvSpPr/>
+            <p:nvPr/>
+          </p:nvSpPr>
+          <p:spPr>
+            <a:xfrm>
+              <a:off x="6482781" y="1890969"/>
+              <a:ext cx="1417320" cy="320040"/>
+            </a:xfrm>
+            <a:prstGeom prst="rect">
+              <a:avLst/>
+            </a:prstGeom>
+            <a:noFill/>
+            <a:ln/>
+          </p:spPr>
+          <p:txBody>
+            <a:bodyPr wrap="square" rtlCol="0" anchor="ctr"/>
+            <a:lstStyle/>
+            <a:p>
+              <a:r>
+                <a:rPr lang="en-US" altLang="zh-CN" sz="2000" dirty="0">
+                  <a:solidFill>
+                    <a:schemeClr val="dk1"/>
+                  </a:solidFill>
+                </a:rPr>
+                <a:t>Interaction</a:t>
+              </a:r>
+              <a:endParaRPr lang="en-US" sz="2000" dirty="0">
+                <a:solidFill>
+                  <a:schemeClr val="dk1"/>
+                </a:solidFill>
+              </a:endParaRPr>
+            </a:p>
+          </p:txBody>
+        </p:sp>
+        <p:sp>
+          <p:nvSpPr>
+            <p:cNvPr id="7" name="Shape 2">
+              <a:extLst>
+                <a:ext uri="{FF2B5EF4-FFF2-40B4-BE49-F238E27FC236}">
+                  <a16:creationId xmlns:a16="http://schemas.microsoft.com/office/drawing/2014/main" id="{E250B8C1-42EF-634B-5246-73CC6E18AF9F}"/>
+                </a:ext>
+              </a:extLst>
+            </p:cNvPr>
+            <p:cNvSpPr/>
+            <p:nvPr/>
+          </p:nvSpPr>
+          <p:spPr>
+            <a:xfrm>
+              <a:off x="6456198" y="2244954"/>
+              <a:ext cx="1417123" cy="713232"/>
+            </a:xfrm>
+            <a:prstGeom prst="leftRightArrow">
+              <a:avLst/>
+            </a:prstGeom>
+            <a:solidFill>
+              <a:srgbClr val="FFFFFF"/>
+            </a:solidFill>
+            <a:ln w="31750">
+              <a:solidFill>
+                <a:srgbClr val="000000"/>
+              </a:solidFill>
+              <a:prstDash val="solid"/>
+            </a:ln>
+          </p:spPr>
+        </p:sp>
+        <p:grpSp>
+          <p:nvGrpSpPr>
+            <p:cNvPr id="53" name="组合 52">
+              <a:extLst>
+                <a:ext uri="{FF2B5EF4-FFF2-40B4-BE49-F238E27FC236}">
+                  <a16:creationId xmlns:a16="http://schemas.microsoft.com/office/drawing/2014/main" id="{C32A5EB0-7AF7-8F66-6422-E53C5D1D8279}"/>
+                </a:ext>
+              </a:extLst>
+            </p:cNvPr>
+            <p:cNvGrpSpPr/>
+            <p:nvPr/>
+          </p:nvGrpSpPr>
+          <p:grpSpPr>
+            <a:xfrm>
+              <a:off x="8479562" y="4575134"/>
+              <a:ext cx="1005840" cy="1234776"/>
+              <a:chOff x="9306091" y="4393063"/>
+              <a:chExt cx="1005840" cy="1234776"/>
+            </a:xfrm>
+          </p:grpSpPr>
+          <p:grpSp>
+            <p:nvGrpSpPr>
+              <p:cNvPr id="49" name="组合 48">
+                <a:extLst>
+                  <a:ext uri="{FF2B5EF4-FFF2-40B4-BE49-F238E27FC236}">
+                    <a16:creationId xmlns:a16="http://schemas.microsoft.com/office/drawing/2014/main" id="{350811FC-AA15-6A68-31C7-1A8A2FD79D2A}"/>
+                  </a:ext>
+                </a:extLst>
+              </p:cNvPr>
+              <p:cNvGrpSpPr/>
+              <p:nvPr/>
+            </p:nvGrpSpPr>
+            <p:grpSpPr>
+              <a:xfrm>
+                <a:off x="9526119" y="4393063"/>
+                <a:ext cx="565785" cy="843611"/>
+                <a:chOff x="1865947" y="4084776"/>
+                <a:chExt cx="565785" cy="843611"/>
+              </a:xfrm>
+            </p:grpSpPr>
+            <p:sp>
+              <p:nvSpPr>
+                <p:cNvPr id="46" name="任意多边形: 形状 45">
+                  <a:extLst>
+                    <a:ext uri="{FF2B5EF4-FFF2-40B4-BE49-F238E27FC236}">
+                      <a16:creationId xmlns:a16="http://schemas.microsoft.com/office/drawing/2014/main" id="{9E0668B4-E54C-46B9-3A40-A0F34F81B2D6}"/>
+                    </a:ext>
+                  </a:extLst>
+                </p:cNvPr>
+                <p:cNvSpPr/>
+                <p:nvPr/>
+              </p:nvSpPr>
+              <p:spPr>
+                <a:xfrm>
+                  <a:off x="1960244" y="4084776"/>
+                  <a:ext cx="377190" cy="370332"/>
+                </a:xfrm>
+                <a:custGeom>
+                  <a:avLst/>
+                  <a:gdLst>
+                    <a:gd name="connsiteX0" fmla="*/ 377190 w 377190"/>
+                    <a:gd name="connsiteY0" fmla="*/ 185166 h 370332"/>
+                    <a:gd name="connsiteX1" fmla="*/ 188595 w 377190"/>
+                    <a:gd name="connsiteY1" fmla="*/ 370332 h 370332"/>
+                    <a:gd name="connsiteX2" fmla="*/ 0 w 377190"/>
+                    <a:gd name="connsiteY2" fmla="*/ 185166 h 370332"/>
+                    <a:gd name="connsiteX3" fmla="*/ 188595 w 377190"/>
+                    <a:gd name="connsiteY3" fmla="*/ 0 h 370332"/>
+                    <a:gd name="connsiteX4" fmla="*/ 377190 w 377190"/>
+                    <a:gd name="connsiteY4" fmla="*/ 185166 h 370332"/>
+                  </a:gdLst>
+                  <a:ahLst/>
+                  <a:cxnLst>
+                    <a:cxn ang="0">
+                      <a:pos x="connsiteX0" y="connsiteY0"/>
+                    </a:cxn>
+                    <a:cxn ang="0">
+                      <a:pos x="connsiteX1" y="connsiteY1"/>
+                    </a:cxn>
+                    <a:cxn ang="0">
+                      <a:pos x="connsiteX2" y="connsiteY2"/>
+                    </a:cxn>
+                    <a:cxn ang="0">
+                      <a:pos x="connsiteX3" y="connsiteY3"/>
+                    </a:cxn>
+                    <a:cxn ang="0">
+                      <a:pos x="connsiteX4" y="connsiteY4"/>
+                    </a:cxn>
+                  </a:cxnLst>
+                  <a:rect l="l" t="t" r="r" b="b"/>
+                  <a:pathLst>
+                    <a:path w="377190" h="370332">
+                      <a:moveTo>
+                        <a:pt x="377190" y="185166"/>
+                      </a:moveTo>
+                      <a:cubicBezTo>
+                        <a:pt x="377190" y="287430"/>
+                        <a:pt x="292753" y="370332"/>
+                        <a:pt x="188595" y="370332"/>
+                      </a:cubicBezTo>
+                      <a:cubicBezTo>
+                        <a:pt x="84437" y="370332"/>
+                        <a:pt x="0" y="287430"/>
+                        <a:pt x="0" y="185166"/>
+                      </a:cubicBezTo>
+                      <a:cubicBezTo>
+                        <a:pt x="0" y="82902"/>
+                        <a:pt x="84437" y="0"/>
+                        <a:pt x="188595" y="0"/>
+                      </a:cubicBezTo>
+                      <a:cubicBezTo>
+                        <a:pt x="292753" y="0"/>
+                        <a:pt x="377190" y="82902"/>
+                        <a:pt x="377190" y="185166"/>
+                      </a:cubicBezTo>
+                      <a:close/>
+                    </a:path>
+                  </a:pathLst>
+                </a:custGeom>
+                <a:noFill/>
+                <a:ln w="37505" cap="flat">
+                  <a:solidFill>
+                    <a:srgbClr val="000000"/>
+                  </a:solidFill>
+                  <a:prstDash val="solid"/>
+                  <a:miter/>
+                </a:ln>
+              </p:spPr>
+              <p:txBody>
+                <a:bodyPr rtlCol="0" anchor="ctr"/>
+                <a:lstStyle/>
+                <a:p>
+                  <a:endParaRPr lang="zh-CN" altLang="en-US"/>
+                </a:p>
+              </p:txBody>
+            </p:sp>
+            <p:sp>
+              <p:nvSpPr>
+                <p:cNvPr id="47" name="任意多边形: 形状 46">
+                  <a:extLst>
+                    <a:ext uri="{FF2B5EF4-FFF2-40B4-BE49-F238E27FC236}">
+                      <a16:creationId xmlns:a16="http://schemas.microsoft.com/office/drawing/2014/main" id="{D5532900-E4B2-5405-2B5D-51A67049EFA6}"/>
+                    </a:ext>
+                  </a:extLst>
+                </p:cNvPr>
+                <p:cNvSpPr/>
+                <p:nvPr/>
+              </p:nvSpPr>
+              <p:spPr>
+                <a:xfrm>
+                  <a:off x="1865947" y="4527194"/>
+                  <a:ext cx="565785" cy="395020"/>
+                </a:xfrm>
+                <a:custGeom>
+                  <a:avLst/>
+                  <a:gdLst>
+                    <a:gd name="connsiteX0" fmla="*/ 0 w 565785"/>
+                    <a:gd name="connsiteY0" fmla="*/ 395021 h 395020"/>
+                    <a:gd name="connsiteX1" fmla="*/ 282893 w 565785"/>
+                    <a:gd name="connsiteY1" fmla="*/ 0 h 395020"/>
+                    <a:gd name="connsiteX2" fmla="*/ 565785 w 565785"/>
+                    <a:gd name="connsiteY2" fmla="*/ 395021 h 395020"/>
+                  </a:gdLst>
+                  <a:ahLst/>
+                  <a:cxnLst>
+                    <a:cxn ang="0">
+                      <a:pos x="connsiteX0" y="connsiteY0"/>
+                    </a:cxn>
+                    <a:cxn ang="0">
+                      <a:pos x="connsiteX1" y="connsiteY1"/>
+                    </a:cxn>
+                    <a:cxn ang="0">
+                      <a:pos x="connsiteX2" y="connsiteY2"/>
+                    </a:cxn>
+                  </a:cxnLst>
+                  <a:rect l="l" t="t" r="r" b="b"/>
+                  <a:pathLst>
+                    <a:path w="565785" h="395020">
+                      <a:moveTo>
+                        <a:pt x="0" y="395021"/>
+                      </a:moveTo>
+                      <a:cubicBezTo>
+                        <a:pt x="0" y="123444"/>
+                        <a:pt x="125730" y="0"/>
+                        <a:pt x="282893" y="0"/>
+                      </a:cubicBezTo>
+                      <a:cubicBezTo>
+                        <a:pt x="440055" y="0"/>
+                        <a:pt x="565785" y="123444"/>
+                        <a:pt x="565785" y="395021"/>
+                      </a:cubicBezTo>
+                    </a:path>
+                  </a:pathLst>
+                </a:custGeom>
+                <a:noFill/>
+                <a:ln w="37505" cap="rnd">
+                  <a:solidFill>
+                    <a:srgbClr val="000000"/>
+                  </a:solidFill>
+                  <a:prstDash val="solid"/>
+                  <a:miter/>
+                </a:ln>
+              </p:spPr>
+              <p:txBody>
+                <a:bodyPr rtlCol="0" anchor="ctr"/>
+                <a:lstStyle/>
+                <a:p>
+                  <a:endParaRPr lang="zh-CN" altLang="en-US"/>
+                </a:p>
+              </p:txBody>
+            </p:sp>
+            <p:sp>
+              <p:nvSpPr>
+                <p:cNvPr id="48" name="任意多边形: 形状 47">
+                  <a:extLst>
+                    <a:ext uri="{FF2B5EF4-FFF2-40B4-BE49-F238E27FC236}">
+                      <a16:creationId xmlns:a16="http://schemas.microsoft.com/office/drawing/2014/main" id="{823B2BE2-2874-C00A-AA5A-752BAE44C29A}"/>
+                    </a:ext>
+                  </a:extLst>
+                </p:cNvPr>
+                <p:cNvSpPr/>
+                <p:nvPr/>
+              </p:nvSpPr>
+              <p:spPr>
+                <a:xfrm>
+                  <a:off x="1865947" y="4922215"/>
+                  <a:ext cx="565785" cy="6172"/>
+                </a:xfrm>
+                <a:custGeom>
+                  <a:avLst/>
+                  <a:gdLst>
+                    <a:gd name="connsiteX0" fmla="*/ 0 w 565785"/>
+                    <a:gd name="connsiteY0" fmla="*/ 0 h 6172"/>
+                    <a:gd name="connsiteX1" fmla="*/ 565785 w 565785"/>
+                    <a:gd name="connsiteY1" fmla="*/ 0 h 6172"/>
+                  </a:gdLst>
+                  <a:ahLst/>
+                  <a:cxnLst>
+                    <a:cxn ang="0">
+                      <a:pos x="connsiteX0" y="connsiteY0"/>
+                    </a:cxn>
+                    <a:cxn ang="0">
+                      <a:pos x="connsiteX1" y="connsiteY1"/>
+                    </a:cxn>
+                  </a:cxnLst>
+                  <a:rect l="l" t="t" r="r" b="b"/>
+                  <a:pathLst>
+                    <a:path w="565785" h="6172">
+                      <a:moveTo>
+                        <a:pt x="0" y="0"/>
+                      </a:moveTo>
+                      <a:lnTo>
+                        <a:pt x="565785" y="0"/>
+                      </a:lnTo>
+                    </a:path>
+                  </a:pathLst>
+                </a:custGeom>
+                <a:noFill/>
+                <a:ln w="37505" cap="rnd">
+                  <a:solidFill>
+                    <a:srgbClr val="000000"/>
+                  </a:solidFill>
+                  <a:prstDash val="solid"/>
+                  <a:miter/>
+                </a:ln>
+              </p:spPr>
+              <p:txBody>
+                <a:bodyPr rtlCol="0" anchor="ctr"/>
+                <a:lstStyle/>
+                <a:p>
+                  <a:endParaRPr lang="zh-CN" altLang="en-US"/>
+                </a:p>
+              </p:txBody>
+            </p:sp>
+          </p:grpSp>
+          <p:sp>
+            <p:nvSpPr>
+              <p:cNvPr id="9" name="Text 3">
+                <a:extLst>
+                  <a:ext uri="{FF2B5EF4-FFF2-40B4-BE49-F238E27FC236}">
+                    <a16:creationId xmlns:a16="http://schemas.microsoft.com/office/drawing/2014/main" id="{537DD5AA-56F8-036E-B7AF-EFB56830BDD1}"/>
+                  </a:ext>
+                </a:extLst>
+              </p:cNvPr>
+              <p:cNvSpPr/>
+              <p:nvPr/>
+            </p:nvSpPr>
+            <p:spPr>
+              <a:xfrm>
+                <a:off x="9306091" y="5307799"/>
+                <a:ext cx="1005840" cy="320040"/>
+              </a:xfrm>
+              <a:prstGeom prst="rect">
+                <a:avLst/>
+              </a:prstGeom>
+              <a:noFill/>
+              <a:ln/>
+            </p:spPr>
+            <p:txBody>
+              <a:bodyPr wrap="square" rtlCol="0" anchor="ctr"/>
+              <a:lstStyle/>
+              <a:p>
+                <a:pPr marL="0" indent="0" algn="ctr">
+                  <a:buNone/>
+                </a:pPr>
+                <a:r>
+                  <a:rPr lang="en-US" sz="2400" dirty="0"/>
+                  <a:t>User</a:t>
+                </a:r>
+              </a:p>
+            </p:txBody>
+          </p:sp>
+        </p:grpSp>
+        <p:sp>
+          <p:nvSpPr>
+            <p:cNvPr id="10" name="Shape 4">
+              <a:extLst>
+                <a:ext uri="{FF2B5EF4-FFF2-40B4-BE49-F238E27FC236}">
+                  <a16:creationId xmlns:a16="http://schemas.microsoft.com/office/drawing/2014/main" id="{6A247319-E928-0AC1-1966-3ADC4E3A21CD}"/>
+                </a:ext>
+              </a:extLst>
+            </p:cNvPr>
+            <p:cNvSpPr/>
+            <p:nvPr/>
+          </p:nvSpPr>
+          <p:spPr>
+            <a:xfrm rot="5400000">
+              <a:off x="7300589" y="4254128"/>
+              <a:ext cx="502920" cy="1815847"/>
+            </a:xfrm>
+            <a:prstGeom prst="upArrow">
+              <a:avLst/>
+            </a:prstGeom>
+            <a:solidFill>
+              <a:srgbClr val="FFFFFF"/>
+            </a:solidFill>
+            <a:ln w="31750">
+              <a:solidFill>
+                <a:srgbClr val="000000"/>
+              </a:solidFill>
+              <a:prstDash val="solid"/>
+            </a:ln>
+          </p:spPr>
+        </p:sp>
+        <p:sp>
+          <p:nvSpPr>
+            <p:cNvPr id="11" name="Text 5">
+              <a:extLst>
+                <a:ext uri="{FF2B5EF4-FFF2-40B4-BE49-F238E27FC236}">
+                  <a16:creationId xmlns:a16="http://schemas.microsoft.com/office/drawing/2014/main" id="{44BD4A7A-B5A5-94C9-ADA0-6581FE23A036}"/>
+                </a:ext>
+              </a:extLst>
+            </p:cNvPr>
+            <p:cNvSpPr/>
+            <p:nvPr/>
+          </p:nvSpPr>
+          <p:spPr>
+            <a:xfrm>
+              <a:off x="9160768" y="3423274"/>
+              <a:ext cx="1203473" cy="640080"/>
+            </a:xfrm>
+            <a:prstGeom prst="rect">
+              <a:avLst/>
+            </a:prstGeom>
+            <a:noFill/>
+            <a:ln/>
+          </p:spPr>
+          <p:txBody>
+            <a:bodyPr wrap="square" rtlCol="0" anchor="ctr"/>
+            <a:lstStyle/>
+            <a:p>
+              <a:pPr marL="0" indent="0">
+                <a:buNone/>
+              </a:pPr>
+              <a:r>
+                <a:rPr lang="en-US" sz="2000" dirty="0">
+                  <a:solidFill>
+                    <a:schemeClr val="dk1"/>
+                  </a:solidFill>
+                </a:rPr>
+                <a:t>Deploy </a:t>
+              </a:r>
+            </a:p>
+            <a:p>
+              <a:pPr marL="0" indent="0">
+                <a:buNone/>
+              </a:pPr>
+              <a:r>
+                <a:rPr lang="en-US" sz="2000" dirty="0">
+                  <a:solidFill>
+                    <a:schemeClr val="dk1"/>
+                  </a:solidFill>
+                </a:rPr>
+                <a:t>Workflow</a:t>
+              </a:r>
+            </a:p>
+          </p:txBody>
+        </p:sp>
+        <p:sp>
+          <p:nvSpPr>
+            <p:cNvPr id="12" name="Text 6">
+              <a:extLst>
+                <a:ext uri="{FF2B5EF4-FFF2-40B4-BE49-F238E27FC236}">
+                  <a16:creationId xmlns:a16="http://schemas.microsoft.com/office/drawing/2014/main" id="{45B4A606-9253-E4B9-41A2-B47BB703640E}"/>
+                </a:ext>
+              </a:extLst>
+            </p:cNvPr>
+            <p:cNvSpPr/>
+            <p:nvPr/>
+          </p:nvSpPr>
+          <p:spPr>
+            <a:xfrm>
+              <a:off x="6777596" y="4490090"/>
+              <a:ext cx="1620855" cy="320040"/>
+            </a:xfrm>
+            <a:prstGeom prst="rect">
+              <a:avLst/>
+            </a:prstGeom>
+            <a:noFill/>
+            <a:ln/>
+          </p:spPr>
+          <p:txBody>
+            <a:bodyPr wrap="square" rtlCol="0" anchor="ctr"/>
+            <a:lstStyle/>
+            <a:p>
+              <a:r>
+                <a:rPr lang="en-US" altLang="zh-CN" sz="2000" dirty="0">
+                  <a:solidFill>
+                    <a:schemeClr val="dk1"/>
+                  </a:solidFill>
+                </a:rPr>
+                <a:t>Programming Framework</a:t>
+              </a:r>
+              <a:endParaRPr lang="en-US" sz="2000" dirty="0">
+                <a:solidFill>
+                  <a:schemeClr val="dk1"/>
+                </a:solidFill>
+              </a:endParaRPr>
+            </a:p>
+          </p:txBody>
+        </p:sp>
+        <p:sp>
+          <p:nvSpPr>
+            <p:cNvPr id="13" name="Shape 7">
+              <a:extLst>
+                <a:ext uri="{FF2B5EF4-FFF2-40B4-BE49-F238E27FC236}">
+                  <a16:creationId xmlns:a16="http://schemas.microsoft.com/office/drawing/2014/main" id="{3667AFC3-47F4-8131-C90F-D67E81F10EA3}"/>
+                </a:ext>
+              </a:extLst>
+            </p:cNvPr>
+            <p:cNvSpPr/>
+            <p:nvPr/>
+          </p:nvSpPr>
+          <p:spPr>
+            <a:xfrm rot="5400000">
+              <a:off x="8291767" y="3439328"/>
+              <a:ext cx="1381431" cy="502920"/>
+            </a:xfrm>
+            <a:prstGeom prst="leftArrow">
+              <a:avLst/>
+            </a:prstGeom>
+            <a:solidFill>
+              <a:srgbClr val="FFFFFF"/>
+            </a:solidFill>
+            <a:ln w="31750">
+              <a:solidFill>
+                <a:srgbClr val="000000"/>
+              </a:solidFill>
+              <a:prstDash val="solid"/>
+            </a:ln>
+          </p:spPr>
+        </p:sp>
+        <p:sp>
+          <p:nvSpPr>
+            <p:cNvPr id="24" name="Shape 18">
+              <a:extLst>
+                <a:ext uri="{FF2B5EF4-FFF2-40B4-BE49-F238E27FC236}">
+                  <a16:creationId xmlns:a16="http://schemas.microsoft.com/office/drawing/2014/main" id="{6E656889-B9DF-3B38-2BCE-E9E3E4532493}"/>
+                </a:ext>
+              </a:extLst>
+            </p:cNvPr>
+            <p:cNvSpPr/>
+            <p:nvPr/>
+          </p:nvSpPr>
+          <p:spPr>
+            <a:xfrm>
+              <a:off x="532471" y="4860067"/>
+              <a:ext cx="5747829" cy="640080"/>
+            </a:xfrm>
+            <a:prstGeom prst="rect">
+              <a:avLst/>
+            </a:prstGeom>
+            <a:solidFill>
+              <a:srgbClr val="F8FAFC"/>
+            </a:solidFill>
+            <a:ln w="25400">
+              <a:solidFill>
+                <a:srgbClr val="000000"/>
+              </a:solidFill>
+              <a:prstDash val="solid"/>
+            </a:ln>
+          </p:spPr>
+          <p:txBody>
+            <a:bodyPr/>
+            <a:lstStyle/>
+            <a:p>
+              <a:pPr algn="ctr">
+                <a:spcBef>
+                  <a:spcPts val="2000"/>
+                </a:spcBef>
+              </a:pPr>
+              <a:endParaRPr lang="en-US" altLang="zh-CN" sz="2400" b="1" dirty="0"/>
+            </a:p>
+          </p:txBody>
+        </p:sp>
+        <p:sp>
+          <p:nvSpPr>
+            <p:cNvPr id="25" name="Text 19">
+              <a:extLst>
+                <a:ext uri="{FF2B5EF4-FFF2-40B4-BE49-F238E27FC236}">
+                  <a16:creationId xmlns:a16="http://schemas.microsoft.com/office/drawing/2014/main" id="{D0CCF9FF-0680-D413-B847-F4D0971ACDE6}"/>
+                </a:ext>
+              </a:extLst>
+            </p:cNvPr>
+            <p:cNvSpPr/>
+            <p:nvPr/>
+          </p:nvSpPr>
+          <p:spPr>
+            <a:xfrm>
+              <a:off x="424180" y="4926713"/>
+              <a:ext cx="6263640" cy="822960"/>
+            </a:xfrm>
+            <a:prstGeom prst="rect">
+              <a:avLst/>
+            </a:prstGeom>
+            <a:noFill/>
+            <a:ln/>
+          </p:spPr>
+          <p:txBody>
+            <a:bodyPr wrap="square" rtlCol="0" anchor="ctr"/>
+            <a:lstStyle/>
+            <a:p>
+              <a:pPr marL="0" indent="0" algn="ctr">
+                <a:buNone/>
+              </a:pPr>
+              <a:endParaRPr lang="en-US" sz="2200" dirty="0"/>
+            </a:p>
+          </p:txBody>
+        </p:sp>
+        <p:sp>
+          <p:nvSpPr>
+            <p:cNvPr id="26" name="Shape 20">
+              <a:extLst>
+                <a:ext uri="{FF2B5EF4-FFF2-40B4-BE49-F238E27FC236}">
+                  <a16:creationId xmlns:a16="http://schemas.microsoft.com/office/drawing/2014/main" id="{DE878C9D-11EC-45DB-619B-B2DEBDE414D5}"/>
+                </a:ext>
+              </a:extLst>
+            </p:cNvPr>
+            <p:cNvSpPr/>
+            <p:nvPr/>
+          </p:nvSpPr>
+          <p:spPr>
+            <a:xfrm>
+              <a:off x="3247116" y="4087552"/>
+              <a:ext cx="364149" cy="640080"/>
+            </a:xfrm>
+            <a:prstGeom prst="upArrow">
+              <a:avLst/>
+            </a:prstGeom>
+            <a:solidFill>
+              <a:srgbClr val="FFFFFF"/>
+            </a:solidFill>
+            <a:ln w="31750">
+              <a:solidFill>
+                <a:srgbClr val="000000"/>
+              </a:solidFill>
+              <a:prstDash val="solid"/>
+            </a:ln>
+          </p:spPr>
+        </p:sp>
+        <p:sp>
+          <p:nvSpPr>
+            <p:cNvPr id="27" name="Text 21">
+              <a:extLst>
+                <a:ext uri="{FF2B5EF4-FFF2-40B4-BE49-F238E27FC236}">
+                  <a16:creationId xmlns:a16="http://schemas.microsoft.com/office/drawing/2014/main" id="{AE5DEB92-3327-2913-98B7-3DC9E9AD7DE9}"/>
+                </a:ext>
+              </a:extLst>
+            </p:cNvPr>
+            <p:cNvSpPr/>
+            <p:nvPr/>
+          </p:nvSpPr>
+          <p:spPr>
+            <a:xfrm>
+              <a:off x="3664290" y="4250990"/>
+              <a:ext cx="1187109" cy="320040"/>
+            </a:xfrm>
+            <a:prstGeom prst="rect">
+              <a:avLst/>
+            </a:prstGeom>
+            <a:noFill/>
+            <a:ln/>
+          </p:spPr>
+          <p:txBody>
+            <a:bodyPr wrap="square" rtlCol="0" anchor="ctr"/>
+            <a:lstStyle/>
+            <a:p>
+              <a:r>
+                <a:rPr lang="en-US" altLang="zh-CN" sz="2000" dirty="0">
+                  <a:solidFill>
+                    <a:schemeClr val="dk1"/>
+                  </a:solidFill>
+                </a:rPr>
+                <a:t>Guidance</a:t>
+              </a:r>
+              <a:endParaRPr lang="en-US" sz="2000" dirty="0">
+                <a:solidFill>
+                  <a:schemeClr val="dk1"/>
+                </a:solidFill>
+              </a:endParaRPr>
+            </a:p>
+          </p:txBody>
+        </p:sp>
+        <p:grpSp>
+          <p:nvGrpSpPr>
+            <p:cNvPr id="35" name="组合 34">
+              <a:extLst>
+                <a:ext uri="{FF2B5EF4-FFF2-40B4-BE49-F238E27FC236}">
+                  <a16:creationId xmlns:a16="http://schemas.microsoft.com/office/drawing/2014/main" id="{E0602C2E-9899-80C2-6746-042237351A4D}"/>
+                </a:ext>
+              </a:extLst>
+            </p:cNvPr>
+            <p:cNvGrpSpPr/>
+            <p:nvPr/>
+          </p:nvGrpSpPr>
+          <p:grpSpPr>
+            <a:xfrm>
+              <a:off x="872384" y="2195740"/>
+              <a:ext cx="2395324" cy="667708"/>
+              <a:chOff x="3489960" y="2446020"/>
+              <a:chExt cx="1325880" cy="960120"/>
+            </a:xfrm>
+          </p:grpSpPr>
+          <p:sp>
+            <p:nvSpPr>
+              <p:cNvPr id="36" name="Shape 15">
+                <a:extLst>
+                  <a:ext uri="{FF2B5EF4-FFF2-40B4-BE49-F238E27FC236}">
+                    <a16:creationId xmlns:a16="http://schemas.microsoft.com/office/drawing/2014/main" id="{B589031A-3D76-A650-F4D2-402632174616}"/>
+                  </a:ext>
+                </a:extLst>
+              </p:cNvPr>
+              <p:cNvSpPr/>
+              <p:nvPr/>
+            </p:nvSpPr>
+            <p:spPr>
+              <a:xfrm>
+                <a:off x="3489960" y="2446020"/>
+                <a:ext cx="1325880" cy="960120"/>
+              </a:xfrm>
+              <a:prstGeom prst="roundRect">
+                <a:avLst/>
+              </a:prstGeom>
+              <a:solidFill>
+                <a:srgbClr val="EEF2FF"/>
+              </a:solidFill>
+              <a:ln w="12700">
+                <a:solidFill>
+                  <a:srgbClr val="334155"/>
+                </a:solidFill>
+                <a:prstDash val="solid"/>
+              </a:ln>
+              <a:effectLst>
+                <a:outerShdw blurRad="38100" dist="19050" dir="2700000" algn="bl" rotWithShape="0">
+                  <a:srgbClr val="000000">
+                    <a:alpha val="15000"/>
+                  </a:srgbClr>
+                </a:outerShdw>
+              </a:effectLst>
+            </p:spPr>
+            <p:txBody>
+              <a:bodyPr/>
+              <a:lstStyle/>
+              <a:p>
+                <a:endParaRPr lang="zh-CN" altLang="en-US"/>
+              </a:p>
+            </p:txBody>
+          </p:sp>
+          <p:sp>
+            <p:nvSpPr>
+              <p:cNvPr id="37" name="Text 16">
+                <a:extLst>
+                  <a:ext uri="{FF2B5EF4-FFF2-40B4-BE49-F238E27FC236}">
+                    <a16:creationId xmlns:a16="http://schemas.microsoft.com/office/drawing/2014/main" id="{C603D1EE-3E42-4FEA-2758-F951063DBA65}"/>
+                  </a:ext>
+                </a:extLst>
+              </p:cNvPr>
+              <p:cNvSpPr/>
+              <p:nvPr/>
+            </p:nvSpPr>
+            <p:spPr>
+              <a:xfrm>
+                <a:off x="3581400" y="2516786"/>
+                <a:ext cx="1143000" cy="868680"/>
+              </a:xfrm>
+              <a:prstGeom prst="rect">
+                <a:avLst/>
+              </a:prstGeom>
+              <a:noFill/>
+              <a:ln/>
+            </p:spPr>
+            <p:txBody>
+              <a:bodyPr wrap="square" rtlCol="0" anchor="ctr"/>
+              <a:lstStyle>
+                <a:lvl1pPr marL="0" algn="l" defTabSz="914400" rtl="0" eaLnBrk="1" latinLnBrk="0" hangingPunct="1">
+                  <a:defRPr sz="1800" kern="1200">
+                    <a:solidFill>
+                      <a:schemeClr val="tx1"/>
+                    </a:solidFill>
+                    <a:latin typeface="+mn-lt"/>
+                    <a:ea typeface="+mn-ea"/>
+                    <a:cs typeface="+mn-cs"/>
+                  </a:defRPr>
+                </a:lvl1pPr>
+                <a:lvl2pPr marL="457200" algn="l" defTabSz="914400" rtl="0" eaLnBrk="1" latinLnBrk="0" hangingPunct="1">
+                  <a:defRPr sz="1800" kern="1200">
+                    <a:solidFill>
+                      <a:schemeClr val="tx1"/>
+                    </a:solidFill>
+                    <a:latin typeface="+mn-lt"/>
+                    <a:ea typeface="+mn-ea"/>
+                    <a:cs typeface="+mn-cs"/>
+                  </a:defRPr>
+                </a:lvl2pPr>
+                <a:lvl3pPr marL="914400" algn="l" defTabSz="914400" rtl="0" eaLnBrk="1" latinLnBrk="0" hangingPunct="1">
+                  <a:defRPr sz="1800" kern="1200">
+                    <a:solidFill>
+                      <a:schemeClr val="tx1"/>
+                    </a:solidFill>
+                    <a:latin typeface="+mn-lt"/>
+                    <a:ea typeface="+mn-ea"/>
+                    <a:cs typeface="+mn-cs"/>
+                  </a:defRPr>
+                </a:lvl3pPr>
+                <a:lvl4pPr marL="1371600" algn="l" defTabSz="914400" rtl="0" eaLnBrk="1" latinLnBrk="0" hangingPunct="1">
+                  <a:defRPr sz="1800" kern="1200">
+                    <a:solidFill>
+                      <a:schemeClr val="tx1"/>
+                    </a:solidFill>
+                    <a:latin typeface="+mn-lt"/>
+                    <a:ea typeface="+mn-ea"/>
+                    <a:cs typeface="+mn-cs"/>
+                  </a:defRPr>
+                </a:lvl4pPr>
+                <a:lvl5pPr marL="1828800" algn="l" defTabSz="914400" rtl="0" eaLnBrk="1" latinLnBrk="0" hangingPunct="1">
+                  <a:defRPr sz="1800" kern="1200">
+                    <a:solidFill>
+                      <a:schemeClr val="tx1"/>
+                    </a:solidFill>
+                    <a:latin typeface="+mn-lt"/>
+                    <a:ea typeface="+mn-ea"/>
+                    <a:cs typeface="+mn-cs"/>
+                  </a:defRPr>
+                </a:lvl5pPr>
+                <a:lvl6pPr marL="2286000" algn="l" defTabSz="914400" rtl="0" eaLnBrk="1" latinLnBrk="0" hangingPunct="1">
+                  <a:defRPr sz="1800" kern="1200">
+                    <a:solidFill>
+                      <a:schemeClr val="tx1"/>
+                    </a:solidFill>
+                    <a:latin typeface="+mn-lt"/>
+                    <a:ea typeface="+mn-ea"/>
+                    <a:cs typeface="+mn-cs"/>
+                  </a:defRPr>
+                </a:lvl6pPr>
+                <a:lvl7pPr marL="2743200" algn="l" defTabSz="914400" rtl="0" eaLnBrk="1" latinLnBrk="0" hangingPunct="1">
+                  <a:defRPr sz="1800" kern="1200">
+                    <a:solidFill>
+                      <a:schemeClr val="tx1"/>
+                    </a:solidFill>
+                    <a:latin typeface="+mn-lt"/>
+                    <a:ea typeface="+mn-ea"/>
+                    <a:cs typeface="+mn-cs"/>
+                  </a:defRPr>
+                </a:lvl7pPr>
+                <a:lvl8pPr marL="3200400" algn="l" defTabSz="914400" rtl="0" eaLnBrk="1" latinLnBrk="0" hangingPunct="1">
+                  <a:defRPr sz="1800" kern="1200">
+                    <a:solidFill>
+                      <a:schemeClr val="tx1"/>
+                    </a:solidFill>
+                    <a:latin typeface="+mn-lt"/>
+                    <a:ea typeface="+mn-ea"/>
+                    <a:cs typeface="+mn-cs"/>
+                  </a:defRPr>
+                </a:lvl8pPr>
+                <a:lvl9pPr marL="3657600" algn="l" defTabSz="914400" rtl="0" eaLnBrk="1" latinLnBrk="0" hangingPunct="1">
+                  <a:defRPr sz="1800" kern="1200">
+                    <a:solidFill>
+                      <a:schemeClr val="tx1"/>
+                    </a:solidFill>
+                    <a:latin typeface="+mn-lt"/>
+                    <a:ea typeface="+mn-ea"/>
+                    <a:cs typeface="+mn-cs"/>
+                  </a:defRPr>
+                </a:lvl9pPr>
+              </a:lstStyle>
+              <a:p>
+                <a:pPr indent="0" algn="ctr">
+                  <a:buNone/>
+                </a:pPr>
+                <a:r>
+                  <a:rPr lang="en-US" dirty="0">
+                    <a:solidFill>
+                      <a:schemeClr val="dk1"/>
+                    </a:solidFill>
+                  </a:rPr>
+                  <a:t>Prediction </a:t>
+                </a:r>
+              </a:p>
+              <a:p>
+                <a:pPr indent="0" algn="ctr">
+                  <a:buNone/>
+                </a:pPr>
+                <a:r>
+                  <a:rPr lang="en-US" dirty="0">
+                    <a:solidFill>
+                      <a:schemeClr val="dk1"/>
+                    </a:solidFill>
+                  </a:rPr>
+                  <a:t>Service</a:t>
+                </a:r>
+              </a:p>
+            </p:txBody>
+          </p:sp>
+        </p:grpSp>
+        <p:sp>
+          <p:nvSpPr>
+            <p:cNvPr id="38" name="Shape 17">
+              <a:extLst>
+                <a:ext uri="{FF2B5EF4-FFF2-40B4-BE49-F238E27FC236}">
+                  <a16:creationId xmlns:a16="http://schemas.microsoft.com/office/drawing/2014/main" id="{620D3A45-B8B5-C12A-45DC-27682FB7F539}"/>
+                </a:ext>
+              </a:extLst>
+            </p:cNvPr>
+            <p:cNvSpPr/>
+            <p:nvPr/>
+          </p:nvSpPr>
+          <p:spPr>
+            <a:xfrm>
+              <a:off x="3664291" y="2207551"/>
+              <a:ext cx="2395324" cy="667708"/>
+            </a:xfrm>
+            <a:prstGeom prst="roundRect">
+              <a:avLst/>
+            </a:prstGeom>
+            <a:solidFill>
+              <a:srgbClr val="ECFDF5"/>
+            </a:solidFill>
+            <a:ln w="12700">
+              <a:solidFill>
+                <a:srgbClr val="334155"/>
+              </a:solidFill>
+              <a:prstDash val="solid"/>
+            </a:ln>
+            <a:effectLst>
+              <a:outerShdw blurRad="38100" dist="19050" dir="2700000" algn="bl" rotWithShape="0">
+                <a:srgbClr val="000000">
+                  <a:alpha val="15000"/>
+                </a:srgbClr>
+              </a:outerShdw>
+            </a:effectLst>
+          </p:spPr>
+          <p:txBody>
+            <a:bodyPr/>
+            <a:lstStyle/>
+            <a:p>
+              <a:pPr indent="0" algn="ctr">
+                <a:buNone/>
+              </a:pPr>
+              <a:r>
+                <a:rPr lang="en-US" altLang="zh-CN" dirty="0">
+                  <a:solidFill>
+                    <a:schemeClr val="dk1"/>
+                  </a:solidFill>
+                </a:rPr>
+                <a:t>Gating &amp; Budgeting</a:t>
+              </a:r>
+            </a:p>
+            <a:p>
+              <a:pPr indent="0" algn="ctr">
+                <a:buNone/>
+              </a:pPr>
+              <a:r>
+                <a:rPr lang="en-US" altLang="zh-CN" dirty="0">
+                  <a:solidFill>
+                    <a:schemeClr val="dk1"/>
+                  </a:solidFill>
+                </a:rPr>
+                <a:t>Service</a:t>
+              </a:r>
+            </a:p>
+          </p:txBody>
+        </p:sp>
+        <p:sp>
+          <p:nvSpPr>
+            <p:cNvPr id="39" name="Shape 19">
+              <a:extLst>
+                <a:ext uri="{FF2B5EF4-FFF2-40B4-BE49-F238E27FC236}">
+                  <a16:creationId xmlns:a16="http://schemas.microsoft.com/office/drawing/2014/main" id="{1C7670E4-46BF-5131-35D1-B97032782888}"/>
+                </a:ext>
+              </a:extLst>
+            </p:cNvPr>
+            <p:cNvSpPr/>
+            <p:nvPr/>
+          </p:nvSpPr>
+          <p:spPr>
+            <a:xfrm>
+              <a:off x="3647533" y="3104332"/>
+              <a:ext cx="2395324" cy="667708"/>
+            </a:xfrm>
+            <a:prstGeom prst="roundRect">
+              <a:avLst/>
+            </a:prstGeom>
+            <a:solidFill>
+              <a:srgbClr val="FFF7ED"/>
+            </a:solidFill>
+            <a:ln w="12700">
+              <a:solidFill>
+                <a:srgbClr val="334155"/>
+              </a:solidFill>
+              <a:prstDash val="solid"/>
+            </a:ln>
+            <a:effectLst>
+              <a:outerShdw blurRad="38100" dist="19050" dir="2700000" algn="bl" rotWithShape="0">
+                <a:srgbClr val="000000">
+                  <a:alpha val="15000"/>
+                </a:srgbClr>
+              </a:outerShdw>
+            </a:effectLst>
+          </p:spPr>
+          <p:txBody>
+            <a:bodyPr/>
+            <a:lstStyle/>
+            <a:p>
+              <a:pPr indent="0" algn="ctr">
+                <a:buNone/>
+              </a:pPr>
+              <a:r>
+                <a:rPr lang="en-US" altLang="zh-CN" dirty="0">
+                  <a:solidFill>
+                    <a:schemeClr val="dk1"/>
+                  </a:solidFill>
+                </a:rPr>
+                <a:t>Buffering</a:t>
+              </a:r>
+            </a:p>
+            <a:p>
+              <a:pPr indent="0" algn="ctr">
+                <a:buNone/>
+              </a:pPr>
+              <a:r>
+                <a:rPr lang="en-US" altLang="zh-CN" dirty="0">
+                  <a:solidFill>
+                    <a:schemeClr val="dk1"/>
+                  </a:solidFill>
+                </a:rPr>
+                <a:t>Service</a:t>
+              </a:r>
+            </a:p>
+          </p:txBody>
+        </p:sp>
+        <p:sp>
+          <p:nvSpPr>
+            <p:cNvPr id="40" name="Shape 21">
+              <a:extLst>
+                <a:ext uri="{FF2B5EF4-FFF2-40B4-BE49-F238E27FC236}">
+                  <a16:creationId xmlns:a16="http://schemas.microsoft.com/office/drawing/2014/main" id="{0C0FE419-951C-22CA-BF38-63D36BAA4571}"/>
+                </a:ext>
+              </a:extLst>
+            </p:cNvPr>
+            <p:cNvSpPr/>
+            <p:nvPr/>
+          </p:nvSpPr>
+          <p:spPr>
+            <a:xfrm>
+              <a:off x="870343" y="3104332"/>
+              <a:ext cx="2395325" cy="667708"/>
+            </a:xfrm>
+            <a:prstGeom prst="roundRect">
+              <a:avLst/>
+            </a:prstGeom>
+            <a:solidFill>
+              <a:srgbClr val="FEF2F2"/>
+            </a:solidFill>
+            <a:ln w="12700">
+              <a:solidFill>
+                <a:srgbClr val="334155"/>
+              </a:solidFill>
+              <a:prstDash val="solid"/>
+            </a:ln>
+            <a:effectLst>
+              <a:outerShdw blurRad="38100" dist="19050" dir="2700000" algn="bl" rotWithShape="0">
+                <a:srgbClr val="000000">
+                  <a:alpha val="15000"/>
+                </a:srgbClr>
+              </a:outerShdw>
+            </a:effectLst>
+          </p:spPr>
+          <p:txBody>
+            <a:bodyPr/>
+            <a:lstStyle/>
+            <a:p>
+              <a:pPr indent="0" algn="ctr">
+                <a:buNone/>
+              </a:pPr>
+              <a:r>
+                <a:rPr lang="en-US" altLang="zh-CN" dirty="0">
+                  <a:solidFill>
+                    <a:schemeClr val="dk1"/>
+                  </a:solidFill>
+                </a:rPr>
+                <a:t>Validation  &amp; Recovery</a:t>
+              </a:r>
+            </a:p>
+            <a:p>
+              <a:pPr indent="0" algn="ctr">
+                <a:buNone/>
+              </a:pPr>
+              <a:r>
+                <a:rPr lang="en-US" altLang="zh-CN" dirty="0">
+                  <a:solidFill>
+                    <a:schemeClr val="dk1"/>
+                  </a:solidFill>
+                </a:rPr>
+                <a:t>Service</a:t>
+              </a:r>
+            </a:p>
+            <a:p>
+              <a:endParaRPr lang="zh-CN" altLang="en-US" dirty="0"/>
+            </a:p>
+          </p:txBody>
+        </p:sp>
+        <p:sp>
+          <p:nvSpPr>
+            <p:cNvPr id="44" name="文本框 43">
+              <a:extLst>
+                <a:ext uri="{FF2B5EF4-FFF2-40B4-BE49-F238E27FC236}">
+                  <a16:creationId xmlns:a16="http://schemas.microsoft.com/office/drawing/2014/main" id="{F02E962E-B3E4-1347-1CB7-14B78CEF3736}"/>
+                </a:ext>
+              </a:extLst>
+            </p:cNvPr>
+            <p:cNvSpPr txBox="1"/>
+            <p:nvPr/>
+          </p:nvSpPr>
+          <p:spPr>
+            <a:xfrm>
+              <a:off x="7680179" y="1438098"/>
+              <a:ext cx="2684062" cy="400110"/>
+            </a:xfrm>
+            <a:prstGeom prst="rect">
+              <a:avLst/>
+            </a:prstGeom>
+            <a:noFill/>
+          </p:spPr>
+          <p:txBody>
+            <a:bodyPr wrap="square">
+              <a:spAutoFit/>
+            </a:bodyPr>
+            <a:lstStyle/>
+            <a:p>
+              <a:pPr marL="0" indent="0" algn="ctr">
+                <a:buNone/>
+              </a:pPr>
+              <a:r>
+                <a:rPr lang="en-US" altLang="zh-CN" sz="2000" b="1" dirty="0">
+                  <a:latin typeface="Microsoft YaHei" pitchFamily="34" charset="0"/>
+                  <a:ea typeface="Microsoft YaHei" pitchFamily="34" charset="-122"/>
+                  <a:cs typeface="Microsoft YaHei" pitchFamily="34" charset="-120"/>
+                </a:rPr>
+                <a:t>Serverless Platform</a:t>
+              </a:r>
+              <a:endParaRPr lang="en-US" altLang="zh-CN" sz="2000" b="1" dirty="0"/>
+            </a:p>
+          </p:txBody>
+        </p:sp>
+        <p:sp>
+          <p:nvSpPr>
+            <p:cNvPr id="50" name="Text 13">
+              <a:extLst>
+                <a:ext uri="{FF2B5EF4-FFF2-40B4-BE49-F238E27FC236}">
+                  <a16:creationId xmlns:a16="http://schemas.microsoft.com/office/drawing/2014/main" id="{0172D709-06B1-1336-7429-FAEE6B225512}"/>
+                </a:ext>
+              </a:extLst>
+            </p:cNvPr>
+            <p:cNvSpPr/>
+            <p:nvPr/>
+          </p:nvSpPr>
+          <p:spPr>
+            <a:xfrm>
+              <a:off x="1897570" y="4948823"/>
+              <a:ext cx="3063240" cy="391304"/>
+            </a:xfrm>
+            <a:prstGeom prst="rect">
+              <a:avLst/>
+            </a:prstGeom>
+            <a:noFill/>
+            <a:ln/>
+          </p:spPr>
+          <p:txBody>
+            <a:bodyPr wrap="square" rtlCol="0" anchor="t"/>
+            <a:lstStyle>
+              <a:lvl1pPr marL="0" algn="l" defTabSz="914400" rtl="0" eaLnBrk="1" latinLnBrk="0" hangingPunct="1">
+                <a:defRPr sz="1800" kern="1200">
+                  <a:solidFill>
+                    <a:schemeClr val="tx1"/>
+                  </a:solidFill>
+                  <a:latin typeface="+mn-lt"/>
+                  <a:ea typeface="+mn-ea"/>
+                  <a:cs typeface="+mn-cs"/>
+                </a:defRPr>
+              </a:lvl1pPr>
+              <a:lvl2pPr marL="457200" algn="l" defTabSz="914400" rtl="0" eaLnBrk="1" latinLnBrk="0" hangingPunct="1">
+                <a:defRPr sz="1800" kern="1200">
+                  <a:solidFill>
+                    <a:schemeClr val="tx1"/>
+                  </a:solidFill>
+                  <a:latin typeface="+mn-lt"/>
+                  <a:ea typeface="+mn-ea"/>
+                  <a:cs typeface="+mn-cs"/>
+                </a:defRPr>
+              </a:lvl2pPr>
+              <a:lvl3pPr marL="914400" algn="l" defTabSz="914400" rtl="0" eaLnBrk="1" latinLnBrk="0" hangingPunct="1">
+                <a:defRPr sz="1800" kern="1200">
+                  <a:solidFill>
+                    <a:schemeClr val="tx1"/>
+                  </a:solidFill>
+                  <a:latin typeface="+mn-lt"/>
+                  <a:ea typeface="+mn-ea"/>
+                  <a:cs typeface="+mn-cs"/>
+                </a:defRPr>
+              </a:lvl3pPr>
+              <a:lvl4pPr marL="1371600" algn="l" defTabSz="914400" rtl="0" eaLnBrk="1" latinLnBrk="0" hangingPunct="1">
+                <a:defRPr sz="1800" kern="1200">
+                  <a:solidFill>
+                    <a:schemeClr val="tx1"/>
+                  </a:solidFill>
+                  <a:latin typeface="+mn-lt"/>
+                  <a:ea typeface="+mn-ea"/>
+                  <a:cs typeface="+mn-cs"/>
+                </a:defRPr>
+              </a:lvl4pPr>
+              <a:lvl5pPr marL="1828800" algn="l" defTabSz="914400" rtl="0" eaLnBrk="1" latinLnBrk="0" hangingPunct="1">
+                <a:defRPr sz="1800" kern="1200">
+                  <a:solidFill>
+                    <a:schemeClr val="tx1"/>
+                  </a:solidFill>
+                  <a:latin typeface="+mn-lt"/>
+                  <a:ea typeface="+mn-ea"/>
+                  <a:cs typeface="+mn-cs"/>
+                </a:defRPr>
+              </a:lvl5pPr>
+              <a:lvl6pPr marL="2286000" algn="l" defTabSz="914400" rtl="0" eaLnBrk="1" latinLnBrk="0" hangingPunct="1">
+                <a:defRPr sz="1800" kern="1200">
+                  <a:solidFill>
+                    <a:schemeClr val="tx1"/>
+                  </a:solidFill>
+                  <a:latin typeface="+mn-lt"/>
+                  <a:ea typeface="+mn-ea"/>
+                  <a:cs typeface="+mn-cs"/>
+                </a:defRPr>
+              </a:lvl6pPr>
+              <a:lvl7pPr marL="2743200" algn="l" defTabSz="914400" rtl="0" eaLnBrk="1" latinLnBrk="0" hangingPunct="1">
+                <a:defRPr sz="1800" kern="1200">
+                  <a:solidFill>
+                    <a:schemeClr val="tx1"/>
+                  </a:solidFill>
+                  <a:latin typeface="+mn-lt"/>
+                  <a:ea typeface="+mn-ea"/>
+                  <a:cs typeface="+mn-cs"/>
+                </a:defRPr>
+              </a:lvl7pPr>
+              <a:lvl8pPr marL="3200400" algn="l" defTabSz="914400" rtl="0" eaLnBrk="1" latinLnBrk="0" hangingPunct="1">
+                <a:defRPr sz="1800" kern="1200">
+                  <a:solidFill>
+                    <a:schemeClr val="tx1"/>
+                  </a:solidFill>
+                  <a:latin typeface="+mn-lt"/>
+                  <a:ea typeface="+mn-ea"/>
+                  <a:cs typeface="+mn-cs"/>
+                </a:defRPr>
+              </a:lvl8pPr>
+              <a:lvl9pPr marL="3657600" algn="l" defTabSz="914400" rtl="0" eaLnBrk="1" latinLnBrk="0" hangingPunct="1">
+                <a:defRPr sz="1800" kern="1200">
+                  <a:solidFill>
+                    <a:schemeClr val="tx1"/>
+                  </a:solidFill>
+                  <a:latin typeface="+mn-lt"/>
+                  <a:ea typeface="+mn-ea"/>
+                  <a:cs typeface="+mn-cs"/>
+                </a:defRPr>
+              </a:lvl9pPr>
+            </a:lstStyle>
+            <a:p>
+              <a:pPr algn="ctr"/>
+              <a:r>
+                <a:rPr lang="en-US" altLang="zh-CN" sz="2400" dirty="0"/>
+                <a:t>The </a:t>
+              </a:r>
+              <a:r>
+                <a:rPr lang="en-US" altLang="zh-CN" sz="2400" dirty="0" err="1"/>
+                <a:t>SpecSW</a:t>
+              </a:r>
+              <a:r>
+                <a:rPr lang="en-US" altLang="zh-CN" sz="2400" dirty="0"/>
+                <a:t> </a:t>
+              </a:r>
+              <a:r>
+                <a:rPr lang="en-US" altLang="zh-CN" sz="2400" b="1" dirty="0"/>
+                <a:t>Method</a:t>
+              </a:r>
+            </a:p>
+            <a:p>
+              <a:pPr indent="0" algn="ctr">
+                <a:buNone/>
+              </a:pPr>
+              <a:endParaRPr lang="en-US" sz="2000" dirty="0">
+                <a:solidFill>
+                  <a:schemeClr val="dk1"/>
+                </a:solidFill>
+              </a:endParaRPr>
+            </a:p>
+          </p:txBody>
+        </p:sp>
+        <p:sp>
+          <p:nvSpPr>
+            <p:cNvPr id="52" name="Text 13">
+              <a:extLst>
+                <a:ext uri="{FF2B5EF4-FFF2-40B4-BE49-F238E27FC236}">
+                  <a16:creationId xmlns:a16="http://schemas.microsoft.com/office/drawing/2014/main" id="{8D6EFF6D-7447-8487-3892-DB8FA16184F6}"/>
+                </a:ext>
+              </a:extLst>
+            </p:cNvPr>
+            <p:cNvSpPr/>
+            <p:nvPr/>
+          </p:nvSpPr>
+          <p:spPr>
+            <a:xfrm>
+              <a:off x="1897570" y="1693630"/>
+              <a:ext cx="3063240" cy="391304"/>
+            </a:xfrm>
+            <a:prstGeom prst="rect">
+              <a:avLst/>
+            </a:prstGeom>
+            <a:noFill/>
+            <a:ln/>
+          </p:spPr>
+          <p:txBody>
+            <a:bodyPr wrap="square" rtlCol="0" anchor="t"/>
+            <a:lstStyle>
+              <a:lvl1pPr marL="0" algn="l" defTabSz="914400" rtl="0" eaLnBrk="1" latinLnBrk="0" hangingPunct="1">
+                <a:defRPr sz="1800" kern="1200">
+                  <a:solidFill>
+                    <a:schemeClr val="tx1"/>
+                  </a:solidFill>
+                  <a:latin typeface="+mn-lt"/>
+                  <a:ea typeface="+mn-ea"/>
+                  <a:cs typeface="+mn-cs"/>
+                </a:defRPr>
+              </a:lvl1pPr>
+              <a:lvl2pPr marL="457200" algn="l" defTabSz="914400" rtl="0" eaLnBrk="1" latinLnBrk="0" hangingPunct="1">
+                <a:defRPr sz="1800" kern="1200">
+                  <a:solidFill>
+                    <a:schemeClr val="tx1"/>
+                  </a:solidFill>
+                  <a:latin typeface="+mn-lt"/>
+                  <a:ea typeface="+mn-ea"/>
+                  <a:cs typeface="+mn-cs"/>
+                </a:defRPr>
+              </a:lvl2pPr>
+              <a:lvl3pPr marL="914400" algn="l" defTabSz="914400" rtl="0" eaLnBrk="1" latinLnBrk="0" hangingPunct="1">
+                <a:defRPr sz="1800" kern="1200">
+                  <a:solidFill>
+                    <a:schemeClr val="tx1"/>
+                  </a:solidFill>
+                  <a:latin typeface="+mn-lt"/>
+                  <a:ea typeface="+mn-ea"/>
+                  <a:cs typeface="+mn-cs"/>
+                </a:defRPr>
+              </a:lvl3pPr>
+              <a:lvl4pPr marL="1371600" algn="l" defTabSz="914400" rtl="0" eaLnBrk="1" latinLnBrk="0" hangingPunct="1">
+                <a:defRPr sz="1800" kern="1200">
+                  <a:solidFill>
+                    <a:schemeClr val="tx1"/>
+                  </a:solidFill>
+                  <a:latin typeface="+mn-lt"/>
+                  <a:ea typeface="+mn-ea"/>
+                  <a:cs typeface="+mn-cs"/>
+                </a:defRPr>
+              </a:lvl4pPr>
+              <a:lvl5pPr marL="1828800" algn="l" defTabSz="914400" rtl="0" eaLnBrk="1" latinLnBrk="0" hangingPunct="1">
+                <a:defRPr sz="1800" kern="1200">
+                  <a:solidFill>
+                    <a:schemeClr val="tx1"/>
+                  </a:solidFill>
+                  <a:latin typeface="+mn-lt"/>
+                  <a:ea typeface="+mn-ea"/>
+                  <a:cs typeface="+mn-cs"/>
+                </a:defRPr>
+              </a:lvl5pPr>
+              <a:lvl6pPr marL="2286000" algn="l" defTabSz="914400" rtl="0" eaLnBrk="1" latinLnBrk="0" hangingPunct="1">
+                <a:defRPr sz="1800" kern="1200">
+                  <a:solidFill>
+                    <a:schemeClr val="tx1"/>
+                  </a:solidFill>
+                  <a:latin typeface="+mn-lt"/>
+                  <a:ea typeface="+mn-ea"/>
+                  <a:cs typeface="+mn-cs"/>
+                </a:defRPr>
+              </a:lvl6pPr>
+              <a:lvl7pPr marL="2743200" algn="l" defTabSz="914400" rtl="0" eaLnBrk="1" latinLnBrk="0" hangingPunct="1">
+                <a:defRPr sz="1800" kern="1200">
+                  <a:solidFill>
+                    <a:schemeClr val="tx1"/>
+                  </a:solidFill>
+                  <a:latin typeface="+mn-lt"/>
+                  <a:ea typeface="+mn-ea"/>
+                  <a:cs typeface="+mn-cs"/>
+                </a:defRPr>
+              </a:lvl7pPr>
+              <a:lvl8pPr marL="3200400" algn="l" defTabSz="914400" rtl="0" eaLnBrk="1" latinLnBrk="0" hangingPunct="1">
+                <a:defRPr sz="1800" kern="1200">
+                  <a:solidFill>
+                    <a:schemeClr val="tx1"/>
+                  </a:solidFill>
+                  <a:latin typeface="+mn-lt"/>
+                  <a:ea typeface="+mn-ea"/>
+                  <a:cs typeface="+mn-cs"/>
+                </a:defRPr>
+              </a:lvl8pPr>
+              <a:lvl9pPr marL="3657600" algn="l" defTabSz="914400" rtl="0" eaLnBrk="1" latinLnBrk="0" hangingPunct="1">
+                <a:defRPr sz="1800" kern="1200">
+                  <a:solidFill>
+                    <a:schemeClr val="tx1"/>
+                  </a:solidFill>
+                  <a:latin typeface="+mn-lt"/>
+                  <a:ea typeface="+mn-ea"/>
+                  <a:cs typeface="+mn-cs"/>
+                </a:defRPr>
+              </a:lvl9pPr>
+            </a:lstStyle>
+            <a:p>
+              <a:pPr algn="ctr"/>
+              <a:r>
+                <a:rPr lang="en-US" altLang="zh-CN" sz="2400" dirty="0"/>
+                <a:t>The </a:t>
+              </a:r>
+              <a:r>
+                <a:rPr lang="en-US" altLang="zh-CN" sz="2400" dirty="0" err="1"/>
+                <a:t>SpecSW</a:t>
+              </a:r>
+              <a:r>
+                <a:rPr lang="en-US" altLang="zh-CN" sz="2400" dirty="0"/>
+                <a:t> </a:t>
+              </a:r>
+              <a:r>
+                <a:rPr lang="en-US" altLang="zh-CN" sz="2400" b="1" dirty="0"/>
+                <a:t>System</a:t>
+              </a:r>
+            </a:p>
+            <a:p>
+              <a:pPr indent="0" algn="ctr">
+                <a:buNone/>
+              </a:pPr>
+              <a:endParaRPr lang="en-US" sz="2000" dirty="0">
+                <a:solidFill>
+                  <a:schemeClr val="dk1"/>
+                </a:solidFill>
+              </a:endParaRPr>
+            </a:p>
+          </p:txBody>
+        </p:sp>
+      </p:grpSp>
+    </p:spTree>
+    <p:extLst>
+      <p:ext uri="{BB962C8B-B14F-4D97-AF65-F5344CB8AC3E}">
+        <p14:creationId xmlns:p14="http://schemas.microsoft.com/office/powerpoint/2010/main" val="3195218633"/>
+      </p:ext>
+    </p:extLst>
+  </p:cSld>
+  <p:clrMapOvr>
+    <a:masterClrMapping/>
+  </p:clrMapOvr>
+</p:sld>
+</file>
+
+<file path=ppt/slides/slide8.xml><?xml version="1.0" encoding="utf-8"?>
+<p:sld xmlns:a="http://schemas.openxmlformats.org/drawingml/2006/main" xmlns:r="http://schemas.openxmlformats.org/officeDocument/2006/relationships" xmlns:p="http://schemas.openxmlformats.org/presentationml/2006/main">
+  <p:cSld>
+    <p:spTree>
+      <p:nvGrpSpPr>
+        <p:cNvPr id="1" name=""/>
+        <p:cNvGrpSpPr/>
+        <p:nvPr/>
+      </p:nvGrpSpPr>
+      <p:grpSpPr>
+        <a:xfrm>
+          <a:off x="0" y="0"/>
+          <a:ext cx="0" cy="0"/>
+          <a:chOff x="0" y="0"/>
+          <a:chExt cx="0" cy="0"/>
+        </a:xfrm>
+      </p:grpSpPr>
+      <p:sp>
+        <p:nvSpPr>
+          <p:cNvPr id="28" name="Shape 0">
+            <a:extLst>
+              <a:ext uri="{FF2B5EF4-FFF2-40B4-BE49-F238E27FC236}">
+                <a16:creationId xmlns:a16="http://schemas.microsoft.com/office/drawing/2014/main" id="{F141B2B2-AD0F-4610-81FD-4585F7B4A802}"/>
+              </a:ext>
+            </a:extLst>
+          </p:cNvPr>
+          <p:cNvSpPr/>
+          <p:nvPr/>
+        </p:nvSpPr>
+        <p:spPr>
+          <a:xfrm>
+            <a:off x="594360" y="365760"/>
+            <a:ext cx="10972800" cy="1417320"/>
+          </a:xfrm>
+          <a:prstGeom prst="rect">
+            <a:avLst/>
+          </a:prstGeom>
+          <a:solidFill>
+            <a:srgbClr val="FFFFFF"/>
+          </a:solidFill>
+          <a:ln w="25400">
+            <a:solidFill>
+              <a:srgbClr val="000000"/>
+            </a:solidFill>
+            <a:prstDash val="solid"/>
+          </a:ln>
+        </p:spPr>
+      </p:sp>
+      <p:sp>
+        <p:nvSpPr>
+          <p:cNvPr id="29" name="Text 1">
+            <a:extLst>
+              <a:ext uri="{FF2B5EF4-FFF2-40B4-BE49-F238E27FC236}">
+                <a16:creationId xmlns:a16="http://schemas.microsoft.com/office/drawing/2014/main" id="{6DF583C8-59CB-E888-AB7B-B7A389EC143E}"/>
+              </a:ext>
+            </a:extLst>
+          </p:cNvPr>
+          <p:cNvSpPr/>
+          <p:nvPr/>
+        </p:nvSpPr>
+        <p:spPr>
+          <a:xfrm>
+            <a:off x="594360" y="438912"/>
+            <a:ext cx="10972800" cy="347472"/>
+          </a:xfrm>
+          <a:prstGeom prst="rect">
+            <a:avLst/>
+          </a:prstGeom>
+          <a:noFill/>
+          <a:ln/>
+        </p:spPr>
+        <p:txBody>
+          <a:bodyPr wrap="square" rtlCol="0" anchor="ctr"/>
+          <a:lstStyle/>
+          <a:p>
+            <a:pPr marL="0" indent="0" algn="ctr">
+              <a:buNone/>
+            </a:pPr>
+            <a:r>
+              <a:rPr lang="en-US" sz="2000" b="1" dirty="0">
+                <a:solidFill>
+                  <a:srgbClr val="000000"/>
+                </a:solidFill>
+                <a:latin typeface="Microsoft YaHei" pitchFamily="34" charset="0"/>
+                <a:ea typeface="Microsoft YaHei" pitchFamily="34" charset="-122"/>
+                <a:cs typeface="Microsoft YaHei" pitchFamily="34" charset="-120"/>
+              </a:rPr>
+              <a:t>SpecSW—Serverless 工作流投机执行编程框架</a:t>
+            </a:r>
+            <a:endParaRPr lang="en-US" sz="2000" dirty="0"/>
+          </a:p>
+        </p:txBody>
+      </p:sp>
+      <p:sp>
+        <p:nvSpPr>
+          <p:cNvPr id="30" name="Shape 2">
+            <a:extLst>
+              <a:ext uri="{FF2B5EF4-FFF2-40B4-BE49-F238E27FC236}">
+                <a16:creationId xmlns:a16="http://schemas.microsoft.com/office/drawing/2014/main" id="{0F9F212A-B4C5-C2A9-2F59-005CD1B43EB5}"/>
+              </a:ext>
+            </a:extLst>
+          </p:cNvPr>
+          <p:cNvSpPr/>
+          <p:nvPr/>
+        </p:nvSpPr>
+        <p:spPr>
+          <a:xfrm>
+            <a:off x="960120" y="932688"/>
+            <a:ext cx="4892040" cy="713232"/>
+          </a:xfrm>
+          <a:prstGeom prst="roundRect">
+            <a:avLst/>
+          </a:prstGeom>
+          <a:solidFill>
+            <a:srgbClr val="FFFFFF"/>
+          </a:solidFill>
+          <a:ln w="19050">
+            <a:solidFill>
+              <a:srgbClr val="7A7A7A"/>
+            </a:solidFill>
+            <a:prstDash val="solid"/>
+          </a:ln>
+        </p:spPr>
+      </p:sp>
+      <p:sp>
+        <p:nvSpPr>
+          <p:cNvPr id="31" name="Text 3">
+            <a:extLst>
+              <a:ext uri="{FF2B5EF4-FFF2-40B4-BE49-F238E27FC236}">
+                <a16:creationId xmlns:a16="http://schemas.microsoft.com/office/drawing/2014/main" id="{A82D08BE-9D44-8381-0932-BD476CFEE49B}"/>
+              </a:ext>
+            </a:extLst>
+          </p:cNvPr>
+          <p:cNvSpPr/>
+          <p:nvPr/>
+        </p:nvSpPr>
+        <p:spPr>
+          <a:xfrm>
+            <a:off x="960120" y="932688"/>
+            <a:ext cx="4892040" cy="713232"/>
+          </a:xfrm>
+          <a:prstGeom prst="rect">
+            <a:avLst/>
+          </a:prstGeom>
+          <a:noFill/>
+          <a:ln/>
+        </p:spPr>
+        <p:txBody>
+          <a:bodyPr wrap="square" rtlCol="0" anchor="ctr"/>
+          <a:lstStyle/>
+          <a:p>
+            <a:pPr marL="0" indent="0" algn="ctr">
+              <a:buNone/>
+            </a:pPr>
+            <a:r>
+              <a:rPr lang="en-US" sz="1600" dirty="0">
+                <a:solidFill>
+                  <a:srgbClr val="000000"/>
+                </a:solidFill>
+                <a:latin typeface="Microsoft YaHei" pitchFamily="34" charset="0"/>
+                <a:ea typeface="Microsoft YaHei" pitchFamily="34" charset="-122"/>
+                <a:cs typeface="Microsoft YaHei" pitchFamily="34" charset="-120"/>
+              </a:rPr>
+              <a:t>工作流描述与注解规范</a:t>
+            </a:r>
+            <a:endParaRPr lang="en-US" sz="1600" dirty="0"/>
+          </a:p>
+        </p:txBody>
+      </p:sp>
+      <p:sp>
+        <p:nvSpPr>
+          <p:cNvPr id="32" name="Shape 4">
+            <a:extLst>
+              <a:ext uri="{FF2B5EF4-FFF2-40B4-BE49-F238E27FC236}">
+                <a16:creationId xmlns:a16="http://schemas.microsoft.com/office/drawing/2014/main" id="{AC77FA24-928B-7FA4-5182-6BEB57F23A0F}"/>
+              </a:ext>
+            </a:extLst>
+          </p:cNvPr>
+          <p:cNvSpPr/>
+          <p:nvPr/>
+        </p:nvSpPr>
+        <p:spPr>
+          <a:xfrm>
+            <a:off x="6309360" y="932688"/>
+            <a:ext cx="4892040" cy="713232"/>
+          </a:xfrm>
+          <a:prstGeom prst="roundRect">
+            <a:avLst/>
+          </a:prstGeom>
+          <a:solidFill>
+            <a:srgbClr val="FFFFFF"/>
+          </a:solidFill>
+          <a:ln w="19050">
+            <a:solidFill>
+              <a:srgbClr val="7A7A7A"/>
+            </a:solidFill>
+            <a:prstDash val="solid"/>
+          </a:ln>
+        </p:spPr>
+      </p:sp>
+      <p:sp>
+        <p:nvSpPr>
+          <p:cNvPr id="33" name="Text 5">
+            <a:extLst>
+              <a:ext uri="{FF2B5EF4-FFF2-40B4-BE49-F238E27FC236}">
+                <a16:creationId xmlns:a16="http://schemas.microsoft.com/office/drawing/2014/main" id="{B78A48E5-E6D5-22C6-3F4E-E193739F9BB3}"/>
+              </a:ext>
+            </a:extLst>
+          </p:cNvPr>
+          <p:cNvSpPr/>
+          <p:nvPr/>
+        </p:nvSpPr>
+        <p:spPr>
+          <a:xfrm>
+            <a:off x="6309360" y="932688"/>
+            <a:ext cx="4892040" cy="713232"/>
+          </a:xfrm>
+          <a:prstGeom prst="rect">
+            <a:avLst/>
+          </a:prstGeom>
+          <a:noFill/>
+          <a:ln/>
+        </p:spPr>
+        <p:txBody>
+          <a:bodyPr wrap="square" rtlCol="0" anchor="ctr"/>
+          <a:lstStyle/>
+          <a:p>
+            <a:pPr marL="0" indent="0" algn="ctr">
+              <a:buNone/>
+            </a:pPr>
+            <a:r>
+              <a:rPr lang="en-US" sz="1600" dirty="0">
+                <a:solidFill>
+                  <a:srgbClr val="000000"/>
+                </a:solidFill>
+                <a:latin typeface="Microsoft YaHei" pitchFamily="34" charset="0"/>
+                <a:ea typeface="Microsoft YaHei" pitchFamily="34" charset="-122"/>
+                <a:cs typeface="Microsoft YaHei" pitchFamily="34" charset="-120"/>
+              </a:rPr>
+              <a:t>运行时接口与策略API</a:t>
+            </a:r>
+            <a:endParaRPr lang="en-US" sz="1600" dirty="0"/>
+          </a:p>
+        </p:txBody>
+      </p:sp>
+      <p:sp>
+        <p:nvSpPr>
+          <p:cNvPr id="34" name="Shape 6">
+            <a:extLst>
+              <a:ext uri="{FF2B5EF4-FFF2-40B4-BE49-F238E27FC236}">
+                <a16:creationId xmlns:a16="http://schemas.microsoft.com/office/drawing/2014/main" id="{EF0CE213-CB24-8916-A973-5B543448DD63}"/>
+              </a:ext>
+            </a:extLst>
+          </p:cNvPr>
+          <p:cNvSpPr/>
+          <p:nvPr/>
+        </p:nvSpPr>
+        <p:spPr>
+          <a:xfrm>
+            <a:off x="594360" y="1965960"/>
+            <a:ext cx="10972800" cy="1417320"/>
+          </a:xfrm>
+          <a:prstGeom prst="rect">
+            <a:avLst/>
+          </a:prstGeom>
+          <a:solidFill>
+            <a:srgbClr val="FFFFFF"/>
+          </a:solidFill>
+          <a:ln w="25400">
+            <a:solidFill>
+              <a:srgbClr val="000000"/>
+            </a:solidFill>
+            <a:prstDash val="solid"/>
+          </a:ln>
+        </p:spPr>
+      </p:sp>
+      <p:sp>
+        <p:nvSpPr>
+          <p:cNvPr id="35" name="Text 7">
+            <a:extLst>
+              <a:ext uri="{FF2B5EF4-FFF2-40B4-BE49-F238E27FC236}">
+                <a16:creationId xmlns:a16="http://schemas.microsoft.com/office/drawing/2014/main" id="{2D63D094-1694-2442-2287-0D7AA4B652C2}"/>
+              </a:ext>
+            </a:extLst>
+          </p:cNvPr>
+          <p:cNvSpPr/>
+          <p:nvPr/>
+        </p:nvSpPr>
+        <p:spPr>
+          <a:xfrm>
+            <a:off x="594360" y="2039112"/>
+            <a:ext cx="10972800" cy="347472"/>
+          </a:xfrm>
+          <a:prstGeom prst="rect">
+            <a:avLst/>
+          </a:prstGeom>
+          <a:noFill/>
+          <a:ln/>
+        </p:spPr>
+        <p:txBody>
+          <a:bodyPr wrap="square" rtlCol="0" anchor="ctr"/>
+          <a:lstStyle/>
+          <a:p>
+            <a:pPr marL="0" indent="0" algn="ctr">
+              <a:buNone/>
+            </a:pPr>
+            <a:r>
+              <a:rPr lang="en-US" sz="2000" b="1" dirty="0">
+                <a:solidFill>
+                  <a:srgbClr val="000000"/>
+                </a:solidFill>
+                <a:latin typeface="Microsoft YaHei" pitchFamily="34" charset="0"/>
+                <a:ea typeface="Microsoft YaHei" pitchFamily="34" charset="-122"/>
+                <a:cs typeface="Microsoft YaHei" pitchFamily="34" charset="-120"/>
+              </a:rPr>
+              <a:t>SpecSW—Serverless 工作流投机执行模型</a:t>
+            </a:r>
+            <a:endParaRPr lang="en-US" sz="2000" dirty="0"/>
+          </a:p>
+        </p:txBody>
+      </p:sp>
+      <p:sp>
+        <p:nvSpPr>
+          <p:cNvPr id="36" name="Shape 8">
+            <a:extLst>
+              <a:ext uri="{FF2B5EF4-FFF2-40B4-BE49-F238E27FC236}">
+                <a16:creationId xmlns:a16="http://schemas.microsoft.com/office/drawing/2014/main" id="{C578D7C8-5E84-73FD-F14E-016109EB40D5}"/>
+              </a:ext>
+            </a:extLst>
+          </p:cNvPr>
+          <p:cNvSpPr/>
+          <p:nvPr/>
+        </p:nvSpPr>
+        <p:spPr>
+          <a:xfrm>
+            <a:off x="960120" y="2532888"/>
+            <a:ext cx="3169920" cy="713232"/>
+          </a:xfrm>
+          <a:prstGeom prst="roundRect">
+            <a:avLst/>
+          </a:prstGeom>
+          <a:solidFill>
+            <a:srgbClr val="FFFFFF"/>
+          </a:solidFill>
+          <a:ln w="19050">
+            <a:solidFill>
+              <a:srgbClr val="7A7A7A"/>
+            </a:solidFill>
+            <a:prstDash val="solid"/>
+          </a:ln>
+        </p:spPr>
+      </p:sp>
+      <p:sp>
+        <p:nvSpPr>
+          <p:cNvPr id="37" name="Text 9">
+            <a:extLst>
+              <a:ext uri="{FF2B5EF4-FFF2-40B4-BE49-F238E27FC236}">
+                <a16:creationId xmlns:a16="http://schemas.microsoft.com/office/drawing/2014/main" id="{20657FB9-3608-20A0-B849-5CDB280E7086}"/>
+              </a:ext>
+            </a:extLst>
+          </p:cNvPr>
+          <p:cNvSpPr/>
+          <p:nvPr/>
+        </p:nvSpPr>
+        <p:spPr>
+          <a:xfrm>
+            <a:off x="960120" y="2532888"/>
+            <a:ext cx="3169920" cy="713232"/>
+          </a:xfrm>
+          <a:prstGeom prst="rect">
+            <a:avLst/>
+          </a:prstGeom>
+          <a:noFill/>
+          <a:ln/>
+        </p:spPr>
+        <p:txBody>
+          <a:bodyPr wrap="square" rtlCol="0" anchor="ctr"/>
+          <a:lstStyle/>
+          <a:p>
+            <a:pPr marL="0" indent="0" algn="ctr">
+              <a:buNone/>
+            </a:pPr>
+            <a:r>
+              <a:rPr lang="en-US" sz="1600" dirty="0">
+                <a:solidFill>
+                  <a:srgbClr val="000000"/>
+                </a:solidFill>
+                <a:latin typeface="Microsoft YaHei" pitchFamily="34" charset="0"/>
+                <a:ea typeface="Microsoft YaHei" pitchFamily="34" charset="-122"/>
+                <a:cs typeface="Microsoft YaHei" pitchFamily="34" charset="-120"/>
+              </a:rPr>
+              <a:t>模型定义</a:t>
+            </a:r>
+            <a:endParaRPr lang="en-US" sz="1600" dirty="0"/>
+          </a:p>
+        </p:txBody>
+      </p:sp>
+      <p:sp>
+        <p:nvSpPr>
+          <p:cNvPr id="38" name="Shape 10">
+            <a:extLst>
+              <a:ext uri="{FF2B5EF4-FFF2-40B4-BE49-F238E27FC236}">
+                <a16:creationId xmlns:a16="http://schemas.microsoft.com/office/drawing/2014/main" id="{74726928-6414-E8D0-695D-7ECBECA0F1B4}"/>
+              </a:ext>
+            </a:extLst>
+          </p:cNvPr>
+          <p:cNvSpPr/>
+          <p:nvPr/>
+        </p:nvSpPr>
+        <p:spPr>
+          <a:xfrm>
+            <a:off x="4495800" y="2532888"/>
+            <a:ext cx="3169920" cy="713232"/>
+          </a:xfrm>
+          <a:prstGeom prst="roundRect">
+            <a:avLst/>
+          </a:prstGeom>
+          <a:solidFill>
+            <a:srgbClr val="FFFFFF"/>
+          </a:solidFill>
+          <a:ln w="19050">
+            <a:solidFill>
+              <a:srgbClr val="7A7A7A"/>
+            </a:solidFill>
+            <a:prstDash val="solid"/>
+          </a:ln>
+        </p:spPr>
+      </p:sp>
+      <p:sp>
+        <p:nvSpPr>
+          <p:cNvPr id="39" name="Text 11">
+            <a:extLst>
+              <a:ext uri="{FF2B5EF4-FFF2-40B4-BE49-F238E27FC236}">
+                <a16:creationId xmlns:a16="http://schemas.microsoft.com/office/drawing/2014/main" id="{9490749F-CC97-5ED2-9390-20C2ECABA347}"/>
+              </a:ext>
+            </a:extLst>
+          </p:cNvPr>
+          <p:cNvSpPr/>
+          <p:nvPr/>
+        </p:nvSpPr>
+        <p:spPr>
+          <a:xfrm>
+            <a:off x="4495800" y="2532888"/>
+            <a:ext cx="3169920" cy="713232"/>
+          </a:xfrm>
+          <a:prstGeom prst="rect">
+            <a:avLst/>
+          </a:prstGeom>
+          <a:noFill/>
+          <a:ln/>
+        </p:spPr>
+        <p:txBody>
+          <a:bodyPr wrap="square" rtlCol="0" anchor="ctr"/>
+          <a:lstStyle/>
+          <a:p>
+            <a:pPr marL="0" indent="0" algn="ctr">
+              <a:buNone/>
+            </a:pPr>
+            <a:r>
+              <a:rPr lang="en-US" sz="1600" dirty="0">
+                <a:solidFill>
+                  <a:srgbClr val="000000"/>
+                </a:solidFill>
+                <a:latin typeface="Microsoft YaHei" pitchFamily="34" charset="0"/>
+                <a:ea typeface="Microsoft YaHei" pitchFamily="34" charset="-122"/>
+                <a:cs typeface="Microsoft YaHei" pitchFamily="34" charset="-120"/>
+              </a:rPr>
+              <a:t>模型组件</a:t>
+            </a:r>
+            <a:endParaRPr lang="en-US" sz="1600" dirty="0"/>
+          </a:p>
+        </p:txBody>
+      </p:sp>
+      <p:sp>
+        <p:nvSpPr>
+          <p:cNvPr id="40" name="Shape 12">
+            <a:extLst>
+              <a:ext uri="{FF2B5EF4-FFF2-40B4-BE49-F238E27FC236}">
+                <a16:creationId xmlns:a16="http://schemas.microsoft.com/office/drawing/2014/main" id="{04118ECC-B42D-7DB2-A3D0-966D921C3CED}"/>
+              </a:ext>
+            </a:extLst>
+          </p:cNvPr>
+          <p:cNvSpPr/>
+          <p:nvPr/>
+        </p:nvSpPr>
+        <p:spPr>
+          <a:xfrm>
+            <a:off x="8031480" y="2532888"/>
+            <a:ext cx="3169920" cy="713232"/>
+          </a:xfrm>
+          <a:prstGeom prst="roundRect">
+            <a:avLst/>
+          </a:prstGeom>
+          <a:solidFill>
+            <a:srgbClr val="FFFFFF"/>
+          </a:solidFill>
+          <a:ln w="19050">
+            <a:solidFill>
+              <a:srgbClr val="7A7A7A"/>
+            </a:solidFill>
+            <a:prstDash val="solid"/>
+          </a:ln>
+        </p:spPr>
+      </p:sp>
+      <p:sp>
+        <p:nvSpPr>
+          <p:cNvPr id="41" name="Text 13">
+            <a:extLst>
+              <a:ext uri="{FF2B5EF4-FFF2-40B4-BE49-F238E27FC236}">
+                <a16:creationId xmlns:a16="http://schemas.microsoft.com/office/drawing/2014/main" id="{7AF06E9D-8BA7-CCB4-E73D-0ED06D91AD86}"/>
+              </a:ext>
+            </a:extLst>
+          </p:cNvPr>
+          <p:cNvSpPr/>
+          <p:nvPr/>
+        </p:nvSpPr>
+        <p:spPr>
+          <a:xfrm>
+            <a:off x="8031480" y="2532888"/>
+            <a:ext cx="3169920" cy="713232"/>
+          </a:xfrm>
+          <a:prstGeom prst="rect">
+            <a:avLst/>
+          </a:prstGeom>
+          <a:noFill/>
+          <a:ln/>
+        </p:spPr>
+        <p:txBody>
+          <a:bodyPr wrap="square" rtlCol="0" anchor="ctr"/>
+          <a:lstStyle/>
+          <a:p>
+            <a:pPr marL="0" indent="0" algn="ctr">
+              <a:buNone/>
+            </a:pPr>
+            <a:r>
+              <a:rPr lang="en-US" sz="1600" dirty="0">
+                <a:solidFill>
+                  <a:srgbClr val="000000"/>
+                </a:solidFill>
+                <a:latin typeface="Microsoft YaHei" pitchFamily="34" charset="0"/>
+                <a:ea typeface="Microsoft YaHei" pitchFamily="34" charset="-122"/>
+                <a:cs typeface="Microsoft YaHei" pitchFamily="34" charset="-120"/>
+              </a:rPr>
+              <a:t>模型运行时行为</a:t>
+            </a:r>
+            <a:endParaRPr lang="en-US" sz="1600" dirty="0"/>
+          </a:p>
+        </p:txBody>
+      </p:sp>
+      <p:sp>
+        <p:nvSpPr>
+          <p:cNvPr id="42" name="Shape 14">
+            <a:extLst>
+              <a:ext uri="{FF2B5EF4-FFF2-40B4-BE49-F238E27FC236}">
+                <a16:creationId xmlns:a16="http://schemas.microsoft.com/office/drawing/2014/main" id="{6D75D752-C317-3B87-4661-23942EEB3701}"/>
+              </a:ext>
+            </a:extLst>
+          </p:cNvPr>
+          <p:cNvSpPr/>
+          <p:nvPr/>
+        </p:nvSpPr>
+        <p:spPr>
+          <a:xfrm>
+            <a:off x="594360" y="3566160"/>
+            <a:ext cx="10972800" cy="2788920"/>
+          </a:xfrm>
+          <a:prstGeom prst="rect">
+            <a:avLst/>
+          </a:prstGeom>
+          <a:solidFill>
+            <a:srgbClr val="FFFFFF"/>
+          </a:solidFill>
+          <a:ln w="25400">
+            <a:solidFill>
+              <a:srgbClr val="000000"/>
+            </a:solidFill>
+            <a:prstDash val="solid"/>
+          </a:ln>
+        </p:spPr>
+      </p:sp>
+      <p:sp>
+        <p:nvSpPr>
+          <p:cNvPr id="43" name="Text 15">
+            <a:extLst>
+              <a:ext uri="{FF2B5EF4-FFF2-40B4-BE49-F238E27FC236}">
+                <a16:creationId xmlns:a16="http://schemas.microsoft.com/office/drawing/2014/main" id="{EA8D2B65-332E-A5EB-2B9A-BBCBAE86A5AD}"/>
+              </a:ext>
+            </a:extLst>
+          </p:cNvPr>
+          <p:cNvSpPr/>
+          <p:nvPr/>
+        </p:nvSpPr>
+        <p:spPr>
+          <a:xfrm>
+            <a:off x="594360" y="3639312"/>
+            <a:ext cx="10972800" cy="347472"/>
+          </a:xfrm>
+          <a:prstGeom prst="rect">
+            <a:avLst/>
+          </a:prstGeom>
+          <a:noFill/>
+          <a:ln/>
+        </p:spPr>
+        <p:txBody>
+          <a:bodyPr wrap="square" rtlCol="0" anchor="ctr"/>
+          <a:lstStyle/>
+          <a:p>
+            <a:pPr marL="0" indent="0" algn="ctr">
+              <a:buNone/>
+            </a:pPr>
+            <a:r>
+              <a:rPr lang="en-US" sz="2000" b="1" dirty="0">
+                <a:solidFill>
+                  <a:srgbClr val="000000"/>
+                </a:solidFill>
+                <a:latin typeface="Microsoft YaHei" pitchFamily="34" charset="0"/>
+                <a:ea typeface="Microsoft YaHei" pitchFamily="34" charset="-122"/>
+                <a:cs typeface="Microsoft YaHei" pitchFamily="34" charset="-120"/>
+              </a:rPr>
+              <a:t>SpecSW—Serverless 工作流投机执行优化方法</a:t>
+            </a:r>
+            <a:endParaRPr lang="en-US" sz="2000" dirty="0"/>
+          </a:p>
+        </p:txBody>
+      </p:sp>
+      <p:sp>
+        <p:nvSpPr>
+          <p:cNvPr id="44" name="Shape 16">
+            <a:extLst>
+              <a:ext uri="{FF2B5EF4-FFF2-40B4-BE49-F238E27FC236}">
+                <a16:creationId xmlns:a16="http://schemas.microsoft.com/office/drawing/2014/main" id="{F1313FF8-0DC8-45F7-B5EB-C20C7BCC24A7}"/>
+              </a:ext>
+            </a:extLst>
+          </p:cNvPr>
+          <p:cNvSpPr/>
+          <p:nvPr/>
+        </p:nvSpPr>
+        <p:spPr>
+          <a:xfrm>
+            <a:off x="960120" y="4133088"/>
+            <a:ext cx="4892040" cy="859536"/>
+          </a:xfrm>
+          <a:prstGeom prst="roundRect">
+            <a:avLst/>
+          </a:prstGeom>
+          <a:solidFill>
+            <a:srgbClr val="FFFFFF"/>
+          </a:solidFill>
+          <a:ln w="19050">
+            <a:solidFill>
+              <a:srgbClr val="7A7A7A"/>
+            </a:solidFill>
+            <a:prstDash val="solid"/>
+          </a:ln>
+        </p:spPr>
+      </p:sp>
+      <p:sp>
+        <p:nvSpPr>
+          <p:cNvPr id="45" name="Text 17">
+            <a:extLst>
+              <a:ext uri="{FF2B5EF4-FFF2-40B4-BE49-F238E27FC236}">
+                <a16:creationId xmlns:a16="http://schemas.microsoft.com/office/drawing/2014/main" id="{690A3C64-6693-BC14-0196-1780EAFDD9C0}"/>
+              </a:ext>
+            </a:extLst>
+          </p:cNvPr>
+          <p:cNvSpPr/>
+          <p:nvPr/>
+        </p:nvSpPr>
+        <p:spPr>
+          <a:xfrm>
+            <a:off x="960120" y="4133088"/>
+            <a:ext cx="4892040" cy="859536"/>
+          </a:xfrm>
+          <a:prstGeom prst="rect">
+            <a:avLst/>
+          </a:prstGeom>
+          <a:noFill/>
+          <a:ln/>
+        </p:spPr>
+        <p:txBody>
+          <a:bodyPr wrap="square" rtlCol="0" anchor="ctr"/>
+          <a:lstStyle/>
+          <a:p>
+            <a:pPr marL="0" indent="0" algn="ctr">
+              <a:buNone/>
+            </a:pPr>
+            <a:r>
+              <a:rPr lang="en-US" sz="1400" dirty="0">
+                <a:solidFill>
+                  <a:srgbClr val="000000"/>
+                </a:solidFill>
+                <a:latin typeface="Microsoft YaHei" pitchFamily="34" charset="0"/>
+                <a:ea typeface="Microsoft YaHei" pitchFamily="34" charset="-122"/>
+                <a:cs typeface="Microsoft YaHei" pitchFamily="34" charset="-120"/>
+              </a:rPr>
+              <a:t>分支预测优化</a:t>
+            </a:r>
+            <a:endParaRPr lang="en-US" sz="1400" dirty="0"/>
+          </a:p>
+          <a:p>
+            <a:pPr marL="0" indent="0" algn="ctr">
+              <a:buNone/>
+            </a:pPr>
+            <a:r>
+              <a:rPr lang="en-US" sz="1400" dirty="0">
+                <a:solidFill>
+                  <a:srgbClr val="000000"/>
+                </a:solidFill>
+                <a:latin typeface="Microsoft YaHei" pitchFamily="34" charset="0"/>
+                <a:ea typeface="Microsoft YaHei" pitchFamily="34" charset="-122"/>
+                <a:cs typeface="Microsoft YaHei" pitchFamily="34" charset="-120"/>
+              </a:rPr>
+              <a:t>（上下文敏感 / 漂移自适应 / 循环感知）</a:t>
+            </a:r>
+            <a:endParaRPr lang="en-US" sz="1400" dirty="0"/>
+          </a:p>
+        </p:txBody>
+      </p:sp>
+      <p:sp>
+        <p:nvSpPr>
+          <p:cNvPr id="46" name="Shape 18">
+            <a:extLst>
+              <a:ext uri="{FF2B5EF4-FFF2-40B4-BE49-F238E27FC236}">
+                <a16:creationId xmlns:a16="http://schemas.microsoft.com/office/drawing/2014/main" id="{E86A3271-20C0-8A28-41BF-3517BF06E976}"/>
+              </a:ext>
+            </a:extLst>
+          </p:cNvPr>
+          <p:cNvSpPr/>
+          <p:nvPr/>
+        </p:nvSpPr>
+        <p:spPr>
+          <a:xfrm>
+            <a:off x="6309360" y="4133088"/>
+            <a:ext cx="4892040" cy="859536"/>
+          </a:xfrm>
+          <a:prstGeom prst="roundRect">
+            <a:avLst/>
+          </a:prstGeom>
+          <a:solidFill>
+            <a:srgbClr val="FFFFFF"/>
+          </a:solidFill>
+          <a:ln w="19050">
+            <a:solidFill>
+              <a:srgbClr val="7A7A7A"/>
+            </a:solidFill>
+            <a:prstDash val="solid"/>
+          </a:ln>
+        </p:spPr>
+      </p:sp>
+      <p:sp>
+        <p:nvSpPr>
+          <p:cNvPr id="47" name="Text 19">
+            <a:extLst>
+              <a:ext uri="{FF2B5EF4-FFF2-40B4-BE49-F238E27FC236}">
+                <a16:creationId xmlns:a16="http://schemas.microsoft.com/office/drawing/2014/main" id="{8ED59C21-1F94-3F57-3D38-FC6A52C171D7}"/>
+              </a:ext>
+            </a:extLst>
+          </p:cNvPr>
+          <p:cNvSpPr/>
+          <p:nvPr/>
+        </p:nvSpPr>
+        <p:spPr>
+          <a:xfrm>
+            <a:off x="6309360" y="4133088"/>
+            <a:ext cx="4892040" cy="859536"/>
+          </a:xfrm>
+          <a:prstGeom prst="rect">
+            <a:avLst/>
+          </a:prstGeom>
+          <a:noFill/>
+          <a:ln/>
+        </p:spPr>
+        <p:txBody>
+          <a:bodyPr wrap="square" rtlCol="0" anchor="ctr"/>
+          <a:lstStyle/>
+          <a:p>
+            <a:pPr marL="0" indent="0" algn="ctr">
+              <a:buNone/>
+            </a:pPr>
+            <a:r>
+              <a:rPr lang="en-US" sz="1400" dirty="0">
+                <a:solidFill>
+                  <a:srgbClr val="000000"/>
+                </a:solidFill>
+                <a:latin typeface="Microsoft YaHei" pitchFamily="34" charset="0"/>
+                <a:ea typeface="Microsoft YaHei" pitchFamily="34" charset="-122"/>
+                <a:cs typeface="Microsoft YaHei" pitchFamily="34" charset="-120"/>
+              </a:rPr>
+              <a:t>候选集合构造（N-way）</a:t>
+            </a:r>
+            <a:endParaRPr lang="en-US" sz="1400" dirty="0"/>
+          </a:p>
+          <a:p>
+            <a:pPr marL="0" indent="0" algn="ctr">
+              <a:buNone/>
+            </a:pPr>
+            <a:r>
+              <a:rPr lang="en-US" sz="1400" dirty="0">
+                <a:solidFill>
+                  <a:srgbClr val="000000"/>
+                </a:solidFill>
+                <a:latin typeface="Microsoft YaHei" pitchFamily="34" charset="0"/>
+                <a:ea typeface="Microsoft YaHei" pitchFamily="34" charset="-122"/>
+                <a:cs typeface="Microsoft YaHei" pitchFamily="34" charset="-120"/>
+              </a:rPr>
+              <a:t>与单阈值门控</a:t>
+            </a:r>
+            <a:endParaRPr lang="en-US" sz="1400" dirty="0"/>
+          </a:p>
+        </p:txBody>
+      </p:sp>
+      <p:sp>
+        <p:nvSpPr>
+          <p:cNvPr id="48" name="Shape 20">
+            <a:extLst>
+              <a:ext uri="{FF2B5EF4-FFF2-40B4-BE49-F238E27FC236}">
+                <a16:creationId xmlns:a16="http://schemas.microsoft.com/office/drawing/2014/main" id="{82BCC128-242A-2742-9114-31518E1A044D}"/>
+              </a:ext>
+            </a:extLst>
+          </p:cNvPr>
+          <p:cNvSpPr/>
+          <p:nvPr/>
+        </p:nvSpPr>
+        <p:spPr>
+          <a:xfrm>
+            <a:off x="960120" y="5266944"/>
+            <a:ext cx="4892040" cy="859536"/>
+          </a:xfrm>
+          <a:prstGeom prst="roundRect">
+            <a:avLst/>
+          </a:prstGeom>
+          <a:solidFill>
+            <a:srgbClr val="FFFFFF"/>
+          </a:solidFill>
+          <a:ln w="19050">
+            <a:solidFill>
+              <a:srgbClr val="7A7A7A"/>
+            </a:solidFill>
+            <a:prstDash val="solid"/>
+          </a:ln>
+        </p:spPr>
+      </p:sp>
+      <p:sp>
+        <p:nvSpPr>
+          <p:cNvPr id="49" name="Text 21">
+            <a:extLst>
+              <a:ext uri="{FF2B5EF4-FFF2-40B4-BE49-F238E27FC236}">
+                <a16:creationId xmlns:a16="http://schemas.microsoft.com/office/drawing/2014/main" id="{ABDC3829-4E0B-52DE-A02F-AA9AC82081E7}"/>
+              </a:ext>
+            </a:extLst>
+          </p:cNvPr>
+          <p:cNvSpPr/>
+          <p:nvPr/>
+        </p:nvSpPr>
+        <p:spPr>
+          <a:xfrm>
+            <a:off x="960120" y="5266944"/>
+            <a:ext cx="4892040" cy="859536"/>
+          </a:xfrm>
+          <a:prstGeom prst="rect">
+            <a:avLst/>
+          </a:prstGeom>
+          <a:noFill/>
+          <a:ln/>
+        </p:spPr>
+        <p:txBody>
+          <a:bodyPr wrap="square" rtlCol="0" anchor="ctr"/>
+          <a:lstStyle/>
+          <a:p>
+            <a:pPr marL="0" indent="0" algn="ctr">
+              <a:buNone/>
+            </a:pPr>
+            <a:r>
+              <a:rPr lang="en-US" sz="1400" dirty="0">
+                <a:solidFill>
+                  <a:srgbClr val="000000"/>
+                </a:solidFill>
+                <a:latin typeface="Microsoft YaHei" pitchFamily="34" charset="0"/>
+                <a:ea typeface="Microsoft YaHei" pitchFamily="34" charset="-122"/>
+                <a:cs typeface="Microsoft YaHei" pitchFamily="34" charset="-120"/>
+              </a:rPr>
+              <a:t>并发预算约束</a:t>
+            </a:r>
+            <a:endParaRPr lang="en-US" sz="1400" dirty="0"/>
+          </a:p>
+          <a:p>
+            <a:pPr marL="0" indent="0" algn="ctr">
+              <a:buNone/>
+            </a:pPr>
+            <a:r>
+              <a:rPr lang="en-US" sz="1400" dirty="0">
+                <a:solidFill>
+                  <a:srgbClr val="000000"/>
+                </a:solidFill>
+                <a:latin typeface="Microsoft YaHei" pitchFamily="34" charset="0"/>
+                <a:ea typeface="Microsoft YaHei" pitchFamily="34" charset="-122"/>
+                <a:cs typeface="Microsoft YaHei" pitchFamily="34" charset="-120"/>
+              </a:rPr>
+              <a:t>与可控退化（背压）</a:t>
+            </a:r>
+            <a:endParaRPr lang="en-US" sz="1400" dirty="0"/>
+          </a:p>
+        </p:txBody>
+      </p:sp>
+      <p:sp>
+        <p:nvSpPr>
+          <p:cNvPr id="50" name="Shape 22">
+            <a:extLst>
+              <a:ext uri="{FF2B5EF4-FFF2-40B4-BE49-F238E27FC236}">
+                <a16:creationId xmlns:a16="http://schemas.microsoft.com/office/drawing/2014/main" id="{A93DFFC5-1B30-5C82-5E2C-CFC81421C80C}"/>
+              </a:ext>
+            </a:extLst>
+          </p:cNvPr>
+          <p:cNvSpPr/>
+          <p:nvPr/>
+        </p:nvSpPr>
+        <p:spPr>
+          <a:xfrm>
+            <a:off x="6309360" y="5266944"/>
+            <a:ext cx="4892040" cy="859536"/>
+          </a:xfrm>
+          <a:prstGeom prst="roundRect">
+            <a:avLst/>
+          </a:prstGeom>
+          <a:solidFill>
+            <a:srgbClr val="FFFFFF"/>
+          </a:solidFill>
+          <a:ln w="19050">
+            <a:solidFill>
+              <a:srgbClr val="7A7A7A"/>
+            </a:solidFill>
+            <a:prstDash val="solid"/>
+          </a:ln>
+        </p:spPr>
+      </p:sp>
+      <p:sp>
+        <p:nvSpPr>
+          <p:cNvPr id="51" name="Text 23">
+            <a:extLst>
+              <a:ext uri="{FF2B5EF4-FFF2-40B4-BE49-F238E27FC236}">
+                <a16:creationId xmlns:a16="http://schemas.microsoft.com/office/drawing/2014/main" id="{64873C94-5B65-ECF7-ED8D-703E687853E0}"/>
+              </a:ext>
+            </a:extLst>
+          </p:cNvPr>
+          <p:cNvSpPr/>
+          <p:nvPr/>
+        </p:nvSpPr>
+        <p:spPr>
+          <a:xfrm>
+            <a:off x="6309360" y="5266944"/>
+            <a:ext cx="4892040" cy="859536"/>
+          </a:xfrm>
+          <a:prstGeom prst="rect">
+            <a:avLst/>
+          </a:prstGeom>
+          <a:noFill/>
+          <a:ln/>
+        </p:spPr>
+        <p:txBody>
+          <a:bodyPr wrap="square" rtlCol="0" anchor="ctr"/>
+          <a:lstStyle/>
+          <a:p>
+            <a:pPr marL="0" indent="0" algn="ctr">
+              <a:buNone/>
+            </a:pPr>
+            <a:r>
+              <a:rPr lang="en-US" sz="1400" dirty="0">
+                <a:solidFill>
+                  <a:srgbClr val="000000"/>
+                </a:solidFill>
+                <a:latin typeface="Microsoft YaHei" pitchFamily="34" charset="0"/>
+                <a:ea typeface="Microsoft YaHei" pitchFamily="34" charset="-122"/>
+                <a:cs typeface="Microsoft YaHei" pitchFamily="34" charset="-120"/>
+              </a:rPr>
+              <a:t>状态缓冲隔离</a:t>
+            </a:r>
+            <a:endParaRPr lang="en-US" sz="1400" dirty="0"/>
+          </a:p>
+          <a:p>
+            <a:pPr marL="0" indent="0" algn="ctr">
+              <a:buNone/>
+            </a:pPr>
+            <a:r>
+              <a:rPr lang="en-US" sz="1400" dirty="0">
+                <a:solidFill>
+                  <a:srgbClr val="000000"/>
+                </a:solidFill>
+                <a:latin typeface="Microsoft YaHei" pitchFamily="34" charset="0"/>
+                <a:ea typeface="Microsoft YaHei" pitchFamily="34" charset="-122"/>
+                <a:cs typeface="Microsoft YaHei" pitchFamily="34" charset="-120"/>
+              </a:rPr>
+              <a:t>与验证 / 恢复机制</a:t>
+            </a:r>
+            <a:endParaRPr lang="en-US" sz="1400" dirty="0"/>
+          </a:p>
+        </p:txBody>
+      </p:sp>
+    </p:spTree>
+    <p:extLst>
+      <p:ext uri="{BB962C8B-B14F-4D97-AF65-F5344CB8AC3E}">
+        <p14:creationId xmlns:p14="http://schemas.microsoft.com/office/powerpoint/2010/main" val="3911305990"/>
+      </p:ext>
+    </p:extLst>
+  </p:cSld>
+  <p:clrMapOvr>
+    <a:masterClrMapping/>
+  </p:clrMapOvr>
+</p:sld>
+</file>
+
+<file path=ppt/slides/slide9.xml><?xml version="1.0" encoding="utf-8"?>
+<p:sld xmlns:a="http://schemas.openxmlformats.org/drawingml/2006/main" xmlns:r="http://schemas.openxmlformats.org/officeDocument/2006/relationships" xmlns:p="http://schemas.openxmlformats.org/presentationml/2006/main">
+  <p:cSld>
+    <p:spTree>
+      <p:nvGrpSpPr>
+        <p:cNvPr id="1" name=""/>
+        <p:cNvGrpSpPr/>
+        <p:nvPr/>
+      </p:nvGrpSpPr>
+      <p:grpSpPr>
+        <a:xfrm>
+          <a:off x="0" y="0"/>
+          <a:ext cx="0" cy="0"/>
+          <a:chOff x="0" y="0"/>
+          <a:chExt cx="0" cy="0"/>
+        </a:xfrm>
+      </p:grpSpPr>
+      <p:grpSp>
+        <p:nvGrpSpPr>
+          <p:cNvPr id="19" name="组合 18">
+            <a:extLst>
+              <a:ext uri="{FF2B5EF4-FFF2-40B4-BE49-F238E27FC236}">
+                <a16:creationId xmlns:a16="http://schemas.microsoft.com/office/drawing/2014/main" id="{FDD5D6CB-FE85-02AF-3D1F-253433BEABAA}"/>
+              </a:ext>
+            </a:extLst>
+          </p:cNvPr>
+          <p:cNvGrpSpPr/>
+          <p:nvPr/>
+        </p:nvGrpSpPr>
+        <p:grpSpPr>
+          <a:xfrm>
+            <a:off x="319155" y="1883219"/>
+            <a:ext cx="10571346" cy="4345848"/>
+            <a:chOff x="319155" y="1883219"/>
+            <a:chExt cx="10571346" cy="4345848"/>
+          </a:xfrm>
+        </p:grpSpPr>
+        <p:pic>
+          <p:nvPicPr>
+            <p:cNvPr id="13" name="图片 12">
+              <a:extLst>
+                <a:ext uri="{FF2B5EF4-FFF2-40B4-BE49-F238E27FC236}">
+                  <a16:creationId xmlns:a16="http://schemas.microsoft.com/office/drawing/2014/main" id="{B0619AAE-D481-C95E-E765-275544AE48D4}"/>
+                </a:ext>
+              </a:extLst>
+            </p:cNvPr>
+            <p:cNvPicPr>
+              <a:picLocks noChangeAspect="1"/>
+            </p:cNvPicPr>
+            <p:nvPr/>
+          </p:nvPicPr>
+          <p:blipFill>
+            <a:blip r:embed="rId2"/>
+            <a:stretch>
+              <a:fillRect/>
+            </a:stretch>
+          </p:blipFill>
+          <p:spPr>
+            <a:xfrm>
+              <a:off x="9213331" y="3217559"/>
+              <a:ext cx="1677170" cy="1677170"/>
+            </a:xfrm>
+            <a:prstGeom prst="rect">
+              <a:avLst/>
+            </a:prstGeom>
+          </p:spPr>
+        </p:pic>
+        <p:pic>
+          <p:nvPicPr>
+            <p:cNvPr id="7" name="图片 6">
+              <a:extLst>
+                <a:ext uri="{FF2B5EF4-FFF2-40B4-BE49-F238E27FC236}">
+                  <a16:creationId xmlns:a16="http://schemas.microsoft.com/office/drawing/2014/main" id="{B407AFCE-2210-3FFA-2435-41CA9ABC2070}"/>
+                </a:ext>
+              </a:extLst>
+            </p:cNvPr>
+            <p:cNvPicPr>
+              <a:picLocks noChangeAspect="1"/>
+            </p:cNvPicPr>
+            <p:nvPr/>
+          </p:nvPicPr>
+          <p:blipFill>
+            <a:blip r:embed="rId3"/>
+            <a:srcRect b="2210"/>
+            <a:stretch/>
+          </p:blipFill>
+          <p:spPr>
+            <a:xfrm>
+              <a:off x="319155" y="1963552"/>
+              <a:ext cx="8585786" cy="4185184"/>
+            </a:xfrm>
+            <a:prstGeom prst="rect">
+              <a:avLst/>
+            </a:prstGeom>
+          </p:spPr>
+        </p:pic>
+        <p:sp>
+          <p:nvSpPr>
+            <p:cNvPr id="8" name="矩形 7">
+              <a:extLst>
+                <a:ext uri="{FF2B5EF4-FFF2-40B4-BE49-F238E27FC236}">
+                  <a16:creationId xmlns:a16="http://schemas.microsoft.com/office/drawing/2014/main" id="{EE2A0F62-9619-18AA-B76A-C04BDFE27075}"/>
+                </a:ext>
+              </a:extLst>
+            </p:cNvPr>
+            <p:cNvSpPr/>
+            <p:nvPr/>
+          </p:nvSpPr>
+          <p:spPr>
+            <a:xfrm>
+              <a:off x="319155" y="1883219"/>
+              <a:ext cx="7722048" cy="4345848"/>
+            </a:xfrm>
+            <a:prstGeom prst="rect">
+              <a:avLst/>
+            </a:prstGeom>
+            <a:noFill/>
+            <a:ln w="38100">
+              <a:solidFill>
+                <a:schemeClr val="accent1"/>
+              </a:solidFill>
+            </a:ln>
+          </p:spPr>
+          <p:style>
+            <a:lnRef idx="2">
+              <a:schemeClr val="accent1">
+                <a:shade val="15000"/>
+              </a:schemeClr>
+            </a:lnRef>
+            <a:fillRef idx="1">
+              <a:schemeClr val="accent1"/>
+            </a:fillRef>
+            <a:effectRef idx="0">
+              <a:schemeClr val="accent1"/>
+            </a:effectRef>
+            <a:fontRef idx="minor">
+              <a:schemeClr val="lt1"/>
+            </a:fontRef>
+          </p:style>
+          <p:txBody>
+            <a:bodyPr rtlCol="0" anchor="ctr"/>
+            <a:lstStyle/>
+            <a:p>
+              <a:pPr algn="ctr"/>
+              <a:endParaRPr lang="zh-CN" altLang="en-US"/>
+            </a:p>
+          </p:txBody>
+        </p:sp>
+        <p:sp>
+          <p:nvSpPr>
+            <p:cNvPr id="10" name="文本框 9">
+              <a:extLst>
+                <a:ext uri="{FF2B5EF4-FFF2-40B4-BE49-F238E27FC236}">
+                  <a16:creationId xmlns:a16="http://schemas.microsoft.com/office/drawing/2014/main" id="{35577BB5-862E-0885-8F0C-20A8F09C22CA}"/>
+                </a:ext>
+              </a:extLst>
+            </p:cNvPr>
+            <p:cNvSpPr txBox="1"/>
+            <p:nvPr/>
+          </p:nvSpPr>
+          <p:spPr>
+            <a:xfrm>
+              <a:off x="8349593" y="3640645"/>
+              <a:ext cx="490840" cy="830997"/>
+            </a:xfrm>
+            <a:prstGeom prst="rect">
+              <a:avLst/>
+            </a:prstGeom>
+            <a:noFill/>
+          </p:spPr>
+          <p:txBody>
+            <a:bodyPr wrap="none" rtlCol="0">
+              <a:spAutoFit/>
+            </a:bodyPr>
+            <a:lstStyle/>
+            <a:p>
+              <a:r>
+                <a:rPr lang="en-US" altLang="zh-CN" sz="4800" b="1" dirty="0"/>
+                <a:t>+</a:t>
+              </a:r>
+              <a:endParaRPr lang="zh-CN" altLang="en-US" sz="4800" b="1" dirty="0"/>
+            </a:p>
+          </p:txBody>
+        </p:sp>
+        <p:sp>
+          <p:nvSpPr>
+            <p:cNvPr id="17" name="矩形 16">
+              <a:extLst>
+                <a:ext uri="{FF2B5EF4-FFF2-40B4-BE49-F238E27FC236}">
+                  <a16:creationId xmlns:a16="http://schemas.microsoft.com/office/drawing/2014/main" id="{614BE567-6868-9755-CE5B-4279745D59D1}"/>
+                </a:ext>
+              </a:extLst>
+            </p:cNvPr>
+            <p:cNvSpPr/>
+            <p:nvPr/>
+          </p:nvSpPr>
+          <p:spPr>
+            <a:xfrm>
+              <a:off x="9177551" y="3217559"/>
+              <a:ext cx="1712949" cy="1677169"/>
+            </a:xfrm>
+            <a:prstGeom prst="rect">
+              <a:avLst/>
+            </a:prstGeom>
+            <a:noFill/>
+            <a:ln w="38100">
+              <a:solidFill>
+                <a:schemeClr val="accent1"/>
+              </a:solidFill>
+            </a:ln>
+          </p:spPr>
+          <p:style>
+            <a:lnRef idx="2">
+              <a:schemeClr val="accent1">
+                <a:shade val="15000"/>
+              </a:schemeClr>
+            </a:lnRef>
+            <a:fillRef idx="1">
+              <a:schemeClr val="accent1"/>
+            </a:fillRef>
+            <a:effectRef idx="0">
+              <a:schemeClr val="accent1"/>
+            </a:effectRef>
+            <a:fontRef idx="minor">
+              <a:schemeClr val="lt1"/>
+            </a:fontRef>
+          </p:style>
+          <p:txBody>
+            <a:bodyPr rtlCol="0" anchor="ctr"/>
+            <a:lstStyle/>
+            <a:p>
+              <a:pPr algn="ctr"/>
+              <a:endParaRPr lang="zh-CN" altLang="en-US"/>
+            </a:p>
+          </p:txBody>
+        </p:sp>
+      </p:grpSp>
+    </p:spTree>
+    <p:extLst>
+      <p:ext uri="{BB962C8B-B14F-4D97-AF65-F5344CB8AC3E}">
+        <p14:creationId xmlns:p14="http://schemas.microsoft.com/office/powerpoint/2010/main" val="531027728"/>
+      </p:ext>
+    </p:extLst>
+  </p:cSld>
+  <p:clrMapOvr>
+    <a:masterClrMapping/>
+  </p:clrMapOvr>
+</p:sld>
+</file>
+
 <file path=ppt/theme/theme1.xml><?xml version="1.0" encoding="utf-8"?>
 <a:theme xmlns:a="http://schemas.openxmlformats.org/drawingml/2006/main" name="WPS">
   <a:themeElements>

--- a/美术作品.pptx
+++ b/美术作品.pptx
@@ -5,7 +5,7 @@
     <p:sldMasterId id="2147483648" r:id="rId1"/>
   </p:sldMasterIdLst>
   <p:notesMasterIdLst>
-    <p:notesMasterId r:id="rId11"/>
+    <p:notesMasterId r:id="rId12"/>
   </p:notesMasterIdLst>
   <p:sldIdLst>
     <p:sldId id="256" r:id="rId2"/>
@@ -17,6 +17,7 @@
     <p:sldId id="262" r:id="rId8"/>
     <p:sldId id="263" r:id="rId9"/>
     <p:sldId id="264" r:id="rId10"/>
+    <p:sldId id="265" r:id="rId11"/>
   </p:sldIdLst>
   <p:sldSz cx="12192000" cy="6858000"/>
   <p:notesSz cx="6858000" cy="9144000"/>
@@ -421,7 +422,7 @@
           <a:p>
             <a:fld id="{1F5AD5B5-6CBB-4946-BB99-91A038EC83D0}" type="datetimeFigureOut">
               <a:rPr lang="zh-CN" altLang="en-US" smtClean="0"/>
-              <a:t>2026/3/11</a:t>
+              <a:t>2026/3/18</a:t>
             </a:fld>
             <a:endParaRPr lang="zh-CN" altLang="en-US"/>
           </a:p>
@@ -806,6 +807,178 @@
 </p:notes>
 </file>
 
+<file path=ppt/notesSlides/notesSlide2.xml><?xml version="1.0" encoding="utf-8"?>
+<p:notes xmlns:a="http://schemas.openxmlformats.org/drawingml/2006/main" xmlns:r="http://schemas.openxmlformats.org/officeDocument/2006/relationships" xmlns:p="http://schemas.openxmlformats.org/presentationml/2006/main">
+  <p:cSld>
+    <p:spTree>
+      <p:nvGrpSpPr>
+        <p:cNvPr id="1" name=""/>
+        <p:cNvGrpSpPr/>
+        <p:nvPr/>
+      </p:nvGrpSpPr>
+      <p:grpSpPr>
+        <a:xfrm>
+          <a:off x="0" y="0"/>
+          <a:ext cx="0" cy="0"/>
+          <a:chOff x="0" y="0"/>
+          <a:chExt cx="0" cy="0"/>
+        </a:xfrm>
+      </p:grpSpPr>
+      <p:sp>
+        <p:nvSpPr>
+          <p:cNvPr id="2" name="幻灯片图像占位符 1"/>
+          <p:cNvSpPr>
+            <a:spLocks noGrp="1" noRot="1" noChangeAspect="1"/>
+          </p:cNvSpPr>
+          <p:nvPr>
+            <p:ph type="sldImg"/>
+          </p:nvPr>
+        </p:nvSpPr>
+        <p:spPr/>
+      </p:sp>
+      <p:sp>
+        <p:nvSpPr>
+          <p:cNvPr id="3" name="备注占位符 2"/>
+          <p:cNvSpPr>
+            <a:spLocks noGrp="1"/>
+          </p:cNvSpPr>
+          <p:nvPr>
+            <p:ph type="body" idx="1"/>
+          </p:nvPr>
+        </p:nvSpPr>
+        <p:spPr/>
+        <p:txBody>
+          <a:bodyPr/>
+          <a:lstStyle/>
+          <a:p>
+            <a:endParaRPr lang="zh-CN" altLang="en-US" dirty="0"/>
+          </a:p>
+        </p:txBody>
+      </p:sp>
+      <p:sp>
+        <p:nvSpPr>
+          <p:cNvPr id="4" name="灯片编号占位符 3"/>
+          <p:cNvSpPr>
+            <a:spLocks noGrp="1"/>
+          </p:cNvSpPr>
+          <p:nvPr>
+            <p:ph type="sldNum" sz="quarter" idx="5"/>
+          </p:nvPr>
+        </p:nvSpPr>
+        <p:spPr/>
+        <p:txBody>
+          <a:bodyPr/>
+          <a:lstStyle/>
+          <a:p>
+            <a:fld id="{ED9D1D49-895D-4F5A-ABF8-27223E77D4BA}" type="slidenum">
+              <a:rPr lang="zh-CN" altLang="en-US" smtClean="0"/>
+              <a:t>8</a:t>
+            </a:fld>
+            <a:endParaRPr lang="zh-CN" altLang="en-US"/>
+          </a:p>
+        </p:txBody>
+      </p:sp>
+    </p:spTree>
+    <p:extLst>
+      <p:ext uri="{BB962C8B-B14F-4D97-AF65-F5344CB8AC3E}">
+        <p14:creationId xmlns:p14="http://schemas.microsoft.com/office/powerpoint/2010/main" val="596315252"/>
+      </p:ext>
+    </p:extLst>
+  </p:cSld>
+  <p:clrMapOvr>
+    <a:masterClrMapping/>
+  </p:clrMapOvr>
+</p:notes>
+</file>
+
+<file path=ppt/notesSlides/notesSlide3.xml><?xml version="1.0" encoding="utf-8"?>
+<p:notes xmlns:a="http://schemas.openxmlformats.org/drawingml/2006/main" xmlns:r="http://schemas.openxmlformats.org/officeDocument/2006/relationships" xmlns:p="http://schemas.openxmlformats.org/presentationml/2006/main">
+  <p:cSld>
+    <p:spTree>
+      <p:nvGrpSpPr>
+        <p:cNvPr id="1" name=""/>
+        <p:cNvGrpSpPr/>
+        <p:nvPr/>
+      </p:nvGrpSpPr>
+      <p:grpSpPr>
+        <a:xfrm>
+          <a:off x="0" y="0"/>
+          <a:ext cx="0" cy="0"/>
+          <a:chOff x="0" y="0"/>
+          <a:chExt cx="0" cy="0"/>
+        </a:xfrm>
+      </p:grpSpPr>
+      <p:sp>
+        <p:nvSpPr>
+          <p:cNvPr id="2" name="Slide Image Placeholder 1"/>
+          <p:cNvSpPr>
+            <a:spLocks noGrp="1" noRot="1" noChangeAspect="1"/>
+          </p:cNvSpPr>
+          <p:nvPr>
+            <p:ph type="sldImg"/>
+          </p:nvPr>
+        </p:nvSpPr>
+        <p:spPr/>
+      </p:sp>
+      <p:sp>
+        <p:nvSpPr>
+          <p:cNvPr id="3" name="Notes Placeholder 2"/>
+          <p:cNvSpPr>
+            <a:spLocks noGrp="1"/>
+          </p:cNvSpPr>
+          <p:nvPr>
+            <p:ph type="body" idx="1"/>
+          </p:nvPr>
+        </p:nvSpPr>
+        <p:spPr/>
+        <p:txBody>
+          <a:bodyPr/>
+          <a:lstStyle/>
+          <a:p>
+            <a:r>
+              <a:rPr lang="zh-CN" altLang="en-US" dirty="0"/>
+              <a:t>弃用</a:t>
+            </a:r>
+            <a:endParaRPr lang="en-US" dirty="0"/>
+          </a:p>
+        </p:txBody>
+      </p:sp>
+      <p:sp>
+        <p:nvSpPr>
+          <p:cNvPr id="4" name="Slide Number Placeholder 3"/>
+          <p:cNvSpPr>
+            <a:spLocks noGrp="1"/>
+          </p:cNvSpPr>
+          <p:nvPr>
+            <p:ph type="sldNum" sz="quarter" idx="10"/>
+          </p:nvPr>
+        </p:nvSpPr>
+        <p:spPr/>
+        <p:txBody>
+          <a:bodyPr/>
+          <a:lstStyle/>
+          <a:p>
+            <a:fld id="{F7021451-1387-4CA6-816F-3879F97B5CBC}" type="slidenum">
+              <a:rPr lang="en-US"/>
+              <a:t>10</a:t>
+            </a:fld>
+            <a:endParaRPr lang="en-US"/>
+          </a:p>
+        </p:txBody>
+      </p:sp>
+    </p:spTree>
+    <p:extLst>
+      <p:ext uri="{BB962C8B-B14F-4D97-AF65-F5344CB8AC3E}">
+        <p14:creationId xmlns:p14="http://schemas.microsoft.com/office/powerpoint/2010/main" val="1024086991"/>
+      </p:ext>
+    </p:extLst>
+  </p:cSld>
+  <p:clrMapOvr>
+    <a:masterClrMapping/>
+  </p:clrMapOvr>
+</p:notes>
+</file>
+
 <file path=ppt/slideLayouts/slideLayout1.xml><?xml version="1.0" encoding="utf-8"?>
 <p:sldLayout xmlns:a="http://schemas.openxmlformats.org/drawingml/2006/main" xmlns:r="http://schemas.openxmlformats.org/officeDocument/2006/relationships" xmlns:p="http://schemas.openxmlformats.org/presentationml/2006/main" type="title" preserve="1">
   <p:cSld name="标题幻灯片">
@@ -935,7 +1108,7 @@
           <a:p>
             <a:fld id="{D997B5FA-0921-464F-AAE1-844C04324D75}" type="datetimeFigureOut">
               <a:rPr lang="zh-CN" altLang="en-US" smtClean="0"/>
-              <a:t>2026/3/11</a:t>
+              <a:t>2026/3/18</a:t>
             </a:fld>
             <a:endParaRPr lang="zh-CN" altLang="en-US"/>
           </a:p>
@@ -1098,7 +1271,7 @@
           <a:p>
             <a:fld id="{D997B5FA-0921-464F-AAE1-844C04324D75}" type="datetimeFigureOut">
               <a:rPr lang="zh-CN" altLang="en-US" smtClean="0"/>
-              <a:t>2026/3/11</a:t>
+              <a:t>2026/3/18</a:t>
             </a:fld>
             <a:endParaRPr lang="zh-CN" altLang="en-US"/>
           </a:p>
@@ -1271,7 +1444,7 @@
           <a:p>
             <a:fld id="{D997B5FA-0921-464F-AAE1-844C04324D75}" type="datetimeFigureOut">
               <a:rPr lang="zh-CN" altLang="en-US" smtClean="0"/>
-              <a:t>2026/3/11</a:t>
+              <a:t>2026/3/18</a:t>
             </a:fld>
             <a:endParaRPr lang="zh-CN" altLang="en-US"/>
           </a:p>
@@ -1320,6 +1493,41 @@
         </p:txBody>
       </p:sp>
     </p:spTree>
+  </p:cSld>
+  <p:clrMapOvr>
+    <a:masterClrMapping/>
+  </p:clrMapOvr>
+</p:sldLayout>
+</file>
+
+<file path=ppt/slideLayouts/slideLayout12.xml><?xml version="1.0" encoding="utf-8"?>
+<p:sldLayout xmlns:a="http://schemas.openxmlformats.org/drawingml/2006/main" xmlns:r="http://schemas.openxmlformats.org/officeDocument/2006/relationships" xmlns:p="http://schemas.openxmlformats.org/presentationml/2006/main">
+  <p:cSld name="DEFAULT">
+    <p:bg>
+      <p:bgRef idx="1001">
+        <a:schemeClr val="bg1"/>
+      </p:bgRef>
+    </p:bg>
+    <p:spTree>
+      <p:nvGrpSpPr>
+        <p:cNvPr id="1" name=""/>
+        <p:cNvGrpSpPr/>
+        <p:nvPr/>
+      </p:nvGrpSpPr>
+      <p:grpSpPr>
+        <a:xfrm>
+          <a:off x="0" y="0"/>
+          <a:ext cx="0" cy="0"/>
+          <a:chOff x="0" y="0"/>
+          <a:chExt cx="0" cy="0"/>
+        </a:xfrm>
+      </p:grpSpPr>
+    </p:spTree>
+    <p:extLst>
+      <p:ext uri="{BB962C8B-B14F-4D97-AF65-F5344CB8AC3E}">
+        <p14:creationId xmlns:p14="http://schemas.microsoft.com/office/powerpoint/2010/main" val="4178836587"/>
+      </p:ext>
+    </p:extLst>
   </p:cSld>
   <p:clrMapOvr>
     <a:masterClrMapping/>
@@ -1434,7 +1642,7 @@
           <a:p>
             <a:fld id="{D997B5FA-0921-464F-AAE1-844C04324D75}" type="datetimeFigureOut">
               <a:rPr lang="zh-CN" altLang="en-US" smtClean="0"/>
-              <a:t>2026/3/11</a:t>
+              <a:t>2026/3/18</a:t>
             </a:fld>
             <a:endParaRPr lang="zh-CN" altLang="en-US"/>
           </a:p>
@@ -1674,7 +1882,7 @@
           <a:p>
             <a:fld id="{D997B5FA-0921-464F-AAE1-844C04324D75}" type="datetimeFigureOut">
               <a:rPr lang="zh-CN" altLang="en-US" smtClean="0"/>
-              <a:t>2026/3/11</a:t>
+              <a:t>2026/3/18</a:t>
             </a:fld>
             <a:endParaRPr lang="zh-CN" altLang="en-US"/>
           </a:p>
@@ -1898,7 +2106,7 @@
           <a:p>
             <a:fld id="{D997B5FA-0921-464F-AAE1-844C04324D75}" type="datetimeFigureOut">
               <a:rPr lang="zh-CN" altLang="en-US" smtClean="0"/>
-              <a:t>2026/3/11</a:t>
+              <a:t>2026/3/18</a:t>
             </a:fld>
             <a:endParaRPr lang="zh-CN" altLang="en-US"/>
           </a:p>
@@ -2257,7 +2465,7 @@
           <a:p>
             <a:fld id="{D997B5FA-0921-464F-AAE1-844C04324D75}" type="datetimeFigureOut">
               <a:rPr lang="zh-CN" altLang="en-US" smtClean="0"/>
-              <a:t>2026/3/11</a:t>
+              <a:t>2026/3/18</a:t>
             </a:fld>
             <a:endParaRPr lang="zh-CN" altLang="en-US"/>
           </a:p>
@@ -2369,7 +2577,7 @@
           <a:p>
             <a:fld id="{D997B5FA-0921-464F-AAE1-844C04324D75}" type="datetimeFigureOut">
               <a:rPr lang="zh-CN" altLang="en-US" smtClean="0"/>
-              <a:t>2026/3/11</a:t>
+              <a:t>2026/3/18</a:t>
             </a:fld>
             <a:endParaRPr lang="zh-CN" altLang="en-US"/>
           </a:p>
@@ -2459,7 +2667,7 @@
           <a:p>
             <a:fld id="{D997B5FA-0921-464F-AAE1-844C04324D75}" type="datetimeFigureOut">
               <a:rPr lang="zh-CN" altLang="en-US" smtClean="0"/>
-              <a:t>2026/3/11</a:t>
+              <a:t>2026/3/18</a:t>
             </a:fld>
             <a:endParaRPr lang="zh-CN" altLang="en-US"/>
           </a:p>
@@ -2729,7 +2937,7 @@
           <a:p>
             <a:fld id="{D997B5FA-0921-464F-AAE1-844C04324D75}" type="datetimeFigureOut">
               <a:rPr lang="zh-CN" altLang="en-US" smtClean="0"/>
-              <a:t>2026/3/11</a:t>
+              <a:t>2026/3/18</a:t>
             </a:fld>
             <a:endParaRPr lang="zh-CN" altLang="en-US"/>
           </a:p>
@@ -2976,7 +3184,7 @@
           <a:p>
             <a:fld id="{D997B5FA-0921-464F-AAE1-844C04324D75}" type="datetimeFigureOut">
               <a:rPr lang="zh-CN" altLang="en-US" smtClean="0"/>
-              <a:t>2026/3/11</a:t>
+              <a:t>2026/3/18</a:t>
             </a:fld>
             <a:endParaRPr lang="zh-CN" altLang="en-US"/>
           </a:p>
@@ -3182,7 +3390,7 @@
           <a:p>
             <a:fld id="{D997B5FA-0921-464F-AAE1-844C04324D75}" type="datetimeFigureOut">
               <a:rPr lang="zh-CN" altLang="en-US" smtClean="0"/>
-              <a:t>2026/3/11</a:t>
+              <a:t>2026/3/18</a:t>
             </a:fld>
             <a:endParaRPr lang="zh-CN" altLang="en-US"/>
           </a:p>
@@ -3281,6 +3489,7 @@
     <p:sldLayoutId id="2147483657" r:id="rId9"/>
     <p:sldLayoutId id="2147483658" r:id="rId10"/>
     <p:sldLayoutId id="2147483659" r:id="rId11"/>
+    <p:sldLayoutId id="2147483660" r:id="rId12"/>
   </p:sldLayoutIdLst>
   <p:txStyles>
     <p:titleStyle>
@@ -5613,6 +5822,980 @@
         <p14:creationId xmlns:p14="http://schemas.microsoft.com/office/powerpoint/2010/main" val="4284125829"/>
       </p:ext>
     </p:extLst>
+  </p:cSld>
+  <p:clrMapOvr>
+    <a:masterClrMapping/>
+  </p:clrMapOvr>
+</p:sld>
+</file>
+
+<file path=ppt/slides/slide10.xml><?xml version="1.0" encoding="utf-8"?>
+<p:sld xmlns:a="http://schemas.openxmlformats.org/drawingml/2006/main" xmlns:r="http://schemas.openxmlformats.org/officeDocument/2006/relationships" xmlns:p="http://schemas.openxmlformats.org/presentationml/2006/main">
+  <p:cSld>
+    <p:spTree>
+      <p:nvGrpSpPr>
+        <p:cNvPr id="1" name=""/>
+        <p:cNvGrpSpPr/>
+        <p:nvPr/>
+      </p:nvGrpSpPr>
+      <p:grpSpPr>
+        <a:xfrm>
+          <a:off x="0" y="0"/>
+          <a:ext cx="0" cy="0"/>
+          <a:chOff x="0" y="0"/>
+          <a:chExt cx="0" cy="0"/>
+        </a:xfrm>
+      </p:grpSpPr>
+      <p:sp>
+        <p:nvSpPr>
+          <p:cNvPr id="2" name="Text 0"/>
+          <p:cNvSpPr/>
+          <p:nvPr/>
+        </p:nvSpPr>
+        <p:spPr>
+          <a:xfrm>
+            <a:off x="594360" y="347472"/>
+            <a:ext cx="11064240" cy="411480"/>
+          </a:xfrm>
+          <a:prstGeom prst="rect">
+            <a:avLst/>
+          </a:prstGeom>
+          <a:noFill/>
+          <a:ln/>
+        </p:spPr>
+        <p:txBody>
+          <a:bodyPr wrap="square" lIns="0" tIns="0" rIns="0" bIns="0" rtlCol="0" anchor="ctr"/>
+          <a:lstStyle/>
+          <a:p>
+            <a:pPr marL="0" indent="0">
+              <a:buNone/>
+            </a:pPr>
+            <a:r>
+              <a:rPr lang="en-US" sz="2500" b="1" dirty="0">
+                <a:solidFill>
+                  <a:srgbClr val="1F2937"/>
+                </a:solidFill>
+                <a:latin typeface="Microsoft YaHei" pitchFamily="34" charset="0"/>
+                <a:ea typeface="Microsoft YaHei" pitchFamily="34" charset="-122"/>
+                <a:cs typeface="Microsoft YaHei" pitchFamily="34" charset="-120"/>
+              </a:rPr>
+              <a:t>输入感知与分布漂移适应联合预测示意图</a:t>
+            </a:r>
+            <a:endParaRPr lang="en-US" sz="2500" dirty="0"/>
+          </a:p>
+        </p:txBody>
+      </p:sp>
+      <p:sp>
+        <p:nvSpPr>
+          <p:cNvPr id="3" name="Text 1"/>
+          <p:cNvSpPr/>
+          <p:nvPr/>
+        </p:nvSpPr>
+        <p:spPr>
+          <a:xfrm>
+            <a:off x="594360" y="786384"/>
+            <a:ext cx="10972800" cy="274320"/>
+          </a:xfrm>
+          <a:prstGeom prst="rect">
+            <a:avLst/>
+          </a:prstGeom>
+          <a:noFill/>
+          <a:ln/>
+        </p:spPr>
+        <p:txBody>
+          <a:bodyPr wrap="square" lIns="0" tIns="0" rIns="0" bIns="0" rtlCol="0" anchor="ctr"/>
+          <a:lstStyle/>
+          <a:p>
+            <a:pPr marL="0" indent="0">
+              <a:buNone/>
+            </a:pPr>
+            <a:r>
+              <a:rPr lang="en-US" sz="1130" dirty="0">
+                <a:solidFill>
+                  <a:srgbClr val="4B5563"/>
+                </a:solidFill>
+                <a:latin typeface="Microsoft YaHei" pitchFamily="34" charset="0"/>
+                <a:ea typeface="Microsoft YaHei" pitchFamily="34" charset="-122"/>
+                <a:cs typeface="Microsoft YaHei" pitchFamily="34" charset="-120"/>
+              </a:rPr>
+              <a:t>更简化的概念图：路径级采用完整漂移适应；桶级仅使用 EWMA 统计，再通过回退混合得到最终分支分布</a:t>
+            </a:r>
+            <a:endParaRPr lang="en-US" sz="1130" dirty="0"/>
+          </a:p>
+        </p:txBody>
+      </p:sp>
+      <p:sp>
+        <p:nvSpPr>
+          <p:cNvPr id="4" name="Shape 2"/>
+          <p:cNvSpPr/>
+          <p:nvPr/>
+        </p:nvSpPr>
+        <p:spPr>
+          <a:xfrm>
+            <a:off x="6035040" y="5029200"/>
+            <a:ext cx="0" cy="658368"/>
+          </a:xfrm>
+          <a:prstGeom prst="line">
+            <a:avLst/>
+          </a:prstGeom>
+          <a:noFill/>
+          <a:ln w="22860">
+            <a:solidFill>
+              <a:srgbClr val="94A3B8"/>
+            </a:solidFill>
+            <a:prstDash val="solid"/>
+            <a:headEnd type="none"/>
+            <a:tailEnd type="triangle"/>
+          </a:ln>
+        </p:spPr>
+      </p:sp>
+      <p:sp>
+        <p:nvSpPr>
+          <p:cNvPr id="5" name="Shape 3"/>
+          <p:cNvSpPr/>
+          <p:nvPr/>
+        </p:nvSpPr>
+        <p:spPr>
+          <a:xfrm>
+            <a:off x="1897380" y="1725228"/>
+            <a:ext cx="3108960" cy="2450592"/>
+          </a:xfrm>
+          <a:prstGeom prst="ellipse">
+            <a:avLst/>
+          </a:prstGeom>
+          <a:solidFill>
+            <a:srgbClr val="EEF2FF"/>
+          </a:solidFill>
+          <a:ln w="12700">
+            <a:solidFill>
+              <a:srgbClr val="334155"/>
+            </a:solidFill>
+            <a:prstDash val="solid"/>
+          </a:ln>
+          <a:effectLst>
+            <a:outerShdw blurRad="38100" dist="19050" dir="2700000" algn="bl" rotWithShape="0">
+              <a:srgbClr val="000000">
+                <a:alpha val="15000"/>
+              </a:srgbClr>
+            </a:outerShdw>
+          </a:effectLst>
+        </p:spPr>
+      </p:sp>
+      <p:sp>
+        <p:nvSpPr>
+          <p:cNvPr id="6" name="Shape 4"/>
+          <p:cNvSpPr/>
+          <p:nvPr/>
+        </p:nvSpPr>
+        <p:spPr>
+          <a:xfrm>
+            <a:off x="5257800" y="1572768"/>
+            <a:ext cx="3840480" cy="3840480"/>
+          </a:xfrm>
+          <a:prstGeom prst="ellipse">
+            <a:avLst/>
+          </a:prstGeom>
+          <a:solidFill>
+            <a:srgbClr val="ECFDF5"/>
+          </a:solidFill>
+          <a:ln w="12700">
+            <a:solidFill>
+              <a:srgbClr val="334155"/>
+            </a:solidFill>
+            <a:prstDash val="solid"/>
+          </a:ln>
+          <a:effectLst>
+            <a:outerShdw blurRad="38100" dist="19050" dir="2700000" algn="bl" rotWithShape="0">
+              <a:srgbClr val="000000">
+                <a:alpha val="15000"/>
+              </a:srgbClr>
+            </a:outerShdw>
+          </a:effectLst>
+        </p:spPr>
+      </p:sp>
+      <p:sp>
+        <p:nvSpPr>
+          <p:cNvPr id="7" name="Text 5"/>
+          <p:cNvSpPr/>
+          <p:nvPr/>
+        </p:nvSpPr>
+        <p:spPr>
+          <a:xfrm>
+            <a:off x="3108960" y="1956816"/>
+            <a:ext cx="1554480" cy="292608"/>
+          </a:xfrm>
+          <a:prstGeom prst="rect">
+            <a:avLst/>
+          </a:prstGeom>
+          <a:noFill/>
+          <a:ln/>
+        </p:spPr>
+        <p:txBody>
+          <a:bodyPr wrap="square" lIns="0" tIns="0" rIns="0" bIns="0" rtlCol="0" anchor="ctr"/>
+          <a:lstStyle/>
+          <a:p>
+            <a:pPr marL="0" indent="0" algn="ctr">
+              <a:buNone/>
+            </a:pPr>
+            <a:r>
+              <a:rPr lang="en-US" sz="1880" b="1" dirty="0">
+                <a:solidFill>
+                  <a:srgbClr val="0F172A"/>
+                </a:solidFill>
+                <a:latin typeface="Microsoft YaHei" pitchFamily="34" charset="0"/>
+                <a:ea typeface="Microsoft YaHei" pitchFamily="34" charset="-122"/>
+                <a:cs typeface="Microsoft YaHei" pitchFamily="34" charset="-120"/>
+              </a:rPr>
+              <a:t>输入感知</a:t>
+            </a:r>
+            <a:endParaRPr lang="en-US" sz="1880" dirty="0"/>
+          </a:p>
+        </p:txBody>
+      </p:sp>
+      <p:sp>
+        <p:nvSpPr>
+          <p:cNvPr id="8" name="Text 6"/>
+          <p:cNvSpPr/>
+          <p:nvPr/>
+        </p:nvSpPr>
+        <p:spPr>
+          <a:xfrm>
+            <a:off x="5897880" y="1938528"/>
+            <a:ext cx="2286000" cy="310896"/>
+          </a:xfrm>
+          <a:prstGeom prst="rect">
+            <a:avLst/>
+          </a:prstGeom>
+          <a:noFill/>
+          <a:ln/>
+        </p:spPr>
+        <p:txBody>
+          <a:bodyPr wrap="square" lIns="0" tIns="0" rIns="0" bIns="0" rtlCol="0" anchor="ctr"/>
+          <a:lstStyle/>
+          <a:p>
+            <a:pPr marL="0" indent="0" algn="ctr">
+              <a:buNone/>
+            </a:pPr>
+            <a:r>
+              <a:rPr lang="en-US" sz="1800" b="1" dirty="0">
+                <a:solidFill>
+                  <a:srgbClr val="0F172A"/>
+                </a:solidFill>
+                <a:latin typeface="Microsoft YaHei" pitchFamily="34" charset="0"/>
+                <a:ea typeface="Microsoft YaHei" pitchFamily="34" charset="-122"/>
+                <a:cs typeface="Microsoft YaHei" pitchFamily="34" charset="-120"/>
+              </a:rPr>
+              <a:t>分布漂移适应</a:t>
+            </a:r>
+            <a:endParaRPr lang="en-US" sz="1800" dirty="0"/>
+          </a:p>
+        </p:txBody>
+      </p:sp>
+      <p:sp>
+        <p:nvSpPr>
+          <p:cNvPr id="9" name="Text 7"/>
+          <p:cNvSpPr/>
+          <p:nvPr/>
+        </p:nvSpPr>
+        <p:spPr>
+          <a:xfrm>
+            <a:off x="2724912" y="2505456"/>
+            <a:ext cx="1600200" cy="1234440"/>
+          </a:xfrm>
+          <a:prstGeom prst="rect">
+            <a:avLst/>
+          </a:prstGeom>
+          <a:noFill/>
+          <a:ln/>
+        </p:spPr>
+        <p:txBody>
+          <a:bodyPr wrap="square" lIns="635" tIns="635" rIns="635" bIns="635" rtlCol="0" anchor="ctr"/>
+          <a:lstStyle/>
+          <a:p>
+            <a:pPr marL="0" indent="0">
+              <a:buNone/>
+            </a:pPr>
+            <a:r>
+              <a:rPr lang="en-US" sz="1230" dirty="0">
+                <a:solidFill>
+                  <a:srgbClr val="111827"/>
+                </a:solidFill>
+                <a:latin typeface="Microsoft YaHei" pitchFamily="34" charset="0"/>
+                <a:ea typeface="Microsoft YaHei" pitchFamily="34" charset="-122"/>
+                <a:cs typeface="Microsoft YaHei" pitchFamily="34" charset="-120"/>
+              </a:rPr>
+              <a:t>• 输入桶细化</a:t>
+            </a:r>
+            <a:endParaRPr lang="en-US" sz="1230" dirty="0"/>
+          </a:p>
+          <a:p>
+            <a:pPr marL="0" indent="0">
+              <a:buNone/>
+            </a:pPr>
+            <a:r>
+              <a:rPr lang="en-US" sz="1230" dirty="0">
+                <a:solidFill>
+                  <a:srgbClr val="111827"/>
+                </a:solidFill>
+                <a:latin typeface="Microsoft YaHei" pitchFamily="34" charset="0"/>
+                <a:ea typeface="Microsoft YaHei" pitchFamily="34" charset="-122"/>
+                <a:cs typeface="Microsoft YaHei" pitchFamily="34" charset="-120"/>
+              </a:rPr>
+              <a:t>• 区分输入模式</a:t>
+            </a:r>
+            <a:endParaRPr lang="en-US" sz="1230" dirty="0"/>
+          </a:p>
+          <a:p>
+            <a:pPr marL="0" indent="0">
+              <a:buNone/>
+            </a:pPr>
+            <a:r>
+              <a:rPr lang="en-US" sz="1230" dirty="0">
+                <a:solidFill>
+                  <a:srgbClr val="111827"/>
+                </a:solidFill>
+                <a:latin typeface="Microsoft YaHei" pitchFamily="34" charset="0"/>
+                <a:ea typeface="Microsoft YaHei" pitchFamily="34" charset="-122"/>
+                <a:cs typeface="Microsoft YaHei" pitchFamily="34" charset="-120"/>
+              </a:rPr>
+              <a:t>• 捕捉空间差异</a:t>
+            </a:r>
+            <a:endParaRPr lang="en-US" sz="1230" dirty="0"/>
+          </a:p>
+        </p:txBody>
+      </p:sp>
+      <p:sp>
+        <p:nvSpPr>
+          <p:cNvPr id="10" name="Text 8"/>
+          <p:cNvSpPr/>
+          <p:nvPr/>
+        </p:nvSpPr>
+        <p:spPr>
+          <a:xfrm>
+            <a:off x="6821424" y="2505456"/>
+            <a:ext cx="1261872" cy="1234440"/>
+          </a:xfrm>
+          <a:prstGeom prst="rect">
+            <a:avLst/>
+          </a:prstGeom>
+          <a:noFill/>
+          <a:ln/>
+        </p:spPr>
+        <p:txBody>
+          <a:bodyPr wrap="square" lIns="635" tIns="635" rIns="635" bIns="635" rtlCol="0" anchor="ctr"/>
+          <a:lstStyle/>
+          <a:p>
+            <a:pPr marL="0" indent="0">
+              <a:buNone/>
+            </a:pPr>
+            <a:r>
+              <a:rPr lang="en-US" sz="1220" dirty="0">
+                <a:solidFill>
+                  <a:srgbClr val="111827"/>
+                </a:solidFill>
+                <a:latin typeface="Microsoft YaHei" pitchFamily="34" charset="0"/>
+                <a:ea typeface="Microsoft YaHei" pitchFamily="34" charset="-122"/>
+                <a:cs typeface="Microsoft YaHei" pitchFamily="34" charset="-120"/>
+              </a:rPr>
+              <a:t>• EWMA + Window</a:t>
+            </a:r>
+            <a:endParaRPr lang="en-US" sz="1220" dirty="0"/>
+          </a:p>
+          <a:p>
+            <a:pPr marL="0" indent="0">
+              <a:buNone/>
+            </a:pPr>
+            <a:r>
+              <a:rPr lang="en-US" sz="1220" dirty="0">
+                <a:solidFill>
+                  <a:srgbClr val="111827"/>
+                </a:solidFill>
+                <a:latin typeface="Microsoft YaHei" pitchFamily="34" charset="0"/>
+                <a:ea typeface="Microsoft YaHei" pitchFamily="34" charset="-122"/>
+                <a:cs typeface="Microsoft YaHei" pitchFamily="34" charset="-120"/>
+              </a:rPr>
+              <a:t>• 强调近期统计</a:t>
+            </a:r>
+            <a:endParaRPr lang="en-US" sz="1220" dirty="0"/>
+          </a:p>
+          <a:p>
+            <a:pPr marL="0" indent="0">
+              <a:buNone/>
+            </a:pPr>
+            <a:r>
+              <a:rPr lang="en-US" sz="1220" dirty="0">
+                <a:solidFill>
+                  <a:srgbClr val="111827"/>
+                </a:solidFill>
+                <a:latin typeface="Microsoft YaHei" pitchFamily="34" charset="0"/>
+                <a:ea typeface="Microsoft YaHei" pitchFamily="34" charset="-122"/>
+                <a:cs typeface="Microsoft YaHei" pitchFamily="34" charset="-120"/>
+              </a:rPr>
+              <a:t>• 响应时间变化</a:t>
+            </a:r>
+            <a:endParaRPr lang="en-US" sz="1220" dirty="0"/>
+          </a:p>
+        </p:txBody>
+      </p:sp>
+      <p:sp>
+        <p:nvSpPr>
+          <p:cNvPr id="11" name="Shape 9"/>
+          <p:cNvSpPr/>
+          <p:nvPr/>
+        </p:nvSpPr>
+        <p:spPr>
+          <a:xfrm>
+            <a:off x="4572000" y="2807208"/>
+            <a:ext cx="2331720" cy="1389888"/>
+          </a:xfrm>
+          <a:prstGeom prst="roundRect">
+            <a:avLst>
+              <a:gd name="adj" fmla="val 5263"/>
+            </a:avLst>
+          </a:prstGeom>
+          <a:solidFill>
+            <a:srgbClr val="FEF2F2"/>
+          </a:solidFill>
+          <a:ln w="12700">
+            <a:solidFill>
+              <a:srgbClr val="334155"/>
+            </a:solidFill>
+            <a:prstDash val="solid"/>
+          </a:ln>
+          <a:effectLst>
+            <a:outerShdw blurRad="38100" dist="19050" dir="2700000" algn="bl" rotWithShape="0">
+              <a:srgbClr val="000000">
+                <a:alpha val="15000"/>
+              </a:srgbClr>
+            </a:outerShdw>
+          </a:effectLst>
+        </p:spPr>
+      </p:sp>
+      <p:sp>
+        <p:nvSpPr>
+          <p:cNvPr id="12" name="Text 10"/>
+          <p:cNvSpPr/>
+          <p:nvPr/>
+        </p:nvSpPr>
+        <p:spPr>
+          <a:xfrm>
+            <a:off x="4828032" y="2907792"/>
+            <a:ext cx="1828800" cy="219456"/>
+          </a:xfrm>
+          <a:prstGeom prst="rect">
+            <a:avLst/>
+          </a:prstGeom>
+          <a:noFill/>
+          <a:ln/>
+        </p:spPr>
+        <p:txBody>
+          <a:bodyPr wrap="square" lIns="0" tIns="0" rIns="0" bIns="0" rtlCol="0" anchor="ctr"/>
+          <a:lstStyle/>
+          <a:p>
+            <a:pPr marL="0" indent="0" algn="ctr">
+              <a:buNone/>
+            </a:pPr>
+            <a:r>
+              <a:rPr lang="en-US" sz="1660" b="1" dirty="0">
+                <a:solidFill>
+                  <a:srgbClr val="5B21B6"/>
+                </a:solidFill>
+                <a:latin typeface="Microsoft YaHei" pitchFamily="34" charset="0"/>
+                <a:ea typeface="Microsoft YaHei" pitchFamily="34" charset="-122"/>
+                <a:cs typeface="Microsoft YaHei" pitchFamily="34" charset="-120"/>
+              </a:rPr>
+              <a:t>联合预测器</a:t>
+            </a:r>
+            <a:endParaRPr lang="en-US" sz="1660" dirty="0"/>
+          </a:p>
+        </p:txBody>
+      </p:sp>
+      <p:sp>
+        <p:nvSpPr>
+          <p:cNvPr id="13" name="Text 11"/>
+          <p:cNvSpPr/>
+          <p:nvPr/>
+        </p:nvSpPr>
+        <p:spPr>
+          <a:xfrm>
+            <a:off x="4754880" y="3200400"/>
+            <a:ext cx="1938528" cy="822960"/>
+          </a:xfrm>
+          <a:prstGeom prst="rect">
+            <a:avLst/>
+          </a:prstGeom>
+          <a:noFill/>
+          <a:ln/>
+        </p:spPr>
+        <p:txBody>
+          <a:bodyPr wrap="square" lIns="381" tIns="381" rIns="381" bIns="381" rtlCol="0" anchor="ctr"/>
+          <a:lstStyle/>
+          <a:p>
+            <a:pPr marL="0" indent="0" algn="ctr">
+              <a:buNone/>
+            </a:pPr>
+            <a:r>
+              <a:rPr lang="en-US" sz="1230" dirty="0">
+                <a:solidFill>
+                  <a:srgbClr val="111827"/>
+                </a:solidFill>
+                <a:latin typeface="Microsoft YaHei" pitchFamily="34" charset="0"/>
+                <a:ea typeface="Microsoft YaHei" pitchFamily="34" charset="-122"/>
+                <a:cs typeface="Microsoft YaHei" pitchFamily="34" charset="-120"/>
+              </a:rPr>
+              <a:t>路径级：完整 Drift
+</a:t>
+            </a:r>
+            <a:r>
+              <a:rPr lang="en-US" sz="1230" b="1" dirty="0">
+                <a:solidFill>
+                  <a:srgbClr val="B91C1C"/>
+                </a:solidFill>
+                <a:latin typeface="Microsoft YaHei" pitchFamily="34" charset="0"/>
+                <a:ea typeface="Microsoft YaHei" pitchFamily="34" charset="-122"/>
+                <a:cs typeface="Microsoft YaHei" pitchFamily="34" charset="-120"/>
+              </a:rPr>
+              <a:t>桶级：仅 EWMA 修正
+</a:t>
+            </a:r>
+            <a:r>
+              <a:rPr lang="en-US" sz="1230" dirty="0">
+                <a:solidFill>
+                  <a:srgbClr val="111827"/>
+                </a:solidFill>
+                <a:latin typeface="Microsoft YaHei" pitchFamily="34" charset="0"/>
+                <a:ea typeface="Microsoft YaHei" pitchFamily="34" charset="-122"/>
+                <a:cs typeface="Microsoft YaHei" pitchFamily="34" charset="-120"/>
+              </a:rPr>
+              <a:t>回退混合输出</a:t>
+            </a:r>
+            <a:endParaRPr lang="en-US" sz="1230" dirty="0"/>
+          </a:p>
+        </p:txBody>
+      </p:sp>
+      <p:sp>
+        <p:nvSpPr>
+          <p:cNvPr id="14" name="Shape 12"/>
+          <p:cNvSpPr/>
+          <p:nvPr/>
+        </p:nvSpPr>
+        <p:spPr>
+          <a:xfrm>
+            <a:off x="9464040" y="2907792"/>
+            <a:ext cx="2084832" cy="896112"/>
+          </a:xfrm>
+          <a:prstGeom prst="roundRect">
+            <a:avLst>
+              <a:gd name="adj" fmla="val 6122"/>
+            </a:avLst>
+          </a:prstGeom>
+          <a:solidFill>
+            <a:srgbClr val="FFF7ED"/>
+          </a:solidFill>
+          <a:ln w="12700">
+            <a:solidFill>
+              <a:srgbClr val="FB923C"/>
+            </a:solidFill>
+            <a:prstDash val="solid"/>
+          </a:ln>
+        </p:spPr>
+      </p:sp>
+      <p:sp>
+        <p:nvSpPr>
+          <p:cNvPr id="15" name="Text 13"/>
+          <p:cNvSpPr/>
+          <p:nvPr/>
+        </p:nvSpPr>
+        <p:spPr>
+          <a:xfrm>
+            <a:off x="9601200" y="3026664"/>
+            <a:ext cx="1810512" cy="640080"/>
+          </a:xfrm>
+          <a:prstGeom prst="rect">
+            <a:avLst/>
+          </a:prstGeom>
+          <a:noFill/>
+          <a:ln/>
+        </p:spPr>
+        <p:txBody>
+          <a:bodyPr wrap="square" lIns="0" tIns="0" rIns="0" bIns="0" rtlCol="0" anchor="ctr"/>
+          <a:lstStyle/>
+          <a:p>
+            <a:pPr marL="0" indent="0" algn="ctr">
+              <a:buNone/>
+            </a:pPr>
+            <a:r>
+              <a:rPr lang="en-US" sz="1100" dirty="0">
+                <a:solidFill>
+                  <a:srgbClr val="9A3412"/>
+                </a:solidFill>
+                <a:latin typeface="Microsoft YaHei" pitchFamily="34" charset="0"/>
+                <a:ea typeface="Microsoft YaHei" pitchFamily="34" charset="-122"/>
+                <a:cs typeface="Microsoft YaHei" pitchFamily="34" charset="-120"/>
+              </a:rPr>
+              <a:t>桶级不使用</a:t>
+            </a:r>
+            <a:endParaRPr lang="en-US" sz="1100" dirty="0"/>
+          </a:p>
+          <a:p>
+            <a:pPr marL="0" indent="0" algn="ctr">
+              <a:buNone/>
+            </a:pPr>
+            <a:r>
+              <a:rPr lang="en-US" sz="1100" dirty="0">
+                <a:solidFill>
+                  <a:srgbClr val="9A3412"/>
+                </a:solidFill>
+                <a:latin typeface="Microsoft YaHei" pitchFamily="34" charset="0"/>
+                <a:ea typeface="Microsoft YaHei" pitchFamily="34" charset="-122"/>
+                <a:cs typeface="Microsoft YaHei" pitchFamily="34" charset="-120"/>
+              </a:rPr>
+              <a:t>滑动窗口 / JSD / 模式切换</a:t>
+            </a:r>
+            <a:endParaRPr lang="en-US" sz="1100" dirty="0"/>
+          </a:p>
+          <a:p>
+            <a:pPr marL="0" indent="0" algn="ctr">
+              <a:buNone/>
+            </a:pPr>
+            <a:r>
+              <a:rPr lang="en-US" sz="1100" dirty="0">
+                <a:solidFill>
+                  <a:srgbClr val="9A3412"/>
+                </a:solidFill>
+                <a:latin typeface="Microsoft YaHei" pitchFamily="34" charset="0"/>
+                <a:ea typeface="Microsoft YaHei" pitchFamily="34" charset="-122"/>
+                <a:cs typeface="Microsoft YaHei" pitchFamily="34" charset="-120"/>
+              </a:rPr>
+              <a:t>仅保留 EWMA 统计</a:t>
+            </a:r>
+            <a:endParaRPr lang="en-US" sz="1100" dirty="0"/>
+          </a:p>
+        </p:txBody>
+      </p:sp>
+      <p:sp>
+        <p:nvSpPr>
+          <p:cNvPr id="16" name="Shape 14"/>
+          <p:cNvSpPr/>
+          <p:nvPr/>
+        </p:nvSpPr>
+        <p:spPr>
+          <a:xfrm>
+            <a:off x="4187952" y="5705856"/>
+            <a:ext cx="3749040" cy="512064"/>
+          </a:xfrm>
+          <a:prstGeom prst="roundRect">
+            <a:avLst>
+              <a:gd name="adj" fmla="val 12500"/>
+            </a:avLst>
+          </a:prstGeom>
+          <a:solidFill>
+            <a:srgbClr val="FFF7ED"/>
+          </a:solidFill>
+          <a:ln w="12700">
+            <a:solidFill>
+              <a:srgbClr val="334155"/>
+            </a:solidFill>
+            <a:prstDash val="solid"/>
+          </a:ln>
+          <a:effectLst>
+            <a:outerShdw blurRad="38100" dist="19050" dir="2700000" algn="bl" rotWithShape="0">
+              <a:srgbClr val="000000">
+                <a:alpha val="15000"/>
+              </a:srgbClr>
+            </a:outerShdw>
+          </a:effectLst>
+        </p:spPr>
+      </p:sp>
+      <p:sp>
+        <p:nvSpPr>
+          <p:cNvPr id="17" name="Text 15"/>
+          <p:cNvSpPr/>
+          <p:nvPr/>
+        </p:nvSpPr>
+        <p:spPr>
+          <a:xfrm>
+            <a:off x="4425696" y="5843016"/>
+            <a:ext cx="3273552" cy="201168"/>
+          </a:xfrm>
+          <a:prstGeom prst="rect">
+            <a:avLst/>
+          </a:prstGeom>
+          <a:noFill/>
+          <a:ln/>
+        </p:spPr>
+        <p:txBody>
+          <a:bodyPr wrap="square" lIns="0" tIns="0" rIns="0" bIns="0" rtlCol="0" anchor="ctr"/>
+          <a:lstStyle/>
+          <a:p>
+            <a:pPr marL="0" indent="0" algn="ctr">
+              <a:buNone/>
+            </a:pPr>
+            <a:r>
+              <a:rPr lang="en-US" sz="1500" b="1" dirty="0">
+                <a:latin typeface="Microsoft YaHei" pitchFamily="34" charset="0"/>
+                <a:ea typeface="Microsoft YaHei" pitchFamily="34" charset="-122"/>
+                <a:cs typeface="Microsoft YaHei" pitchFamily="34" charset="-120"/>
+              </a:rPr>
+              <a:t>最终分支分布  P_t(v)</a:t>
+            </a:r>
+            <a:endParaRPr lang="en-US" sz="1500" dirty="0"/>
+          </a:p>
+        </p:txBody>
+      </p:sp>
+      <p:sp>
+        <p:nvSpPr>
+          <p:cNvPr id="18" name="Shape 15">
+            <a:extLst>
+              <a:ext uri="{FF2B5EF4-FFF2-40B4-BE49-F238E27FC236}">
+                <a16:creationId xmlns:a16="http://schemas.microsoft.com/office/drawing/2014/main" id="{210FB8FB-6371-C6E2-2296-882B9F475235}"/>
+              </a:ext>
+            </a:extLst>
+          </p:cNvPr>
+          <p:cNvSpPr/>
+          <p:nvPr/>
+        </p:nvSpPr>
+        <p:spPr>
+          <a:xfrm>
+            <a:off x="9026713" y="774573"/>
+            <a:ext cx="2395324" cy="667708"/>
+          </a:xfrm>
+          <a:prstGeom prst="roundRect">
+            <a:avLst/>
+          </a:prstGeom>
+          <a:solidFill>
+            <a:srgbClr val="EEF2FF"/>
+          </a:solidFill>
+          <a:ln w="12700">
+            <a:solidFill>
+              <a:srgbClr val="334155"/>
+            </a:solidFill>
+            <a:prstDash val="solid"/>
+          </a:ln>
+          <a:effectLst>
+            <a:outerShdw blurRad="38100" dist="19050" dir="2700000" algn="bl" rotWithShape="0">
+              <a:srgbClr val="000000">
+                <a:alpha val="15000"/>
+              </a:srgbClr>
+            </a:outerShdw>
+          </a:effectLst>
+        </p:spPr>
+        <p:txBody>
+          <a:bodyPr/>
+          <a:lstStyle/>
+          <a:p>
+            <a:endParaRPr lang="zh-CN" altLang="en-US"/>
+          </a:p>
+        </p:txBody>
+      </p:sp>
+      <p:sp>
+        <p:nvSpPr>
+          <p:cNvPr id="19" name="Shape 17">
+            <a:extLst>
+              <a:ext uri="{FF2B5EF4-FFF2-40B4-BE49-F238E27FC236}">
+                <a16:creationId xmlns:a16="http://schemas.microsoft.com/office/drawing/2014/main" id="{7B0B4E3D-18F4-A99D-2E90-3632FB1A89D0}"/>
+              </a:ext>
+            </a:extLst>
+          </p:cNvPr>
+          <p:cNvSpPr/>
+          <p:nvPr/>
+        </p:nvSpPr>
+        <p:spPr>
+          <a:xfrm>
+            <a:off x="11818620" y="786384"/>
+            <a:ext cx="2395324" cy="667708"/>
+          </a:xfrm>
+          <a:prstGeom prst="roundRect">
+            <a:avLst/>
+          </a:prstGeom>
+          <a:solidFill>
+            <a:srgbClr val="ECFDF5"/>
+          </a:solidFill>
+          <a:ln w="12700">
+            <a:solidFill>
+              <a:srgbClr val="334155"/>
+            </a:solidFill>
+            <a:prstDash val="solid"/>
+          </a:ln>
+          <a:effectLst>
+            <a:outerShdw blurRad="38100" dist="19050" dir="2700000" algn="bl" rotWithShape="0">
+              <a:srgbClr val="000000">
+                <a:alpha val="15000"/>
+              </a:srgbClr>
+            </a:outerShdw>
+          </a:effectLst>
+        </p:spPr>
+        <p:txBody>
+          <a:bodyPr/>
+          <a:lstStyle/>
+          <a:p>
+            <a:pPr indent="0" algn="ctr">
+              <a:buNone/>
+            </a:pPr>
+            <a:r>
+              <a:rPr lang="en-US" altLang="zh-CN" dirty="0">
+                <a:solidFill>
+                  <a:schemeClr val="dk1"/>
+                </a:solidFill>
+              </a:rPr>
+              <a:t>Gating &amp; Budgeting</a:t>
+            </a:r>
+          </a:p>
+          <a:p>
+            <a:pPr indent="0" algn="ctr">
+              <a:buNone/>
+            </a:pPr>
+            <a:r>
+              <a:rPr lang="en-US" altLang="zh-CN" dirty="0">
+                <a:solidFill>
+                  <a:schemeClr val="dk1"/>
+                </a:solidFill>
+              </a:rPr>
+              <a:t>Service</a:t>
+            </a:r>
+          </a:p>
+        </p:txBody>
+      </p:sp>
+      <p:sp>
+        <p:nvSpPr>
+          <p:cNvPr id="20" name="Shape 19">
+            <a:extLst>
+              <a:ext uri="{FF2B5EF4-FFF2-40B4-BE49-F238E27FC236}">
+                <a16:creationId xmlns:a16="http://schemas.microsoft.com/office/drawing/2014/main" id="{8425C86C-4610-70EF-6D89-4F289EE0A61D}"/>
+              </a:ext>
+            </a:extLst>
+          </p:cNvPr>
+          <p:cNvSpPr/>
+          <p:nvPr/>
+        </p:nvSpPr>
+        <p:spPr>
+          <a:xfrm>
+            <a:off x="11801862" y="1683165"/>
+            <a:ext cx="2395324" cy="667708"/>
+          </a:xfrm>
+          <a:prstGeom prst="roundRect">
+            <a:avLst/>
+          </a:prstGeom>
+          <a:solidFill>
+            <a:srgbClr val="FFF7ED"/>
+          </a:solidFill>
+          <a:ln w="12700">
+            <a:solidFill>
+              <a:srgbClr val="334155"/>
+            </a:solidFill>
+            <a:prstDash val="solid"/>
+          </a:ln>
+          <a:effectLst>
+            <a:outerShdw blurRad="38100" dist="19050" dir="2700000" algn="bl" rotWithShape="0">
+              <a:srgbClr val="000000">
+                <a:alpha val="15000"/>
+              </a:srgbClr>
+            </a:outerShdw>
+          </a:effectLst>
+        </p:spPr>
+        <p:txBody>
+          <a:bodyPr/>
+          <a:lstStyle/>
+          <a:p>
+            <a:pPr indent="0" algn="ctr">
+              <a:buNone/>
+            </a:pPr>
+            <a:r>
+              <a:rPr lang="en-US" altLang="zh-CN" dirty="0">
+                <a:solidFill>
+                  <a:schemeClr val="dk1"/>
+                </a:solidFill>
+              </a:rPr>
+              <a:t>Buffering</a:t>
+            </a:r>
+          </a:p>
+          <a:p>
+            <a:pPr indent="0" algn="ctr">
+              <a:buNone/>
+            </a:pPr>
+            <a:r>
+              <a:rPr lang="en-US" altLang="zh-CN" dirty="0">
+                <a:solidFill>
+                  <a:schemeClr val="dk1"/>
+                </a:solidFill>
+              </a:rPr>
+              <a:t>Service</a:t>
+            </a:r>
+          </a:p>
+        </p:txBody>
+      </p:sp>
+      <p:sp>
+        <p:nvSpPr>
+          <p:cNvPr id="21" name="Shape 21">
+            <a:extLst>
+              <a:ext uri="{FF2B5EF4-FFF2-40B4-BE49-F238E27FC236}">
+                <a16:creationId xmlns:a16="http://schemas.microsoft.com/office/drawing/2014/main" id="{94AFB183-3EF0-3FCE-2AFF-4DEF67FFAE29}"/>
+              </a:ext>
+            </a:extLst>
+          </p:cNvPr>
+          <p:cNvSpPr/>
+          <p:nvPr/>
+        </p:nvSpPr>
+        <p:spPr>
+          <a:xfrm>
+            <a:off x="9024672" y="1683165"/>
+            <a:ext cx="2395325" cy="667708"/>
+          </a:xfrm>
+          <a:prstGeom prst="roundRect">
+            <a:avLst/>
+          </a:prstGeom>
+          <a:solidFill>
+            <a:srgbClr val="FEF2F2"/>
+          </a:solidFill>
+          <a:ln w="12700">
+            <a:solidFill>
+              <a:srgbClr val="334155"/>
+            </a:solidFill>
+            <a:prstDash val="solid"/>
+          </a:ln>
+          <a:effectLst>
+            <a:outerShdw blurRad="38100" dist="19050" dir="2700000" algn="bl" rotWithShape="0">
+              <a:srgbClr val="000000">
+                <a:alpha val="15000"/>
+              </a:srgbClr>
+            </a:outerShdw>
+          </a:effectLst>
+        </p:spPr>
+        <p:txBody>
+          <a:bodyPr/>
+          <a:lstStyle/>
+          <a:p>
+            <a:pPr indent="0" algn="ctr">
+              <a:buNone/>
+            </a:pPr>
+            <a:r>
+              <a:rPr lang="en-US" altLang="zh-CN" dirty="0">
+                <a:solidFill>
+                  <a:schemeClr val="dk1"/>
+                </a:solidFill>
+              </a:rPr>
+              <a:t>Validation  &amp; Recovery</a:t>
+            </a:r>
+          </a:p>
+          <a:p>
+            <a:pPr indent="0" algn="ctr">
+              <a:buNone/>
+            </a:pPr>
+            <a:r>
+              <a:rPr lang="en-US" altLang="zh-CN" dirty="0">
+                <a:solidFill>
+                  <a:schemeClr val="dk1"/>
+                </a:solidFill>
+              </a:rPr>
+              <a:t>Service</a:t>
+            </a:r>
+          </a:p>
+          <a:p>
+            <a:endParaRPr lang="zh-CN" altLang="en-US" dirty="0"/>
+          </a:p>
+        </p:txBody>
+      </p:sp>
+    </p:spTree>
   </p:cSld>
   <p:clrMapOvr>
     <a:masterClrMapping/>
@@ -14924,986 +16107,791 @@
           <a:chExt cx="0" cy="0"/>
         </a:xfrm>
       </p:grpSpPr>
-      <p:sp>
-        <p:nvSpPr>
-          <p:cNvPr id="28" name="Shape 0">
+      <p:grpSp>
+        <p:nvGrpSpPr>
+          <p:cNvPr id="13" name="组合 12">
             <a:extLst>
               <a:ext uri="{FF2B5EF4-FFF2-40B4-BE49-F238E27FC236}">
-                <a16:creationId xmlns:a16="http://schemas.microsoft.com/office/drawing/2014/main" id="{F141B2B2-AD0F-4610-81FD-4585F7B4A802}"/>
+                <a16:creationId xmlns:a16="http://schemas.microsoft.com/office/drawing/2014/main" id="{179E52C9-F383-9729-A28C-A10CEB2EABF9}"/>
               </a:ext>
             </a:extLst>
           </p:cNvPr>
-          <p:cNvSpPr/>
+          <p:cNvGrpSpPr/>
           <p:nvPr/>
-        </p:nvSpPr>
-        <p:spPr>
+        </p:nvGrpSpPr>
+        <p:grpSpPr>
           <a:xfrm>
-            <a:off x="594360" y="365760"/>
-            <a:ext cx="10972800" cy="1417320"/>
+            <a:off x="739810" y="365760"/>
+            <a:ext cx="5380320" cy="4587120"/>
+            <a:chOff x="739810" y="365760"/>
+            <a:chExt cx="5380320" cy="4587120"/>
           </a:xfrm>
-          <a:prstGeom prst="rect">
-            <a:avLst/>
-          </a:prstGeom>
-          <a:solidFill>
-            <a:srgbClr val="FFFFFF"/>
-          </a:solidFill>
-          <a:ln w="25400">
+        </p:grpSpPr>
+        <p:sp>
+          <p:nvSpPr>
+            <p:cNvPr id="12" name="Shape 0">
+              <a:extLst>
+                <a:ext uri="{FF2B5EF4-FFF2-40B4-BE49-F238E27FC236}">
+                  <a16:creationId xmlns:a16="http://schemas.microsoft.com/office/drawing/2014/main" id="{4C121EE9-C7E1-0145-B4E8-2D0B06664E36}"/>
+                </a:ext>
+              </a:extLst>
+            </p:cNvPr>
+            <p:cNvSpPr/>
+            <p:nvPr/>
+          </p:nvSpPr>
+          <p:spPr>
+            <a:xfrm>
+              <a:off x="739810" y="3535560"/>
+              <a:ext cx="5372362" cy="1417320"/>
+            </a:xfrm>
+            <a:prstGeom prst="rect">
+              <a:avLst/>
+            </a:prstGeom>
             <a:solidFill>
-              <a:srgbClr val="000000"/>
+              <a:srgbClr val="FFFFFF"/>
             </a:solidFill>
-            <a:prstDash val="solid"/>
-          </a:ln>
-        </p:spPr>
-      </p:sp>
-      <p:sp>
-        <p:nvSpPr>
-          <p:cNvPr id="29" name="Text 1">
-            <a:extLst>
-              <a:ext uri="{FF2B5EF4-FFF2-40B4-BE49-F238E27FC236}">
-                <a16:creationId xmlns:a16="http://schemas.microsoft.com/office/drawing/2014/main" id="{6DF583C8-59CB-E888-AB7B-B7A389EC143E}"/>
-              </a:ext>
-            </a:extLst>
-          </p:cNvPr>
-          <p:cNvSpPr/>
-          <p:nvPr/>
-        </p:nvSpPr>
-        <p:spPr>
-          <a:xfrm>
-            <a:off x="594360" y="438912"/>
-            <a:ext cx="10972800" cy="347472"/>
-          </a:xfrm>
-          <a:prstGeom prst="rect">
-            <a:avLst/>
-          </a:prstGeom>
-          <a:noFill/>
-          <a:ln/>
-        </p:spPr>
-        <p:txBody>
-          <a:bodyPr wrap="square" rtlCol="0" anchor="ctr"/>
-          <a:lstStyle/>
-          <a:p>
-            <a:pPr marL="0" indent="0" algn="ctr">
-              <a:buNone/>
-            </a:pPr>
-            <a:r>
-              <a:rPr lang="en-US" sz="2000" b="1" dirty="0">
-                <a:solidFill>
-                  <a:srgbClr val="000000"/>
-                </a:solidFill>
-                <a:latin typeface="Microsoft YaHei" pitchFamily="34" charset="0"/>
-                <a:ea typeface="Microsoft YaHei" pitchFamily="34" charset="-122"/>
-                <a:cs typeface="Microsoft YaHei" pitchFamily="34" charset="-120"/>
-              </a:rPr>
-              <a:t>SpecSW—Serverless 工作流投机执行编程框架</a:t>
-            </a:r>
-            <a:endParaRPr lang="en-US" sz="2000" dirty="0"/>
-          </a:p>
-        </p:txBody>
-      </p:sp>
-      <p:sp>
-        <p:nvSpPr>
-          <p:cNvPr id="30" name="Shape 2">
-            <a:extLst>
-              <a:ext uri="{FF2B5EF4-FFF2-40B4-BE49-F238E27FC236}">
-                <a16:creationId xmlns:a16="http://schemas.microsoft.com/office/drawing/2014/main" id="{0F9F212A-B4C5-C2A9-2F59-005CD1B43EB5}"/>
-              </a:ext>
-            </a:extLst>
-          </p:cNvPr>
-          <p:cNvSpPr/>
-          <p:nvPr/>
-        </p:nvSpPr>
-        <p:spPr>
-          <a:xfrm>
-            <a:off x="960120" y="932688"/>
-            <a:ext cx="4892040" cy="713232"/>
-          </a:xfrm>
-          <a:prstGeom prst="roundRect">
-            <a:avLst/>
-          </a:prstGeom>
-          <a:solidFill>
-            <a:srgbClr val="FFFFFF"/>
-          </a:solidFill>
-          <a:ln w="19050">
+            <a:ln w="25400">
+              <a:solidFill>
+                <a:srgbClr val="000000"/>
+              </a:solidFill>
+              <a:prstDash val="solid"/>
+            </a:ln>
+          </p:spPr>
+        </p:sp>
+        <p:sp>
+          <p:nvSpPr>
+            <p:cNvPr id="11" name="Shape 0">
+              <a:extLst>
+                <a:ext uri="{FF2B5EF4-FFF2-40B4-BE49-F238E27FC236}">
+                  <a16:creationId xmlns:a16="http://schemas.microsoft.com/office/drawing/2014/main" id="{89AC3F9E-9BDC-14FD-3D36-E8EF2F38A5D6}"/>
+                </a:ext>
+              </a:extLst>
+            </p:cNvPr>
+            <p:cNvSpPr/>
+            <p:nvPr/>
+          </p:nvSpPr>
+          <p:spPr>
+            <a:xfrm>
+              <a:off x="747768" y="1950660"/>
+              <a:ext cx="5372362" cy="1417320"/>
+            </a:xfrm>
+            <a:prstGeom prst="rect">
+              <a:avLst/>
+            </a:prstGeom>
             <a:solidFill>
-              <a:srgbClr val="7A7A7A"/>
+              <a:srgbClr val="FFFFFF"/>
             </a:solidFill>
-            <a:prstDash val="solid"/>
-          </a:ln>
-        </p:spPr>
-      </p:sp>
-      <p:sp>
-        <p:nvSpPr>
-          <p:cNvPr id="31" name="Text 3">
-            <a:extLst>
-              <a:ext uri="{FF2B5EF4-FFF2-40B4-BE49-F238E27FC236}">
-                <a16:creationId xmlns:a16="http://schemas.microsoft.com/office/drawing/2014/main" id="{A82D08BE-9D44-8381-0932-BD476CFEE49B}"/>
-              </a:ext>
-            </a:extLst>
-          </p:cNvPr>
-          <p:cNvSpPr/>
-          <p:nvPr/>
-        </p:nvSpPr>
-        <p:spPr>
-          <a:xfrm>
-            <a:off x="960120" y="932688"/>
-            <a:ext cx="4892040" cy="713232"/>
-          </a:xfrm>
-          <a:prstGeom prst="rect">
-            <a:avLst/>
-          </a:prstGeom>
-          <a:noFill/>
-          <a:ln/>
-        </p:spPr>
-        <p:txBody>
-          <a:bodyPr wrap="square" rtlCol="0" anchor="ctr"/>
-          <a:lstStyle/>
-          <a:p>
-            <a:pPr marL="0" indent="0" algn="ctr">
-              <a:buNone/>
-            </a:pPr>
-            <a:r>
-              <a:rPr lang="en-US" sz="1600" dirty="0">
-                <a:solidFill>
-                  <a:srgbClr val="000000"/>
-                </a:solidFill>
-                <a:latin typeface="Microsoft YaHei" pitchFamily="34" charset="0"/>
-                <a:ea typeface="Microsoft YaHei" pitchFamily="34" charset="-122"/>
-                <a:cs typeface="Microsoft YaHei" pitchFamily="34" charset="-120"/>
-              </a:rPr>
-              <a:t>工作流描述与注解规范</a:t>
-            </a:r>
-            <a:endParaRPr lang="en-US" sz="1600" dirty="0"/>
-          </a:p>
-        </p:txBody>
-      </p:sp>
-      <p:sp>
-        <p:nvSpPr>
-          <p:cNvPr id="32" name="Shape 4">
-            <a:extLst>
-              <a:ext uri="{FF2B5EF4-FFF2-40B4-BE49-F238E27FC236}">
-                <a16:creationId xmlns:a16="http://schemas.microsoft.com/office/drawing/2014/main" id="{AC77FA24-928B-7FA4-5182-6BEB57F23A0F}"/>
-              </a:ext>
-            </a:extLst>
-          </p:cNvPr>
-          <p:cNvSpPr/>
-          <p:nvPr/>
-        </p:nvSpPr>
-        <p:spPr>
-          <a:xfrm>
-            <a:off x="6309360" y="932688"/>
-            <a:ext cx="4892040" cy="713232"/>
-          </a:xfrm>
-          <a:prstGeom prst="roundRect">
-            <a:avLst/>
-          </a:prstGeom>
-          <a:solidFill>
-            <a:srgbClr val="FFFFFF"/>
-          </a:solidFill>
-          <a:ln w="19050">
+            <a:ln w="25400">
+              <a:solidFill>
+                <a:srgbClr val="000000"/>
+              </a:solidFill>
+              <a:prstDash val="solid"/>
+            </a:ln>
+          </p:spPr>
+        </p:sp>
+        <p:sp>
+          <p:nvSpPr>
+            <p:cNvPr id="28" name="Shape 0">
+              <a:extLst>
+                <a:ext uri="{FF2B5EF4-FFF2-40B4-BE49-F238E27FC236}">
+                  <a16:creationId xmlns:a16="http://schemas.microsoft.com/office/drawing/2014/main" id="{F141B2B2-AD0F-4610-81FD-4585F7B4A802}"/>
+                </a:ext>
+              </a:extLst>
+            </p:cNvPr>
+            <p:cNvSpPr/>
+            <p:nvPr/>
+          </p:nvSpPr>
+          <p:spPr>
+            <a:xfrm>
+              <a:off x="747768" y="365760"/>
+              <a:ext cx="5372362" cy="1417320"/>
+            </a:xfrm>
+            <a:prstGeom prst="rect">
+              <a:avLst/>
+            </a:prstGeom>
             <a:solidFill>
-              <a:srgbClr val="7A7A7A"/>
+              <a:srgbClr val="FFFFFF"/>
             </a:solidFill>
-            <a:prstDash val="solid"/>
-          </a:ln>
-        </p:spPr>
-      </p:sp>
-      <p:sp>
-        <p:nvSpPr>
-          <p:cNvPr id="33" name="Text 5">
-            <a:extLst>
-              <a:ext uri="{FF2B5EF4-FFF2-40B4-BE49-F238E27FC236}">
-                <a16:creationId xmlns:a16="http://schemas.microsoft.com/office/drawing/2014/main" id="{B78A48E5-E6D5-22C6-3F4E-E193739F9BB3}"/>
-              </a:ext>
-            </a:extLst>
-          </p:cNvPr>
-          <p:cNvSpPr/>
-          <p:nvPr/>
-        </p:nvSpPr>
-        <p:spPr>
-          <a:xfrm>
-            <a:off x="6309360" y="932688"/>
-            <a:ext cx="4892040" cy="713232"/>
-          </a:xfrm>
-          <a:prstGeom prst="rect">
-            <a:avLst/>
-          </a:prstGeom>
-          <a:noFill/>
-          <a:ln/>
-        </p:spPr>
-        <p:txBody>
-          <a:bodyPr wrap="square" rtlCol="0" anchor="ctr"/>
-          <a:lstStyle/>
-          <a:p>
-            <a:pPr marL="0" indent="0" algn="ctr">
-              <a:buNone/>
-            </a:pPr>
-            <a:r>
-              <a:rPr lang="en-US" sz="1600" dirty="0">
-                <a:solidFill>
-                  <a:srgbClr val="000000"/>
-                </a:solidFill>
-                <a:latin typeface="Microsoft YaHei" pitchFamily="34" charset="0"/>
-                <a:ea typeface="Microsoft YaHei" pitchFamily="34" charset="-122"/>
-                <a:cs typeface="Microsoft YaHei" pitchFamily="34" charset="-120"/>
-              </a:rPr>
-              <a:t>运行时接口与策略API</a:t>
-            </a:r>
-            <a:endParaRPr lang="en-US" sz="1600" dirty="0"/>
-          </a:p>
-        </p:txBody>
-      </p:sp>
-      <p:sp>
-        <p:nvSpPr>
-          <p:cNvPr id="34" name="Shape 6">
-            <a:extLst>
-              <a:ext uri="{FF2B5EF4-FFF2-40B4-BE49-F238E27FC236}">
-                <a16:creationId xmlns:a16="http://schemas.microsoft.com/office/drawing/2014/main" id="{EF0CE213-CB24-8916-A973-5B543448DD63}"/>
-              </a:ext>
-            </a:extLst>
-          </p:cNvPr>
-          <p:cNvSpPr/>
-          <p:nvPr/>
-        </p:nvSpPr>
-        <p:spPr>
-          <a:xfrm>
-            <a:off x="594360" y="1965960"/>
-            <a:ext cx="10972800" cy="1417320"/>
-          </a:xfrm>
-          <a:prstGeom prst="rect">
-            <a:avLst/>
-          </a:prstGeom>
-          <a:solidFill>
-            <a:srgbClr val="FFFFFF"/>
-          </a:solidFill>
-          <a:ln w="25400">
+            <a:ln w="25400">
+              <a:solidFill>
+                <a:srgbClr val="000000"/>
+              </a:solidFill>
+              <a:prstDash val="solid"/>
+            </a:ln>
+          </p:spPr>
+        </p:sp>
+        <p:sp>
+          <p:nvSpPr>
+            <p:cNvPr id="29" name="Text 1">
+              <a:extLst>
+                <a:ext uri="{FF2B5EF4-FFF2-40B4-BE49-F238E27FC236}">
+                  <a16:creationId xmlns:a16="http://schemas.microsoft.com/office/drawing/2014/main" id="{6DF583C8-59CB-E888-AB7B-B7A389EC143E}"/>
+                </a:ext>
+              </a:extLst>
+            </p:cNvPr>
+            <p:cNvSpPr/>
+            <p:nvPr/>
+          </p:nvSpPr>
+          <p:spPr>
+            <a:xfrm>
+              <a:off x="747767" y="438912"/>
+              <a:ext cx="5372362" cy="347472"/>
+            </a:xfrm>
+            <a:prstGeom prst="rect">
+              <a:avLst/>
+            </a:prstGeom>
+            <a:noFill/>
+            <a:ln/>
+          </p:spPr>
+          <p:txBody>
+            <a:bodyPr wrap="square" rtlCol="0" anchor="ctr"/>
+            <a:lstStyle/>
+            <a:p>
+              <a:pPr marL="0" indent="0" algn="ctr">
+                <a:buNone/>
+              </a:pPr>
+              <a:r>
+                <a:rPr lang="en-US" sz="2000" dirty="0">
+                  <a:solidFill>
+                    <a:srgbClr val="000000"/>
+                  </a:solidFill>
+                  <a:latin typeface="Microsoft YaHei" pitchFamily="34" charset="0"/>
+                  <a:ea typeface="Microsoft YaHei" pitchFamily="34" charset="-122"/>
+                  <a:cs typeface="Microsoft YaHei" pitchFamily="34" charset="-120"/>
+                </a:rPr>
+                <a:t>Serverless 工作流投机执行编程框架</a:t>
+              </a:r>
+              <a:endParaRPr lang="en-US" sz="2000" dirty="0"/>
+            </a:p>
+          </p:txBody>
+        </p:sp>
+        <p:sp>
+          <p:nvSpPr>
+            <p:cNvPr id="30" name="Shape 2">
+              <a:extLst>
+                <a:ext uri="{FF2B5EF4-FFF2-40B4-BE49-F238E27FC236}">
+                  <a16:creationId xmlns:a16="http://schemas.microsoft.com/office/drawing/2014/main" id="{0F9F212A-B4C5-C2A9-2F59-005CD1B43EB5}"/>
+                </a:ext>
+              </a:extLst>
+            </p:cNvPr>
+            <p:cNvSpPr/>
+            <p:nvPr/>
+          </p:nvSpPr>
+          <p:spPr>
+            <a:xfrm>
+              <a:off x="837901" y="932688"/>
+              <a:ext cx="2490117" cy="713232"/>
+            </a:xfrm>
+            <a:prstGeom prst="roundRect">
+              <a:avLst/>
+            </a:prstGeom>
             <a:solidFill>
-              <a:srgbClr val="000000"/>
+              <a:srgbClr val="FFFFFF"/>
             </a:solidFill>
-            <a:prstDash val="solid"/>
-          </a:ln>
-        </p:spPr>
-      </p:sp>
-      <p:sp>
-        <p:nvSpPr>
-          <p:cNvPr id="35" name="Text 7">
-            <a:extLst>
-              <a:ext uri="{FF2B5EF4-FFF2-40B4-BE49-F238E27FC236}">
-                <a16:creationId xmlns:a16="http://schemas.microsoft.com/office/drawing/2014/main" id="{2D63D094-1694-2442-2287-0D7AA4B652C2}"/>
-              </a:ext>
-            </a:extLst>
-          </p:cNvPr>
-          <p:cNvSpPr/>
-          <p:nvPr/>
-        </p:nvSpPr>
-        <p:spPr>
-          <a:xfrm>
-            <a:off x="594360" y="2039112"/>
-            <a:ext cx="10972800" cy="347472"/>
-          </a:xfrm>
-          <a:prstGeom prst="rect">
-            <a:avLst/>
-          </a:prstGeom>
-          <a:noFill/>
-          <a:ln/>
-        </p:spPr>
-        <p:txBody>
-          <a:bodyPr wrap="square" rtlCol="0" anchor="ctr"/>
-          <a:lstStyle/>
-          <a:p>
-            <a:pPr marL="0" indent="0" algn="ctr">
-              <a:buNone/>
-            </a:pPr>
-            <a:r>
-              <a:rPr lang="en-US" sz="2000" b="1" dirty="0">
-                <a:solidFill>
-                  <a:srgbClr val="000000"/>
-                </a:solidFill>
-                <a:latin typeface="Microsoft YaHei" pitchFamily="34" charset="0"/>
-                <a:ea typeface="Microsoft YaHei" pitchFamily="34" charset="-122"/>
-                <a:cs typeface="Microsoft YaHei" pitchFamily="34" charset="-120"/>
-              </a:rPr>
-              <a:t>SpecSW—Serverless 工作流投机执行模型</a:t>
-            </a:r>
-            <a:endParaRPr lang="en-US" sz="2000" dirty="0"/>
-          </a:p>
-        </p:txBody>
-      </p:sp>
-      <p:sp>
-        <p:nvSpPr>
-          <p:cNvPr id="36" name="Shape 8">
-            <a:extLst>
-              <a:ext uri="{FF2B5EF4-FFF2-40B4-BE49-F238E27FC236}">
-                <a16:creationId xmlns:a16="http://schemas.microsoft.com/office/drawing/2014/main" id="{C578D7C8-5E84-73FD-F14E-016109EB40D5}"/>
-              </a:ext>
-            </a:extLst>
-          </p:cNvPr>
-          <p:cNvSpPr/>
-          <p:nvPr/>
-        </p:nvSpPr>
-        <p:spPr>
-          <a:xfrm>
-            <a:off x="960120" y="2532888"/>
-            <a:ext cx="3169920" cy="713232"/>
-          </a:xfrm>
-          <a:prstGeom prst="roundRect">
-            <a:avLst/>
-          </a:prstGeom>
-          <a:solidFill>
-            <a:srgbClr val="FFFFFF"/>
-          </a:solidFill>
-          <a:ln w="19050">
+            <a:ln w="19050">
+              <a:solidFill>
+                <a:srgbClr val="7A7A7A"/>
+              </a:solidFill>
+              <a:prstDash val="solid"/>
+            </a:ln>
+          </p:spPr>
+        </p:sp>
+        <p:sp>
+          <p:nvSpPr>
+            <p:cNvPr id="31" name="Text 3">
+              <a:extLst>
+                <a:ext uri="{FF2B5EF4-FFF2-40B4-BE49-F238E27FC236}">
+                  <a16:creationId xmlns:a16="http://schemas.microsoft.com/office/drawing/2014/main" id="{A82D08BE-9D44-8381-0932-BD476CFEE49B}"/>
+                </a:ext>
+              </a:extLst>
+            </p:cNvPr>
+            <p:cNvSpPr/>
+            <p:nvPr/>
+          </p:nvSpPr>
+          <p:spPr>
+            <a:xfrm>
+              <a:off x="837901" y="932688"/>
+              <a:ext cx="2490117" cy="713232"/>
+            </a:xfrm>
+            <a:prstGeom prst="rect">
+              <a:avLst/>
+            </a:prstGeom>
+            <a:noFill/>
+            <a:ln/>
+          </p:spPr>
+          <p:txBody>
+            <a:bodyPr wrap="square" rtlCol="0" anchor="ctr"/>
+            <a:lstStyle/>
+            <a:p>
+              <a:pPr marL="0" indent="0" algn="ctr">
+                <a:buNone/>
+              </a:pPr>
+              <a:r>
+                <a:rPr lang="zh-CN" altLang="en-US" sz="1600" dirty="0">
+                  <a:solidFill>
+                    <a:srgbClr val="000000"/>
+                  </a:solidFill>
+                  <a:latin typeface="Microsoft YaHei" pitchFamily="34" charset="0"/>
+                  <a:ea typeface="Microsoft YaHei" pitchFamily="34" charset="-122"/>
+                  <a:cs typeface="Microsoft YaHei" pitchFamily="34" charset="-120"/>
+                </a:rPr>
+                <a:t>工作流过程描述</a:t>
+              </a:r>
+              <a:endParaRPr lang="en-US" sz="1600" dirty="0"/>
+            </a:p>
+          </p:txBody>
+        </p:sp>
+        <p:sp>
+          <p:nvSpPr>
+            <p:cNvPr id="32" name="Shape 4">
+              <a:extLst>
+                <a:ext uri="{FF2B5EF4-FFF2-40B4-BE49-F238E27FC236}">
+                  <a16:creationId xmlns:a16="http://schemas.microsoft.com/office/drawing/2014/main" id="{AC77FA24-928B-7FA4-5182-6BEB57F23A0F}"/>
+                </a:ext>
+              </a:extLst>
+            </p:cNvPr>
+            <p:cNvSpPr/>
+            <p:nvPr/>
+          </p:nvSpPr>
+          <p:spPr>
+            <a:xfrm>
+              <a:off x="3479015" y="932688"/>
+              <a:ext cx="2490117" cy="713232"/>
+            </a:xfrm>
+            <a:prstGeom prst="roundRect">
+              <a:avLst/>
+            </a:prstGeom>
             <a:solidFill>
-              <a:srgbClr val="7A7A7A"/>
+              <a:srgbClr val="FFFFFF"/>
             </a:solidFill>
-            <a:prstDash val="solid"/>
-          </a:ln>
-        </p:spPr>
-      </p:sp>
-      <p:sp>
-        <p:nvSpPr>
-          <p:cNvPr id="37" name="Text 9">
-            <a:extLst>
-              <a:ext uri="{FF2B5EF4-FFF2-40B4-BE49-F238E27FC236}">
-                <a16:creationId xmlns:a16="http://schemas.microsoft.com/office/drawing/2014/main" id="{20657FB9-3608-20A0-B849-5CDB280E7086}"/>
-              </a:ext>
-            </a:extLst>
-          </p:cNvPr>
-          <p:cNvSpPr/>
-          <p:nvPr/>
-        </p:nvSpPr>
-        <p:spPr>
-          <a:xfrm>
-            <a:off x="960120" y="2532888"/>
-            <a:ext cx="3169920" cy="713232"/>
-          </a:xfrm>
-          <a:prstGeom prst="rect">
-            <a:avLst/>
-          </a:prstGeom>
-          <a:noFill/>
-          <a:ln/>
-        </p:spPr>
-        <p:txBody>
-          <a:bodyPr wrap="square" rtlCol="0" anchor="ctr"/>
-          <a:lstStyle/>
-          <a:p>
-            <a:pPr marL="0" indent="0" algn="ctr">
-              <a:buNone/>
-            </a:pPr>
-            <a:r>
-              <a:rPr lang="en-US" sz="1600" dirty="0">
-                <a:solidFill>
-                  <a:srgbClr val="000000"/>
-                </a:solidFill>
-                <a:latin typeface="Microsoft YaHei" pitchFamily="34" charset="0"/>
-                <a:ea typeface="Microsoft YaHei" pitchFamily="34" charset="-122"/>
-                <a:cs typeface="Microsoft YaHei" pitchFamily="34" charset="-120"/>
-              </a:rPr>
-              <a:t>模型定义</a:t>
-            </a:r>
-            <a:endParaRPr lang="en-US" sz="1600" dirty="0"/>
-          </a:p>
-        </p:txBody>
-      </p:sp>
-      <p:sp>
-        <p:nvSpPr>
-          <p:cNvPr id="38" name="Shape 10">
-            <a:extLst>
-              <a:ext uri="{FF2B5EF4-FFF2-40B4-BE49-F238E27FC236}">
-                <a16:creationId xmlns:a16="http://schemas.microsoft.com/office/drawing/2014/main" id="{74726928-6414-E8D0-695D-7ECBECA0F1B4}"/>
-              </a:ext>
-            </a:extLst>
-          </p:cNvPr>
-          <p:cNvSpPr/>
-          <p:nvPr/>
-        </p:nvSpPr>
-        <p:spPr>
-          <a:xfrm>
-            <a:off x="4495800" y="2532888"/>
-            <a:ext cx="3169920" cy="713232"/>
-          </a:xfrm>
-          <a:prstGeom prst="roundRect">
-            <a:avLst/>
-          </a:prstGeom>
-          <a:solidFill>
-            <a:srgbClr val="FFFFFF"/>
-          </a:solidFill>
-          <a:ln w="19050">
+            <a:ln w="19050">
+              <a:solidFill>
+                <a:srgbClr val="7A7A7A"/>
+              </a:solidFill>
+              <a:prstDash val="solid"/>
+            </a:ln>
+          </p:spPr>
+        </p:sp>
+        <p:sp>
+          <p:nvSpPr>
+            <p:cNvPr id="33" name="Text 5">
+              <a:extLst>
+                <a:ext uri="{FF2B5EF4-FFF2-40B4-BE49-F238E27FC236}">
+                  <a16:creationId xmlns:a16="http://schemas.microsoft.com/office/drawing/2014/main" id="{B78A48E5-E6D5-22C6-3F4E-E193739F9BB3}"/>
+                </a:ext>
+              </a:extLst>
+            </p:cNvPr>
+            <p:cNvSpPr/>
+            <p:nvPr/>
+          </p:nvSpPr>
+          <p:spPr>
+            <a:xfrm>
+              <a:off x="3479015" y="932688"/>
+              <a:ext cx="2490117" cy="713232"/>
+            </a:xfrm>
+            <a:prstGeom prst="rect">
+              <a:avLst/>
+            </a:prstGeom>
+            <a:noFill/>
+            <a:ln/>
+          </p:spPr>
+          <p:txBody>
+            <a:bodyPr wrap="square" rtlCol="0" anchor="ctr"/>
+            <a:lstStyle/>
+            <a:p>
+              <a:pPr marL="0" indent="0" algn="ctr">
+                <a:buNone/>
+              </a:pPr>
+              <a:r>
+                <a:rPr lang="zh-CN" altLang="en-US" sz="1600" dirty="0"/>
+                <a:t>投机运行时配置接口</a:t>
+              </a:r>
+              <a:endParaRPr lang="en-US" sz="1600" dirty="0"/>
+            </a:p>
+          </p:txBody>
+        </p:sp>
+        <p:sp>
+          <p:nvSpPr>
+            <p:cNvPr id="35" name="Text 7">
+              <a:extLst>
+                <a:ext uri="{FF2B5EF4-FFF2-40B4-BE49-F238E27FC236}">
+                  <a16:creationId xmlns:a16="http://schemas.microsoft.com/office/drawing/2014/main" id="{2D63D094-1694-2442-2287-0D7AA4B652C2}"/>
+                </a:ext>
+              </a:extLst>
+            </p:cNvPr>
+            <p:cNvSpPr/>
+            <p:nvPr/>
+          </p:nvSpPr>
+          <p:spPr>
+            <a:xfrm>
+              <a:off x="747767" y="2039112"/>
+              <a:ext cx="5348233" cy="347472"/>
+            </a:xfrm>
+            <a:prstGeom prst="rect">
+              <a:avLst/>
+            </a:prstGeom>
+            <a:noFill/>
+            <a:ln/>
+          </p:spPr>
+          <p:txBody>
+            <a:bodyPr wrap="square" rtlCol="0" anchor="ctr"/>
+            <a:lstStyle/>
+            <a:p>
+              <a:pPr marL="0" indent="0" algn="ctr">
+                <a:buNone/>
+              </a:pPr>
+              <a:r>
+                <a:rPr lang="en-US" sz="2000" dirty="0">
+                  <a:solidFill>
+                    <a:srgbClr val="000000"/>
+                  </a:solidFill>
+                  <a:latin typeface="Microsoft YaHei" pitchFamily="34" charset="0"/>
+                  <a:ea typeface="Microsoft YaHei" pitchFamily="34" charset="-122"/>
+                  <a:cs typeface="Microsoft YaHei" pitchFamily="34" charset="-120"/>
+                </a:rPr>
+                <a:t>Serverless 工作流投机执行模型</a:t>
+              </a:r>
+              <a:endParaRPr lang="en-US" sz="2000" dirty="0"/>
+            </a:p>
+          </p:txBody>
+        </p:sp>
+        <p:sp>
+          <p:nvSpPr>
+            <p:cNvPr id="36" name="Shape 8">
+              <a:extLst>
+                <a:ext uri="{FF2B5EF4-FFF2-40B4-BE49-F238E27FC236}">
+                  <a16:creationId xmlns:a16="http://schemas.microsoft.com/office/drawing/2014/main" id="{C578D7C8-5E84-73FD-F14E-016109EB40D5}"/>
+                </a:ext>
+              </a:extLst>
+            </p:cNvPr>
+            <p:cNvSpPr/>
+            <p:nvPr/>
+          </p:nvSpPr>
+          <p:spPr>
+            <a:xfrm>
+              <a:off x="837901" y="2532888"/>
+              <a:ext cx="1613534" cy="713232"/>
+            </a:xfrm>
+            <a:prstGeom prst="roundRect">
+              <a:avLst/>
+            </a:prstGeom>
             <a:solidFill>
-              <a:srgbClr val="7A7A7A"/>
+              <a:srgbClr val="FFFFFF"/>
             </a:solidFill>
-            <a:prstDash val="solid"/>
-          </a:ln>
-        </p:spPr>
-      </p:sp>
-      <p:sp>
-        <p:nvSpPr>
-          <p:cNvPr id="39" name="Text 11">
-            <a:extLst>
-              <a:ext uri="{FF2B5EF4-FFF2-40B4-BE49-F238E27FC236}">
-                <a16:creationId xmlns:a16="http://schemas.microsoft.com/office/drawing/2014/main" id="{9490749F-CC97-5ED2-9390-20C2ECABA347}"/>
-              </a:ext>
-            </a:extLst>
-          </p:cNvPr>
-          <p:cNvSpPr/>
-          <p:nvPr/>
-        </p:nvSpPr>
-        <p:spPr>
-          <a:xfrm>
-            <a:off x="4495800" y="2532888"/>
-            <a:ext cx="3169920" cy="713232"/>
-          </a:xfrm>
-          <a:prstGeom prst="rect">
-            <a:avLst/>
-          </a:prstGeom>
-          <a:noFill/>
-          <a:ln/>
-        </p:spPr>
-        <p:txBody>
-          <a:bodyPr wrap="square" rtlCol="0" anchor="ctr"/>
-          <a:lstStyle/>
-          <a:p>
-            <a:pPr marL="0" indent="0" algn="ctr">
-              <a:buNone/>
-            </a:pPr>
-            <a:r>
-              <a:rPr lang="en-US" sz="1600" dirty="0">
-                <a:solidFill>
-                  <a:srgbClr val="000000"/>
-                </a:solidFill>
-                <a:latin typeface="Microsoft YaHei" pitchFamily="34" charset="0"/>
-                <a:ea typeface="Microsoft YaHei" pitchFamily="34" charset="-122"/>
-                <a:cs typeface="Microsoft YaHei" pitchFamily="34" charset="-120"/>
-              </a:rPr>
-              <a:t>模型组件</a:t>
-            </a:r>
-            <a:endParaRPr lang="en-US" sz="1600" dirty="0"/>
-          </a:p>
-        </p:txBody>
-      </p:sp>
-      <p:sp>
-        <p:nvSpPr>
-          <p:cNvPr id="40" name="Shape 12">
-            <a:extLst>
-              <a:ext uri="{FF2B5EF4-FFF2-40B4-BE49-F238E27FC236}">
-                <a16:creationId xmlns:a16="http://schemas.microsoft.com/office/drawing/2014/main" id="{04118ECC-B42D-7DB2-A3D0-966D921C3CED}"/>
-              </a:ext>
-            </a:extLst>
-          </p:cNvPr>
-          <p:cNvSpPr/>
-          <p:nvPr/>
-        </p:nvSpPr>
-        <p:spPr>
-          <a:xfrm>
-            <a:off x="8031480" y="2532888"/>
-            <a:ext cx="3169920" cy="713232"/>
-          </a:xfrm>
-          <a:prstGeom prst="roundRect">
-            <a:avLst/>
-          </a:prstGeom>
-          <a:solidFill>
-            <a:srgbClr val="FFFFFF"/>
-          </a:solidFill>
-          <a:ln w="19050">
+            <a:ln w="19050">
+              <a:solidFill>
+                <a:srgbClr val="7A7A7A"/>
+              </a:solidFill>
+              <a:prstDash val="solid"/>
+            </a:ln>
+          </p:spPr>
+        </p:sp>
+        <p:sp>
+          <p:nvSpPr>
+            <p:cNvPr id="37" name="Text 9">
+              <a:extLst>
+                <a:ext uri="{FF2B5EF4-FFF2-40B4-BE49-F238E27FC236}">
+                  <a16:creationId xmlns:a16="http://schemas.microsoft.com/office/drawing/2014/main" id="{20657FB9-3608-20A0-B849-5CDB280E7086}"/>
+                </a:ext>
+              </a:extLst>
+            </p:cNvPr>
+            <p:cNvSpPr/>
+            <p:nvPr/>
+          </p:nvSpPr>
+          <p:spPr>
+            <a:xfrm>
+              <a:off x="837901" y="2532888"/>
+              <a:ext cx="1613534" cy="713232"/>
+            </a:xfrm>
+            <a:prstGeom prst="rect">
+              <a:avLst/>
+            </a:prstGeom>
+            <a:noFill/>
+            <a:ln/>
+          </p:spPr>
+          <p:txBody>
+            <a:bodyPr wrap="square" rtlCol="0" anchor="ctr"/>
+            <a:lstStyle/>
+            <a:p>
+              <a:pPr marL="0" indent="0" algn="ctr">
+                <a:buNone/>
+              </a:pPr>
+              <a:r>
+                <a:rPr lang="en-US" sz="1600" dirty="0">
+                  <a:solidFill>
+                    <a:srgbClr val="000000"/>
+                  </a:solidFill>
+                  <a:latin typeface="Microsoft YaHei" pitchFamily="34" charset="0"/>
+                  <a:ea typeface="Microsoft YaHei" pitchFamily="34" charset="-122"/>
+                  <a:cs typeface="Microsoft YaHei" pitchFamily="34" charset="-120"/>
+                </a:rPr>
+                <a:t>模型定义</a:t>
+              </a:r>
+              <a:endParaRPr lang="en-US" sz="1600" dirty="0"/>
+            </a:p>
+          </p:txBody>
+        </p:sp>
+        <p:sp>
+          <p:nvSpPr>
+            <p:cNvPr id="38" name="Shape 10">
+              <a:extLst>
+                <a:ext uri="{FF2B5EF4-FFF2-40B4-BE49-F238E27FC236}">
+                  <a16:creationId xmlns:a16="http://schemas.microsoft.com/office/drawing/2014/main" id="{74726928-6414-E8D0-695D-7ECBECA0F1B4}"/>
+                </a:ext>
+              </a:extLst>
+            </p:cNvPr>
+            <p:cNvSpPr/>
+            <p:nvPr/>
+          </p:nvSpPr>
+          <p:spPr>
+            <a:xfrm>
+              <a:off x="2604842" y="2520666"/>
+              <a:ext cx="1613534" cy="713232"/>
+            </a:xfrm>
+            <a:prstGeom prst="roundRect">
+              <a:avLst/>
+            </a:prstGeom>
             <a:solidFill>
-              <a:srgbClr val="7A7A7A"/>
+              <a:srgbClr val="FFFFFF"/>
             </a:solidFill>
-            <a:prstDash val="solid"/>
-          </a:ln>
-        </p:spPr>
-      </p:sp>
-      <p:sp>
-        <p:nvSpPr>
-          <p:cNvPr id="41" name="Text 13">
-            <a:extLst>
-              <a:ext uri="{FF2B5EF4-FFF2-40B4-BE49-F238E27FC236}">
-                <a16:creationId xmlns:a16="http://schemas.microsoft.com/office/drawing/2014/main" id="{7AF06E9D-8BA7-CCB4-E73D-0ED06D91AD86}"/>
-              </a:ext>
-            </a:extLst>
-          </p:cNvPr>
-          <p:cNvSpPr/>
-          <p:nvPr/>
-        </p:nvSpPr>
-        <p:spPr>
-          <a:xfrm>
-            <a:off x="8031480" y="2532888"/>
-            <a:ext cx="3169920" cy="713232"/>
-          </a:xfrm>
-          <a:prstGeom prst="rect">
-            <a:avLst/>
-          </a:prstGeom>
-          <a:noFill/>
-          <a:ln/>
-        </p:spPr>
-        <p:txBody>
-          <a:bodyPr wrap="square" rtlCol="0" anchor="ctr"/>
-          <a:lstStyle/>
-          <a:p>
-            <a:pPr marL="0" indent="0" algn="ctr">
-              <a:buNone/>
-            </a:pPr>
-            <a:r>
-              <a:rPr lang="en-US" sz="1600" dirty="0">
-                <a:solidFill>
-                  <a:srgbClr val="000000"/>
-                </a:solidFill>
-                <a:latin typeface="Microsoft YaHei" pitchFamily="34" charset="0"/>
-                <a:ea typeface="Microsoft YaHei" pitchFamily="34" charset="-122"/>
-                <a:cs typeface="Microsoft YaHei" pitchFamily="34" charset="-120"/>
-              </a:rPr>
-              <a:t>模型运行时行为</a:t>
-            </a:r>
-            <a:endParaRPr lang="en-US" sz="1600" dirty="0"/>
-          </a:p>
-        </p:txBody>
-      </p:sp>
-      <p:sp>
-        <p:nvSpPr>
-          <p:cNvPr id="42" name="Shape 14">
-            <a:extLst>
-              <a:ext uri="{FF2B5EF4-FFF2-40B4-BE49-F238E27FC236}">
-                <a16:creationId xmlns:a16="http://schemas.microsoft.com/office/drawing/2014/main" id="{6D75D752-C317-3B87-4661-23942EEB3701}"/>
-              </a:ext>
-            </a:extLst>
-          </p:cNvPr>
-          <p:cNvSpPr/>
-          <p:nvPr/>
-        </p:nvSpPr>
-        <p:spPr>
-          <a:xfrm>
-            <a:off x="594360" y="3566160"/>
-            <a:ext cx="10972800" cy="2788920"/>
-          </a:xfrm>
-          <a:prstGeom prst="rect">
-            <a:avLst/>
-          </a:prstGeom>
-          <a:solidFill>
-            <a:srgbClr val="FFFFFF"/>
-          </a:solidFill>
-          <a:ln w="25400">
+            <a:ln w="19050">
+              <a:solidFill>
+                <a:srgbClr val="7A7A7A"/>
+              </a:solidFill>
+              <a:prstDash val="solid"/>
+            </a:ln>
+          </p:spPr>
+        </p:sp>
+        <p:sp>
+          <p:nvSpPr>
+            <p:cNvPr id="39" name="Text 11">
+              <a:extLst>
+                <a:ext uri="{FF2B5EF4-FFF2-40B4-BE49-F238E27FC236}">
+                  <a16:creationId xmlns:a16="http://schemas.microsoft.com/office/drawing/2014/main" id="{9490749F-CC97-5ED2-9390-20C2ECABA347}"/>
+                </a:ext>
+              </a:extLst>
+            </p:cNvPr>
+            <p:cNvSpPr/>
+            <p:nvPr/>
+          </p:nvSpPr>
+          <p:spPr>
+            <a:xfrm>
+              <a:off x="2604842" y="2520666"/>
+              <a:ext cx="1613534" cy="713232"/>
+            </a:xfrm>
+            <a:prstGeom prst="rect">
+              <a:avLst/>
+            </a:prstGeom>
+            <a:noFill/>
+            <a:ln/>
+          </p:spPr>
+          <p:txBody>
+            <a:bodyPr wrap="square" rtlCol="0" anchor="ctr"/>
+            <a:lstStyle/>
+            <a:p>
+              <a:pPr marL="0" indent="0" algn="ctr">
+                <a:buNone/>
+              </a:pPr>
+              <a:r>
+                <a:rPr lang="en-US" sz="1600" dirty="0">
+                  <a:solidFill>
+                    <a:srgbClr val="000000"/>
+                  </a:solidFill>
+                  <a:latin typeface="Microsoft YaHei" pitchFamily="34" charset="0"/>
+                  <a:ea typeface="Microsoft YaHei" pitchFamily="34" charset="-122"/>
+                  <a:cs typeface="Microsoft YaHei" pitchFamily="34" charset="-120"/>
+                </a:rPr>
+                <a:t>模型组件</a:t>
+              </a:r>
+              <a:endParaRPr lang="en-US" sz="1600" dirty="0"/>
+            </a:p>
+          </p:txBody>
+        </p:sp>
+        <p:sp>
+          <p:nvSpPr>
+            <p:cNvPr id="40" name="Shape 12">
+              <a:extLst>
+                <a:ext uri="{FF2B5EF4-FFF2-40B4-BE49-F238E27FC236}">
+                  <a16:creationId xmlns:a16="http://schemas.microsoft.com/office/drawing/2014/main" id="{04118ECC-B42D-7DB2-A3D0-966D921C3CED}"/>
+                </a:ext>
+              </a:extLst>
+            </p:cNvPr>
+            <p:cNvSpPr/>
+            <p:nvPr/>
+          </p:nvSpPr>
+          <p:spPr>
+            <a:xfrm>
+              <a:off x="4371782" y="2532888"/>
+              <a:ext cx="1613534" cy="713232"/>
+            </a:xfrm>
+            <a:prstGeom prst="roundRect">
+              <a:avLst/>
+            </a:prstGeom>
             <a:solidFill>
-              <a:srgbClr val="000000"/>
+              <a:srgbClr val="FFFFFF"/>
             </a:solidFill>
-            <a:prstDash val="solid"/>
-          </a:ln>
-        </p:spPr>
-      </p:sp>
-      <p:sp>
-        <p:nvSpPr>
-          <p:cNvPr id="43" name="Text 15">
-            <a:extLst>
-              <a:ext uri="{FF2B5EF4-FFF2-40B4-BE49-F238E27FC236}">
-                <a16:creationId xmlns:a16="http://schemas.microsoft.com/office/drawing/2014/main" id="{EA8D2B65-332E-A5EB-2B9A-BBCBAE86A5AD}"/>
-              </a:ext>
-            </a:extLst>
-          </p:cNvPr>
-          <p:cNvSpPr/>
-          <p:nvPr/>
-        </p:nvSpPr>
-        <p:spPr>
-          <a:xfrm>
-            <a:off x="594360" y="3639312"/>
-            <a:ext cx="10972800" cy="347472"/>
-          </a:xfrm>
-          <a:prstGeom prst="rect">
-            <a:avLst/>
-          </a:prstGeom>
-          <a:noFill/>
-          <a:ln/>
-        </p:spPr>
-        <p:txBody>
-          <a:bodyPr wrap="square" rtlCol="0" anchor="ctr"/>
-          <a:lstStyle/>
-          <a:p>
-            <a:pPr marL="0" indent="0" algn="ctr">
-              <a:buNone/>
-            </a:pPr>
-            <a:r>
-              <a:rPr lang="en-US" sz="2000" b="1" dirty="0">
-                <a:solidFill>
-                  <a:srgbClr val="000000"/>
-                </a:solidFill>
-                <a:latin typeface="Microsoft YaHei" pitchFamily="34" charset="0"/>
-                <a:ea typeface="Microsoft YaHei" pitchFamily="34" charset="-122"/>
-                <a:cs typeface="Microsoft YaHei" pitchFamily="34" charset="-120"/>
-              </a:rPr>
-              <a:t>SpecSW—Serverless 工作流投机执行优化方法</a:t>
-            </a:r>
-            <a:endParaRPr lang="en-US" sz="2000" dirty="0"/>
-          </a:p>
-        </p:txBody>
-      </p:sp>
-      <p:sp>
-        <p:nvSpPr>
-          <p:cNvPr id="44" name="Shape 16">
-            <a:extLst>
-              <a:ext uri="{FF2B5EF4-FFF2-40B4-BE49-F238E27FC236}">
-                <a16:creationId xmlns:a16="http://schemas.microsoft.com/office/drawing/2014/main" id="{F1313FF8-0DC8-45F7-B5EB-C20C7BCC24A7}"/>
-              </a:ext>
-            </a:extLst>
-          </p:cNvPr>
-          <p:cNvSpPr/>
-          <p:nvPr/>
-        </p:nvSpPr>
-        <p:spPr>
-          <a:xfrm>
-            <a:off x="960120" y="4133088"/>
-            <a:ext cx="4892040" cy="859536"/>
-          </a:xfrm>
-          <a:prstGeom prst="roundRect">
-            <a:avLst/>
-          </a:prstGeom>
-          <a:solidFill>
-            <a:srgbClr val="FFFFFF"/>
-          </a:solidFill>
-          <a:ln w="19050">
+            <a:ln w="19050">
+              <a:solidFill>
+                <a:srgbClr val="7A7A7A"/>
+              </a:solidFill>
+              <a:prstDash val="solid"/>
+            </a:ln>
+          </p:spPr>
+        </p:sp>
+        <p:sp>
+          <p:nvSpPr>
+            <p:cNvPr id="41" name="Text 13">
+              <a:extLst>
+                <a:ext uri="{FF2B5EF4-FFF2-40B4-BE49-F238E27FC236}">
+                  <a16:creationId xmlns:a16="http://schemas.microsoft.com/office/drawing/2014/main" id="{7AF06E9D-8BA7-CCB4-E73D-0ED06D91AD86}"/>
+                </a:ext>
+              </a:extLst>
+            </p:cNvPr>
+            <p:cNvSpPr/>
+            <p:nvPr/>
+          </p:nvSpPr>
+          <p:spPr>
+            <a:xfrm>
+              <a:off x="4371782" y="2532888"/>
+              <a:ext cx="1613534" cy="713232"/>
+            </a:xfrm>
+            <a:prstGeom prst="rect">
+              <a:avLst/>
+            </a:prstGeom>
+            <a:noFill/>
+            <a:ln/>
+          </p:spPr>
+          <p:txBody>
+            <a:bodyPr wrap="square" rtlCol="0" anchor="ctr"/>
+            <a:lstStyle/>
+            <a:p>
+              <a:pPr marL="0" indent="0" algn="ctr">
+                <a:buNone/>
+              </a:pPr>
+              <a:r>
+                <a:rPr lang="en-US" sz="1600" dirty="0">
+                  <a:solidFill>
+                    <a:srgbClr val="000000"/>
+                  </a:solidFill>
+                  <a:latin typeface="Microsoft YaHei" pitchFamily="34" charset="0"/>
+                  <a:ea typeface="Microsoft YaHei" pitchFamily="34" charset="-122"/>
+                  <a:cs typeface="Microsoft YaHei" pitchFamily="34" charset="-120"/>
+                </a:rPr>
+                <a:t>模型运行时行为</a:t>
+              </a:r>
+              <a:endParaRPr lang="en-US" sz="1600" dirty="0"/>
+            </a:p>
+          </p:txBody>
+        </p:sp>
+        <p:sp>
+          <p:nvSpPr>
+            <p:cNvPr id="3" name="Text 7">
+              <a:extLst>
+                <a:ext uri="{FF2B5EF4-FFF2-40B4-BE49-F238E27FC236}">
+                  <a16:creationId xmlns:a16="http://schemas.microsoft.com/office/drawing/2014/main" id="{BBCCB63C-6C77-B42B-B4E3-B09990E6F79E}"/>
+                </a:ext>
+              </a:extLst>
+            </p:cNvPr>
+            <p:cNvSpPr/>
+            <p:nvPr/>
+          </p:nvSpPr>
+          <p:spPr>
+            <a:xfrm>
+              <a:off x="739810" y="3639312"/>
+              <a:ext cx="5372362" cy="347472"/>
+            </a:xfrm>
+            <a:prstGeom prst="rect">
+              <a:avLst/>
+            </a:prstGeom>
+            <a:noFill/>
+            <a:ln/>
+          </p:spPr>
+          <p:txBody>
+            <a:bodyPr wrap="square" rtlCol="0" anchor="ctr"/>
+            <a:lstStyle/>
+            <a:p>
+              <a:pPr marL="0" indent="0" algn="ctr">
+                <a:buNone/>
+              </a:pPr>
+              <a:r>
+                <a:rPr lang="en-US" sz="2000" dirty="0">
+                  <a:solidFill>
+                    <a:srgbClr val="000000"/>
+                  </a:solidFill>
+                  <a:latin typeface="Microsoft YaHei" pitchFamily="34" charset="0"/>
+                  <a:ea typeface="Microsoft YaHei" pitchFamily="34" charset="-122"/>
+                  <a:cs typeface="Microsoft YaHei" pitchFamily="34" charset="-120"/>
+                </a:rPr>
+                <a:t>Serverless </a:t>
+              </a:r>
+              <a:r>
+                <a:rPr lang="zh-CN" altLang="en-US" sz="2000" dirty="0">
+                  <a:solidFill>
+                    <a:srgbClr val="000000"/>
+                  </a:solidFill>
+                  <a:latin typeface="Microsoft YaHei" pitchFamily="34" charset="0"/>
+                  <a:ea typeface="Microsoft YaHei" pitchFamily="34" charset="-122"/>
+                  <a:cs typeface="Microsoft YaHei" pitchFamily="34" charset="-120"/>
+                </a:rPr>
+                <a:t>工作流投机执行关键优化方法</a:t>
+              </a:r>
+              <a:endParaRPr lang="en-US" sz="2000" dirty="0"/>
+            </a:p>
+          </p:txBody>
+        </p:sp>
+        <p:sp>
+          <p:nvSpPr>
+            <p:cNvPr id="4" name="Shape 8">
+              <a:extLst>
+                <a:ext uri="{FF2B5EF4-FFF2-40B4-BE49-F238E27FC236}">
+                  <a16:creationId xmlns:a16="http://schemas.microsoft.com/office/drawing/2014/main" id="{B50D6590-3B59-E09A-7624-1014D73C212D}"/>
+                </a:ext>
+              </a:extLst>
+            </p:cNvPr>
+            <p:cNvSpPr/>
+            <p:nvPr/>
+          </p:nvSpPr>
+          <p:spPr>
+            <a:xfrm>
+              <a:off x="837901" y="4133088"/>
+              <a:ext cx="2506300" cy="713232"/>
+            </a:xfrm>
+            <a:prstGeom prst="roundRect">
+              <a:avLst/>
+            </a:prstGeom>
             <a:solidFill>
-              <a:srgbClr val="7A7A7A"/>
+              <a:srgbClr val="FFFFFF"/>
             </a:solidFill>
-            <a:prstDash val="solid"/>
-          </a:ln>
-        </p:spPr>
-      </p:sp>
-      <p:sp>
-        <p:nvSpPr>
-          <p:cNvPr id="45" name="Text 17">
-            <a:extLst>
-              <a:ext uri="{FF2B5EF4-FFF2-40B4-BE49-F238E27FC236}">
-                <a16:creationId xmlns:a16="http://schemas.microsoft.com/office/drawing/2014/main" id="{690A3C64-6693-BC14-0196-1780EAFDD9C0}"/>
-              </a:ext>
-            </a:extLst>
-          </p:cNvPr>
-          <p:cNvSpPr/>
-          <p:nvPr/>
-        </p:nvSpPr>
-        <p:spPr>
-          <a:xfrm>
-            <a:off x="960120" y="4133088"/>
-            <a:ext cx="4892040" cy="859536"/>
-          </a:xfrm>
-          <a:prstGeom prst="rect">
-            <a:avLst/>
-          </a:prstGeom>
-          <a:noFill/>
-          <a:ln/>
-        </p:spPr>
-        <p:txBody>
-          <a:bodyPr wrap="square" rtlCol="0" anchor="ctr"/>
-          <a:lstStyle/>
-          <a:p>
-            <a:pPr marL="0" indent="0" algn="ctr">
-              <a:buNone/>
-            </a:pPr>
-            <a:r>
-              <a:rPr lang="en-US" sz="1400" dirty="0">
-                <a:solidFill>
-                  <a:srgbClr val="000000"/>
-                </a:solidFill>
-                <a:latin typeface="Microsoft YaHei" pitchFamily="34" charset="0"/>
-                <a:ea typeface="Microsoft YaHei" pitchFamily="34" charset="-122"/>
-                <a:cs typeface="Microsoft YaHei" pitchFamily="34" charset="-120"/>
-              </a:rPr>
-              <a:t>分支预测优化</a:t>
-            </a:r>
-            <a:endParaRPr lang="en-US" sz="1400" dirty="0"/>
-          </a:p>
-          <a:p>
-            <a:pPr marL="0" indent="0" algn="ctr">
-              <a:buNone/>
-            </a:pPr>
-            <a:r>
-              <a:rPr lang="en-US" sz="1400" dirty="0">
-                <a:solidFill>
-                  <a:srgbClr val="000000"/>
-                </a:solidFill>
-                <a:latin typeface="Microsoft YaHei" pitchFamily="34" charset="0"/>
-                <a:ea typeface="Microsoft YaHei" pitchFamily="34" charset="-122"/>
-                <a:cs typeface="Microsoft YaHei" pitchFamily="34" charset="-120"/>
-              </a:rPr>
-              <a:t>（上下文敏感 / 漂移自适应 / 循环感知）</a:t>
-            </a:r>
-            <a:endParaRPr lang="en-US" sz="1400" dirty="0"/>
-          </a:p>
-        </p:txBody>
-      </p:sp>
-      <p:sp>
-        <p:nvSpPr>
-          <p:cNvPr id="46" name="Shape 18">
-            <a:extLst>
-              <a:ext uri="{FF2B5EF4-FFF2-40B4-BE49-F238E27FC236}">
-                <a16:creationId xmlns:a16="http://schemas.microsoft.com/office/drawing/2014/main" id="{E86A3271-20C0-8A28-41BF-3517BF06E976}"/>
-              </a:ext>
-            </a:extLst>
-          </p:cNvPr>
-          <p:cNvSpPr/>
-          <p:nvPr/>
-        </p:nvSpPr>
-        <p:spPr>
-          <a:xfrm>
-            <a:off x="6309360" y="4133088"/>
-            <a:ext cx="4892040" cy="859536"/>
-          </a:xfrm>
-          <a:prstGeom prst="roundRect">
-            <a:avLst/>
-          </a:prstGeom>
-          <a:solidFill>
-            <a:srgbClr val="FFFFFF"/>
-          </a:solidFill>
-          <a:ln w="19050">
+            <a:ln w="19050">
+              <a:solidFill>
+                <a:srgbClr val="7A7A7A"/>
+              </a:solidFill>
+              <a:prstDash val="solid"/>
+            </a:ln>
+          </p:spPr>
+        </p:sp>
+        <p:sp>
+          <p:nvSpPr>
+            <p:cNvPr id="5" name="Text 9">
+              <a:extLst>
+                <a:ext uri="{FF2B5EF4-FFF2-40B4-BE49-F238E27FC236}">
+                  <a16:creationId xmlns:a16="http://schemas.microsoft.com/office/drawing/2014/main" id="{A79B3FF8-5B53-DC38-6049-020BB78F6976}"/>
+                </a:ext>
+              </a:extLst>
+            </p:cNvPr>
+            <p:cNvSpPr/>
+            <p:nvPr/>
+          </p:nvSpPr>
+          <p:spPr>
+            <a:xfrm>
+              <a:off x="837901" y="4133088"/>
+              <a:ext cx="2490117" cy="713232"/>
+            </a:xfrm>
+            <a:prstGeom prst="rect">
+              <a:avLst/>
+            </a:prstGeom>
+            <a:noFill/>
+            <a:ln/>
+          </p:spPr>
+          <p:txBody>
+            <a:bodyPr wrap="square" rtlCol="0" anchor="ctr"/>
+            <a:lstStyle/>
+            <a:p>
+              <a:pPr marL="0" indent="0" algn="ctr">
+                <a:buNone/>
+              </a:pPr>
+              <a:r>
+                <a:rPr lang="zh-CN" altLang="en-US" sz="1600" dirty="0">
+                  <a:solidFill>
+                    <a:srgbClr val="000000"/>
+                  </a:solidFill>
+                  <a:latin typeface="Microsoft YaHei" pitchFamily="34" charset="0"/>
+                  <a:ea typeface="Microsoft YaHei" pitchFamily="34" charset="-122"/>
+                  <a:cs typeface="Microsoft YaHei" pitchFamily="34" charset="-120"/>
+                </a:rPr>
+                <a:t>输入感知的分支预测</a:t>
+              </a:r>
+              <a:endParaRPr lang="en-US" sz="1600" dirty="0"/>
+            </a:p>
+          </p:txBody>
+        </p:sp>
+        <p:sp>
+          <p:nvSpPr>
+            <p:cNvPr id="6" name="Shape 10">
+              <a:extLst>
+                <a:ext uri="{FF2B5EF4-FFF2-40B4-BE49-F238E27FC236}">
+                  <a16:creationId xmlns:a16="http://schemas.microsoft.com/office/drawing/2014/main" id="{A2E2D134-56A7-1493-B913-24F47BB6CBBB}"/>
+                </a:ext>
+              </a:extLst>
+            </p:cNvPr>
+            <p:cNvSpPr/>
+            <p:nvPr/>
+          </p:nvSpPr>
+          <p:spPr>
+            <a:xfrm>
+              <a:off x="3479016" y="4142232"/>
+              <a:ext cx="2506300" cy="713232"/>
+            </a:xfrm>
+            <a:prstGeom prst="roundRect">
+              <a:avLst/>
+            </a:prstGeom>
             <a:solidFill>
-              <a:srgbClr val="7A7A7A"/>
+              <a:srgbClr val="FFFFFF"/>
             </a:solidFill>
-            <a:prstDash val="solid"/>
-          </a:ln>
-        </p:spPr>
-      </p:sp>
-      <p:sp>
-        <p:nvSpPr>
-          <p:cNvPr id="47" name="Text 19">
-            <a:extLst>
-              <a:ext uri="{FF2B5EF4-FFF2-40B4-BE49-F238E27FC236}">
-                <a16:creationId xmlns:a16="http://schemas.microsoft.com/office/drawing/2014/main" id="{8ED59C21-1F94-3F57-3D38-FC6A52C171D7}"/>
-              </a:ext>
-            </a:extLst>
-          </p:cNvPr>
-          <p:cNvSpPr/>
-          <p:nvPr/>
-        </p:nvSpPr>
-        <p:spPr>
-          <a:xfrm>
-            <a:off x="6309360" y="4133088"/>
-            <a:ext cx="4892040" cy="859536"/>
-          </a:xfrm>
-          <a:prstGeom prst="rect">
-            <a:avLst/>
-          </a:prstGeom>
-          <a:noFill/>
-          <a:ln/>
-        </p:spPr>
-        <p:txBody>
-          <a:bodyPr wrap="square" rtlCol="0" anchor="ctr"/>
-          <a:lstStyle/>
-          <a:p>
-            <a:pPr marL="0" indent="0" algn="ctr">
-              <a:buNone/>
-            </a:pPr>
-            <a:r>
-              <a:rPr lang="en-US" sz="1400" dirty="0">
-                <a:solidFill>
-                  <a:srgbClr val="000000"/>
-                </a:solidFill>
-                <a:latin typeface="Microsoft YaHei" pitchFamily="34" charset="0"/>
-                <a:ea typeface="Microsoft YaHei" pitchFamily="34" charset="-122"/>
-                <a:cs typeface="Microsoft YaHei" pitchFamily="34" charset="-120"/>
-              </a:rPr>
-              <a:t>候选集合构造（N-way）</a:t>
-            </a:r>
-            <a:endParaRPr lang="en-US" sz="1400" dirty="0"/>
-          </a:p>
-          <a:p>
-            <a:pPr marL="0" indent="0" algn="ctr">
-              <a:buNone/>
-            </a:pPr>
-            <a:r>
-              <a:rPr lang="en-US" sz="1400" dirty="0">
-                <a:solidFill>
-                  <a:srgbClr val="000000"/>
-                </a:solidFill>
-                <a:latin typeface="Microsoft YaHei" pitchFamily="34" charset="0"/>
-                <a:ea typeface="Microsoft YaHei" pitchFamily="34" charset="-122"/>
-                <a:cs typeface="Microsoft YaHei" pitchFamily="34" charset="-120"/>
-              </a:rPr>
-              <a:t>与单阈值门控</a:t>
-            </a:r>
-            <a:endParaRPr lang="en-US" sz="1400" dirty="0"/>
-          </a:p>
-        </p:txBody>
-      </p:sp>
-      <p:sp>
-        <p:nvSpPr>
-          <p:cNvPr id="48" name="Shape 20">
-            <a:extLst>
-              <a:ext uri="{FF2B5EF4-FFF2-40B4-BE49-F238E27FC236}">
-                <a16:creationId xmlns:a16="http://schemas.microsoft.com/office/drawing/2014/main" id="{82BCC128-242A-2742-9114-31518E1A044D}"/>
-              </a:ext>
-            </a:extLst>
-          </p:cNvPr>
-          <p:cNvSpPr/>
-          <p:nvPr/>
-        </p:nvSpPr>
-        <p:spPr>
-          <a:xfrm>
-            <a:off x="960120" y="5266944"/>
-            <a:ext cx="4892040" cy="859536"/>
-          </a:xfrm>
-          <a:prstGeom prst="roundRect">
-            <a:avLst/>
-          </a:prstGeom>
-          <a:solidFill>
-            <a:srgbClr val="FFFFFF"/>
-          </a:solidFill>
-          <a:ln w="19050">
-            <a:solidFill>
-              <a:srgbClr val="7A7A7A"/>
-            </a:solidFill>
-            <a:prstDash val="solid"/>
-          </a:ln>
-        </p:spPr>
-      </p:sp>
-      <p:sp>
-        <p:nvSpPr>
-          <p:cNvPr id="49" name="Text 21">
-            <a:extLst>
-              <a:ext uri="{FF2B5EF4-FFF2-40B4-BE49-F238E27FC236}">
-                <a16:creationId xmlns:a16="http://schemas.microsoft.com/office/drawing/2014/main" id="{ABDC3829-4E0B-52DE-A02F-AA9AC82081E7}"/>
-              </a:ext>
-            </a:extLst>
-          </p:cNvPr>
-          <p:cNvSpPr/>
-          <p:nvPr/>
-        </p:nvSpPr>
-        <p:spPr>
-          <a:xfrm>
-            <a:off x="960120" y="5266944"/>
-            <a:ext cx="4892040" cy="859536"/>
-          </a:xfrm>
-          <a:prstGeom prst="rect">
-            <a:avLst/>
-          </a:prstGeom>
-          <a:noFill/>
-          <a:ln/>
-        </p:spPr>
-        <p:txBody>
-          <a:bodyPr wrap="square" rtlCol="0" anchor="ctr"/>
-          <a:lstStyle/>
-          <a:p>
-            <a:pPr marL="0" indent="0" algn="ctr">
-              <a:buNone/>
-            </a:pPr>
-            <a:r>
-              <a:rPr lang="en-US" sz="1400" dirty="0">
-                <a:solidFill>
-                  <a:srgbClr val="000000"/>
-                </a:solidFill>
-                <a:latin typeface="Microsoft YaHei" pitchFamily="34" charset="0"/>
-                <a:ea typeface="Microsoft YaHei" pitchFamily="34" charset="-122"/>
-                <a:cs typeface="Microsoft YaHei" pitchFamily="34" charset="-120"/>
-              </a:rPr>
-              <a:t>并发预算约束</a:t>
-            </a:r>
-            <a:endParaRPr lang="en-US" sz="1400" dirty="0"/>
-          </a:p>
-          <a:p>
-            <a:pPr marL="0" indent="0" algn="ctr">
-              <a:buNone/>
-            </a:pPr>
-            <a:r>
-              <a:rPr lang="en-US" sz="1400" dirty="0">
-                <a:solidFill>
-                  <a:srgbClr val="000000"/>
-                </a:solidFill>
-                <a:latin typeface="Microsoft YaHei" pitchFamily="34" charset="0"/>
-                <a:ea typeface="Microsoft YaHei" pitchFamily="34" charset="-122"/>
-                <a:cs typeface="Microsoft YaHei" pitchFamily="34" charset="-120"/>
-              </a:rPr>
-              <a:t>与可控退化（背压）</a:t>
-            </a:r>
-            <a:endParaRPr lang="en-US" sz="1400" dirty="0"/>
-          </a:p>
-        </p:txBody>
-      </p:sp>
-      <p:sp>
-        <p:nvSpPr>
-          <p:cNvPr id="50" name="Shape 22">
-            <a:extLst>
-              <a:ext uri="{FF2B5EF4-FFF2-40B4-BE49-F238E27FC236}">
-                <a16:creationId xmlns:a16="http://schemas.microsoft.com/office/drawing/2014/main" id="{A93DFFC5-1B30-5C82-5E2C-CFC81421C80C}"/>
-              </a:ext>
-            </a:extLst>
-          </p:cNvPr>
-          <p:cNvSpPr/>
-          <p:nvPr/>
-        </p:nvSpPr>
-        <p:spPr>
-          <a:xfrm>
-            <a:off x="6309360" y="5266944"/>
-            <a:ext cx="4892040" cy="859536"/>
-          </a:xfrm>
-          <a:prstGeom prst="roundRect">
-            <a:avLst/>
-          </a:prstGeom>
-          <a:solidFill>
-            <a:srgbClr val="FFFFFF"/>
-          </a:solidFill>
-          <a:ln w="19050">
-            <a:solidFill>
-              <a:srgbClr val="7A7A7A"/>
-            </a:solidFill>
-            <a:prstDash val="solid"/>
-          </a:ln>
-        </p:spPr>
-      </p:sp>
-      <p:sp>
-        <p:nvSpPr>
-          <p:cNvPr id="51" name="Text 23">
-            <a:extLst>
-              <a:ext uri="{FF2B5EF4-FFF2-40B4-BE49-F238E27FC236}">
-                <a16:creationId xmlns:a16="http://schemas.microsoft.com/office/drawing/2014/main" id="{64873C94-5B65-ECF7-ED8D-703E687853E0}"/>
-              </a:ext>
-            </a:extLst>
-          </p:cNvPr>
-          <p:cNvSpPr/>
-          <p:nvPr/>
-        </p:nvSpPr>
-        <p:spPr>
-          <a:xfrm>
-            <a:off x="6309360" y="5266944"/>
-            <a:ext cx="4892040" cy="859536"/>
-          </a:xfrm>
-          <a:prstGeom prst="rect">
-            <a:avLst/>
-          </a:prstGeom>
-          <a:noFill/>
-          <a:ln/>
-        </p:spPr>
-        <p:txBody>
-          <a:bodyPr wrap="square" rtlCol="0" anchor="ctr"/>
-          <a:lstStyle/>
-          <a:p>
-            <a:pPr marL="0" indent="0" algn="ctr">
-              <a:buNone/>
-            </a:pPr>
-            <a:r>
-              <a:rPr lang="en-US" sz="1400" dirty="0">
-                <a:solidFill>
-                  <a:srgbClr val="000000"/>
-                </a:solidFill>
-                <a:latin typeface="Microsoft YaHei" pitchFamily="34" charset="0"/>
-                <a:ea typeface="Microsoft YaHei" pitchFamily="34" charset="-122"/>
-                <a:cs typeface="Microsoft YaHei" pitchFamily="34" charset="-120"/>
-              </a:rPr>
-              <a:t>状态缓冲隔离</a:t>
-            </a:r>
-            <a:endParaRPr lang="en-US" sz="1400" dirty="0"/>
-          </a:p>
-          <a:p>
-            <a:pPr marL="0" indent="0" algn="ctr">
-              <a:buNone/>
-            </a:pPr>
-            <a:r>
-              <a:rPr lang="en-US" sz="1400" dirty="0">
-                <a:solidFill>
-                  <a:srgbClr val="000000"/>
-                </a:solidFill>
-                <a:latin typeface="Microsoft YaHei" pitchFamily="34" charset="0"/>
-                <a:ea typeface="Microsoft YaHei" pitchFamily="34" charset="-122"/>
-                <a:cs typeface="Microsoft YaHei" pitchFamily="34" charset="-120"/>
-              </a:rPr>
-              <a:t>与验证 / 恢复机制</a:t>
-            </a:r>
-            <a:endParaRPr lang="en-US" sz="1400" dirty="0"/>
-          </a:p>
-        </p:txBody>
-      </p:sp>
+            <a:ln w="19050">
+              <a:solidFill>
+                <a:srgbClr val="7A7A7A"/>
+              </a:solidFill>
+              <a:prstDash val="solid"/>
+            </a:ln>
+          </p:spPr>
+        </p:sp>
+        <p:sp>
+          <p:nvSpPr>
+            <p:cNvPr id="7" name="Text 11">
+              <a:extLst>
+                <a:ext uri="{FF2B5EF4-FFF2-40B4-BE49-F238E27FC236}">
+                  <a16:creationId xmlns:a16="http://schemas.microsoft.com/office/drawing/2014/main" id="{6544578B-1477-48FA-DF87-86C6D65E4FEE}"/>
+                </a:ext>
+              </a:extLst>
+            </p:cNvPr>
+            <p:cNvSpPr/>
+            <p:nvPr/>
+          </p:nvSpPr>
+          <p:spPr>
+            <a:xfrm>
+              <a:off x="3489650" y="4142232"/>
+              <a:ext cx="2479481" cy="713232"/>
+            </a:xfrm>
+            <a:prstGeom prst="rect">
+              <a:avLst/>
+            </a:prstGeom>
+            <a:noFill/>
+            <a:ln/>
+          </p:spPr>
+          <p:txBody>
+            <a:bodyPr wrap="square" rtlCol="0" anchor="ctr"/>
+            <a:lstStyle/>
+            <a:p>
+              <a:pPr marL="0" indent="0" algn="ctr">
+                <a:buNone/>
+              </a:pPr>
+              <a:r>
+                <a:rPr lang="zh-CN" altLang="en-US" sz="1600" dirty="0">
+                  <a:solidFill>
+                    <a:srgbClr val="000000"/>
+                  </a:solidFill>
+                  <a:latin typeface="Microsoft YaHei" pitchFamily="34" charset="0"/>
+                  <a:ea typeface="Microsoft YaHei" pitchFamily="34" charset="-122"/>
+                  <a:cs typeface="Microsoft YaHei" pitchFamily="34" charset="-120"/>
+                </a:rPr>
+                <a:t>分布漂移适应</a:t>
+              </a:r>
+              <a:endParaRPr lang="en-US" sz="1600" dirty="0"/>
+            </a:p>
+          </p:txBody>
+        </p:sp>
+      </p:grpSp>
     </p:spTree>
     <p:extLst>
       <p:ext uri="{BB962C8B-B14F-4D97-AF65-F5344CB8AC3E}">

--- a/美术作品.pptx
+++ b/美术作品.pptx
@@ -5,7 +5,7 @@
     <p:sldMasterId id="2147483648" r:id="rId1"/>
   </p:sldMasterIdLst>
   <p:notesMasterIdLst>
-    <p:notesMasterId r:id="rId12"/>
+    <p:notesMasterId r:id="rId13"/>
   </p:notesMasterIdLst>
   <p:sldIdLst>
     <p:sldId id="256" r:id="rId2"/>
@@ -18,6 +18,7 @@
     <p:sldId id="263" r:id="rId9"/>
     <p:sldId id="264" r:id="rId10"/>
     <p:sldId id="265" r:id="rId11"/>
+    <p:sldId id="267" r:id="rId12"/>
   </p:sldIdLst>
   <p:sldSz cx="12192000" cy="6858000"/>
   <p:notesSz cx="6858000" cy="9144000"/>
@@ -422,7 +423,7 @@
           <a:p>
             <a:fld id="{1F5AD5B5-6CBB-4946-BB99-91A038EC83D0}" type="datetimeFigureOut">
               <a:rPr lang="zh-CN" altLang="en-US" smtClean="0"/>
-              <a:t>2026/3/18</a:t>
+              <a:t>2026/4/3</a:t>
             </a:fld>
             <a:endParaRPr lang="zh-CN" altLang="en-US"/>
           </a:p>
@@ -910,6 +911,90 @@
       </p:grpSpPr>
       <p:sp>
         <p:nvSpPr>
+          <p:cNvPr id="2" name="幻灯片图像占位符 1"/>
+          <p:cNvSpPr>
+            <a:spLocks noGrp="1" noRot="1" noChangeAspect="1"/>
+          </p:cNvSpPr>
+          <p:nvPr>
+            <p:ph type="sldImg"/>
+          </p:nvPr>
+        </p:nvSpPr>
+        <p:spPr/>
+      </p:sp>
+      <p:sp>
+        <p:nvSpPr>
+          <p:cNvPr id="3" name="备注占位符 2"/>
+          <p:cNvSpPr>
+            <a:spLocks noGrp="1"/>
+          </p:cNvSpPr>
+          <p:nvPr>
+            <p:ph type="body" idx="1"/>
+          </p:nvPr>
+        </p:nvSpPr>
+        <p:spPr/>
+        <p:txBody>
+          <a:bodyPr/>
+          <a:lstStyle/>
+          <a:p>
+            <a:endParaRPr lang="zh-CN" altLang="en-US" dirty="0"/>
+          </a:p>
+        </p:txBody>
+      </p:sp>
+      <p:sp>
+        <p:nvSpPr>
+          <p:cNvPr id="4" name="灯片编号占位符 3"/>
+          <p:cNvSpPr>
+            <a:spLocks noGrp="1"/>
+          </p:cNvSpPr>
+          <p:nvPr>
+            <p:ph type="sldNum" sz="quarter" idx="5"/>
+          </p:nvPr>
+        </p:nvSpPr>
+        <p:spPr/>
+        <p:txBody>
+          <a:bodyPr/>
+          <a:lstStyle/>
+          <a:p>
+            <a:fld id="{ED9D1D49-895D-4F5A-ABF8-27223E77D4BA}" type="slidenum">
+              <a:rPr lang="zh-CN" altLang="en-US" smtClean="0"/>
+              <a:t>9</a:t>
+            </a:fld>
+            <a:endParaRPr lang="zh-CN" altLang="en-US"/>
+          </a:p>
+        </p:txBody>
+      </p:sp>
+    </p:spTree>
+    <p:extLst>
+      <p:ext uri="{BB962C8B-B14F-4D97-AF65-F5344CB8AC3E}">
+        <p14:creationId xmlns:p14="http://schemas.microsoft.com/office/powerpoint/2010/main" val="3279917772"/>
+      </p:ext>
+    </p:extLst>
+  </p:cSld>
+  <p:clrMapOvr>
+    <a:masterClrMapping/>
+  </p:clrMapOvr>
+</p:notes>
+</file>
+
+<file path=ppt/notesSlides/notesSlide4.xml><?xml version="1.0" encoding="utf-8"?>
+<p:notes xmlns:a="http://schemas.openxmlformats.org/drawingml/2006/main" xmlns:r="http://schemas.openxmlformats.org/officeDocument/2006/relationships" xmlns:p="http://schemas.openxmlformats.org/presentationml/2006/main">
+  <p:cSld>
+    <p:spTree>
+      <p:nvGrpSpPr>
+        <p:cNvPr id="1" name=""/>
+        <p:cNvGrpSpPr/>
+        <p:nvPr/>
+      </p:nvGrpSpPr>
+      <p:grpSpPr>
+        <a:xfrm>
+          <a:off x="0" y="0"/>
+          <a:ext cx="0" cy="0"/>
+          <a:chOff x="0" y="0"/>
+          <a:chExt cx="0" cy="0"/>
+        </a:xfrm>
+      </p:grpSpPr>
+      <p:sp>
+        <p:nvSpPr>
           <p:cNvPr id="2" name="Slide Image Placeholder 1"/>
           <p:cNvSpPr>
             <a:spLocks noGrp="1" noRot="1" noChangeAspect="1"/>
@@ -961,6 +1046,94 @@
             <a:fld id="{F7021451-1387-4CA6-816F-3879F97B5CBC}" type="slidenum">
               <a:rPr lang="en-US"/>
               <a:t>10</a:t>
+            </a:fld>
+            <a:endParaRPr lang="en-US"/>
+          </a:p>
+        </p:txBody>
+      </p:sp>
+    </p:spTree>
+    <p:extLst>
+      <p:ext uri="{BB962C8B-B14F-4D97-AF65-F5344CB8AC3E}">
+        <p14:creationId xmlns:p14="http://schemas.microsoft.com/office/powerpoint/2010/main" val="1024086991"/>
+      </p:ext>
+    </p:extLst>
+  </p:cSld>
+  <p:clrMapOvr>
+    <a:masterClrMapping/>
+  </p:clrMapOvr>
+</p:notes>
+</file>
+
+<file path=ppt/notesSlides/notesSlide5.xml><?xml version="1.0" encoding="utf-8"?>
+<p:notes xmlns:a="http://schemas.openxmlformats.org/drawingml/2006/main" xmlns:r="http://schemas.openxmlformats.org/officeDocument/2006/relationships" xmlns:p="http://schemas.openxmlformats.org/presentationml/2006/main">
+  <p:cSld>
+    <p:spTree>
+      <p:nvGrpSpPr>
+        <p:cNvPr id="1" name=""/>
+        <p:cNvGrpSpPr/>
+        <p:nvPr/>
+      </p:nvGrpSpPr>
+      <p:grpSpPr>
+        <a:xfrm>
+          <a:off x="0" y="0"/>
+          <a:ext cx="0" cy="0"/>
+          <a:chOff x="0" y="0"/>
+          <a:chExt cx="0" cy="0"/>
+        </a:xfrm>
+      </p:grpSpPr>
+      <p:sp>
+        <p:nvSpPr>
+          <p:cNvPr id="2" name="Slide Image Placeholder 1"/>
+          <p:cNvSpPr>
+            <a:spLocks noGrp="1" noRot="1" noChangeAspect="1"/>
+          </p:cNvSpPr>
+          <p:nvPr>
+            <p:ph type="sldImg"/>
+          </p:nvPr>
+        </p:nvSpPr>
+        <p:spPr/>
+      </p:sp>
+      <p:sp>
+        <p:nvSpPr>
+          <p:cNvPr id="3" name="Notes Placeholder 2"/>
+          <p:cNvSpPr>
+            <a:spLocks noGrp="1"/>
+          </p:cNvSpPr>
+          <p:nvPr>
+            <p:ph type="body" idx="1"/>
+          </p:nvPr>
+        </p:nvSpPr>
+        <p:spPr/>
+        <p:txBody>
+          <a:bodyPr/>
+          <a:lstStyle/>
+          <a:p>
+            <a:r>
+              <a:rPr lang="zh-CN" altLang="en-US"/>
+              <a:t>弃用</a:t>
+            </a:r>
+            <a:endParaRPr lang="en-US" dirty="0"/>
+          </a:p>
+        </p:txBody>
+      </p:sp>
+      <p:sp>
+        <p:nvSpPr>
+          <p:cNvPr id="4" name="Slide Number Placeholder 3"/>
+          <p:cNvSpPr>
+            <a:spLocks noGrp="1"/>
+          </p:cNvSpPr>
+          <p:nvPr>
+            <p:ph type="sldNum" sz="quarter" idx="10"/>
+          </p:nvPr>
+        </p:nvSpPr>
+        <p:spPr/>
+        <p:txBody>
+          <a:bodyPr/>
+          <a:lstStyle/>
+          <a:p>
+            <a:fld id="{F7021451-1387-4CA6-816F-3879F97B5CBC}" type="slidenum">
+              <a:rPr lang="en-US"/>
+              <a:t>11</a:t>
             </a:fld>
             <a:endParaRPr lang="en-US"/>
           </a:p>
@@ -1108,7 +1281,7 @@
           <a:p>
             <a:fld id="{D997B5FA-0921-464F-AAE1-844C04324D75}" type="datetimeFigureOut">
               <a:rPr lang="zh-CN" altLang="en-US" smtClean="0"/>
-              <a:t>2026/3/18</a:t>
+              <a:t>2026/4/3</a:t>
             </a:fld>
             <a:endParaRPr lang="zh-CN" altLang="en-US"/>
           </a:p>
@@ -1271,7 +1444,7 @@
           <a:p>
             <a:fld id="{D997B5FA-0921-464F-AAE1-844C04324D75}" type="datetimeFigureOut">
               <a:rPr lang="zh-CN" altLang="en-US" smtClean="0"/>
-              <a:t>2026/3/18</a:t>
+              <a:t>2026/4/3</a:t>
             </a:fld>
             <a:endParaRPr lang="zh-CN" altLang="en-US"/>
           </a:p>
@@ -1444,7 +1617,7 @@
           <a:p>
             <a:fld id="{D997B5FA-0921-464F-AAE1-844C04324D75}" type="datetimeFigureOut">
               <a:rPr lang="zh-CN" altLang="en-US" smtClean="0"/>
-              <a:t>2026/3/18</a:t>
+              <a:t>2026/4/3</a:t>
             </a:fld>
             <a:endParaRPr lang="zh-CN" altLang="en-US"/>
           </a:p>
@@ -1642,7 +1815,7 @@
           <a:p>
             <a:fld id="{D997B5FA-0921-464F-AAE1-844C04324D75}" type="datetimeFigureOut">
               <a:rPr lang="zh-CN" altLang="en-US" smtClean="0"/>
-              <a:t>2026/3/18</a:t>
+              <a:t>2026/4/3</a:t>
             </a:fld>
             <a:endParaRPr lang="zh-CN" altLang="en-US"/>
           </a:p>
@@ -1882,7 +2055,7 @@
           <a:p>
             <a:fld id="{D997B5FA-0921-464F-AAE1-844C04324D75}" type="datetimeFigureOut">
               <a:rPr lang="zh-CN" altLang="en-US" smtClean="0"/>
-              <a:t>2026/3/18</a:t>
+              <a:t>2026/4/3</a:t>
             </a:fld>
             <a:endParaRPr lang="zh-CN" altLang="en-US"/>
           </a:p>
@@ -2106,7 +2279,7 @@
           <a:p>
             <a:fld id="{D997B5FA-0921-464F-AAE1-844C04324D75}" type="datetimeFigureOut">
               <a:rPr lang="zh-CN" altLang="en-US" smtClean="0"/>
-              <a:t>2026/3/18</a:t>
+              <a:t>2026/4/3</a:t>
             </a:fld>
             <a:endParaRPr lang="zh-CN" altLang="en-US"/>
           </a:p>
@@ -2465,7 +2638,7 @@
           <a:p>
             <a:fld id="{D997B5FA-0921-464F-AAE1-844C04324D75}" type="datetimeFigureOut">
               <a:rPr lang="zh-CN" altLang="en-US" smtClean="0"/>
-              <a:t>2026/3/18</a:t>
+              <a:t>2026/4/3</a:t>
             </a:fld>
             <a:endParaRPr lang="zh-CN" altLang="en-US"/>
           </a:p>
@@ -2577,7 +2750,7 @@
           <a:p>
             <a:fld id="{D997B5FA-0921-464F-AAE1-844C04324D75}" type="datetimeFigureOut">
               <a:rPr lang="zh-CN" altLang="en-US" smtClean="0"/>
-              <a:t>2026/3/18</a:t>
+              <a:t>2026/4/3</a:t>
             </a:fld>
             <a:endParaRPr lang="zh-CN" altLang="en-US"/>
           </a:p>
@@ -2667,7 +2840,7 @@
           <a:p>
             <a:fld id="{D997B5FA-0921-464F-AAE1-844C04324D75}" type="datetimeFigureOut">
               <a:rPr lang="zh-CN" altLang="en-US" smtClean="0"/>
-              <a:t>2026/3/18</a:t>
+              <a:t>2026/4/3</a:t>
             </a:fld>
             <a:endParaRPr lang="zh-CN" altLang="en-US"/>
           </a:p>
@@ -2937,7 +3110,7 @@
           <a:p>
             <a:fld id="{D997B5FA-0921-464F-AAE1-844C04324D75}" type="datetimeFigureOut">
               <a:rPr lang="zh-CN" altLang="en-US" smtClean="0"/>
-              <a:t>2026/3/18</a:t>
+              <a:t>2026/4/3</a:t>
             </a:fld>
             <a:endParaRPr lang="zh-CN" altLang="en-US"/>
           </a:p>
@@ -3184,7 +3357,7 @@
           <a:p>
             <a:fld id="{D997B5FA-0921-464F-AAE1-844C04324D75}" type="datetimeFigureOut">
               <a:rPr lang="zh-CN" altLang="en-US" smtClean="0"/>
-              <a:t>2026/3/18</a:t>
+              <a:t>2026/4/3</a:t>
             </a:fld>
             <a:endParaRPr lang="zh-CN" altLang="en-US"/>
           </a:p>
@@ -3390,7 +3563,7 @@
           <a:p>
             <a:fld id="{D997B5FA-0921-464F-AAE1-844C04324D75}" type="datetimeFigureOut">
               <a:rPr lang="zh-CN" altLang="en-US" smtClean="0"/>
-              <a:t>2026/3/18</a:t>
+              <a:t>2026/4/3</a:t>
             </a:fld>
             <a:endParaRPr lang="zh-CN" altLang="en-US"/>
           </a:p>
@@ -6792,6 +6965,1309 @@
           </a:p>
           <a:p>
             <a:endParaRPr lang="zh-CN" altLang="en-US" dirty="0"/>
+          </a:p>
+        </p:txBody>
+      </p:sp>
+    </p:spTree>
+  </p:cSld>
+  <p:clrMapOvr>
+    <a:masterClrMapping/>
+  </p:clrMapOvr>
+</p:sld>
+</file>
+
+<file path=ppt/slides/slide11.xml><?xml version="1.0" encoding="utf-8"?>
+<p:sld xmlns:a="http://schemas.openxmlformats.org/drawingml/2006/main" xmlns:r="http://schemas.openxmlformats.org/officeDocument/2006/relationships" xmlns:p="http://schemas.openxmlformats.org/presentationml/2006/main">
+  <p:cSld>
+    <p:spTree>
+      <p:nvGrpSpPr>
+        <p:cNvPr id="1" name=""/>
+        <p:cNvGrpSpPr/>
+        <p:nvPr/>
+      </p:nvGrpSpPr>
+      <p:grpSpPr>
+        <a:xfrm>
+          <a:off x="0" y="0"/>
+          <a:ext cx="0" cy="0"/>
+          <a:chOff x="0" y="0"/>
+          <a:chExt cx="0" cy="0"/>
+        </a:xfrm>
+      </p:grpSpPr>
+      <p:sp>
+        <p:nvSpPr>
+          <p:cNvPr id="4" name="Text 2"/>
+          <p:cNvSpPr/>
+          <p:nvPr/>
+        </p:nvSpPr>
+        <p:spPr>
+          <a:xfrm>
+            <a:off x="1396999" y="854964"/>
+            <a:ext cx="6841066" cy="996696"/>
+          </a:xfrm>
+          <a:prstGeom prst="rect">
+            <a:avLst/>
+          </a:prstGeom>
+          <a:solidFill>
+            <a:schemeClr val="tx2">
+              <a:lumMod val="20000"/>
+              <a:lumOff val="80000"/>
+            </a:schemeClr>
+          </a:solidFill>
+          <a:ln>
+            <a:solidFill>
+              <a:srgbClr val="4F7CCF"/>
+            </a:solidFill>
+          </a:ln>
+        </p:spPr>
+        <p:txBody>
+          <a:bodyPr wrap="square" lIns="0" tIns="0" rIns="0" bIns="0" rtlCol="0" anchor="ctr"/>
+          <a:lstStyle/>
+          <a:p>
+            <a:pPr marL="0" indent="0" algn="ctr">
+              <a:buNone/>
+            </a:pPr>
+            <a:endParaRPr lang="en-US" sz="1050" dirty="0"/>
+          </a:p>
+        </p:txBody>
+      </p:sp>
+      <p:sp>
+        <p:nvSpPr>
+          <p:cNvPr id="2" name="Text 0"/>
+          <p:cNvSpPr/>
+          <p:nvPr/>
+        </p:nvSpPr>
+        <p:spPr>
+          <a:xfrm>
+            <a:off x="502920" y="164592"/>
+            <a:ext cx="7315200" cy="292608"/>
+          </a:xfrm>
+          <a:prstGeom prst="rect">
+            <a:avLst/>
+          </a:prstGeom>
+          <a:noFill/>
+          <a:ln/>
+        </p:spPr>
+        <p:txBody>
+          <a:bodyPr wrap="square" lIns="0" tIns="0" rIns="0" bIns="0" rtlCol="0" anchor="ctr"/>
+          <a:lstStyle/>
+          <a:p>
+            <a:pPr marL="0" indent="0">
+              <a:buNone/>
+            </a:pPr>
+            <a:r>
+              <a:rPr lang="en-US" sz="2200" b="1" dirty="0">
+                <a:solidFill>
+                  <a:srgbClr val="1F2937"/>
+                </a:solidFill>
+              </a:rPr>
+              <a:t>SpecSW 原型系统总体架构</a:t>
+            </a:r>
+            <a:endParaRPr lang="en-US" sz="2200" dirty="0"/>
+          </a:p>
+        </p:txBody>
+      </p:sp>
+      <p:sp>
+        <p:nvSpPr>
+          <p:cNvPr id="3" name="Text 1"/>
+          <p:cNvSpPr/>
+          <p:nvPr/>
+        </p:nvSpPr>
+        <p:spPr>
+          <a:xfrm>
+            <a:off x="521208" y="512064"/>
+            <a:ext cx="4754880" cy="164592"/>
+          </a:xfrm>
+          <a:prstGeom prst="rect">
+            <a:avLst/>
+          </a:prstGeom>
+          <a:noFill/>
+          <a:ln/>
+        </p:spPr>
+        <p:txBody>
+          <a:bodyPr wrap="square" lIns="0" tIns="0" rIns="0" bIns="0" rtlCol="0" anchor="ctr"/>
+          <a:lstStyle/>
+          <a:p>
+            <a:pPr marL="0" indent="0">
+              <a:buNone/>
+            </a:pPr>
+            <a:r>
+              <a:rPr lang="en-US" sz="950" dirty="0">
+                <a:solidFill>
+                  <a:srgbClr val="6B7280"/>
+                </a:solidFill>
+              </a:rPr>
+              <a:t>用户接口层、投机控制层与平台执行层</a:t>
+            </a:r>
+            <a:endParaRPr lang="en-US" sz="950" dirty="0"/>
+          </a:p>
+        </p:txBody>
+      </p:sp>
+      <p:sp>
+        <p:nvSpPr>
+          <p:cNvPr id="6" name="Text 4"/>
+          <p:cNvSpPr/>
+          <p:nvPr/>
+        </p:nvSpPr>
+        <p:spPr>
+          <a:xfrm>
+            <a:off x="1399031" y="2391155"/>
+            <a:ext cx="6839031" cy="1687053"/>
+          </a:xfrm>
+          <a:prstGeom prst="rect">
+            <a:avLst/>
+          </a:prstGeom>
+          <a:solidFill>
+            <a:schemeClr val="accent3">
+              <a:lumMod val="20000"/>
+              <a:lumOff val="80000"/>
+            </a:schemeClr>
+          </a:solidFill>
+          <a:ln>
+            <a:solidFill>
+              <a:srgbClr val="D6A22D"/>
+            </a:solidFill>
+          </a:ln>
+        </p:spPr>
+        <p:txBody>
+          <a:bodyPr wrap="square" lIns="0" tIns="0" rIns="0" bIns="0" rtlCol="0" anchor="ctr"/>
+          <a:lstStyle/>
+          <a:p>
+            <a:pPr marL="0" indent="0" algn="ctr">
+              <a:buNone/>
+            </a:pPr>
+            <a:r>
+              <a:rPr lang="en-US" sz="1050" b="1" dirty="0">
+                <a:solidFill>
+                  <a:srgbClr val="FFFFFF"/>
+                </a:solidFill>
+              </a:rPr>
+              <a:t>投机控制层</a:t>
+            </a:r>
+            <a:endParaRPr lang="en-US" sz="1050" dirty="0"/>
+          </a:p>
+        </p:txBody>
+      </p:sp>
+      <p:sp>
+        <p:nvSpPr>
+          <p:cNvPr id="8" name="Text 6"/>
+          <p:cNvSpPr/>
+          <p:nvPr/>
+        </p:nvSpPr>
+        <p:spPr>
+          <a:xfrm>
+            <a:off x="502920" y="4828032"/>
+            <a:ext cx="1188720" cy="310896"/>
+          </a:xfrm>
+          <a:prstGeom prst="rect">
+            <a:avLst/>
+          </a:prstGeom>
+          <a:solidFill>
+            <a:srgbClr val="53A36B"/>
+          </a:solidFill>
+          <a:ln>
+            <a:solidFill>
+              <a:srgbClr val="53A36B"/>
+            </a:solidFill>
+          </a:ln>
+        </p:spPr>
+        <p:txBody>
+          <a:bodyPr wrap="square" lIns="0" tIns="0" rIns="0" bIns="0" rtlCol="0" anchor="ctr"/>
+          <a:lstStyle/>
+          <a:p>
+            <a:pPr marL="0" indent="0" algn="ctr">
+              <a:buNone/>
+            </a:pPr>
+            <a:r>
+              <a:rPr lang="en-US" sz="1050" b="1" dirty="0">
+                <a:solidFill>
+                  <a:srgbClr val="FFFFFF"/>
+                </a:solidFill>
+              </a:rPr>
+              <a:t>平台执行层</a:t>
+            </a:r>
+            <a:endParaRPr lang="en-US" sz="1050" dirty="0"/>
+          </a:p>
+        </p:txBody>
+      </p:sp>
+      <p:sp>
+        <p:nvSpPr>
+          <p:cNvPr id="10" name="Shape 8"/>
+          <p:cNvSpPr/>
+          <p:nvPr/>
+        </p:nvSpPr>
+        <p:spPr>
+          <a:xfrm>
+            <a:off x="1691640" y="1197864"/>
+            <a:ext cx="2621279" cy="457200"/>
+          </a:xfrm>
+          <a:prstGeom prst="roundRect">
+            <a:avLst>
+              <a:gd name="adj" fmla="val 8000"/>
+            </a:avLst>
+          </a:prstGeom>
+          <a:solidFill>
+            <a:srgbClr val="FFFFFF"/>
+          </a:solidFill>
+          <a:ln w="12700">
+            <a:solidFill>
+              <a:schemeClr val="accent1"/>
+            </a:solidFill>
+            <a:prstDash val="solid"/>
+          </a:ln>
+          <a:effectLst>
+            <a:outerShdw blurRad="12700" dist="6350" dir="2700000" algn="bl" rotWithShape="0">
+              <a:srgbClr val="000000">
+                <a:alpha val="8000"/>
+              </a:srgbClr>
+            </a:outerShdw>
+          </a:effectLst>
+        </p:spPr>
+      </p:sp>
+      <p:sp>
+        <p:nvSpPr>
+          <p:cNvPr id="11" name="Text 9"/>
+          <p:cNvSpPr/>
+          <p:nvPr/>
+        </p:nvSpPr>
+        <p:spPr>
+          <a:xfrm>
+            <a:off x="1783757" y="1275588"/>
+            <a:ext cx="2446527" cy="182880"/>
+          </a:xfrm>
+          <a:prstGeom prst="rect">
+            <a:avLst/>
+          </a:prstGeom>
+          <a:noFill/>
+          <a:ln/>
+        </p:spPr>
+        <p:txBody>
+          <a:bodyPr wrap="square" lIns="0" tIns="0" rIns="0" bIns="0" rtlCol="0" anchor="ctr"/>
+          <a:lstStyle/>
+          <a:p>
+            <a:pPr marL="0" indent="0" algn="ctr">
+              <a:buNone/>
+            </a:pPr>
+            <a:r>
+              <a:rPr lang="en-US" sz="1150" b="1" dirty="0">
+                <a:solidFill>
+                  <a:srgbClr val="111827"/>
+                </a:solidFill>
+              </a:rPr>
+              <a:t>工作流定义与运行配置</a:t>
+            </a:r>
+            <a:endParaRPr lang="en-US" sz="1150" dirty="0"/>
+          </a:p>
+        </p:txBody>
+      </p:sp>
+      <p:sp>
+        <p:nvSpPr>
+          <p:cNvPr id="12" name="Text 10"/>
+          <p:cNvSpPr/>
+          <p:nvPr/>
+        </p:nvSpPr>
+        <p:spPr>
+          <a:xfrm>
+            <a:off x="1802045" y="1513332"/>
+            <a:ext cx="2424683" cy="54864"/>
+          </a:xfrm>
+          <a:prstGeom prst="rect">
+            <a:avLst/>
+          </a:prstGeom>
+          <a:noFill/>
+          <a:ln/>
+        </p:spPr>
+        <p:txBody>
+          <a:bodyPr wrap="square" lIns="254" tIns="254" rIns="254" bIns="254" rtlCol="0" anchor="ctr"/>
+          <a:lstStyle/>
+          <a:p>
+            <a:pPr marL="0" indent="0" algn="ctr">
+              <a:buNone/>
+            </a:pPr>
+            <a:r>
+              <a:rPr lang="en-US" sz="920" dirty="0">
+                <a:solidFill>
+                  <a:srgbClr val="4B5563"/>
+                </a:solidFill>
+              </a:rPr>
+              <a:t>工作流结构、节点关系、运行参数</a:t>
+            </a:r>
+            <a:endParaRPr lang="en-US" sz="920" dirty="0"/>
+          </a:p>
+        </p:txBody>
+      </p:sp>
+      <p:sp>
+        <p:nvSpPr>
+          <p:cNvPr id="16" name="Shape 14"/>
+          <p:cNvSpPr/>
+          <p:nvPr/>
+        </p:nvSpPr>
+        <p:spPr>
+          <a:xfrm>
+            <a:off x="1699855" y="2743200"/>
+            <a:ext cx="1668780" cy="1170432"/>
+          </a:xfrm>
+          <a:prstGeom prst="roundRect">
+            <a:avLst>
+              <a:gd name="adj" fmla="val 3125"/>
+            </a:avLst>
+          </a:prstGeom>
+          <a:solidFill>
+            <a:srgbClr val="FFFFFF"/>
+          </a:solidFill>
+          <a:ln w="12700">
+            <a:solidFill>
+              <a:srgbClr val="D4D9E3"/>
+            </a:solidFill>
+            <a:prstDash val="solid"/>
+          </a:ln>
+          <a:effectLst>
+            <a:outerShdw blurRad="12700" dist="6350" dir="2700000" algn="bl" rotWithShape="0">
+              <a:srgbClr val="000000">
+                <a:alpha val="8000"/>
+              </a:srgbClr>
+            </a:outerShdw>
+          </a:effectLst>
+        </p:spPr>
+      </p:sp>
+      <p:sp>
+        <p:nvSpPr>
+          <p:cNvPr id="17" name="Text 15"/>
+          <p:cNvSpPr/>
+          <p:nvPr/>
+        </p:nvSpPr>
+        <p:spPr>
+          <a:xfrm>
+            <a:off x="1722544" y="2814561"/>
+            <a:ext cx="1623401" cy="181703"/>
+          </a:xfrm>
+          <a:prstGeom prst="rect">
+            <a:avLst/>
+          </a:prstGeom>
+          <a:noFill/>
+          <a:ln/>
+        </p:spPr>
+        <p:txBody>
+          <a:bodyPr wrap="square" lIns="0" tIns="0" rIns="0" bIns="0" rtlCol="0" anchor="ctr"/>
+          <a:lstStyle/>
+          <a:p>
+            <a:pPr marL="0" indent="0" algn="ctr">
+              <a:buNone/>
+            </a:pPr>
+            <a:r>
+              <a:rPr lang="en-US" sz="1150" b="1" dirty="0">
+                <a:solidFill>
+                  <a:srgbClr val="111827"/>
+                </a:solidFill>
+              </a:rPr>
+              <a:t>工作流状态管理</a:t>
+            </a:r>
+            <a:endParaRPr lang="en-US" sz="1150" dirty="0"/>
+          </a:p>
+        </p:txBody>
+      </p:sp>
+      <p:sp>
+        <p:nvSpPr>
+          <p:cNvPr id="18" name="Text 16"/>
+          <p:cNvSpPr/>
+          <p:nvPr/>
+        </p:nvSpPr>
+        <p:spPr>
+          <a:xfrm>
+            <a:off x="1986281" y="3098044"/>
+            <a:ext cx="1134625" cy="768096"/>
+          </a:xfrm>
+          <a:prstGeom prst="rect">
+            <a:avLst/>
+          </a:prstGeom>
+          <a:noFill/>
+          <a:ln/>
+        </p:spPr>
+        <p:txBody>
+          <a:bodyPr wrap="square" lIns="254" tIns="254" rIns="254" bIns="254" rtlCol="0" anchor="ctr"/>
+          <a:lstStyle/>
+          <a:p>
+            <a:pPr marL="0" indent="0" algn="ctr">
+              <a:buNone/>
+            </a:pPr>
+            <a:r>
+              <a:rPr lang="en-US" sz="920" dirty="0">
+                <a:solidFill>
+                  <a:srgbClr val="4B5563"/>
+                </a:solidFill>
+              </a:rPr>
+              <a:t>维护工作流运行状态</a:t>
+            </a:r>
+            <a:endParaRPr lang="en-US" sz="920" dirty="0"/>
+          </a:p>
+          <a:p>
+            <a:pPr marL="0" indent="0" algn="ctr">
+              <a:buNone/>
+            </a:pPr>
+            <a:r>
+              <a:rPr lang="en-US" sz="920" dirty="0">
+                <a:solidFill>
+                  <a:srgbClr val="4B5563"/>
+                </a:solidFill>
+              </a:rPr>
+              <a:t>节点推进关系</a:t>
+            </a:r>
+            <a:endParaRPr lang="en-US" sz="920" dirty="0"/>
+          </a:p>
+          <a:p>
+            <a:pPr marL="0" indent="0" algn="ctr">
+              <a:buNone/>
+            </a:pPr>
+            <a:r>
+              <a:rPr lang="en-US" sz="920" dirty="0">
+                <a:solidFill>
+                  <a:srgbClr val="4B5563"/>
+                </a:solidFill>
+              </a:rPr>
+              <a:t>就绪与后继信息</a:t>
+            </a:r>
+            <a:endParaRPr lang="en-US" sz="920" dirty="0"/>
+          </a:p>
+        </p:txBody>
+      </p:sp>
+      <p:sp>
+        <p:nvSpPr>
+          <p:cNvPr id="19" name="Shape 17"/>
+          <p:cNvSpPr/>
+          <p:nvPr/>
+        </p:nvSpPr>
+        <p:spPr>
+          <a:xfrm>
+            <a:off x="4590288" y="2743200"/>
+            <a:ext cx="3017520" cy="1316736"/>
+          </a:xfrm>
+          <a:prstGeom prst="roundRect">
+            <a:avLst>
+              <a:gd name="adj" fmla="val 2778"/>
+            </a:avLst>
+          </a:prstGeom>
+          <a:solidFill>
+            <a:srgbClr val="FFFFFF"/>
+          </a:solidFill>
+          <a:ln w="12700">
+            <a:solidFill>
+              <a:srgbClr val="D4D9E3"/>
+            </a:solidFill>
+            <a:prstDash val="solid"/>
+          </a:ln>
+          <a:effectLst>
+            <a:outerShdw blurRad="12700" dist="6350" dir="2700000" algn="bl" rotWithShape="0">
+              <a:srgbClr val="000000">
+                <a:alpha val="8000"/>
+              </a:srgbClr>
+            </a:outerShdw>
+          </a:effectLst>
+        </p:spPr>
+      </p:sp>
+      <p:sp>
+        <p:nvSpPr>
+          <p:cNvPr id="20" name="Text 18"/>
+          <p:cNvSpPr/>
+          <p:nvPr/>
+        </p:nvSpPr>
+        <p:spPr>
+          <a:xfrm>
+            <a:off x="4736592" y="2834640"/>
+            <a:ext cx="2724912" cy="182880"/>
+          </a:xfrm>
+          <a:prstGeom prst="rect">
+            <a:avLst/>
+          </a:prstGeom>
+          <a:noFill/>
+          <a:ln/>
+        </p:spPr>
+        <p:txBody>
+          <a:bodyPr wrap="square" lIns="0" tIns="0" rIns="0" bIns="0" rtlCol="0" anchor="ctr"/>
+          <a:lstStyle/>
+          <a:p>
+            <a:pPr marL="0" indent="0" algn="ctr">
+              <a:buNone/>
+            </a:pPr>
+            <a:r>
+              <a:rPr lang="en-US" sz="1150" b="1" dirty="0">
+                <a:solidFill>
+                  <a:srgbClr val="111827"/>
+                </a:solidFill>
+              </a:rPr>
+              <a:t>投机执行控制器</a:t>
+            </a:r>
+            <a:endParaRPr lang="en-US" sz="1150" dirty="0"/>
+          </a:p>
+        </p:txBody>
+      </p:sp>
+      <p:sp>
+        <p:nvSpPr>
+          <p:cNvPr id="21" name="Text 19"/>
+          <p:cNvSpPr/>
+          <p:nvPr/>
+        </p:nvSpPr>
+        <p:spPr>
+          <a:xfrm>
+            <a:off x="4754880" y="3072384"/>
+            <a:ext cx="2688336" cy="914400"/>
+          </a:xfrm>
+          <a:prstGeom prst="rect">
+            <a:avLst/>
+          </a:prstGeom>
+          <a:noFill/>
+          <a:ln/>
+        </p:spPr>
+        <p:txBody>
+          <a:bodyPr wrap="square" lIns="254" tIns="254" rIns="254" bIns="254" rtlCol="0" anchor="ctr"/>
+          <a:lstStyle/>
+          <a:p>
+            <a:pPr marL="0" indent="0" algn="ctr">
+              <a:buNone/>
+            </a:pPr>
+            <a:r>
+              <a:rPr lang="en-US" sz="920" dirty="0">
+                <a:solidFill>
+                  <a:srgbClr val="4B5563"/>
+                </a:solidFill>
+              </a:rPr>
+              <a:t>组织函数推进</a:t>
+            </a:r>
+            <a:endParaRPr lang="en-US" sz="920" dirty="0"/>
+          </a:p>
+          <a:p>
+            <a:pPr marL="0" indent="0" algn="ctr">
+              <a:buNone/>
+            </a:pPr>
+            <a:r>
+              <a:rPr lang="en-US" sz="920" dirty="0">
+                <a:solidFill>
+                  <a:srgbClr val="4B5563"/>
+                </a:solidFill>
+              </a:rPr>
+              <a:t>触发投机路径</a:t>
+            </a:r>
+            <a:endParaRPr lang="en-US" sz="920" dirty="0"/>
+          </a:p>
+          <a:p>
+            <a:pPr marL="0" indent="0" algn="ctr">
+              <a:buNone/>
+            </a:pPr>
+            <a:r>
+              <a:rPr lang="en-US" sz="920" dirty="0">
+                <a:solidFill>
+                  <a:srgbClr val="4B5563"/>
+                </a:solidFill>
+              </a:rPr>
+              <a:t>提交 / 撤销结果</a:t>
+            </a:r>
+            <a:endParaRPr lang="en-US" sz="920" dirty="0"/>
+          </a:p>
+        </p:txBody>
+      </p:sp>
+      <p:sp>
+        <p:nvSpPr>
+          <p:cNvPr id="22" name="Shape 20"/>
+          <p:cNvSpPr/>
+          <p:nvPr/>
+        </p:nvSpPr>
+        <p:spPr>
+          <a:xfrm>
+            <a:off x="8302752" y="2816352"/>
+            <a:ext cx="3017520" cy="1170432"/>
+          </a:xfrm>
+          <a:prstGeom prst="roundRect">
+            <a:avLst>
+              <a:gd name="adj" fmla="val 3125"/>
+            </a:avLst>
+          </a:prstGeom>
+          <a:solidFill>
+            <a:srgbClr val="FFFFFF"/>
+          </a:solidFill>
+          <a:ln w="12700">
+            <a:solidFill>
+              <a:srgbClr val="D4D9E3"/>
+            </a:solidFill>
+            <a:prstDash val="solid"/>
+          </a:ln>
+          <a:effectLst>
+            <a:outerShdw blurRad="12700" dist="6350" dir="2700000" algn="bl" rotWithShape="0">
+              <a:srgbClr val="000000">
+                <a:alpha val="8000"/>
+              </a:srgbClr>
+            </a:outerShdw>
+          </a:effectLst>
+        </p:spPr>
+      </p:sp>
+      <p:sp>
+        <p:nvSpPr>
+          <p:cNvPr id="23" name="Text 21"/>
+          <p:cNvSpPr/>
+          <p:nvPr/>
+        </p:nvSpPr>
+        <p:spPr>
+          <a:xfrm>
+            <a:off x="8449056" y="2907792"/>
+            <a:ext cx="2724912" cy="182880"/>
+          </a:xfrm>
+          <a:prstGeom prst="rect">
+            <a:avLst/>
+          </a:prstGeom>
+          <a:noFill/>
+          <a:ln/>
+        </p:spPr>
+        <p:txBody>
+          <a:bodyPr wrap="square" lIns="0" tIns="0" rIns="0" bIns="0" rtlCol="0" anchor="ctr"/>
+          <a:lstStyle/>
+          <a:p>
+            <a:pPr marL="0" indent="0" algn="ctr">
+              <a:buNone/>
+            </a:pPr>
+            <a:r>
+              <a:rPr lang="en-US" sz="1150" b="1" dirty="0">
+                <a:solidFill>
+                  <a:srgbClr val="111827"/>
+                </a:solidFill>
+              </a:rPr>
+              <a:t>分支预测与运行记录</a:t>
+            </a:r>
+            <a:endParaRPr lang="en-US" sz="1150" dirty="0"/>
+          </a:p>
+        </p:txBody>
+      </p:sp>
+      <p:sp>
+        <p:nvSpPr>
+          <p:cNvPr id="24" name="Text 22"/>
+          <p:cNvSpPr/>
+          <p:nvPr/>
+        </p:nvSpPr>
+        <p:spPr>
+          <a:xfrm>
+            <a:off x="8467344" y="3145536"/>
+            <a:ext cx="2688336" cy="768096"/>
+          </a:xfrm>
+          <a:prstGeom prst="rect">
+            <a:avLst/>
+          </a:prstGeom>
+          <a:noFill/>
+          <a:ln/>
+        </p:spPr>
+        <p:txBody>
+          <a:bodyPr wrap="square" lIns="254" tIns="254" rIns="254" bIns="254" rtlCol="0" anchor="ctr"/>
+          <a:lstStyle/>
+          <a:p>
+            <a:pPr marL="0" indent="0" algn="ctr">
+              <a:buNone/>
+            </a:pPr>
+            <a:r>
+              <a:rPr lang="en-US" sz="920" dirty="0">
+                <a:solidFill>
+                  <a:srgbClr val="4B5563"/>
+                </a:solidFill>
+              </a:rPr>
+              <a:t>分支预测</a:t>
+            </a:r>
+            <a:endParaRPr lang="en-US" sz="920" dirty="0"/>
+          </a:p>
+          <a:p>
+            <a:pPr marL="0" indent="0" algn="ctr">
+              <a:buNone/>
+            </a:pPr>
+            <a:r>
+              <a:rPr lang="en-US" sz="920" dirty="0">
+                <a:solidFill>
+                  <a:srgbClr val="4B5563"/>
+                </a:solidFill>
+              </a:rPr>
+              <a:t>模型状态更新</a:t>
+            </a:r>
+            <a:endParaRPr lang="en-US" sz="920" dirty="0"/>
+          </a:p>
+          <a:p>
+            <a:pPr marL="0" indent="0" algn="ctr">
+              <a:buNone/>
+            </a:pPr>
+            <a:r>
+              <a:rPr lang="en-US" sz="920" dirty="0">
+                <a:solidFill>
+                  <a:srgbClr val="4B5563"/>
+                </a:solidFill>
+              </a:rPr>
+              <a:t>时间线与结果汇总</a:t>
+            </a:r>
+            <a:endParaRPr lang="en-US" sz="920" dirty="0"/>
+          </a:p>
+        </p:txBody>
+      </p:sp>
+      <p:sp>
+        <p:nvSpPr>
+          <p:cNvPr id="25" name="Shape 23"/>
+          <p:cNvSpPr/>
+          <p:nvPr/>
+        </p:nvSpPr>
+        <p:spPr>
+          <a:xfrm>
+            <a:off x="1828800" y="5212080"/>
+            <a:ext cx="3474720" cy="566928"/>
+          </a:xfrm>
+          <a:prstGeom prst="roundRect">
+            <a:avLst>
+              <a:gd name="adj" fmla="val 6452"/>
+            </a:avLst>
+          </a:prstGeom>
+          <a:solidFill>
+            <a:srgbClr val="FFFFFF"/>
+          </a:solidFill>
+          <a:ln w="12700">
+            <a:solidFill>
+              <a:srgbClr val="D4D9E3"/>
+            </a:solidFill>
+            <a:prstDash val="solid"/>
+          </a:ln>
+          <a:effectLst>
+            <a:outerShdw blurRad="12700" dist="6350" dir="2700000" algn="bl" rotWithShape="0">
+              <a:srgbClr val="000000">
+                <a:alpha val="8000"/>
+              </a:srgbClr>
+            </a:outerShdw>
+          </a:effectLst>
+        </p:spPr>
+      </p:sp>
+      <p:sp>
+        <p:nvSpPr>
+          <p:cNvPr id="26" name="Text 24"/>
+          <p:cNvSpPr/>
+          <p:nvPr/>
+        </p:nvSpPr>
+        <p:spPr>
+          <a:xfrm>
+            <a:off x="1975104" y="5303520"/>
+            <a:ext cx="3182112" cy="182880"/>
+          </a:xfrm>
+          <a:prstGeom prst="rect">
+            <a:avLst/>
+          </a:prstGeom>
+          <a:noFill/>
+          <a:ln/>
+        </p:spPr>
+        <p:txBody>
+          <a:bodyPr wrap="square" lIns="0" tIns="0" rIns="0" bIns="0" rtlCol="0" anchor="ctr"/>
+          <a:lstStyle/>
+          <a:p>
+            <a:pPr marL="0" indent="0" algn="ctr">
+              <a:buNone/>
+            </a:pPr>
+            <a:r>
+              <a:rPr lang="en-US" sz="1150" b="1" dirty="0">
+                <a:solidFill>
+                  <a:srgbClr val="111827"/>
+                </a:solidFill>
+              </a:rPr>
+              <a:t>本地执行后端</a:t>
+            </a:r>
+            <a:endParaRPr lang="en-US" sz="1150" dirty="0"/>
+          </a:p>
+        </p:txBody>
+      </p:sp>
+      <p:sp>
+        <p:nvSpPr>
+          <p:cNvPr id="27" name="Text 25"/>
+          <p:cNvSpPr/>
+          <p:nvPr/>
+        </p:nvSpPr>
+        <p:spPr>
+          <a:xfrm>
+            <a:off x="1993392" y="5541264"/>
+            <a:ext cx="3145536" cy="164592"/>
+          </a:xfrm>
+          <a:prstGeom prst="rect">
+            <a:avLst/>
+          </a:prstGeom>
+          <a:noFill/>
+          <a:ln/>
+        </p:spPr>
+        <p:txBody>
+          <a:bodyPr wrap="square" lIns="254" tIns="254" rIns="254" bIns="254" rtlCol="0" anchor="ctr"/>
+          <a:lstStyle/>
+          <a:p>
+            <a:pPr marL="0" indent="0" algn="ctr">
+              <a:buNone/>
+            </a:pPr>
+            <a:r>
+              <a:rPr lang="en-US" sz="920" dirty="0">
+                <a:solidFill>
+                  <a:srgbClr val="4B5563"/>
+                </a:solidFill>
+              </a:rPr>
+              <a:t>用于调试与快速验证</a:t>
+            </a:r>
+            <a:endParaRPr lang="en-US" sz="920" dirty="0"/>
+          </a:p>
+        </p:txBody>
+      </p:sp>
+      <p:sp>
+        <p:nvSpPr>
+          <p:cNvPr id="28" name="Shape 26"/>
+          <p:cNvSpPr/>
+          <p:nvPr/>
+        </p:nvSpPr>
+        <p:spPr>
+          <a:xfrm>
+            <a:off x="6903720" y="5212080"/>
+            <a:ext cx="3474720" cy="566928"/>
+          </a:xfrm>
+          <a:prstGeom prst="roundRect">
+            <a:avLst>
+              <a:gd name="adj" fmla="val 6452"/>
+            </a:avLst>
+          </a:prstGeom>
+          <a:solidFill>
+            <a:srgbClr val="FFFFFF"/>
+          </a:solidFill>
+          <a:ln w="12700">
+            <a:solidFill>
+              <a:srgbClr val="D4D9E3"/>
+            </a:solidFill>
+            <a:prstDash val="solid"/>
+          </a:ln>
+          <a:effectLst>
+            <a:outerShdw blurRad="12700" dist="6350" dir="2700000" algn="bl" rotWithShape="0">
+              <a:srgbClr val="000000">
+                <a:alpha val="8000"/>
+              </a:srgbClr>
+            </a:outerShdw>
+          </a:effectLst>
+        </p:spPr>
+      </p:sp>
+      <p:sp>
+        <p:nvSpPr>
+          <p:cNvPr id="29" name="Text 27"/>
+          <p:cNvSpPr/>
+          <p:nvPr/>
+        </p:nvSpPr>
+        <p:spPr>
+          <a:xfrm>
+            <a:off x="7050024" y="5303520"/>
+            <a:ext cx="3182112" cy="182880"/>
+          </a:xfrm>
+          <a:prstGeom prst="rect">
+            <a:avLst/>
+          </a:prstGeom>
+          <a:noFill/>
+          <a:ln/>
+        </p:spPr>
+        <p:txBody>
+          <a:bodyPr wrap="square" lIns="0" tIns="0" rIns="0" bIns="0" rtlCol="0" anchor="ctr"/>
+          <a:lstStyle/>
+          <a:p>
+            <a:pPr marL="0" indent="0" algn="ctr">
+              <a:buNone/>
+            </a:pPr>
+            <a:r>
+              <a:rPr lang="en-US" sz="1150" b="1" dirty="0">
+                <a:solidFill>
+                  <a:srgbClr val="111827"/>
+                </a:solidFill>
+              </a:rPr>
+              <a:t>OpenWhisk 执行后端</a:t>
+            </a:r>
+            <a:endParaRPr lang="en-US" sz="1150" dirty="0"/>
+          </a:p>
+        </p:txBody>
+      </p:sp>
+      <p:sp>
+        <p:nvSpPr>
+          <p:cNvPr id="30" name="Text 28"/>
+          <p:cNvSpPr/>
+          <p:nvPr/>
+        </p:nvSpPr>
+        <p:spPr>
+          <a:xfrm>
+            <a:off x="7068312" y="5541264"/>
+            <a:ext cx="3145536" cy="164592"/>
+          </a:xfrm>
+          <a:prstGeom prst="rect">
+            <a:avLst/>
+          </a:prstGeom>
+          <a:noFill/>
+          <a:ln/>
+        </p:spPr>
+        <p:txBody>
+          <a:bodyPr wrap="square" lIns="254" tIns="254" rIns="254" bIns="254" rtlCol="0" anchor="ctr"/>
+          <a:lstStyle/>
+          <a:p>
+            <a:pPr marL="0" indent="0" algn="ctr">
+              <a:buNone/>
+            </a:pPr>
+            <a:r>
+              <a:rPr lang="en-US" sz="920" dirty="0">
+                <a:solidFill>
+                  <a:srgbClr val="4B5563"/>
+                </a:solidFill>
+              </a:rPr>
+              <a:t>承载函数任务并返回执行结果</a:t>
+            </a:r>
+            <a:endParaRPr lang="en-US" sz="920" dirty="0"/>
+          </a:p>
+        </p:txBody>
+      </p:sp>
+      <p:sp>
+        <p:nvSpPr>
+          <p:cNvPr id="31" name="Shape 29"/>
+          <p:cNvSpPr/>
+          <p:nvPr/>
+        </p:nvSpPr>
+        <p:spPr>
+          <a:xfrm>
+            <a:off x="3154680" y="1764792"/>
+            <a:ext cx="0" cy="1033272"/>
+          </a:xfrm>
+          <a:prstGeom prst="line">
+            <a:avLst/>
+          </a:prstGeom>
+          <a:noFill/>
+          <a:ln w="12700">
+            <a:solidFill>
+              <a:srgbClr val="7C8AA5"/>
+            </a:solidFill>
+            <a:prstDash val="solid"/>
+            <a:tailEnd type="triangle"/>
+          </a:ln>
+        </p:spPr>
+      </p:sp>
+      <p:sp>
+        <p:nvSpPr>
+          <p:cNvPr id="32" name="Shape 30"/>
+          <p:cNvSpPr/>
+          <p:nvPr/>
+        </p:nvSpPr>
+        <p:spPr>
+          <a:xfrm>
+            <a:off x="9034272" y="1764792"/>
+            <a:ext cx="0" cy="969264"/>
+          </a:xfrm>
+          <a:prstGeom prst="line">
+            <a:avLst/>
+          </a:prstGeom>
+          <a:noFill/>
+          <a:ln w="12700">
+            <a:solidFill>
+              <a:srgbClr val="7C8AA5"/>
+            </a:solidFill>
+            <a:prstDash val="solid"/>
+            <a:tailEnd type="triangle"/>
+          </a:ln>
+        </p:spPr>
+      </p:sp>
+      <p:sp>
+        <p:nvSpPr>
+          <p:cNvPr id="33" name="Shape 31"/>
+          <p:cNvSpPr/>
+          <p:nvPr/>
+        </p:nvSpPr>
+        <p:spPr>
+          <a:xfrm>
+            <a:off x="3886200" y="3392424"/>
+            <a:ext cx="685800" cy="0"/>
+          </a:xfrm>
+          <a:prstGeom prst="line">
+            <a:avLst/>
+          </a:prstGeom>
+          <a:noFill/>
+          <a:ln w="12700">
+            <a:solidFill>
+              <a:srgbClr val="B28B28"/>
+            </a:solidFill>
+            <a:prstDash val="solid"/>
+            <a:tailEnd type="triangle"/>
+          </a:ln>
+        </p:spPr>
+      </p:sp>
+      <p:sp>
+        <p:nvSpPr>
+          <p:cNvPr id="34" name="Shape 32"/>
+          <p:cNvSpPr/>
+          <p:nvPr/>
+        </p:nvSpPr>
+        <p:spPr>
+          <a:xfrm>
+            <a:off x="7607808" y="3392424"/>
+            <a:ext cx="676656" cy="0"/>
+          </a:xfrm>
+          <a:prstGeom prst="line">
+            <a:avLst/>
+          </a:prstGeom>
+          <a:noFill/>
+          <a:ln w="12700">
+            <a:solidFill>
+              <a:srgbClr val="B28B28"/>
+            </a:solidFill>
+            <a:prstDash val="solid"/>
+            <a:tailEnd type="triangle"/>
+          </a:ln>
+        </p:spPr>
+      </p:sp>
+      <p:sp>
+        <p:nvSpPr>
+          <p:cNvPr id="35" name="Shape 33"/>
+          <p:cNvSpPr/>
+          <p:nvPr/>
+        </p:nvSpPr>
+        <p:spPr>
+          <a:xfrm>
+            <a:off x="7452360" y="3666744"/>
+            <a:ext cx="0" cy="0"/>
+          </a:xfrm>
+          <a:prstGeom prst="line">
+            <a:avLst/>
+          </a:prstGeom>
+          <a:noFill/>
+          <a:ln w="12700">
+            <a:solidFill>
+              <a:srgbClr val="B28B28"/>
+            </a:solidFill>
+            <a:prstDash val="solid"/>
+            <a:tailEnd type="triangle"/>
+          </a:ln>
+        </p:spPr>
+      </p:sp>
+      <p:sp>
+        <p:nvSpPr>
+          <p:cNvPr id="36" name="Shape 34"/>
+          <p:cNvSpPr/>
+          <p:nvPr/>
+        </p:nvSpPr>
+        <p:spPr>
+          <a:xfrm>
+            <a:off x="6099048" y="4059936"/>
+            <a:ext cx="0" cy="1133856"/>
+          </a:xfrm>
+          <a:prstGeom prst="line">
+            <a:avLst/>
+          </a:prstGeom>
+          <a:noFill/>
+          <a:ln w="12700">
+            <a:solidFill>
+              <a:srgbClr val="7C8AA5"/>
+            </a:solidFill>
+            <a:prstDash val="solid"/>
+            <a:tailEnd type="triangle"/>
+          </a:ln>
+        </p:spPr>
+      </p:sp>
+      <p:sp>
+        <p:nvSpPr>
+          <p:cNvPr id="37" name="Shape 35"/>
+          <p:cNvSpPr/>
+          <p:nvPr/>
+        </p:nvSpPr>
+        <p:spPr>
+          <a:xfrm>
+            <a:off x="6099048" y="4059936"/>
+            <a:ext cx="2542032" cy="1133856"/>
+          </a:xfrm>
+          <a:prstGeom prst="line">
+            <a:avLst/>
+          </a:prstGeom>
+          <a:noFill/>
+          <a:ln w="12700">
+            <a:solidFill>
+              <a:srgbClr val="7C8AA5"/>
+            </a:solidFill>
+            <a:prstDash val="solid"/>
+            <a:tailEnd type="triangle"/>
+          </a:ln>
+        </p:spPr>
+      </p:sp>
+      <p:sp>
+        <p:nvSpPr>
+          <p:cNvPr id="38" name="Text 36"/>
+          <p:cNvSpPr/>
+          <p:nvPr/>
+        </p:nvSpPr>
+        <p:spPr>
+          <a:xfrm>
+            <a:off x="1005840" y="6355080"/>
+            <a:ext cx="10241280" cy="164592"/>
+          </a:xfrm>
+          <a:prstGeom prst="rect">
+            <a:avLst/>
+          </a:prstGeom>
+          <a:noFill/>
+          <a:ln/>
+        </p:spPr>
+        <p:txBody>
+          <a:bodyPr wrap="square" lIns="0" tIns="0" rIns="0" bIns="0" rtlCol="0" anchor="ctr"/>
+          <a:lstStyle/>
+          <a:p>
+            <a:pPr marL="0" indent="0" algn="ctr">
+              <a:buNone/>
+            </a:pPr>
+            <a:r>
+              <a:rPr lang="en-US" sz="900" dirty="0">
+                <a:solidFill>
+                  <a:srgbClr val="6B7280"/>
+                </a:solidFill>
+              </a:rPr>
+              <a:t>定义与配置 → 控制推进与预测 → 后端执行 → 结果回流与状态更新</a:t>
+            </a:r>
+            <a:endParaRPr lang="en-US" sz="900" dirty="0"/>
+          </a:p>
+        </p:txBody>
+      </p:sp>
+      <p:sp>
+        <p:nvSpPr>
+          <p:cNvPr id="39" name="Text 0">
+            <a:extLst>
+              <a:ext uri="{FF2B5EF4-FFF2-40B4-BE49-F238E27FC236}">
+                <a16:creationId xmlns:a16="http://schemas.microsoft.com/office/drawing/2014/main" id="{E265CC4A-08CE-E9B2-5C97-9B6B307127FE}"/>
+              </a:ext>
+            </a:extLst>
+          </p:cNvPr>
+          <p:cNvSpPr/>
+          <p:nvPr/>
+        </p:nvSpPr>
+        <p:spPr>
+          <a:xfrm>
+            <a:off x="4387599" y="893826"/>
+            <a:ext cx="929472" cy="292608"/>
+          </a:xfrm>
+          <a:prstGeom prst="rect">
+            <a:avLst/>
+          </a:prstGeom>
+          <a:noFill/>
+          <a:ln/>
+        </p:spPr>
+        <p:txBody>
+          <a:bodyPr wrap="square" lIns="0" tIns="0" rIns="0" bIns="0" rtlCol="0" anchor="ctr"/>
+          <a:lstStyle/>
+          <a:p>
+            <a:pPr marL="0" indent="0">
+              <a:buNone/>
+            </a:pPr>
+            <a:r>
+              <a:rPr lang="zh-CN" altLang="en-US" sz="1400" b="1" dirty="0">
+                <a:solidFill>
+                  <a:srgbClr val="111827"/>
+                </a:solidFill>
+              </a:rPr>
+              <a:t>用户接口层</a:t>
+            </a:r>
+            <a:endParaRPr lang="en-US" sz="1400" b="1" dirty="0">
+              <a:solidFill>
+                <a:srgbClr val="111827"/>
+              </a:solidFill>
+            </a:endParaRPr>
+          </a:p>
+        </p:txBody>
+      </p:sp>
+      <p:sp>
+        <p:nvSpPr>
+          <p:cNvPr id="40" name="Shape 8">
+            <a:extLst>
+              <a:ext uri="{FF2B5EF4-FFF2-40B4-BE49-F238E27FC236}">
+                <a16:creationId xmlns:a16="http://schemas.microsoft.com/office/drawing/2014/main" id="{8BF199D0-320D-EA1D-C9C6-72DCD1237B98}"/>
+              </a:ext>
+            </a:extLst>
+          </p:cNvPr>
+          <p:cNvSpPr/>
+          <p:nvPr/>
+        </p:nvSpPr>
+        <p:spPr>
+          <a:xfrm>
+            <a:off x="5324857" y="1197864"/>
+            <a:ext cx="2621279" cy="457200"/>
+          </a:xfrm>
+          <a:prstGeom prst="roundRect">
+            <a:avLst>
+              <a:gd name="adj" fmla="val 8000"/>
+            </a:avLst>
+          </a:prstGeom>
+          <a:solidFill>
+            <a:srgbClr val="FFFFFF"/>
+          </a:solidFill>
+          <a:ln w="12700">
+            <a:solidFill>
+              <a:schemeClr val="accent1"/>
+            </a:solidFill>
+            <a:prstDash val="solid"/>
+          </a:ln>
+          <a:effectLst>
+            <a:outerShdw blurRad="12700" dist="6350" dir="2700000" algn="bl" rotWithShape="0">
+              <a:srgbClr val="000000">
+                <a:alpha val="8000"/>
+              </a:srgbClr>
+            </a:outerShdw>
+          </a:effectLst>
+        </p:spPr>
+      </p:sp>
+      <p:sp>
+        <p:nvSpPr>
+          <p:cNvPr id="14" name="Text 12"/>
+          <p:cNvSpPr/>
+          <p:nvPr/>
+        </p:nvSpPr>
+        <p:spPr>
+          <a:xfrm>
+            <a:off x="4590288" y="1275588"/>
+            <a:ext cx="4096512" cy="182880"/>
+          </a:xfrm>
+          <a:prstGeom prst="rect">
+            <a:avLst/>
+          </a:prstGeom>
+          <a:noFill/>
+          <a:ln/>
+        </p:spPr>
+        <p:txBody>
+          <a:bodyPr wrap="square" lIns="0" tIns="0" rIns="0" bIns="0" rtlCol="0" anchor="ctr"/>
+          <a:lstStyle/>
+          <a:p>
+            <a:pPr marL="0" indent="0" algn="ctr">
+              <a:buNone/>
+            </a:pPr>
+            <a:r>
+              <a:rPr lang="en-US" sz="1150" b="1" dirty="0">
+                <a:solidFill>
+                  <a:srgbClr val="111827"/>
+                </a:solidFill>
+              </a:rPr>
+              <a:t>部署与执行入口</a:t>
+            </a:r>
+            <a:endParaRPr lang="en-US" sz="1150" dirty="0"/>
+          </a:p>
+        </p:txBody>
+      </p:sp>
+      <p:sp>
+        <p:nvSpPr>
+          <p:cNvPr id="15" name="Text 13"/>
+          <p:cNvSpPr/>
+          <p:nvPr/>
+        </p:nvSpPr>
+        <p:spPr>
+          <a:xfrm>
+            <a:off x="4605529" y="1527048"/>
+            <a:ext cx="4059936" cy="54864"/>
+          </a:xfrm>
+          <a:prstGeom prst="rect">
+            <a:avLst/>
+          </a:prstGeom>
+          <a:noFill/>
+          <a:ln/>
+        </p:spPr>
+        <p:txBody>
+          <a:bodyPr wrap="square" lIns="254" tIns="254" rIns="254" bIns="254" rtlCol="0" anchor="ctr"/>
+          <a:lstStyle/>
+          <a:p>
+            <a:pPr marL="0" indent="0" algn="ctr">
+              <a:buNone/>
+            </a:pPr>
+            <a:r>
+              <a:rPr lang="en-US" sz="920" dirty="0">
+                <a:solidFill>
+                  <a:srgbClr val="4B5563"/>
+                </a:solidFill>
+              </a:rPr>
+              <a:t>Python API / specx</a:t>
+            </a:r>
+            <a:endParaRPr lang="en-US" sz="920" dirty="0"/>
           </a:p>
         </p:txBody>
       </p:sp>
@@ -16924,10 +18400,10 @@
       </p:grpSpPr>
       <p:grpSp>
         <p:nvGrpSpPr>
-          <p:cNvPr id="19" name="组合 18">
+          <p:cNvPr id="3" name="组合 2">
             <a:extLst>
               <a:ext uri="{FF2B5EF4-FFF2-40B4-BE49-F238E27FC236}">
-                <a16:creationId xmlns:a16="http://schemas.microsoft.com/office/drawing/2014/main" id="{FDD5D6CB-FE85-02AF-3D1F-253433BEABAA}"/>
+                <a16:creationId xmlns:a16="http://schemas.microsoft.com/office/drawing/2014/main" id="{77180E39-A75E-C53B-4DDE-E50E30C52B33}"/>
               </a:ext>
             </a:extLst>
           </p:cNvPr>
@@ -16936,10 +18412,10 @@
         </p:nvGrpSpPr>
         <p:grpSpPr>
           <a:xfrm>
-            <a:off x="319155" y="1883219"/>
-            <a:ext cx="10571346" cy="4345848"/>
-            <a:chOff x="319155" y="1883219"/>
-            <a:chExt cx="10571346" cy="4345848"/>
+            <a:off x="319155" y="1963552"/>
+            <a:ext cx="10571346" cy="4185184"/>
+            <a:chOff x="319155" y="1963552"/>
+            <a:chExt cx="10571346" cy="4185184"/>
           </a:xfrm>
         </p:grpSpPr>
         <p:pic>
@@ -16957,7 +18433,7 @@
             <p:nvPr/>
           </p:nvPicPr>
           <p:blipFill>
-            <a:blip r:embed="rId2"/>
+            <a:blip r:embed="rId3"/>
             <a:stretch>
               <a:fillRect/>
             </a:stretch>
@@ -16987,14 +18463,14 @@
             <p:nvPr/>
           </p:nvPicPr>
           <p:blipFill>
-            <a:blip r:embed="rId3"/>
-            <a:srcRect b="2210"/>
+            <a:blip r:embed="rId4"/>
+            <a:srcRect r="10060" b="2210"/>
             <a:stretch/>
           </p:blipFill>
           <p:spPr>
             <a:xfrm>
               <a:off x="319155" y="1963552"/>
-              <a:ext cx="8585786" cy="4185184"/>
+              <a:ext cx="7722048" cy="4185184"/>
             </a:xfrm>
             <a:prstGeom prst="rect">
               <a:avLst/>
@@ -17015,8 +18491,8 @@
           </p:nvSpPr>
           <p:spPr>
             <a:xfrm>
-              <a:off x="319155" y="1883219"/>
-              <a:ext cx="7722048" cy="4345848"/>
+              <a:off x="319155" y="1963552"/>
+              <a:ext cx="7722048" cy="4185184"/>
             </a:xfrm>
             <a:prstGeom prst="rect">
               <a:avLst/>
@@ -17103,8 +18579,8 @@
           </p:nvSpPr>
           <p:spPr>
             <a:xfrm>
-              <a:off x="9177551" y="3217559"/>
-              <a:ext cx="1712949" cy="1677169"/>
+              <a:off x="9213330" y="3217559"/>
+              <a:ext cx="1677170" cy="1677169"/>
             </a:xfrm>
             <a:prstGeom prst="rect">
               <a:avLst/>

--- a/美术作品.pptx
+++ b/美术作品.pptx
@@ -5,20 +5,24 @@
     <p:sldMasterId id="2147483648" r:id="rId1"/>
   </p:sldMasterIdLst>
   <p:notesMasterIdLst>
-    <p:notesMasterId r:id="rId13"/>
+    <p:notesMasterId r:id="rId17"/>
   </p:notesMasterIdLst>
   <p:sldIdLst>
     <p:sldId id="256" r:id="rId2"/>
     <p:sldId id="257" r:id="rId3"/>
     <p:sldId id="258" r:id="rId4"/>
     <p:sldId id="259" r:id="rId5"/>
-    <p:sldId id="260" r:id="rId6"/>
-    <p:sldId id="261" r:id="rId7"/>
-    <p:sldId id="262" r:id="rId8"/>
-    <p:sldId id="263" r:id="rId9"/>
-    <p:sldId id="264" r:id="rId10"/>
-    <p:sldId id="265" r:id="rId11"/>
-    <p:sldId id="267" r:id="rId12"/>
+    <p:sldId id="271" r:id="rId6"/>
+    <p:sldId id="260" r:id="rId7"/>
+    <p:sldId id="261" r:id="rId8"/>
+    <p:sldId id="262" r:id="rId9"/>
+    <p:sldId id="263" r:id="rId10"/>
+    <p:sldId id="264" r:id="rId11"/>
+    <p:sldId id="265" r:id="rId12"/>
+    <p:sldId id="267" r:id="rId13"/>
+    <p:sldId id="268" r:id="rId14"/>
+    <p:sldId id="269" r:id="rId15"/>
+    <p:sldId id="270" r:id="rId16"/>
   </p:sldIdLst>
   <p:sldSz cx="12192000" cy="6858000"/>
   <p:notesSz cx="6858000" cy="9144000"/>
@@ -423,7 +427,7 @@
           <a:p>
             <a:fld id="{1F5AD5B5-6CBB-4946-BB99-91A038EC83D0}" type="datetimeFigureOut">
               <a:rPr lang="zh-CN" altLang="en-US" smtClean="0"/>
-              <a:t>2026/4/3</a:t>
+              <a:t>2026/4/22</a:t>
             </a:fld>
             <a:endParaRPr lang="zh-CN" altLang="en-US"/>
           </a:p>
@@ -789,7 +793,7 @@
           <a:p>
             <a:fld id="{ED9D1D49-895D-4F5A-ABF8-27223E77D4BA}" type="slidenum">
               <a:rPr lang="zh-CN" altLang="en-US" smtClean="0"/>
-              <a:t>6</a:t>
+              <a:t>7</a:t>
             </a:fld>
             <a:endParaRPr lang="zh-CN" altLang="en-US"/>
           </a:p>
@@ -873,7 +877,7 @@
           <a:p>
             <a:fld id="{ED9D1D49-895D-4F5A-ABF8-27223E77D4BA}" type="slidenum">
               <a:rPr lang="zh-CN" altLang="en-US" smtClean="0"/>
-              <a:t>8</a:t>
+              <a:t>9</a:t>
             </a:fld>
             <a:endParaRPr lang="zh-CN" altLang="en-US"/>
           </a:p>
@@ -957,7 +961,7 @@
           <a:p>
             <a:fld id="{ED9D1D49-895D-4F5A-ABF8-27223E77D4BA}" type="slidenum">
               <a:rPr lang="zh-CN" altLang="en-US" smtClean="0"/>
-              <a:t>9</a:t>
+              <a:t>10</a:t>
             </a:fld>
             <a:endParaRPr lang="zh-CN" altLang="en-US"/>
           </a:p>
@@ -1045,7 +1049,7 @@
           <a:p>
             <a:fld id="{F7021451-1387-4CA6-816F-3879F97B5CBC}" type="slidenum">
               <a:rPr lang="en-US"/>
-              <a:t>10</a:t>
+              <a:t>11</a:t>
             </a:fld>
             <a:endParaRPr lang="en-US"/>
           </a:p>
@@ -1133,7 +1137,7 @@
           <a:p>
             <a:fld id="{F7021451-1387-4CA6-816F-3879F97B5CBC}" type="slidenum">
               <a:rPr lang="en-US"/>
-              <a:t>11</a:t>
+              <a:t>12</a:t>
             </a:fld>
             <a:endParaRPr lang="en-US"/>
           </a:p>
@@ -1143,6 +1147,258 @@
     <p:extLst>
       <p:ext uri="{BB962C8B-B14F-4D97-AF65-F5344CB8AC3E}">
         <p14:creationId xmlns:p14="http://schemas.microsoft.com/office/powerpoint/2010/main" val="1024086991"/>
+      </p:ext>
+    </p:extLst>
+  </p:cSld>
+  <p:clrMapOvr>
+    <a:masterClrMapping/>
+  </p:clrMapOvr>
+</p:notes>
+</file>
+
+<file path=ppt/notesSlides/notesSlide6.xml><?xml version="1.0" encoding="utf-8"?>
+<p:notes xmlns:a="http://schemas.openxmlformats.org/drawingml/2006/main" xmlns:r="http://schemas.openxmlformats.org/officeDocument/2006/relationships" xmlns:p="http://schemas.openxmlformats.org/presentationml/2006/main">
+  <p:cSld>
+    <p:spTree>
+      <p:nvGrpSpPr>
+        <p:cNvPr id="1" name=""/>
+        <p:cNvGrpSpPr/>
+        <p:nvPr/>
+      </p:nvGrpSpPr>
+      <p:grpSpPr>
+        <a:xfrm>
+          <a:off x="0" y="0"/>
+          <a:ext cx="0" cy="0"/>
+          <a:chOff x="0" y="0"/>
+          <a:chExt cx="0" cy="0"/>
+        </a:xfrm>
+      </p:grpSpPr>
+      <p:sp>
+        <p:nvSpPr>
+          <p:cNvPr id="2" name="幻灯片图像占位符 1"/>
+          <p:cNvSpPr>
+            <a:spLocks noGrp="1" noRot="1" noChangeAspect="1"/>
+          </p:cNvSpPr>
+          <p:nvPr>
+            <p:ph type="sldImg"/>
+          </p:nvPr>
+        </p:nvSpPr>
+        <p:spPr/>
+      </p:sp>
+      <p:sp>
+        <p:nvSpPr>
+          <p:cNvPr id="3" name="备注占位符 2"/>
+          <p:cNvSpPr>
+            <a:spLocks noGrp="1"/>
+          </p:cNvSpPr>
+          <p:nvPr>
+            <p:ph type="body" idx="1"/>
+          </p:nvPr>
+        </p:nvSpPr>
+        <p:spPr/>
+        <p:txBody>
+          <a:bodyPr/>
+          <a:lstStyle/>
+          <a:p>
+            <a:endParaRPr lang="zh-CN" altLang="en-US" dirty="0"/>
+          </a:p>
+        </p:txBody>
+      </p:sp>
+      <p:sp>
+        <p:nvSpPr>
+          <p:cNvPr id="4" name="灯片编号占位符 3"/>
+          <p:cNvSpPr>
+            <a:spLocks noGrp="1"/>
+          </p:cNvSpPr>
+          <p:nvPr>
+            <p:ph type="sldNum" sz="quarter" idx="5"/>
+          </p:nvPr>
+        </p:nvSpPr>
+        <p:spPr/>
+        <p:txBody>
+          <a:bodyPr/>
+          <a:lstStyle/>
+          <a:p>
+            <a:fld id="{ED9D1D49-895D-4F5A-ABF8-27223E77D4BA}" type="slidenum">
+              <a:rPr lang="zh-CN" altLang="en-US" smtClean="0"/>
+              <a:t>13</a:t>
+            </a:fld>
+            <a:endParaRPr lang="zh-CN" altLang="en-US"/>
+          </a:p>
+        </p:txBody>
+      </p:sp>
+    </p:spTree>
+    <p:extLst>
+      <p:ext uri="{BB962C8B-B14F-4D97-AF65-F5344CB8AC3E}">
+        <p14:creationId xmlns:p14="http://schemas.microsoft.com/office/powerpoint/2010/main" val="2626939901"/>
+      </p:ext>
+    </p:extLst>
+  </p:cSld>
+  <p:clrMapOvr>
+    <a:masterClrMapping/>
+  </p:clrMapOvr>
+</p:notes>
+</file>
+
+<file path=ppt/notesSlides/notesSlide7.xml><?xml version="1.0" encoding="utf-8"?>
+<p:notes xmlns:a="http://schemas.openxmlformats.org/drawingml/2006/main" xmlns:r="http://schemas.openxmlformats.org/officeDocument/2006/relationships" xmlns:p="http://schemas.openxmlformats.org/presentationml/2006/main">
+  <p:cSld>
+    <p:spTree>
+      <p:nvGrpSpPr>
+        <p:cNvPr id="1" name=""/>
+        <p:cNvGrpSpPr/>
+        <p:nvPr/>
+      </p:nvGrpSpPr>
+      <p:grpSpPr>
+        <a:xfrm>
+          <a:off x="0" y="0"/>
+          <a:ext cx="0" cy="0"/>
+          <a:chOff x="0" y="0"/>
+          <a:chExt cx="0" cy="0"/>
+        </a:xfrm>
+      </p:grpSpPr>
+      <p:sp>
+        <p:nvSpPr>
+          <p:cNvPr id="2" name="幻灯片图像占位符 1"/>
+          <p:cNvSpPr>
+            <a:spLocks noGrp="1" noRot="1" noChangeAspect="1"/>
+          </p:cNvSpPr>
+          <p:nvPr>
+            <p:ph type="sldImg"/>
+          </p:nvPr>
+        </p:nvSpPr>
+        <p:spPr/>
+      </p:sp>
+      <p:sp>
+        <p:nvSpPr>
+          <p:cNvPr id="3" name="备注占位符 2"/>
+          <p:cNvSpPr>
+            <a:spLocks noGrp="1"/>
+          </p:cNvSpPr>
+          <p:nvPr>
+            <p:ph type="body" idx="1"/>
+          </p:nvPr>
+        </p:nvSpPr>
+        <p:spPr/>
+        <p:txBody>
+          <a:bodyPr/>
+          <a:lstStyle/>
+          <a:p>
+            <a:endParaRPr lang="zh-CN" altLang="en-US" dirty="0"/>
+          </a:p>
+        </p:txBody>
+      </p:sp>
+      <p:sp>
+        <p:nvSpPr>
+          <p:cNvPr id="4" name="灯片编号占位符 3"/>
+          <p:cNvSpPr>
+            <a:spLocks noGrp="1"/>
+          </p:cNvSpPr>
+          <p:nvPr>
+            <p:ph type="sldNum" sz="quarter" idx="5"/>
+          </p:nvPr>
+        </p:nvSpPr>
+        <p:spPr/>
+        <p:txBody>
+          <a:bodyPr/>
+          <a:lstStyle/>
+          <a:p>
+            <a:fld id="{ED9D1D49-895D-4F5A-ABF8-27223E77D4BA}" type="slidenum">
+              <a:rPr lang="zh-CN" altLang="en-US" smtClean="0"/>
+              <a:t>14</a:t>
+            </a:fld>
+            <a:endParaRPr lang="zh-CN" altLang="en-US"/>
+          </a:p>
+        </p:txBody>
+      </p:sp>
+    </p:spTree>
+    <p:extLst>
+      <p:ext uri="{BB962C8B-B14F-4D97-AF65-F5344CB8AC3E}">
+        <p14:creationId xmlns:p14="http://schemas.microsoft.com/office/powerpoint/2010/main" val="1122142311"/>
+      </p:ext>
+    </p:extLst>
+  </p:cSld>
+  <p:clrMapOvr>
+    <a:masterClrMapping/>
+  </p:clrMapOvr>
+</p:notes>
+</file>
+
+<file path=ppt/notesSlides/notesSlide8.xml><?xml version="1.0" encoding="utf-8"?>
+<p:notes xmlns:a="http://schemas.openxmlformats.org/drawingml/2006/main" xmlns:r="http://schemas.openxmlformats.org/officeDocument/2006/relationships" xmlns:p="http://schemas.openxmlformats.org/presentationml/2006/main">
+  <p:cSld>
+    <p:spTree>
+      <p:nvGrpSpPr>
+        <p:cNvPr id="1" name=""/>
+        <p:cNvGrpSpPr/>
+        <p:nvPr/>
+      </p:nvGrpSpPr>
+      <p:grpSpPr>
+        <a:xfrm>
+          <a:off x="0" y="0"/>
+          <a:ext cx="0" cy="0"/>
+          <a:chOff x="0" y="0"/>
+          <a:chExt cx="0" cy="0"/>
+        </a:xfrm>
+      </p:grpSpPr>
+      <p:sp>
+        <p:nvSpPr>
+          <p:cNvPr id="2" name="幻灯片图像占位符 1"/>
+          <p:cNvSpPr>
+            <a:spLocks noGrp="1" noRot="1" noChangeAspect="1"/>
+          </p:cNvSpPr>
+          <p:nvPr>
+            <p:ph type="sldImg"/>
+          </p:nvPr>
+        </p:nvSpPr>
+        <p:spPr/>
+      </p:sp>
+      <p:sp>
+        <p:nvSpPr>
+          <p:cNvPr id="3" name="备注占位符 2"/>
+          <p:cNvSpPr>
+            <a:spLocks noGrp="1"/>
+          </p:cNvSpPr>
+          <p:nvPr>
+            <p:ph type="body" idx="1"/>
+          </p:nvPr>
+        </p:nvSpPr>
+        <p:spPr/>
+        <p:txBody>
+          <a:bodyPr/>
+          <a:lstStyle/>
+          <a:p>
+            <a:endParaRPr lang="zh-CN" altLang="en-US" dirty="0"/>
+          </a:p>
+        </p:txBody>
+      </p:sp>
+      <p:sp>
+        <p:nvSpPr>
+          <p:cNvPr id="4" name="灯片编号占位符 3"/>
+          <p:cNvSpPr>
+            <a:spLocks noGrp="1"/>
+          </p:cNvSpPr>
+          <p:nvPr>
+            <p:ph type="sldNum" sz="quarter" idx="5"/>
+          </p:nvPr>
+        </p:nvSpPr>
+        <p:spPr/>
+        <p:txBody>
+          <a:bodyPr/>
+          <a:lstStyle/>
+          <a:p>
+            <a:fld id="{ED9D1D49-895D-4F5A-ABF8-27223E77D4BA}" type="slidenum">
+              <a:rPr lang="zh-CN" altLang="en-US" smtClean="0"/>
+              <a:t>15</a:t>
+            </a:fld>
+            <a:endParaRPr lang="zh-CN" altLang="en-US"/>
+          </a:p>
+        </p:txBody>
+      </p:sp>
+    </p:spTree>
+    <p:extLst>
+      <p:ext uri="{BB962C8B-B14F-4D97-AF65-F5344CB8AC3E}">
+        <p14:creationId xmlns:p14="http://schemas.microsoft.com/office/powerpoint/2010/main" val="456275586"/>
       </p:ext>
     </p:extLst>
   </p:cSld>
@@ -1281,7 +1537,7 @@
           <a:p>
             <a:fld id="{D997B5FA-0921-464F-AAE1-844C04324D75}" type="datetimeFigureOut">
               <a:rPr lang="zh-CN" altLang="en-US" smtClean="0"/>
-              <a:t>2026/4/3</a:t>
+              <a:t>2026/4/22</a:t>
             </a:fld>
             <a:endParaRPr lang="zh-CN" altLang="en-US"/>
           </a:p>
@@ -1444,7 +1700,7 @@
           <a:p>
             <a:fld id="{D997B5FA-0921-464F-AAE1-844C04324D75}" type="datetimeFigureOut">
               <a:rPr lang="zh-CN" altLang="en-US" smtClean="0"/>
-              <a:t>2026/4/3</a:t>
+              <a:t>2026/4/22</a:t>
             </a:fld>
             <a:endParaRPr lang="zh-CN" altLang="en-US"/>
           </a:p>
@@ -1617,7 +1873,7 @@
           <a:p>
             <a:fld id="{D997B5FA-0921-464F-AAE1-844C04324D75}" type="datetimeFigureOut">
               <a:rPr lang="zh-CN" altLang="en-US" smtClean="0"/>
-              <a:t>2026/4/3</a:t>
+              <a:t>2026/4/22</a:t>
             </a:fld>
             <a:endParaRPr lang="zh-CN" altLang="en-US"/>
           </a:p>
@@ -1815,7 +2071,7 @@
           <a:p>
             <a:fld id="{D997B5FA-0921-464F-AAE1-844C04324D75}" type="datetimeFigureOut">
               <a:rPr lang="zh-CN" altLang="en-US" smtClean="0"/>
-              <a:t>2026/4/3</a:t>
+              <a:t>2026/4/22</a:t>
             </a:fld>
             <a:endParaRPr lang="zh-CN" altLang="en-US"/>
           </a:p>
@@ -2055,7 +2311,7 @@
           <a:p>
             <a:fld id="{D997B5FA-0921-464F-AAE1-844C04324D75}" type="datetimeFigureOut">
               <a:rPr lang="zh-CN" altLang="en-US" smtClean="0"/>
-              <a:t>2026/4/3</a:t>
+              <a:t>2026/4/22</a:t>
             </a:fld>
             <a:endParaRPr lang="zh-CN" altLang="en-US"/>
           </a:p>
@@ -2279,7 +2535,7 @@
           <a:p>
             <a:fld id="{D997B5FA-0921-464F-AAE1-844C04324D75}" type="datetimeFigureOut">
               <a:rPr lang="zh-CN" altLang="en-US" smtClean="0"/>
-              <a:t>2026/4/3</a:t>
+              <a:t>2026/4/22</a:t>
             </a:fld>
             <a:endParaRPr lang="zh-CN" altLang="en-US"/>
           </a:p>
@@ -2638,7 +2894,7 @@
           <a:p>
             <a:fld id="{D997B5FA-0921-464F-AAE1-844C04324D75}" type="datetimeFigureOut">
               <a:rPr lang="zh-CN" altLang="en-US" smtClean="0"/>
-              <a:t>2026/4/3</a:t>
+              <a:t>2026/4/22</a:t>
             </a:fld>
             <a:endParaRPr lang="zh-CN" altLang="en-US"/>
           </a:p>
@@ -2750,7 +3006,7 @@
           <a:p>
             <a:fld id="{D997B5FA-0921-464F-AAE1-844C04324D75}" type="datetimeFigureOut">
               <a:rPr lang="zh-CN" altLang="en-US" smtClean="0"/>
-              <a:t>2026/4/3</a:t>
+              <a:t>2026/4/22</a:t>
             </a:fld>
             <a:endParaRPr lang="zh-CN" altLang="en-US"/>
           </a:p>
@@ -2840,7 +3096,7 @@
           <a:p>
             <a:fld id="{D997B5FA-0921-464F-AAE1-844C04324D75}" type="datetimeFigureOut">
               <a:rPr lang="zh-CN" altLang="en-US" smtClean="0"/>
-              <a:t>2026/4/3</a:t>
+              <a:t>2026/4/22</a:t>
             </a:fld>
             <a:endParaRPr lang="zh-CN" altLang="en-US"/>
           </a:p>
@@ -3110,7 +3366,7 @@
           <a:p>
             <a:fld id="{D997B5FA-0921-464F-AAE1-844C04324D75}" type="datetimeFigureOut">
               <a:rPr lang="zh-CN" altLang="en-US" smtClean="0"/>
-              <a:t>2026/4/3</a:t>
+              <a:t>2026/4/22</a:t>
             </a:fld>
             <a:endParaRPr lang="zh-CN" altLang="en-US"/>
           </a:p>
@@ -3357,7 +3613,7 @@
           <a:p>
             <a:fld id="{D997B5FA-0921-464F-AAE1-844C04324D75}" type="datetimeFigureOut">
               <a:rPr lang="zh-CN" altLang="en-US" smtClean="0"/>
-              <a:t>2026/4/3</a:t>
+              <a:t>2026/4/22</a:t>
             </a:fld>
             <a:endParaRPr lang="zh-CN" altLang="en-US"/>
           </a:p>
@@ -3563,7 +3819,7 @@
           <a:p>
             <a:fld id="{D997B5FA-0921-464F-AAE1-844C04324D75}" type="datetimeFigureOut">
               <a:rPr lang="zh-CN" altLang="en-US" smtClean="0"/>
-              <a:t>2026/4/3</a:t>
+              <a:t>2026/4/22</a:t>
             </a:fld>
             <a:endParaRPr lang="zh-CN" altLang="en-US"/>
           </a:p>
@@ -6019,6 +6275,256 @@
           <a:chExt cx="0" cy="0"/>
         </a:xfrm>
       </p:grpSpPr>
+      <p:grpSp>
+        <p:nvGrpSpPr>
+          <p:cNvPr id="3" name="组合 2">
+            <a:extLst>
+              <a:ext uri="{FF2B5EF4-FFF2-40B4-BE49-F238E27FC236}">
+                <a16:creationId xmlns:a16="http://schemas.microsoft.com/office/drawing/2014/main" id="{77180E39-A75E-C53B-4DDE-E50E30C52B33}"/>
+              </a:ext>
+            </a:extLst>
+          </p:cNvPr>
+          <p:cNvGrpSpPr/>
+          <p:nvPr/>
+        </p:nvGrpSpPr>
+        <p:grpSpPr>
+          <a:xfrm>
+            <a:off x="319155" y="1963552"/>
+            <a:ext cx="10571346" cy="4185184"/>
+            <a:chOff x="319155" y="1963552"/>
+            <a:chExt cx="10571346" cy="4185184"/>
+          </a:xfrm>
+        </p:grpSpPr>
+        <p:pic>
+          <p:nvPicPr>
+            <p:cNvPr id="13" name="图片 12">
+              <a:extLst>
+                <a:ext uri="{FF2B5EF4-FFF2-40B4-BE49-F238E27FC236}">
+                  <a16:creationId xmlns:a16="http://schemas.microsoft.com/office/drawing/2014/main" id="{B0619AAE-D481-C95E-E765-275544AE48D4}"/>
+                </a:ext>
+              </a:extLst>
+            </p:cNvPr>
+            <p:cNvPicPr>
+              <a:picLocks noChangeAspect="1"/>
+            </p:cNvPicPr>
+            <p:nvPr/>
+          </p:nvPicPr>
+          <p:blipFill>
+            <a:blip r:embed="rId3"/>
+            <a:stretch>
+              <a:fillRect/>
+            </a:stretch>
+          </p:blipFill>
+          <p:spPr>
+            <a:xfrm>
+              <a:off x="9213331" y="3217559"/>
+              <a:ext cx="1677170" cy="1677170"/>
+            </a:xfrm>
+            <a:prstGeom prst="rect">
+              <a:avLst/>
+            </a:prstGeom>
+          </p:spPr>
+        </p:pic>
+        <p:pic>
+          <p:nvPicPr>
+            <p:cNvPr id="7" name="图片 6">
+              <a:extLst>
+                <a:ext uri="{FF2B5EF4-FFF2-40B4-BE49-F238E27FC236}">
+                  <a16:creationId xmlns:a16="http://schemas.microsoft.com/office/drawing/2014/main" id="{B407AFCE-2210-3FFA-2435-41CA9ABC2070}"/>
+                </a:ext>
+              </a:extLst>
+            </p:cNvPr>
+            <p:cNvPicPr>
+              <a:picLocks noChangeAspect="1"/>
+            </p:cNvPicPr>
+            <p:nvPr/>
+          </p:nvPicPr>
+          <p:blipFill>
+            <a:blip r:embed="rId4"/>
+            <a:srcRect r="10060" b="2210"/>
+            <a:stretch/>
+          </p:blipFill>
+          <p:spPr>
+            <a:xfrm>
+              <a:off x="319155" y="1963552"/>
+              <a:ext cx="7722048" cy="4185184"/>
+            </a:xfrm>
+            <a:prstGeom prst="rect">
+              <a:avLst/>
+            </a:prstGeom>
+          </p:spPr>
+        </p:pic>
+        <p:sp>
+          <p:nvSpPr>
+            <p:cNvPr id="8" name="矩形 7">
+              <a:extLst>
+                <a:ext uri="{FF2B5EF4-FFF2-40B4-BE49-F238E27FC236}">
+                  <a16:creationId xmlns:a16="http://schemas.microsoft.com/office/drawing/2014/main" id="{EE2A0F62-9619-18AA-B76A-C04BDFE27075}"/>
+                </a:ext>
+              </a:extLst>
+            </p:cNvPr>
+            <p:cNvSpPr/>
+            <p:nvPr/>
+          </p:nvSpPr>
+          <p:spPr>
+            <a:xfrm>
+              <a:off x="319155" y="1963552"/>
+              <a:ext cx="7722048" cy="4185184"/>
+            </a:xfrm>
+            <a:prstGeom prst="rect">
+              <a:avLst/>
+            </a:prstGeom>
+            <a:noFill/>
+            <a:ln w="38100">
+              <a:solidFill>
+                <a:schemeClr val="accent1"/>
+              </a:solidFill>
+            </a:ln>
+          </p:spPr>
+          <p:style>
+            <a:lnRef idx="2">
+              <a:schemeClr val="accent1">
+                <a:shade val="15000"/>
+              </a:schemeClr>
+            </a:lnRef>
+            <a:fillRef idx="1">
+              <a:schemeClr val="accent1"/>
+            </a:fillRef>
+            <a:effectRef idx="0">
+              <a:schemeClr val="accent1"/>
+            </a:effectRef>
+            <a:fontRef idx="minor">
+              <a:schemeClr val="lt1"/>
+            </a:fontRef>
+          </p:style>
+          <p:txBody>
+            <a:bodyPr rtlCol="0" anchor="ctr"/>
+            <a:lstStyle/>
+            <a:p>
+              <a:pPr algn="ctr"/>
+              <a:endParaRPr lang="zh-CN" altLang="en-US"/>
+            </a:p>
+          </p:txBody>
+        </p:sp>
+        <p:sp>
+          <p:nvSpPr>
+            <p:cNvPr id="10" name="文本框 9">
+              <a:extLst>
+                <a:ext uri="{FF2B5EF4-FFF2-40B4-BE49-F238E27FC236}">
+                  <a16:creationId xmlns:a16="http://schemas.microsoft.com/office/drawing/2014/main" id="{35577BB5-862E-0885-8F0C-20A8F09C22CA}"/>
+                </a:ext>
+              </a:extLst>
+            </p:cNvPr>
+            <p:cNvSpPr txBox="1"/>
+            <p:nvPr/>
+          </p:nvSpPr>
+          <p:spPr>
+            <a:xfrm>
+              <a:off x="8349593" y="3640645"/>
+              <a:ext cx="490840" cy="830997"/>
+            </a:xfrm>
+            <a:prstGeom prst="rect">
+              <a:avLst/>
+            </a:prstGeom>
+            <a:noFill/>
+          </p:spPr>
+          <p:txBody>
+            <a:bodyPr wrap="none" rtlCol="0">
+              <a:spAutoFit/>
+            </a:bodyPr>
+            <a:lstStyle/>
+            <a:p>
+              <a:r>
+                <a:rPr lang="en-US" altLang="zh-CN" sz="4800" b="1" dirty="0"/>
+                <a:t>+</a:t>
+              </a:r>
+              <a:endParaRPr lang="zh-CN" altLang="en-US" sz="4800" b="1" dirty="0"/>
+            </a:p>
+          </p:txBody>
+        </p:sp>
+        <p:sp>
+          <p:nvSpPr>
+            <p:cNvPr id="17" name="矩形 16">
+              <a:extLst>
+                <a:ext uri="{FF2B5EF4-FFF2-40B4-BE49-F238E27FC236}">
+                  <a16:creationId xmlns:a16="http://schemas.microsoft.com/office/drawing/2014/main" id="{614BE567-6868-9755-CE5B-4279745D59D1}"/>
+                </a:ext>
+              </a:extLst>
+            </p:cNvPr>
+            <p:cNvSpPr/>
+            <p:nvPr/>
+          </p:nvSpPr>
+          <p:spPr>
+            <a:xfrm>
+              <a:off x="9213330" y="3217559"/>
+              <a:ext cx="1677170" cy="1677169"/>
+            </a:xfrm>
+            <a:prstGeom prst="rect">
+              <a:avLst/>
+            </a:prstGeom>
+            <a:noFill/>
+            <a:ln w="38100">
+              <a:solidFill>
+                <a:schemeClr val="accent1"/>
+              </a:solidFill>
+            </a:ln>
+          </p:spPr>
+          <p:style>
+            <a:lnRef idx="2">
+              <a:schemeClr val="accent1">
+                <a:shade val="15000"/>
+              </a:schemeClr>
+            </a:lnRef>
+            <a:fillRef idx="1">
+              <a:schemeClr val="accent1"/>
+            </a:fillRef>
+            <a:effectRef idx="0">
+              <a:schemeClr val="accent1"/>
+            </a:effectRef>
+            <a:fontRef idx="minor">
+              <a:schemeClr val="lt1"/>
+            </a:fontRef>
+          </p:style>
+          <p:txBody>
+            <a:bodyPr rtlCol="0" anchor="ctr"/>
+            <a:lstStyle/>
+            <a:p>
+              <a:pPr algn="ctr"/>
+              <a:endParaRPr lang="zh-CN" altLang="en-US"/>
+            </a:p>
+          </p:txBody>
+        </p:sp>
+      </p:grpSp>
+    </p:spTree>
+    <p:extLst>
+      <p:ext uri="{BB962C8B-B14F-4D97-AF65-F5344CB8AC3E}">
+        <p14:creationId xmlns:p14="http://schemas.microsoft.com/office/powerpoint/2010/main" val="531027728"/>
+      </p:ext>
+    </p:extLst>
+  </p:cSld>
+  <p:clrMapOvr>
+    <a:masterClrMapping/>
+  </p:clrMapOvr>
+</p:sld>
+</file>
+
+<file path=ppt/slides/slide11.xml><?xml version="1.0" encoding="utf-8"?>
+<p:sld xmlns:a="http://schemas.openxmlformats.org/drawingml/2006/main" xmlns:r="http://schemas.openxmlformats.org/officeDocument/2006/relationships" xmlns:p="http://schemas.openxmlformats.org/presentationml/2006/main">
+  <p:cSld>
+    <p:spTree>
+      <p:nvGrpSpPr>
+        <p:cNvPr id="1" name=""/>
+        <p:cNvGrpSpPr/>
+        <p:nvPr/>
+      </p:nvGrpSpPr>
+      <p:grpSpPr>
+        <a:xfrm>
+          <a:off x="0" y="0"/>
+          <a:ext cx="0" cy="0"/>
+          <a:chOff x="0" y="0"/>
+          <a:chExt cx="0" cy="0"/>
+        </a:xfrm>
+      </p:grpSpPr>
       <p:sp>
         <p:nvSpPr>
           <p:cNvPr id="2" name="Text 0"/>
@@ -6976,7 +7482,7 @@
 </p:sld>
 </file>
 
-<file path=ppt/slides/slide11.xml><?xml version="1.0" encoding="utf-8"?>
+<file path=ppt/slides/slide12.xml><?xml version="1.0" encoding="utf-8"?>
 <p:sld xmlns:a="http://schemas.openxmlformats.org/drawingml/2006/main" xmlns:r="http://schemas.openxmlformats.org/officeDocument/2006/relationships" xmlns:p="http://schemas.openxmlformats.org/presentationml/2006/main">
   <p:cSld>
     <p:spTree>
@@ -8272,6 +8778,3155 @@
         </p:txBody>
       </p:sp>
     </p:spTree>
+  </p:cSld>
+  <p:clrMapOvr>
+    <a:masterClrMapping/>
+  </p:clrMapOvr>
+</p:sld>
+</file>
+
+<file path=ppt/slides/slide13.xml><?xml version="1.0" encoding="utf-8"?>
+<p:sld xmlns:a="http://schemas.openxmlformats.org/drawingml/2006/main" xmlns:r="http://schemas.openxmlformats.org/officeDocument/2006/relationships" xmlns:p="http://schemas.openxmlformats.org/presentationml/2006/main">
+  <p:cSld>
+    <p:spTree>
+      <p:nvGrpSpPr>
+        <p:cNvPr id="1" name=""/>
+        <p:cNvGrpSpPr/>
+        <p:nvPr/>
+      </p:nvGrpSpPr>
+      <p:grpSpPr>
+        <a:xfrm>
+          <a:off x="0" y="0"/>
+          <a:ext cx="0" cy="0"/>
+          <a:chOff x="0" y="0"/>
+          <a:chExt cx="0" cy="0"/>
+        </a:xfrm>
+      </p:grpSpPr>
+      <p:sp>
+        <p:nvSpPr>
+          <p:cNvPr id="6" name="矩形: 圆角 5">
+            <a:extLst>
+              <a:ext uri="{FF2B5EF4-FFF2-40B4-BE49-F238E27FC236}">
+                <a16:creationId xmlns:a16="http://schemas.microsoft.com/office/drawing/2014/main" id="{517AC8DD-15CC-B104-6BD4-2FF15A18A5C7}"/>
+              </a:ext>
+            </a:extLst>
+          </p:cNvPr>
+          <p:cNvSpPr/>
+          <p:nvPr/>
+        </p:nvSpPr>
+        <p:spPr>
+          <a:xfrm>
+            <a:off x="4949044" y="4297690"/>
+            <a:ext cx="1128585" cy="764167"/>
+          </a:xfrm>
+          <a:prstGeom prst="roundRect">
+            <a:avLst/>
+          </a:prstGeom>
+          <a:ln w="19050"/>
+        </p:spPr>
+        <p:style>
+          <a:lnRef idx="2">
+            <a:schemeClr val="dk1"/>
+          </a:lnRef>
+          <a:fillRef idx="1">
+            <a:schemeClr val="lt1"/>
+          </a:fillRef>
+          <a:effectRef idx="0">
+            <a:schemeClr val="dk1"/>
+          </a:effectRef>
+          <a:fontRef idx="minor">
+            <a:schemeClr val="dk1"/>
+          </a:fontRef>
+        </p:style>
+        <p:txBody>
+          <a:bodyPr rtlCol="0" anchor="ctr"/>
+          <a:lstStyle/>
+          <a:p>
+            <a:pPr algn="ctr"/>
+            <a:r>
+              <a:rPr lang="en-US" altLang="zh-CN" sz="2400" dirty="0"/>
+              <a:t>b2</a:t>
+            </a:r>
+            <a:endParaRPr lang="zh-CN" altLang="en-US" sz="2400" dirty="0"/>
+          </a:p>
+        </p:txBody>
+      </p:sp>
+      <p:sp>
+        <p:nvSpPr>
+          <p:cNvPr id="7" name="矩形: 圆角 6">
+            <a:extLst>
+              <a:ext uri="{FF2B5EF4-FFF2-40B4-BE49-F238E27FC236}">
+                <a16:creationId xmlns:a16="http://schemas.microsoft.com/office/drawing/2014/main" id="{BEC19FFE-6C81-C73D-EB40-8F6467575AEA}"/>
+              </a:ext>
+            </a:extLst>
+          </p:cNvPr>
+          <p:cNvSpPr/>
+          <p:nvPr/>
+        </p:nvSpPr>
+        <p:spPr>
+          <a:xfrm>
+            <a:off x="4949044" y="2413331"/>
+            <a:ext cx="1128587" cy="764167"/>
+          </a:xfrm>
+          <a:prstGeom prst="roundRect">
+            <a:avLst/>
+          </a:prstGeom>
+          <a:ln w="19050"/>
+        </p:spPr>
+        <p:style>
+          <a:lnRef idx="2">
+            <a:schemeClr val="dk1"/>
+          </a:lnRef>
+          <a:fillRef idx="1">
+            <a:schemeClr val="lt1"/>
+          </a:fillRef>
+          <a:effectRef idx="0">
+            <a:schemeClr val="dk1"/>
+          </a:effectRef>
+          <a:fontRef idx="minor">
+            <a:schemeClr val="dk1"/>
+          </a:fontRef>
+        </p:style>
+        <p:txBody>
+          <a:bodyPr rtlCol="0" anchor="ctr"/>
+          <a:lstStyle/>
+          <a:p>
+            <a:pPr algn="ctr"/>
+            <a:r>
+              <a:rPr lang="en-US" altLang="zh-CN" sz="2400" dirty="0"/>
+              <a:t>b1</a:t>
+            </a:r>
+            <a:endParaRPr lang="zh-CN" altLang="en-US" sz="2400" dirty="0"/>
+          </a:p>
+        </p:txBody>
+      </p:sp>
+      <p:sp>
+        <p:nvSpPr>
+          <p:cNvPr id="8" name="矩形: 圆角 7">
+            <a:extLst>
+              <a:ext uri="{FF2B5EF4-FFF2-40B4-BE49-F238E27FC236}">
+                <a16:creationId xmlns:a16="http://schemas.microsoft.com/office/drawing/2014/main" id="{5D2B16B8-B90F-9513-74B0-767CCD4ACD23}"/>
+              </a:ext>
+            </a:extLst>
+          </p:cNvPr>
+          <p:cNvSpPr/>
+          <p:nvPr/>
+        </p:nvSpPr>
+        <p:spPr>
+          <a:xfrm>
+            <a:off x="7313284" y="3412602"/>
+            <a:ext cx="1128587" cy="764167"/>
+          </a:xfrm>
+          <a:prstGeom prst="roundRect">
+            <a:avLst/>
+          </a:prstGeom>
+          <a:ln w="19050"/>
+        </p:spPr>
+        <p:style>
+          <a:lnRef idx="2">
+            <a:schemeClr val="dk1"/>
+          </a:lnRef>
+          <a:fillRef idx="1">
+            <a:schemeClr val="lt1"/>
+          </a:fillRef>
+          <a:effectRef idx="0">
+            <a:schemeClr val="dk1"/>
+          </a:effectRef>
+          <a:fontRef idx="minor">
+            <a:schemeClr val="dk1"/>
+          </a:fontRef>
+        </p:style>
+        <p:txBody>
+          <a:bodyPr rtlCol="0" anchor="ctr"/>
+          <a:lstStyle/>
+          <a:p>
+            <a:pPr algn="ctr"/>
+            <a:r>
+              <a:rPr lang="en-US" altLang="zh-CN" sz="2400" dirty="0"/>
+              <a:t>end</a:t>
+            </a:r>
+            <a:endParaRPr lang="zh-CN" altLang="en-US" sz="2400" dirty="0"/>
+          </a:p>
+        </p:txBody>
+      </p:sp>
+      <p:sp>
+        <p:nvSpPr>
+          <p:cNvPr id="9" name="矩形: 圆角 8">
+            <a:extLst>
+              <a:ext uri="{FF2B5EF4-FFF2-40B4-BE49-F238E27FC236}">
+                <a16:creationId xmlns:a16="http://schemas.microsoft.com/office/drawing/2014/main" id="{0E982D34-6CD3-0C6F-147D-1E4F4962AA95}"/>
+              </a:ext>
+            </a:extLst>
+          </p:cNvPr>
+          <p:cNvSpPr/>
+          <p:nvPr/>
+        </p:nvSpPr>
+        <p:spPr>
+          <a:xfrm>
+            <a:off x="1109659" y="3429000"/>
+            <a:ext cx="1128587" cy="764167"/>
+          </a:xfrm>
+          <a:prstGeom prst="roundRect">
+            <a:avLst/>
+          </a:prstGeom>
+          <a:ln w="19050"/>
+        </p:spPr>
+        <p:style>
+          <a:lnRef idx="2">
+            <a:schemeClr val="dk1"/>
+          </a:lnRef>
+          <a:fillRef idx="1">
+            <a:schemeClr val="lt1"/>
+          </a:fillRef>
+          <a:effectRef idx="0">
+            <a:schemeClr val="dk1"/>
+          </a:effectRef>
+          <a:fontRef idx="minor">
+            <a:schemeClr val="dk1"/>
+          </a:fontRef>
+        </p:style>
+        <p:txBody>
+          <a:bodyPr rtlCol="0" anchor="ctr"/>
+          <a:lstStyle/>
+          <a:p>
+            <a:pPr algn="ctr"/>
+            <a:r>
+              <a:rPr lang="en-US" altLang="zh-CN" sz="2400" dirty="0"/>
+              <a:t>start</a:t>
+            </a:r>
+            <a:endParaRPr lang="zh-CN" altLang="en-US" sz="2400" dirty="0"/>
+          </a:p>
+        </p:txBody>
+      </p:sp>
+      <p:cxnSp>
+        <p:nvCxnSpPr>
+          <p:cNvPr id="10" name="连接符: 肘形 9">
+            <a:extLst>
+              <a:ext uri="{FF2B5EF4-FFF2-40B4-BE49-F238E27FC236}">
+                <a16:creationId xmlns:a16="http://schemas.microsoft.com/office/drawing/2014/main" id="{89DCB4B5-88F8-9B83-BC55-F111FAE9758D}"/>
+              </a:ext>
+            </a:extLst>
+          </p:cNvPr>
+          <p:cNvCxnSpPr>
+            <a:cxnSpLocks/>
+            <a:stCxn id="4" idx="3"/>
+            <a:endCxn id="7" idx="1"/>
+          </p:cNvCxnSpPr>
+          <p:nvPr/>
+        </p:nvCxnSpPr>
+        <p:spPr>
+          <a:xfrm flipV="1">
+            <a:off x="3991377" y="2795415"/>
+            <a:ext cx="957667" cy="1015668"/>
+          </a:xfrm>
+          <a:prstGeom prst="bentConnector3">
+            <a:avLst/>
+          </a:prstGeom>
+          <a:ln w="38100">
+            <a:tailEnd type="triangle"/>
+          </a:ln>
+        </p:spPr>
+        <p:style>
+          <a:lnRef idx="1">
+            <a:schemeClr val="dk1"/>
+          </a:lnRef>
+          <a:fillRef idx="0">
+            <a:schemeClr val="dk1"/>
+          </a:fillRef>
+          <a:effectRef idx="0">
+            <a:schemeClr val="dk1"/>
+          </a:effectRef>
+          <a:fontRef idx="minor">
+            <a:schemeClr val="tx1"/>
+          </a:fontRef>
+        </p:style>
+      </p:cxnSp>
+      <p:cxnSp>
+        <p:nvCxnSpPr>
+          <p:cNvPr id="11" name="连接符: 肘形 10">
+            <a:extLst>
+              <a:ext uri="{FF2B5EF4-FFF2-40B4-BE49-F238E27FC236}">
+                <a16:creationId xmlns:a16="http://schemas.microsoft.com/office/drawing/2014/main" id="{958A73AF-AD46-AB6E-2527-CD2BF0DFDD3A}"/>
+              </a:ext>
+            </a:extLst>
+          </p:cNvPr>
+          <p:cNvCxnSpPr>
+            <a:cxnSpLocks/>
+            <a:stCxn id="4" idx="3"/>
+            <a:endCxn id="6" idx="1"/>
+          </p:cNvCxnSpPr>
+          <p:nvPr/>
+        </p:nvCxnSpPr>
+        <p:spPr>
+          <a:xfrm>
+            <a:off x="3991377" y="3811083"/>
+            <a:ext cx="957667" cy="868691"/>
+          </a:xfrm>
+          <a:prstGeom prst="bentConnector3">
+            <a:avLst>
+              <a:gd name="adj1" fmla="val 50000"/>
+            </a:avLst>
+          </a:prstGeom>
+          <a:ln w="38100">
+            <a:tailEnd type="triangle"/>
+          </a:ln>
+        </p:spPr>
+        <p:style>
+          <a:lnRef idx="1">
+            <a:schemeClr val="dk1"/>
+          </a:lnRef>
+          <a:fillRef idx="0">
+            <a:schemeClr val="dk1"/>
+          </a:fillRef>
+          <a:effectRef idx="0">
+            <a:schemeClr val="dk1"/>
+          </a:effectRef>
+          <a:fontRef idx="minor">
+            <a:schemeClr val="tx1"/>
+          </a:fontRef>
+        </p:style>
+      </p:cxnSp>
+      <p:cxnSp>
+        <p:nvCxnSpPr>
+          <p:cNvPr id="12" name="连接符: 肘形 11">
+            <a:extLst>
+              <a:ext uri="{FF2B5EF4-FFF2-40B4-BE49-F238E27FC236}">
+                <a16:creationId xmlns:a16="http://schemas.microsoft.com/office/drawing/2014/main" id="{5B97A0AA-0CE4-3428-1777-55A2A2A54DC9}"/>
+              </a:ext>
+            </a:extLst>
+          </p:cNvPr>
+          <p:cNvCxnSpPr>
+            <a:cxnSpLocks/>
+            <a:stCxn id="7" idx="3"/>
+            <a:endCxn id="8" idx="1"/>
+          </p:cNvCxnSpPr>
+          <p:nvPr/>
+        </p:nvCxnSpPr>
+        <p:spPr>
+          <a:xfrm>
+            <a:off x="6077631" y="2795415"/>
+            <a:ext cx="1235653" cy="999271"/>
+          </a:xfrm>
+          <a:prstGeom prst="bentConnector3">
+            <a:avLst>
+              <a:gd name="adj1" fmla="val 50000"/>
+            </a:avLst>
+          </a:prstGeom>
+          <a:ln w="38100">
+            <a:tailEnd type="triangle"/>
+          </a:ln>
+        </p:spPr>
+        <p:style>
+          <a:lnRef idx="1">
+            <a:schemeClr val="dk1"/>
+          </a:lnRef>
+          <a:fillRef idx="0">
+            <a:schemeClr val="dk1"/>
+          </a:fillRef>
+          <a:effectRef idx="0">
+            <a:schemeClr val="dk1"/>
+          </a:effectRef>
+          <a:fontRef idx="minor">
+            <a:schemeClr val="tx1"/>
+          </a:fontRef>
+        </p:style>
+      </p:cxnSp>
+      <p:cxnSp>
+        <p:nvCxnSpPr>
+          <p:cNvPr id="13" name="连接符: 肘形 12">
+            <a:extLst>
+              <a:ext uri="{FF2B5EF4-FFF2-40B4-BE49-F238E27FC236}">
+                <a16:creationId xmlns:a16="http://schemas.microsoft.com/office/drawing/2014/main" id="{9A639A5B-AC5D-D630-A708-AACE34278EA9}"/>
+              </a:ext>
+            </a:extLst>
+          </p:cNvPr>
+          <p:cNvCxnSpPr>
+            <a:cxnSpLocks/>
+            <a:stCxn id="6" idx="3"/>
+            <a:endCxn id="8" idx="1"/>
+          </p:cNvCxnSpPr>
+          <p:nvPr/>
+        </p:nvCxnSpPr>
+        <p:spPr>
+          <a:xfrm flipV="1">
+            <a:off x="6077629" y="3794686"/>
+            <a:ext cx="1235655" cy="885088"/>
+          </a:xfrm>
+          <a:prstGeom prst="bentConnector3">
+            <a:avLst>
+              <a:gd name="adj1" fmla="val 50000"/>
+            </a:avLst>
+          </a:prstGeom>
+          <a:ln w="38100">
+            <a:tailEnd type="triangle"/>
+          </a:ln>
+        </p:spPr>
+        <p:style>
+          <a:lnRef idx="1">
+            <a:schemeClr val="dk1"/>
+          </a:lnRef>
+          <a:fillRef idx="0">
+            <a:schemeClr val="dk1"/>
+          </a:fillRef>
+          <a:effectRef idx="0">
+            <a:schemeClr val="dk1"/>
+          </a:effectRef>
+          <a:fontRef idx="minor">
+            <a:schemeClr val="tx1"/>
+          </a:fontRef>
+        </p:style>
+      </p:cxnSp>
+      <p:sp>
+        <p:nvSpPr>
+          <p:cNvPr id="4" name="矩形: 圆角 3">
+            <a:extLst>
+              <a:ext uri="{FF2B5EF4-FFF2-40B4-BE49-F238E27FC236}">
+                <a16:creationId xmlns:a16="http://schemas.microsoft.com/office/drawing/2014/main" id="{78BCC8A5-1F89-094F-738B-26FFEB6DFD53}"/>
+              </a:ext>
+            </a:extLst>
+          </p:cNvPr>
+          <p:cNvSpPr/>
+          <p:nvPr/>
+        </p:nvSpPr>
+        <p:spPr>
+          <a:xfrm>
+            <a:off x="2862790" y="3428999"/>
+            <a:ext cx="1128587" cy="764167"/>
+          </a:xfrm>
+          <a:prstGeom prst="roundRect">
+            <a:avLst/>
+          </a:prstGeom>
+          <a:ln w="19050"/>
+        </p:spPr>
+        <p:style>
+          <a:lnRef idx="2">
+            <a:schemeClr val="dk1"/>
+          </a:lnRef>
+          <a:fillRef idx="1">
+            <a:schemeClr val="lt1"/>
+          </a:fillRef>
+          <a:effectRef idx="0">
+            <a:schemeClr val="dk1"/>
+          </a:effectRef>
+          <a:fontRef idx="minor">
+            <a:schemeClr val="dk1"/>
+          </a:fontRef>
+        </p:style>
+        <p:txBody>
+          <a:bodyPr rtlCol="0" anchor="ctr"/>
+          <a:lstStyle/>
+          <a:p>
+            <a:pPr algn="ctr"/>
+            <a:r>
+              <a:rPr lang="en-US" altLang="zh-CN" sz="2400" dirty="0" err="1"/>
+              <a:t>br</a:t>
+            </a:r>
+            <a:endParaRPr lang="zh-CN" altLang="en-US" sz="2400" dirty="0"/>
+          </a:p>
+        </p:txBody>
+      </p:sp>
+      <p:cxnSp>
+        <p:nvCxnSpPr>
+          <p:cNvPr id="19" name="直接箭头连接符 18">
+            <a:extLst>
+              <a:ext uri="{FF2B5EF4-FFF2-40B4-BE49-F238E27FC236}">
+                <a16:creationId xmlns:a16="http://schemas.microsoft.com/office/drawing/2014/main" id="{3DACF067-47FA-F4FC-09E2-ABB7ABF75A78}"/>
+              </a:ext>
+            </a:extLst>
+          </p:cNvPr>
+          <p:cNvCxnSpPr>
+            <a:stCxn id="9" idx="3"/>
+            <a:endCxn id="4" idx="1"/>
+          </p:cNvCxnSpPr>
+          <p:nvPr/>
+        </p:nvCxnSpPr>
+        <p:spPr>
+          <a:xfrm flipV="1">
+            <a:off x="2238246" y="3811083"/>
+            <a:ext cx="624544" cy="1"/>
+          </a:xfrm>
+          <a:prstGeom prst="straightConnector1">
+            <a:avLst/>
+          </a:prstGeom>
+          <a:ln w="38100">
+            <a:tailEnd type="triangle"/>
+          </a:ln>
+        </p:spPr>
+        <p:style>
+          <a:lnRef idx="1">
+            <a:schemeClr val="dk1"/>
+          </a:lnRef>
+          <a:fillRef idx="0">
+            <a:schemeClr val="dk1"/>
+          </a:fillRef>
+          <a:effectRef idx="0">
+            <a:schemeClr val="dk1"/>
+          </a:effectRef>
+          <a:fontRef idx="minor">
+            <a:schemeClr val="tx1"/>
+          </a:fontRef>
+        </p:style>
+      </p:cxnSp>
+    </p:spTree>
+    <p:extLst>
+      <p:ext uri="{BB962C8B-B14F-4D97-AF65-F5344CB8AC3E}">
+        <p14:creationId xmlns:p14="http://schemas.microsoft.com/office/powerpoint/2010/main" val="4078814649"/>
+      </p:ext>
+    </p:extLst>
+  </p:cSld>
+  <p:clrMapOvr>
+    <a:masterClrMapping/>
+  </p:clrMapOvr>
+</p:sld>
+</file>
+
+<file path=ppt/slides/slide14.xml><?xml version="1.0" encoding="utf-8"?>
+<p:sld xmlns:a="http://schemas.openxmlformats.org/drawingml/2006/main" xmlns:r="http://schemas.openxmlformats.org/officeDocument/2006/relationships" xmlns:p="http://schemas.openxmlformats.org/presentationml/2006/main">
+  <p:cSld>
+    <p:spTree>
+      <p:nvGrpSpPr>
+        <p:cNvPr id="1" name=""/>
+        <p:cNvGrpSpPr/>
+        <p:nvPr/>
+      </p:nvGrpSpPr>
+      <p:grpSpPr>
+        <a:xfrm>
+          <a:off x="0" y="0"/>
+          <a:ext cx="0" cy="0"/>
+          <a:chOff x="0" y="0"/>
+          <a:chExt cx="0" cy="0"/>
+        </a:xfrm>
+      </p:grpSpPr>
+      <p:grpSp>
+        <p:nvGrpSpPr>
+          <p:cNvPr id="90" name="组合 89">
+            <a:extLst>
+              <a:ext uri="{FF2B5EF4-FFF2-40B4-BE49-F238E27FC236}">
+                <a16:creationId xmlns:a16="http://schemas.microsoft.com/office/drawing/2014/main" id="{89283F29-6859-72D1-D9C5-E37BC68A651B}"/>
+              </a:ext>
+            </a:extLst>
+          </p:cNvPr>
+          <p:cNvGrpSpPr/>
+          <p:nvPr/>
+        </p:nvGrpSpPr>
+        <p:grpSpPr>
+          <a:xfrm>
+            <a:off x="231874" y="636205"/>
+            <a:ext cx="11201018" cy="1796327"/>
+            <a:chOff x="231874" y="636205"/>
+            <a:chExt cx="11201018" cy="1796327"/>
+          </a:xfrm>
+        </p:grpSpPr>
+        <p:sp>
+          <p:nvSpPr>
+            <p:cNvPr id="9" name="矩形: 圆角 8">
+              <a:extLst>
+                <a:ext uri="{FF2B5EF4-FFF2-40B4-BE49-F238E27FC236}">
+                  <a16:creationId xmlns:a16="http://schemas.microsoft.com/office/drawing/2014/main" id="{0E982D34-6CD3-0C6F-147D-1E4F4962AA95}"/>
+                </a:ext>
+              </a:extLst>
+            </p:cNvPr>
+            <p:cNvSpPr/>
+            <p:nvPr/>
+          </p:nvSpPr>
+          <p:spPr>
+            <a:xfrm>
+              <a:off x="231874" y="1179526"/>
+              <a:ext cx="1578045" cy="654860"/>
+            </a:xfrm>
+            <a:prstGeom prst="roundRect">
+              <a:avLst/>
+            </a:prstGeom>
+            <a:ln w="19050"/>
+          </p:spPr>
+          <p:style>
+            <a:lnRef idx="2">
+              <a:schemeClr val="dk1"/>
+            </a:lnRef>
+            <a:fillRef idx="1">
+              <a:schemeClr val="lt1"/>
+            </a:fillRef>
+            <a:effectRef idx="0">
+              <a:schemeClr val="dk1"/>
+            </a:effectRef>
+            <a:fontRef idx="minor">
+              <a:schemeClr val="dk1"/>
+            </a:fontRef>
+          </p:style>
+          <p:txBody>
+            <a:bodyPr rtlCol="0" anchor="ctr"/>
+            <a:lstStyle/>
+            <a:p>
+              <a:pPr algn="ctr"/>
+              <a:r>
+                <a:rPr lang="en-US" altLang="zh-CN" dirty="0" err="1"/>
+                <a:t>recv_request</a:t>
+              </a:r>
+              <a:endParaRPr lang="en-US" altLang="zh-CN" dirty="0"/>
+            </a:p>
+            <a:p>
+              <a:pPr algn="ctr"/>
+              <a:r>
+                <a:rPr lang="zh-CN" altLang="en-US" sz="1200" dirty="0"/>
+                <a:t>请求接入</a:t>
+              </a:r>
+            </a:p>
+          </p:txBody>
+        </p:sp>
+        <p:cxnSp>
+          <p:nvCxnSpPr>
+            <p:cNvPr id="12" name="连接符: 肘形 11">
+              <a:extLst>
+                <a:ext uri="{FF2B5EF4-FFF2-40B4-BE49-F238E27FC236}">
+                  <a16:creationId xmlns:a16="http://schemas.microsoft.com/office/drawing/2014/main" id="{5B97A0AA-0CE4-3428-1777-55A2A2A54DC9}"/>
+                </a:ext>
+              </a:extLst>
+            </p:cNvPr>
+            <p:cNvCxnSpPr>
+              <a:cxnSpLocks/>
+              <a:stCxn id="35" idx="3"/>
+              <a:endCxn id="46" idx="1"/>
+            </p:cNvCxnSpPr>
+            <p:nvPr/>
+          </p:nvCxnSpPr>
+          <p:spPr>
+            <a:xfrm>
+              <a:off x="9401825" y="963635"/>
+              <a:ext cx="333125" cy="598060"/>
+            </a:xfrm>
+            <a:prstGeom prst="bentConnector3">
+              <a:avLst>
+                <a:gd name="adj1" fmla="val 50000"/>
+              </a:avLst>
+            </a:prstGeom>
+            <a:ln w="38100">
+              <a:tailEnd type="triangle"/>
+            </a:ln>
+          </p:spPr>
+          <p:style>
+            <a:lnRef idx="1">
+              <a:schemeClr val="dk1"/>
+            </a:lnRef>
+            <a:fillRef idx="0">
+              <a:schemeClr val="dk1"/>
+            </a:fillRef>
+            <a:effectRef idx="0">
+              <a:schemeClr val="dk1"/>
+            </a:effectRef>
+            <a:fontRef idx="minor">
+              <a:schemeClr val="tx1"/>
+            </a:fontRef>
+          </p:style>
+        </p:cxnSp>
+        <p:cxnSp>
+          <p:nvCxnSpPr>
+            <p:cNvPr id="13" name="连接符: 肘形 12">
+              <a:extLst>
+                <a:ext uri="{FF2B5EF4-FFF2-40B4-BE49-F238E27FC236}">
+                  <a16:creationId xmlns:a16="http://schemas.microsoft.com/office/drawing/2014/main" id="{9A639A5B-AC5D-D630-A708-AACE34278EA9}"/>
+                </a:ext>
+              </a:extLst>
+            </p:cNvPr>
+            <p:cNvCxnSpPr>
+              <a:cxnSpLocks/>
+              <a:stCxn id="42" idx="3"/>
+              <a:endCxn id="46" idx="1"/>
+            </p:cNvCxnSpPr>
+            <p:nvPr/>
+          </p:nvCxnSpPr>
+          <p:spPr>
+            <a:xfrm flipV="1">
+              <a:off x="9401825" y="1561695"/>
+              <a:ext cx="333125" cy="543407"/>
+            </a:xfrm>
+            <a:prstGeom prst="bentConnector3">
+              <a:avLst>
+                <a:gd name="adj1" fmla="val 50000"/>
+              </a:avLst>
+            </a:prstGeom>
+            <a:ln w="38100">
+              <a:tailEnd type="triangle"/>
+            </a:ln>
+          </p:spPr>
+          <p:style>
+            <a:lnRef idx="1">
+              <a:schemeClr val="dk1"/>
+            </a:lnRef>
+            <a:fillRef idx="0">
+              <a:schemeClr val="dk1"/>
+            </a:fillRef>
+            <a:effectRef idx="0">
+              <a:schemeClr val="dk1"/>
+            </a:effectRef>
+            <a:fontRef idx="minor">
+              <a:schemeClr val="tx1"/>
+            </a:fontRef>
+          </p:style>
+        </p:cxnSp>
+        <p:cxnSp>
+          <p:nvCxnSpPr>
+            <p:cNvPr id="19" name="直接箭头连接符 18">
+              <a:extLst>
+                <a:ext uri="{FF2B5EF4-FFF2-40B4-BE49-F238E27FC236}">
+                  <a16:creationId xmlns:a16="http://schemas.microsoft.com/office/drawing/2014/main" id="{3DACF067-47FA-F4FC-09E2-ABB7ABF75A78}"/>
+                </a:ext>
+              </a:extLst>
+            </p:cNvPr>
+            <p:cNvCxnSpPr>
+              <a:cxnSpLocks/>
+              <a:stCxn id="9" idx="3"/>
+            </p:cNvCxnSpPr>
+            <p:nvPr/>
+          </p:nvCxnSpPr>
+          <p:spPr>
+            <a:xfrm>
+              <a:off x="1809919" y="1506956"/>
+              <a:ext cx="252512" cy="0"/>
+            </a:xfrm>
+            <a:prstGeom prst="straightConnector1">
+              <a:avLst/>
+            </a:prstGeom>
+            <a:ln w="38100">
+              <a:tailEnd type="triangle"/>
+            </a:ln>
+          </p:spPr>
+          <p:style>
+            <a:lnRef idx="1">
+              <a:schemeClr val="dk1"/>
+            </a:lnRef>
+            <a:fillRef idx="0">
+              <a:schemeClr val="dk1"/>
+            </a:fillRef>
+            <a:effectRef idx="0">
+              <a:schemeClr val="dk1"/>
+            </a:effectRef>
+            <a:fontRef idx="minor">
+              <a:schemeClr val="tx1"/>
+            </a:fontRef>
+          </p:style>
+        </p:cxnSp>
+        <p:sp>
+          <p:nvSpPr>
+            <p:cNvPr id="28" name="矩形: 圆角 27">
+              <a:extLst>
+                <a:ext uri="{FF2B5EF4-FFF2-40B4-BE49-F238E27FC236}">
+                  <a16:creationId xmlns:a16="http://schemas.microsoft.com/office/drawing/2014/main" id="{DB17EE34-76FF-4D58-9AA5-C765DB3C7B92}"/>
+                </a:ext>
+              </a:extLst>
+            </p:cNvPr>
+            <p:cNvSpPr/>
+            <p:nvPr/>
+          </p:nvSpPr>
+          <p:spPr>
+            <a:xfrm>
+              <a:off x="2062431" y="1179526"/>
+              <a:ext cx="1716603" cy="654860"/>
+            </a:xfrm>
+            <a:prstGeom prst="roundRect">
+              <a:avLst/>
+            </a:prstGeom>
+            <a:ln w="19050"/>
+          </p:spPr>
+          <p:style>
+            <a:lnRef idx="2">
+              <a:schemeClr val="dk1"/>
+            </a:lnRef>
+            <a:fillRef idx="1">
+              <a:schemeClr val="lt1"/>
+            </a:fillRef>
+            <a:effectRef idx="0">
+              <a:schemeClr val="dk1"/>
+            </a:effectRef>
+            <a:fontRef idx="minor">
+              <a:schemeClr val="dk1"/>
+            </a:fontRef>
+          </p:style>
+          <p:txBody>
+            <a:bodyPr rtlCol="0" anchor="ctr"/>
+            <a:lstStyle/>
+            <a:p>
+              <a:pPr algn="ctr"/>
+              <a:r>
+                <a:rPr lang="en-US" altLang="zh-CN" dirty="0" err="1"/>
+                <a:t>check_context</a:t>
+              </a:r>
+              <a:endParaRPr lang="en-US" altLang="zh-CN" dirty="0"/>
+            </a:p>
+            <a:p>
+              <a:pPr algn="ctr"/>
+              <a:r>
+                <a:rPr lang="zh-CN" altLang="en-US" sz="1200" dirty="0"/>
+                <a:t>上下文校验</a:t>
+              </a:r>
+            </a:p>
+          </p:txBody>
+        </p:sp>
+        <p:sp>
+          <p:nvSpPr>
+            <p:cNvPr id="29" name="矩形: 圆角 28">
+              <a:extLst>
+                <a:ext uri="{FF2B5EF4-FFF2-40B4-BE49-F238E27FC236}">
+                  <a16:creationId xmlns:a16="http://schemas.microsoft.com/office/drawing/2014/main" id="{4BBEB8C0-FFA9-F216-F376-0963BF3626E9}"/>
+                </a:ext>
+              </a:extLst>
+            </p:cNvPr>
+            <p:cNvSpPr/>
+            <p:nvPr/>
+          </p:nvSpPr>
+          <p:spPr>
+            <a:xfrm>
+              <a:off x="4027827" y="1177466"/>
+              <a:ext cx="1578045" cy="654860"/>
+            </a:xfrm>
+            <a:prstGeom prst="roundRect">
+              <a:avLst/>
+            </a:prstGeom>
+            <a:ln w="19050"/>
+          </p:spPr>
+          <p:style>
+            <a:lnRef idx="2">
+              <a:schemeClr val="dk1"/>
+            </a:lnRef>
+            <a:fillRef idx="1">
+              <a:schemeClr val="lt1"/>
+            </a:fillRef>
+            <a:effectRef idx="0">
+              <a:schemeClr val="dk1"/>
+            </a:effectRef>
+            <a:fontRef idx="minor">
+              <a:schemeClr val="dk1"/>
+            </a:fontRef>
+          </p:style>
+          <p:txBody>
+            <a:bodyPr rtlCol="0" anchor="ctr"/>
+            <a:lstStyle/>
+            <a:p>
+              <a:pPr algn="ctr"/>
+              <a:r>
+                <a:rPr lang="en-US" altLang="zh-CN" dirty="0" err="1"/>
+                <a:t>extract_feat</a:t>
+              </a:r>
+              <a:endParaRPr lang="en-US" altLang="zh-CN" dirty="0"/>
+            </a:p>
+            <a:p>
+              <a:pPr algn="ctr"/>
+              <a:r>
+                <a:rPr lang="zh-CN" altLang="en-US" sz="1200" dirty="0"/>
+                <a:t>风险特征提取</a:t>
+              </a:r>
+            </a:p>
+          </p:txBody>
+        </p:sp>
+        <p:cxnSp>
+          <p:nvCxnSpPr>
+            <p:cNvPr id="30" name="直接箭头连接符 29">
+              <a:extLst>
+                <a:ext uri="{FF2B5EF4-FFF2-40B4-BE49-F238E27FC236}">
+                  <a16:creationId xmlns:a16="http://schemas.microsoft.com/office/drawing/2014/main" id="{055D524A-AF76-EB5F-F374-097830FE3C55}"/>
+                </a:ext>
+              </a:extLst>
+            </p:cNvPr>
+            <p:cNvCxnSpPr>
+              <a:cxnSpLocks/>
+            </p:cNvCxnSpPr>
+            <p:nvPr/>
+          </p:nvCxnSpPr>
+          <p:spPr>
+            <a:xfrm>
+              <a:off x="3779034" y="1504896"/>
+              <a:ext cx="252512" cy="0"/>
+            </a:xfrm>
+            <a:prstGeom prst="straightConnector1">
+              <a:avLst/>
+            </a:prstGeom>
+            <a:ln w="38100">
+              <a:tailEnd type="triangle"/>
+            </a:ln>
+          </p:spPr>
+          <p:style>
+            <a:lnRef idx="1">
+              <a:schemeClr val="dk1"/>
+            </a:lnRef>
+            <a:fillRef idx="0">
+              <a:schemeClr val="dk1"/>
+            </a:fillRef>
+            <a:effectRef idx="0">
+              <a:schemeClr val="dk1"/>
+            </a:effectRef>
+            <a:fontRef idx="minor">
+              <a:schemeClr val="tx1"/>
+            </a:fontRef>
+          </p:style>
+        </p:cxnSp>
+        <p:sp>
+          <p:nvSpPr>
+            <p:cNvPr id="31" name="矩形: 圆角 30">
+              <a:extLst>
+                <a:ext uri="{FF2B5EF4-FFF2-40B4-BE49-F238E27FC236}">
+                  <a16:creationId xmlns:a16="http://schemas.microsoft.com/office/drawing/2014/main" id="{074DBF14-2A04-5182-E891-D1F859723F74}"/>
+                </a:ext>
+              </a:extLst>
+            </p:cNvPr>
+            <p:cNvSpPr/>
+            <p:nvPr/>
+          </p:nvSpPr>
+          <p:spPr>
+            <a:xfrm>
+              <a:off x="5854665" y="1177466"/>
+              <a:ext cx="1578045" cy="654860"/>
+            </a:xfrm>
+            <a:prstGeom prst="roundRect">
+              <a:avLst/>
+            </a:prstGeom>
+            <a:ln w="19050"/>
+          </p:spPr>
+          <p:style>
+            <a:lnRef idx="2">
+              <a:schemeClr val="dk1"/>
+            </a:lnRef>
+            <a:fillRef idx="1">
+              <a:schemeClr val="lt1"/>
+            </a:fillRef>
+            <a:effectRef idx="0">
+              <a:schemeClr val="dk1"/>
+            </a:effectRef>
+            <a:fontRef idx="minor">
+              <a:schemeClr val="dk1"/>
+            </a:fontRef>
+          </p:style>
+          <p:txBody>
+            <a:bodyPr rtlCol="0" anchor="ctr"/>
+            <a:lstStyle/>
+            <a:p>
+              <a:pPr algn="ctr"/>
+              <a:r>
+                <a:rPr lang="en-US" altLang="zh-CN" dirty="0" err="1"/>
+                <a:t>risk_gate</a:t>
+              </a:r>
+              <a:endParaRPr lang="en-US" altLang="zh-CN" dirty="0"/>
+            </a:p>
+            <a:p>
+              <a:pPr algn="ctr"/>
+              <a:r>
+                <a:rPr lang="zh-CN" altLang="en-US" sz="1200" dirty="0"/>
+                <a:t>风险分流</a:t>
+              </a:r>
+            </a:p>
+          </p:txBody>
+        </p:sp>
+        <p:cxnSp>
+          <p:nvCxnSpPr>
+            <p:cNvPr id="32" name="直接箭头连接符 31">
+              <a:extLst>
+                <a:ext uri="{FF2B5EF4-FFF2-40B4-BE49-F238E27FC236}">
+                  <a16:creationId xmlns:a16="http://schemas.microsoft.com/office/drawing/2014/main" id="{184D9475-7CFD-CDEA-A24C-F7E124B760E2}"/>
+                </a:ext>
+              </a:extLst>
+            </p:cNvPr>
+            <p:cNvCxnSpPr>
+              <a:cxnSpLocks/>
+            </p:cNvCxnSpPr>
+            <p:nvPr/>
+          </p:nvCxnSpPr>
+          <p:spPr>
+            <a:xfrm>
+              <a:off x="5605872" y="1504896"/>
+              <a:ext cx="252512" cy="0"/>
+            </a:xfrm>
+            <a:prstGeom prst="straightConnector1">
+              <a:avLst/>
+            </a:prstGeom>
+            <a:ln w="38100">
+              <a:tailEnd type="triangle"/>
+            </a:ln>
+          </p:spPr>
+          <p:style>
+            <a:lnRef idx="1">
+              <a:schemeClr val="dk1"/>
+            </a:lnRef>
+            <a:fillRef idx="0">
+              <a:schemeClr val="dk1"/>
+            </a:fillRef>
+            <a:effectRef idx="0">
+              <a:schemeClr val="dk1"/>
+            </a:effectRef>
+            <a:fontRef idx="minor">
+              <a:schemeClr val="tx1"/>
+            </a:fontRef>
+          </p:style>
+        </p:cxnSp>
+        <p:cxnSp>
+          <p:nvCxnSpPr>
+            <p:cNvPr id="33" name="连接符: 肘形 32">
+              <a:extLst>
+                <a:ext uri="{FF2B5EF4-FFF2-40B4-BE49-F238E27FC236}">
+                  <a16:creationId xmlns:a16="http://schemas.microsoft.com/office/drawing/2014/main" id="{EBCE1B68-04DD-79F4-64D0-3E2FCADF323D}"/>
+                </a:ext>
+              </a:extLst>
+            </p:cNvPr>
+            <p:cNvCxnSpPr>
+              <a:cxnSpLocks/>
+              <a:stCxn id="31" idx="3"/>
+              <a:endCxn id="42" idx="1"/>
+            </p:cNvCxnSpPr>
+            <p:nvPr/>
+          </p:nvCxnSpPr>
+          <p:spPr>
+            <a:xfrm>
+              <a:off x="7432710" y="1504896"/>
+              <a:ext cx="391070" cy="600206"/>
+            </a:xfrm>
+            <a:prstGeom prst="bentConnector3">
+              <a:avLst>
+                <a:gd name="adj1" fmla="val 50000"/>
+              </a:avLst>
+            </a:prstGeom>
+            <a:ln w="38100">
+              <a:tailEnd type="triangle"/>
+            </a:ln>
+          </p:spPr>
+          <p:style>
+            <a:lnRef idx="1">
+              <a:schemeClr val="dk1"/>
+            </a:lnRef>
+            <a:fillRef idx="0">
+              <a:schemeClr val="dk1"/>
+            </a:fillRef>
+            <a:effectRef idx="0">
+              <a:schemeClr val="dk1"/>
+            </a:effectRef>
+            <a:fontRef idx="minor">
+              <a:schemeClr val="tx1"/>
+            </a:fontRef>
+          </p:style>
+        </p:cxnSp>
+        <p:sp>
+          <p:nvSpPr>
+            <p:cNvPr id="35" name="矩形: 圆角 34">
+              <a:extLst>
+                <a:ext uri="{FF2B5EF4-FFF2-40B4-BE49-F238E27FC236}">
+                  <a16:creationId xmlns:a16="http://schemas.microsoft.com/office/drawing/2014/main" id="{C06FB6CF-441F-B956-C233-AEB754F2FA5A}"/>
+                </a:ext>
+              </a:extLst>
+            </p:cNvPr>
+            <p:cNvSpPr/>
+            <p:nvPr/>
+          </p:nvSpPr>
+          <p:spPr>
+            <a:xfrm>
+              <a:off x="7823780" y="636205"/>
+              <a:ext cx="1578045" cy="654860"/>
+            </a:xfrm>
+            <a:prstGeom prst="roundRect">
+              <a:avLst/>
+            </a:prstGeom>
+            <a:ln w="19050"/>
+          </p:spPr>
+          <p:style>
+            <a:lnRef idx="2">
+              <a:schemeClr val="dk1"/>
+            </a:lnRef>
+            <a:fillRef idx="1">
+              <a:schemeClr val="lt1"/>
+            </a:fillRef>
+            <a:effectRef idx="0">
+              <a:schemeClr val="dk1"/>
+            </a:effectRef>
+            <a:fontRef idx="minor">
+              <a:schemeClr val="dk1"/>
+            </a:fontRef>
+          </p:style>
+          <p:txBody>
+            <a:bodyPr rtlCol="0" anchor="ctr"/>
+            <a:lstStyle/>
+            <a:p>
+              <a:pPr algn="ctr"/>
+              <a:r>
+                <a:rPr lang="en-US" altLang="zh-CN" dirty="0" err="1"/>
+                <a:t>fast_path</a:t>
+              </a:r>
+              <a:endParaRPr lang="en-US" altLang="zh-CN" dirty="0"/>
+            </a:p>
+            <a:p>
+              <a:pPr algn="ctr"/>
+              <a:r>
+                <a:rPr lang="zh-CN" altLang="en-US" sz="1200" dirty="0"/>
+                <a:t>快速处理</a:t>
+              </a:r>
+            </a:p>
+          </p:txBody>
+        </p:sp>
+        <p:cxnSp>
+          <p:nvCxnSpPr>
+            <p:cNvPr id="36" name="连接符: 肘形 35">
+              <a:extLst>
+                <a:ext uri="{FF2B5EF4-FFF2-40B4-BE49-F238E27FC236}">
+                  <a16:creationId xmlns:a16="http://schemas.microsoft.com/office/drawing/2014/main" id="{9B9ADEA2-D18B-04F2-0824-F4F9ED0D6C72}"/>
+                </a:ext>
+              </a:extLst>
+            </p:cNvPr>
+            <p:cNvCxnSpPr>
+              <a:cxnSpLocks/>
+              <a:stCxn id="31" idx="3"/>
+              <a:endCxn id="35" idx="1"/>
+            </p:cNvCxnSpPr>
+            <p:nvPr/>
+          </p:nvCxnSpPr>
+          <p:spPr>
+            <a:xfrm flipV="1">
+              <a:off x="7432710" y="963635"/>
+              <a:ext cx="391070" cy="541261"/>
+            </a:xfrm>
+            <a:prstGeom prst="bentConnector3">
+              <a:avLst>
+                <a:gd name="adj1" fmla="val 50000"/>
+              </a:avLst>
+            </a:prstGeom>
+            <a:ln w="38100">
+              <a:tailEnd type="triangle"/>
+            </a:ln>
+          </p:spPr>
+          <p:style>
+            <a:lnRef idx="1">
+              <a:schemeClr val="dk1"/>
+            </a:lnRef>
+            <a:fillRef idx="0">
+              <a:schemeClr val="dk1"/>
+            </a:fillRef>
+            <a:effectRef idx="0">
+              <a:schemeClr val="dk1"/>
+            </a:effectRef>
+            <a:fontRef idx="minor">
+              <a:schemeClr val="tx1"/>
+            </a:fontRef>
+          </p:style>
+        </p:cxnSp>
+        <p:sp>
+          <p:nvSpPr>
+            <p:cNvPr id="42" name="矩形: 圆角 41">
+              <a:extLst>
+                <a:ext uri="{FF2B5EF4-FFF2-40B4-BE49-F238E27FC236}">
+                  <a16:creationId xmlns:a16="http://schemas.microsoft.com/office/drawing/2014/main" id="{A7A9F149-5ABA-0C1E-6468-7610757D079F}"/>
+                </a:ext>
+              </a:extLst>
+            </p:cNvPr>
+            <p:cNvSpPr/>
+            <p:nvPr/>
+          </p:nvSpPr>
+          <p:spPr>
+            <a:xfrm>
+              <a:off x="7823780" y="1777672"/>
+              <a:ext cx="1578045" cy="654860"/>
+            </a:xfrm>
+            <a:prstGeom prst="roundRect">
+              <a:avLst/>
+            </a:prstGeom>
+            <a:ln w="19050"/>
+          </p:spPr>
+          <p:style>
+            <a:lnRef idx="2">
+              <a:schemeClr val="dk1"/>
+            </a:lnRef>
+            <a:fillRef idx="1">
+              <a:schemeClr val="lt1"/>
+            </a:fillRef>
+            <a:effectRef idx="0">
+              <a:schemeClr val="dk1"/>
+            </a:effectRef>
+            <a:fontRef idx="minor">
+              <a:schemeClr val="dk1"/>
+            </a:fontRef>
+          </p:style>
+          <p:txBody>
+            <a:bodyPr rtlCol="0" anchor="ctr"/>
+            <a:lstStyle/>
+            <a:p>
+              <a:pPr algn="ctr"/>
+              <a:r>
+                <a:rPr lang="en-US" altLang="zh-CN" dirty="0" err="1"/>
+                <a:t>deep_check</a:t>
+              </a:r>
+              <a:endParaRPr lang="en-US" altLang="zh-CN" dirty="0"/>
+            </a:p>
+            <a:p>
+              <a:pPr algn="ctr"/>
+              <a:r>
+                <a:rPr lang="zh-CN" altLang="en-US" sz="1200" dirty="0"/>
+                <a:t>增强校验与处理</a:t>
+              </a:r>
+            </a:p>
+          </p:txBody>
+        </p:sp>
+        <p:sp>
+          <p:nvSpPr>
+            <p:cNvPr id="46" name="矩形: 圆角 45">
+              <a:extLst>
+                <a:ext uri="{FF2B5EF4-FFF2-40B4-BE49-F238E27FC236}">
+                  <a16:creationId xmlns:a16="http://schemas.microsoft.com/office/drawing/2014/main" id="{DEDC7276-4855-A08E-9DF8-1B1F2D075119}"/>
+                </a:ext>
+              </a:extLst>
+            </p:cNvPr>
+            <p:cNvSpPr/>
+            <p:nvPr/>
+          </p:nvSpPr>
+          <p:spPr>
+            <a:xfrm>
+              <a:off x="9734950" y="1234265"/>
+              <a:ext cx="1697942" cy="654860"/>
+            </a:xfrm>
+            <a:prstGeom prst="roundRect">
+              <a:avLst/>
+            </a:prstGeom>
+            <a:ln w="19050"/>
+          </p:spPr>
+          <p:style>
+            <a:lnRef idx="2">
+              <a:schemeClr val="dk1"/>
+            </a:lnRef>
+            <a:fillRef idx="1">
+              <a:schemeClr val="lt1"/>
+            </a:fillRef>
+            <a:effectRef idx="0">
+              <a:schemeClr val="dk1"/>
+            </a:effectRef>
+            <a:fontRef idx="minor">
+              <a:schemeClr val="dk1"/>
+            </a:fontRef>
+          </p:style>
+          <p:txBody>
+            <a:bodyPr rtlCol="0" anchor="ctr"/>
+            <a:lstStyle/>
+            <a:p>
+              <a:pPr algn="ctr"/>
+              <a:r>
+                <a:rPr lang="en-US" altLang="zh-CN" dirty="0" err="1"/>
+                <a:t>build_response</a:t>
+              </a:r>
+              <a:endParaRPr lang="en-US" altLang="zh-CN" dirty="0"/>
+            </a:p>
+            <a:p>
+              <a:pPr algn="ctr"/>
+              <a:r>
+                <a:rPr lang="zh-CN" altLang="en-US" sz="1200" dirty="0"/>
+                <a:t>结果生成与返回</a:t>
+              </a:r>
+            </a:p>
+          </p:txBody>
+        </p:sp>
+      </p:grpSp>
+      <p:grpSp>
+        <p:nvGrpSpPr>
+          <p:cNvPr id="91" name="组合 90">
+            <a:extLst>
+              <a:ext uri="{FF2B5EF4-FFF2-40B4-BE49-F238E27FC236}">
+                <a16:creationId xmlns:a16="http://schemas.microsoft.com/office/drawing/2014/main" id="{E58E7C89-A71C-9619-4FD8-0686B2CAE4F4}"/>
+              </a:ext>
+            </a:extLst>
+          </p:cNvPr>
+          <p:cNvGrpSpPr/>
+          <p:nvPr/>
+        </p:nvGrpSpPr>
+        <p:grpSpPr>
+          <a:xfrm>
+            <a:off x="657938" y="3548659"/>
+            <a:ext cx="9453332" cy="2396533"/>
+            <a:chOff x="657938" y="3548659"/>
+            <a:chExt cx="9453332" cy="2396533"/>
+          </a:xfrm>
+        </p:grpSpPr>
+        <p:sp>
+          <p:nvSpPr>
+            <p:cNvPr id="67" name="矩形: 圆角 66">
+              <a:extLst>
+                <a:ext uri="{FF2B5EF4-FFF2-40B4-BE49-F238E27FC236}">
+                  <a16:creationId xmlns:a16="http://schemas.microsoft.com/office/drawing/2014/main" id="{804D5B5B-7BF2-CCF3-2439-F8F5AE51B273}"/>
+                </a:ext>
+              </a:extLst>
+            </p:cNvPr>
+            <p:cNvSpPr/>
+            <p:nvPr/>
+          </p:nvSpPr>
+          <p:spPr>
+            <a:xfrm>
+              <a:off x="657938" y="4091980"/>
+              <a:ext cx="1578045" cy="654860"/>
+            </a:xfrm>
+            <a:prstGeom prst="roundRect">
+              <a:avLst/>
+            </a:prstGeom>
+            <a:ln w="19050"/>
+          </p:spPr>
+          <p:style>
+            <a:lnRef idx="2">
+              <a:schemeClr val="dk1"/>
+            </a:lnRef>
+            <a:fillRef idx="1">
+              <a:schemeClr val="lt1"/>
+            </a:fillRef>
+            <a:effectRef idx="0">
+              <a:schemeClr val="dk1"/>
+            </a:effectRef>
+            <a:fontRef idx="minor">
+              <a:schemeClr val="dk1"/>
+            </a:fontRef>
+          </p:style>
+          <p:txBody>
+            <a:bodyPr rtlCol="0" anchor="ctr"/>
+            <a:lstStyle/>
+            <a:p>
+              <a:pPr algn="ctr"/>
+              <a:r>
+                <a:rPr lang="en-US" altLang="zh-CN" dirty="0" err="1"/>
+                <a:t>ingest_log</a:t>
+              </a:r>
+              <a:endParaRPr lang="en-US" altLang="zh-CN" dirty="0"/>
+            </a:p>
+            <a:p>
+              <a:pPr algn="ctr"/>
+              <a:r>
+                <a:rPr lang="zh-CN" altLang="en-US" sz="1200" dirty="0"/>
+                <a:t>日志事件接入</a:t>
+              </a:r>
+            </a:p>
+          </p:txBody>
+        </p:sp>
+        <p:cxnSp>
+          <p:nvCxnSpPr>
+            <p:cNvPr id="70" name="直接箭头连接符 69">
+              <a:extLst>
+                <a:ext uri="{FF2B5EF4-FFF2-40B4-BE49-F238E27FC236}">
+                  <a16:creationId xmlns:a16="http://schemas.microsoft.com/office/drawing/2014/main" id="{57D8CBF8-8BEC-41A0-C566-B3E40159C55A}"/>
+                </a:ext>
+              </a:extLst>
+            </p:cNvPr>
+            <p:cNvCxnSpPr>
+              <a:cxnSpLocks/>
+              <a:stCxn id="67" idx="3"/>
+            </p:cNvCxnSpPr>
+            <p:nvPr/>
+          </p:nvCxnSpPr>
+          <p:spPr>
+            <a:xfrm>
+              <a:off x="2235983" y="4419410"/>
+              <a:ext cx="252512" cy="0"/>
+            </a:xfrm>
+            <a:prstGeom prst="straightConnector1">
+              <a:avLst/>
+            </a:prstGeom>
+            <a:ln w="38100">
+              <a:tailEnd type="triangle"/>
+            </a:ln>
+          </p:spPr>
+          <p:style>
+            <a:lnRef idx="1">
+              <a:schemeClr val="dk1"/>
+            </a:lnRef>
+            <a:fillRef idx="0">
+              <a:schemeClr val="dk1"/>
+            </a:fillRef>
+            <a:effectRef idx="0">
+              <a:schemeClr val="dk1"/>
+            </a:effectRef>
+            <a:fontRef idx="minor">
+              <a:schemeClr val="tx1"/>
+            </a:fontRef>
+          </p:style>
+        </p:cxnSp>
+        <p:sp>
+          <p:nvSpPr>
+            <p:cNvPr id="71" name="矩形: 圆角 70">
+              <a:extLst>
+                <a:ext uri="{FF2B5EF4-FFF2-40B4-BE49-F238E27FC236}">
+                  <a16:creationId xmlns:a16="http://schemas.microsoft.com/office/drawing/2014/main" id="{9E18B5F5-B4D8-06B8-081E-1169420A2D89}"/>
+                </a:ext>
+              </a:extLst>
+            </p:cNvPr>
+            <p:cNvSpPr/>
+            <p:nvPr/>
+          </p:nvSpPr>
+          <p:spPr>
+            <a:xfrm>
+              <a:off x="2488495" y="4091980"/>
+              <a:ext cx="1826838" cy="654860"/>
+            </a:xfrm>
+            <a:prstGeom prst="roundRect">
+              <a:avLst/>
+            </a:prstGeom>
+            <a:ln w="19050"/>
+          </p:spPr>
+          <p:style>
+            <a:lnRef idx="2">
+              <a:schemeClr val="dk1"/>
+            </a:lnRef>
+            <a:fillRef idx="1">
+              <a:schemeClr val="lt1"/>
+            </a:fillRef>
+            <a:effectRef idx="0">
+              <a:schemeClr val="dk1"/>
+            </a:effectRef>
+            <a:fontRef idx="minor">
+              <a:schemeClr val="dk1"/>
+            </a:fontRef>
+          </p:style>
+          <p:txBody>
+            <a:bodyPr rtlCol="0" anchor="ctr"/>
+            <a:lstStyle/>
+            <a:p>
+              <a:pPr algn="ctr"/>
+              <a:r>
+                <a:rPr lang="en-US" altLang="zh-CN" dirty="0" err="1"/>
+                <a:t>normalize_event</a:t>
+              </a:r>
+              <a:r>
+                <a:rPr lang="zh-CN" altLang="en-US" sz="1200" dirty="0"/>
+                <a:t>事件标准化</a:t>
+              </a:r>
+            </a:p>
+          </p:txBody>
+        </p:sp>
+        <p:sp>
+          <p:nvSpPr>
+            <p:cNvPr id="72" name="矩形: 圆角 71">
+              <a:extLst>
+                <a:ext uri="{FF2B5EF4-FFF2-40B4-BE49-F238E27FC236}">
+                  <a16:creationId xmlns:a16="http://schemas.microsoft.com/office/drawing/2014/main" id="{B85D84D6-6D62-0B47-F347-C3317B396632}"/>
+                </a:ext>
+              </a:extLst>
+            </p:cNvPr>
+            <p:cNvSpPr/>
+            <p:nvPr/>
+          </p:nvSpPr>
+          <p:spPr>
+            <a:xfrm>
+              <a:off x="4572723" y="4089920"/>
+              <a:ext cx="1585469" cy="654860"/>
+            </a:xfrm>
+            <a:prstGeom prst="roundRect">
+              <a:avLst/>
+            </a:prstGeom>
+            <a:ln w="19050"/>
+          </p:spPr>
+          <p:style>
+            <a:lnRef idx="2">
+              <a:schemeClr val="dk1"/>
+            </a:lnRef>
+            <a:fillRef idx="1">
+              <a:schemeClr val="lt1"/>
+            </a:fillRef>
+            <a:effectRef idx="0">
+              <a:schemeClr val="dk1"/>
+            </a:effectRef>
+            <a:fontRef idx="minor">
+              <a:schemeClr val="dk1"/>
+            </a:fontRef>
+          </p:style>
+          <p:txBody>
+            <a:bodyPr rtlCol="0" anchor="ctr"/>
+            <a:lstStyle/>
+            <a:p>
+              <a:pPr algn="ctr"/>
+              <a:r>
+                <a:rPr lang="en-US" altLang="zh-CN" dirty="0" err="1"/>
+                <a:t>anomaly_gate</a:t>
+              </a:r>
+              <a:r>
+                <a:rPr lang="zh-CN" altLang="en-US" sz="1200" dirty="0"/>
+                <a:t>异常模式判断</a:t>
+              </a:r>
+            </a:p>
+          </p:txBody>
+        </p:sp>
+        <p:cxnSp>
+          <p:nvCxnSpPr>
+            <p:cNvPr id="73" name="直接箭头连接符 72">
+              <a:extLst>
+                <a:ext uri="{FF2B5EF4-FFF2-40B4-BE49-F238E27FC236}">
+                  <a16:creationId xmlns:a16="http://schemas.microsoft.com/office/drawing/2014/main" id="{A6EF6907-8EAA-DC3F-D762-D3A5F7296012}"/>
+                </a:ext>
+              </a:extLst>
+            </p:cNvPr>
+            <p:cNvCxnSpPr>
+              <a:cxnSpLocks/>
+            </p:cNvCxnSpPr>
+            <p:nvPr/>
+          </p:nvCxnSpPr>
+          <p:spPr>
+            <a:xfrm>
+              <a:off x="4327635" y="4417350"/>
+              <a:ext cx="252512" cy="0"/>
+            </a:xfrm>
+            <a:prstGeom prst="straightConnector1">
+              <a:avLst/>
+            </a:prstGeom>
+            <a:ln w="38100">
+              <a:tailEnd type="triangle"/>
+            </a:ln>
+          </p:spPr>
+          <p:style>
+            <a:lnRef idx="1">
+              <a:schemeClr val="dk1"/>
+            </a:lnRef>
+            <a:fillRef idx="0">
+              <a:schemeClr val="dk1"/>
+            </a:fillRef>
+            <a:effectRef idx="0">
+              <a:schemeClr val="dk1"/>
+            </a:effectRef>
+            <a:fontRef idx="minor">
+              <a:schemeClr val="tx1"/>
+            </a:fontRef>
+          </p:style>
+        </p:cxnSp>
+        <p:cxnSp>
+          <p:nvCxnSpPr>
+            <p:cNvPr id="76" name="连接符: 肘形 75">
+              <a:extLst>
+                <a:ext uri="{FF2B5EF4-FFF2-40B4-BE49-F238E27FC236}">
+                  <a16:creationId xmlns:a16="http://schemas.microsoft.com/office/drawing/2014/main" id="{1E147E05-15AA-CB85-781A-2F3850CC7B92}"/>
+                </a:ext>
+              </a:extLst>
+            </p:cNvPr>
+            <p:cNvCxnSpPr>
+              <a:cxnSpLocks/>
+              <a:endCxn id="79" idx="1"/>
+            </p:cNvCxnSpPr>
+            <p:nvPr/>
+          </p:nvCxnSpPr>
+          <p:spPr>
+            <a:xfrm>
+              <a:off x="6158192" y="4417350"/>
+              <a:ext cx="391070" cy="600206"/>
+            </a:xfrm>
+            <a:prstGeom prst="bentConnector3">
+              <a:avLst>
+                <a:gd name="adj1" fmla="val 50000"/>
+              </a:avLst>
+            </a:prstGeom>
+            <a:ln w="38100">
+              <a:tailEnd type="triangle"/>
+            </a:ln>
+          </p:spPr>
+          <p:style>
+            <a:lnRef idx="1">
+              <a:schemeClr val="dk1"/>
+            </a:lnRef>
+            <a:fillRef idx="0">
+              <a:schemeClr val="dk1"/>
+            </a:fillRef>
+            <a:effectRef idx="0">
+              <a:schemeClr val="dk1"/>
+            </a:effectRef>
+            <a:fontRef idx="minor">
+              <a:schemeClr val="tx1"/>
+            </a:fontRef>
+          </p:style>
+        </p:cxnSp>
+        <p:sp>
+          <p:nvSpPr>
+            <p:cNvPr id="77" name="矩形: 圆角 76">
+              <a:extLst>
+                <a:ext uri="{FF2B5EF4-FFF2-40B4-BE49-F238E27FC236}">
+                  <a16:creationId xmlns:a16="http://schemas.microsoft.com/office/drawing/2014/main" id="{D6751835-AD6D-B5C5-91CF-19C11A628268}"/>
+                </a:ext>
+              </a:extLst>
+            </p:cNvPr>
+            <p:cNvSpPr/>
+            <p:nvPr/>
+          </p:nvSpPr>
+          <p:spPr>
+            <a:xfrm>
+              <a:off x="6549262" y="3548659"/>
+              <a:ext cx="1654700" cy="654860"/>
+            </a:xfrm>
+            <a:prstGeom prst="roundRect">
+              <a:avLst/>
+            </a:prstGeom>
+            <a:ln w="19050"/>
+          </p:spPr>
+          <p:style>
+            <a:lnRef idx="2">
+              <a:schemeClr val="dk1"/>
+            </a:lnRef>
+            <a:fillRef idx="1">
+              <a:schemeClr val="lt1"/>
+            </a:fillRef>
+            <a:effectRef idx="0">
+              <a:schemeClr val="dk1"/>
+            </a:effectRef>
+            <a:fontRef idx="minor">
+              <a:schemeClr val="dk1"/>
+            </a:fontRef>
+          </p:style>
+          <p:txBody>
+            <a:bodyPr rtlCol="0" anchor="ctr"/>
+            <a:lstStyle/>
+            <a:p>
+              <a:pPr algn="ctr"/>
+              <a:r>
+                <a:rPr lang="en-US" altLang="zh-CN" dirty="0" err="1"/>
+                <a:t>archive_event</a:t>
+              </a:r>
+              <a:r>
+                <a:rPr lang="zh-CN" altLang="en-US" sz="1200" dirty="0"/>
+                <a:t>普通事件归档</a:t>
+              </a:r>
+            </a:p>
+          </p:txBody>
+        </p:sp>
+        <p:cxnSp>
+          <p:nvCxnSpPr>
+            <p:cNvPr id="78" name="连接符: 肘形 77">
+              <a:extLst>
+                <a:ext uri="{FF2B5EF4-FFF2-40B4-BE49-F238E27FC236}">
+                  <a16:creationId xmlns:a16="http://schemas.microsoft.com/office/drawing/2014/main" id="{4666D667-00F4-0B9E-76EC-C68BAA100D61}"/>
+                </a:ext>
+              </a:extLst>
+            </p:cNvPr>
+            <p:cNvCxnSpPr>
+              <a:cxnSpLocks/>
+              <a:stCxn id="72" idx="3"/>
+              <a:endCxn id="77" idx="1"/>
+            </p:cNvCxnSpPr>
+            <p:nvPr/>
+          </p:nvCxnSpPr>
+          <p:spPr>
+            <a:xfrm flipV="1">
+              <a:off x="6158192" y="3876089"/>
+              <a:ext cx="391070" cy="541261"/>
+            </a:xfrm>
+            <a:prstGeom prst="bentConnector3">
+              <a:avLst>
+                <a:gd name="adj1" fmla="val 50000"/>
+              </a:avLst>
+            </a:prstGeom>
+            <a:ln w="38100">
+              <a:tailEnd type="triangle"/>
+            </a:ln>
+          </p:spPr>
+          <p:style>
+            <a:lnRef idx="1">
+              <a:schemeClr val="dk1"/>
+            </a:lnRef>
+            <a:fillRef idx="0">
+              <a:schemeClr val="dk1"/>
+            </a:fillRef>
+            <a:effectRef idx="0">
+              <a:schemeClr val="dk1"/>
+            </a:effectRef>
+            <a:fontRef idx="minor">
+              <a:schemeClr val="tx1"/>
+            </a:fontRef>
+          </p:style>
+        </p:cxnSp>
+        <p:sp>
+          <p:nvSpPr>
+            <p:cNvPr id="79" name="矩形: 圆角 78">
+              <a:extLst>
+                <a:ext uri="{FF2B5EF4-FFF2-40B4-BE49-F238E27FC236}">
+                  <a16:creationId xmlns:a16="http://schemas.microsoft.com/office/drawing/2014/main" id="{382BB62C-D4BF-5928-2217-A19873731888}"/>
+                </a:ext>
+              </a:extLst>
+            </p:cNvPr>
+            <p:cNvSpPr/>
+            <p:nvPr/>
+          </p:nvSpPr>
+          <p:spPr>
+            <a:xfrm>
+              <a:off x="6549262" y="4690126"/>
+              <a:ext cx="1578045" cy="654860"/>
+            </a:xfrm>
+            <a:prstGeom prst="roundRect">
+              <a:avLst/>
+            </a:prstGeom>
+            <a:ln w="19050"/>
+          </p:spPr>
+          <p:style>
+            <a:lnRef idx="2">
+              <a:schemeClr val="dk1"/>
+            </a:lnRef>
+            <a:fillRef idx="1">
+              <a:schemeClr val="lt1"/>
+            </a:fillRef>
+            <a:effectRef idx="0">
+              <a:schemeClr val="dk1"/>
+            </a:effectRef>
+            <a:fontRef idx="minor">
+              <a:schemeClr val="dk1"/>
+            </a:fontRef>
+          </p:style>
+          <p:txBody>
+            <a:bodyPr rtlCol="0" anchor="ctr"/>
+            <a:lstStyle/>
+            <a:p>
+              <a:pPr algn="ctr"/>
+              <a:r>
+                <a:rPr lang="en-US" altLang="zh-CN" dirty="0" err="1"/>
+                <a:t>enrich_alert</a:t>
+              </a:r>
+              <a:endParaRPr lang="en-US" altLang="zh-CN" dirty="0"/>
+            </a:p>
+            <a:p>
+              <a:pPr algn="ctr"/>
+              <a:r>
+                <a:rPr lang="zh-CN" altLang="en-US" sz="1200" dirty="0"/>
+                <a:t>异常事件告警富化</a:t>
+              </a:r>
+            </a:p>
+          </p:txBody>
+        </p:sp>
+        <p:cxnSp>
+          <p:nvCxnSpPr>
+            <p:cNvPr id="86" name="连接符: 肘形 85">
+              <a:extLst>
+                <a:ext uri="{FF2B5EF4-FFF2-40B4-BE49-F238E27FC236}">
+                  <a16:creationId xmlns:a16="http://schemas.microsoft.com/office/drawing/2014/main" id="{BA41EFCA-1A72-11FC-C0AD-0BF55B44C1D1}"/>
+                </a:ext>
+              </a:extLst>
+            </p:cNvPr>
+            <p:cNvCxnSpPr>
+              <a:cxnSpLocks/>
+            </p:cNvCxnSpPr>
+            <p:nvPr/>
+          </p:nvCxnSpPr>
+          <p:spPr>
+            <a:xfrm>
+              <a:off x="8134731" y="5017556"/>
+              <a:ext cx="391070" cy="600206"/>
+            </a:xfrm>
+            <a:prstGeom prst="bentConnector3">
+              <a:avLst>
+                <a:gd name="adj1" fmla="val 50000"/>
+              </a:avLst>
+            </a:prstGeom>
+            <a:ln w="38100">
+              <a:tailEnd type="triangle"/>
+            </a:ln>
+          </p:spPr>
+          <p:style>
+            <a:lnRef idx="1">
+              <a:schemeClr val="dk1"/>
+            </a:lnRef>
+            <a:fillRef idx="0">
+              <a:schemeClr val="dk1"/>
+            </a:fillRef>
+            <a:effectRef idx="0">
+              <a:schemeClr val="dk1"/>
+            </a:effectRef>
+            <a:fontRef idx="minor">
+              <a:schemeClr val="tx1"/>
+            </a:fontRef>
+          </p:style>
+        </p:cxnSp>
+        <p:cxnSp>
+          <p:nvCxnSpPr>
+            <p:cNvPr id="87" name="连接符: 肘形 86">
+              <a:extLst>
+                <a:ext uri="{FF2B5EF4-FFF2-40B4-BE49-F238E27FC236}">
+                  <a16:creationId xmlns:a16="http://schemas.microsoft.com/office/drawing/2014/main" id="{A74BCD61-0C6C-0BE8-D2A7-0BB064E825D6}"/>
+                </a:ext>
+              </a:extLst>
+            </p:cNvPr>
+            <p:cNvCxnSpPr>
+              <a:cxnSpLocks/>
+            </p:cNvCxnSpPr>
+            <p:nvPr/>
+          </p:nvCxnSpPr>
+          <p:spPr>
+            <a:xfrm flipV="1">
+              <a:off x="8134731" y="4476295"/>
+              <a:ext cx="391070" cy="541261"/>
+            </a:xfrm>
+            <a:prstGeom prst="bentConnector3">
+              <a:avLst>
+                <a:gd name="adj1" fmla="val 50000"/>
+              </a:avLst>
+            </a:prstGeom>
+            <a:ln w="38100">
+              <a:tailEnd type="triangle"/>
+            </a:ln>
+          </p:spPr>
+          <p:style>
+            <a:lnRef idx="1">
+              <a:schemeClr val="dk1"/>
+            </a:lnRef>
+            <a:fillRef idx="0">
+              <a:schemeClr val="dk1"/>
+            </a:fillRef>
+            <a:effectRef idx="0">
+              <a:schemeClr val="dk1"/>
+            </a:effectRef>
+            <a:fontRef idx="minor">
+              <a:schemeClr val="tx1"/>
+            </a:fontRef>
+          </p:style>
+        </p:cxnSp>
+        <p:sp>
+          <p:nvSpPr>
+            <p:cNvPr id="88" name="矩形: 圆角 87">
+              <a:extLst>
+                <a:ext uri="{FF2B5EF4-FFF2-40B4-BE49-F238E27FC236}">
+                  <a16:creationId xmlns:a16="http://schemas.microsoft.com/office/drawing/2014/main" id="{9B533D81-8DB5-9AE7-6661-36810F60B62F}"/>
+                </a:ext>
+              </a:extLst>
+            </p:cNvPr>
+            <p:cNvSpPr/>
+            <p:nvPr/>
+          </p:nvSpPr>
+          <p:spPr>
+            <a:xfrm>
+              <a:off x="8511762" y="4146719"/>
+              <a:ext cx="1578045" cy="654860"/>
+            </a:xfrm>
+            <a:prstGeom prst="roundRect">
+              <a:avLst/>
+            </a:prstGeom>
+            <a:ln w="19050"/>
+          </p:spPr>
+          <p:style>
+            <a:lnRef idx="2">
+              <a:schemeClr val="dk1"/>
+            </a:lnRef>
+            <a:fillRef idx="1">
+              <a:schemeClr val="lt1"/>
+            </a:fillRef>
+            <a:effectRef idx="0">
+              <a:schemeClr val="dk1"/>
+            </a:effectRef>
+            <a:fontRef idx="minor">
+              <a:schemeClr val="dk1"/>
+            </a:fontRef>
+          </p:style>
+          <p:txBody>
+            <a:bodyPr rtlCol="0" anchor="ctr"/>
+            <a:lstStyle/>
+            <a:p>
+              <a:pPr algn="ctr"/>
+              <a:r>
+                <a:rPr lang="en-US" altLang="zh-CN" dirty="0" err="1"/>
+                <a:t>notify_basic</a:t>
+              </a:r>
+              <a:endParaRPr lang="en-US" altLang="zh-CN" dirty="0"/>
+            </a:p>
+            <a:p>
+              <a:pPr algn="ctr"/>
+              <a:r>
+                <a:rPr lang="zh-CN" altLang="en-US" sz="1200" dirty="0"/>
+                <a:t>普通通知</a:t>
+              </a:r>
+            </a:p>
+          </p:txBody>
+        </p:sp>
+        <p:sp>
+          <p:nvSpPr>
+            <p:cNvPr id="89" name="矩形: 圆角 88">
+              <a:extLst>
+                <a:ext uri="{FF2B5EF4-FFF2-40B4-BE49-F238E27FC236}">
+                  <a16:creationId xmlns:a16="http://schemas.microsoft.com/office/drawing/2014/main" id="{2C5C397C-8475-A0D1-248E-41B1C82DC694}"/>
+                </a:ext>
+              </a:extLst>
+            </p:cNvPr>
+            <p:cNvSpPr/>
+            <p:nvPr/>
+          </p:nvSpPr>
+          <p:spPr>
+            <a:xfrm>
+              <a:off x="8533225" y="5290332"/>
+              <a:ext cx="1578045" cy="654860"/>
+            </a:xfrm>
+            <a:prstGeom prst="roundRect">
+              <a:avLst/>
+            </a:prstGeom>
+            <a:ln w="19050"/>
+          </p:spPr>
+          <p:style>
+            <a:lnRef idx="2">
+              <a:schemeClr val="dk1"/>
+            </a:lnRef>
+            <a:fillRef idx="1">
+              <a:schemeClr val="lt1"/>
+            </a:fillRef>
+            <a:effectRef idx="0">
+              <a:schemeClr val="dk1"/>
+            </a:effectRef>
+            <a:fontRef idx="minor">
+              <a:schemeClr val="dk1"/>
+            </a:fontRef>
+          </p:style>
+          <p:txBody>
+            <a:bodyPr rtlCol="0" anchor="ctr"/>
+            <a:lstStyle/>
+            <a:p>
+              <a:pPr algn="ctr"/>
+              <a:r>
+                <a:rPr lang="en-US" altLang="zh-CN" dirty="0" err="1"/>
+                <a:t>notify_urgent</a:t>
+              </a:r>
+              <a:endParaRPr lang="en-US" altLang="zh-CN" dirty="0"/>
+            </a:p>
+            <a:p>
+              <a:pPr algn="ctr"/>
+              <a:r>
+                <a:rPr lang="zh-CN" altLang="en-US" sz="1200" dirty="0"/>
+                <a:t>紧急通知</a:t>
+              </a:r>
+            </a:p>
+          </p:txBody>
+        </p:sp>
+      </p:grpSp>
+    </p:spTree>
+    <p:extLst>
+      <p:ext uri="{BB962C8B-B14F-4D97-AF65-F5344CB8AC3E}">
+        <p14:creationId xmlns:p14="http://schemas.microsoft.com/office/powerpoint/2010/main" val="788673547"/>
+      </p:ext>
+    </p:extLst>
+  </p:cSld>
+  <p:clrMapOvr>
+    <a:masterClrMapping/>
+  </p:clrMapOvr>
+</p:sld>
+</file>
+
+<file path=ppt/slides/slide15.xml><?xml version="1.0" encoding="utf-8"?>
+<p:sld xmlns:a="http://schemas.openxmlformats.org/drawingml/2006/main" xmlns:r="http://schemas.openxmlformats.org/officeDocument/2006/relationships" xmlns:p="http://schemas.openxmlformats.org/presentationml/2006/main">
+  <p:cSld>
+    <p:spTree>
+      <p:nvGrpSpPr>
+        <p:cNvPr id="1" name=""/>
+        <p:cNvGrpSpPr/>
+        <p:nvPr/>
+      </p:nvGrpSpPr>
+      <p:grpSpPr>
+        <a:xfrm>
+          <a:off x="0" y="0"/>
+          <a:ext cx="0" cy="0"/>
+          <a:chOff x="0" y="0"/>
+          <a:chExt cx="0" cy="0"/>
+        </a:xfrm>
+      </p:grpSpPr>
+      <p:grpSp>
+        <p:nvGrpSpPr>
+          <p:cNvPr id="69" name="组合 68">
+            <a:extLst>
+              <a:ext uri="{FF2B5EF4-FFF2-40B4-BE49-F238E27FC236}">
+                <a16:creationId xmlns:a16="http://schemas.microsoft.com/office/drawing/2014/main" id="{6A4BA878-A415-0709-0FF3-CEF660DFF3AC}"/>
+              </a:ext>
+            </a:extLst>
+          </p:cNvPr>
+          <p:cNvGrpSpPr/>
+          <p:nvPr/>
+        </p:nvGrpSpPr>
+        <p:grpSpPr>
+          <a:xfrm>
+            <a:off x="484386" y="3602914"/>
+            <a:ext cx="13431609" cy="2422433"/>
+            <a:chOff x="484386" y="3602914"/>
+            <a:chExt cx="13431609" cy="2422433"/>
+          </a:xfrm>
+        </p:grpSpPr>
+        <p:sp>
+          <p:nvSpPr>
+            <p:cNvPr id="9" name="矩形: 圆角 8">
+              <a:extLst>
+                <a:ext uri="{FF2B5EF4-FFF2-40B4-BE49-F238E27FC236}">
+                  <a16:creationId xmlns:a16="http://schemas.microsoft.com/office/drawing/2014/main" id="{0E982D34-6CD3-0C6F-147D-1E4F4962AA95}"/>
+                </a:ext>
+              </a:extLst>
+            </p:cNvPr>
+            <p:cNvSpPr/>
+            <p:nvPr/>
+          </p:nvSpPr>
+          <p:spPr>
+            <a:xfrm>
+              <a:off x="484386" y="4500537"/>
+              <a:ext cx="1578045" cy="654860"/>
+            </a:xfrm>
+            <a:prstGeom prst="roundRect">
+              <a:avLst/>
+            </a:prstGeom>
+            <a:ln w="19050"/>
+          </p:spPr>
+          <p:style>
+            <a:lnRef idx="2">
+              <a:schemeClr val="dk1"/>
+            </a:lnRef>
+            <a:fillRef idx="1">
+              <a:schemeClr val="lt1"/>
+            </a:fillRef>
+            <a:effectRef idx="0">
+              <a:schemeClr val="dk1"/>
+            </a:effectRef>
+            <a:fontRef idx="minor">
+              <a:schemeClr val="dk1"/>
+            </a:fontRef>
+          </p:style>
+          <p:txBody>
+            <a:bodyPr rtlCol="0" anchor="ctr"/>
+            <a:lstStyle/>
+            <a:p>
+              <a:pPr algn="ctr"/>
+              <a:r>
+                <a:rPr lang="en-US" altLang="zh-CN" dirty="0" err="1"/>
+                <a:t>ingest_media</a:t>
+              </a:r>
+              <a:endParaRPr lang="en-US" altLang="zh-CN" dirty="0"/>
+            </a:p>
+            <a:p>
+              <a:pPr algn="ctr"/>
+              <a:r>
+                <a:rPr lang="zh-CN" altLang="en-US" sz="1200" dirty="0"/>
+                <a:t>内容上传事件接入</a:t>
+              </a:r>
+            </a:p>
+          </p:txBody>
+        </p:sp>
+        <p:cxnSp>
+          <p:nvCxnSpPr>
+            <p:cNvPr id="19" name="直接箭头连接符 18">
+              <a:extLst>
+                <a:ext uri="{FF2B5EF4-FFF2-40B4-BE49-F238E27FC236}">
+                  <a16:creationId xmlns:a16="http://schemas.microsoft.com/office/drawing/2014/main" id="{3DACF067-47FA-F4FC-09E2-ABB7ABF75A78}"/>
+                </a:ext>
+              </a:extLst>
+            </p:cNvPr>
+            <p:cNvCxnSpPr>
+              <a:cxnSpLocks/>
+              <a:stCxn id="9" idx="3"/>
+            </p:cNvCxnSpPr>
+            <p:nvPr/>
+          </p:nvCxnSpPr>
+          <p:spPr>
+            <a:xfrm>
+              <a:off x="2062431" y="4827967"/>
+              <a:ext cx="252512" cy="0"/>
+            </a:xfrm>
+            <a:prstGeom prst="straightConnector1">
+              <a:avLst/>
+            </a:prstGeom>
+            <a:ln w="38100">
+              <a:tailEnd type="triangle"/>
+            </a:ln>
+          </p:spPr>
+          <p:style>
+            <a:lnRef idx="1">
+              <a:schemeClr val="dk1"/>
+            </a:lnRef>
+            <a:fillRef idx="0">
+              <a:schemeClr val="dk1"/>
+            </a:fillRef>
+            <a:effectRef idx="0">
+              <a:schemeClr val="dk1"/>
+            </a:effectRef>
+            <a:fontRef idx="minor">
+              <a:schemeClr val="tx1"/>
+            </a:fontRef>
+          </p:style>
+        </p:cxnSp>
+        <p:sp>
+          <p:nvSpPr>
+            <p:cNvPr id="2" name="矩形: 圆角 1">
+              <a:extLst>
+                <a:ext uri="{FF2B5EF4-FFF2-40B4-BE49-F238E27FC236}">
+                  <a16:creationId xmlns:a16="http://schemas.microsoft.com/office/drawing/2014/main" id="{BF5C341E-B6ED-A559-C4F3-2D6AA12AFC03}"/>
+                </a:ext>
+              </a:extLst>
+            </p:cNvPr>
+            <p:cNvSpPr/>
+            <p:nvPr/>
+          </p:nvSpPr>
+          <p:spPr>
+            <a:xfrm>
+              <a:off x="2327245" y="4500537"/>
+              <a:ext cx="1578045" cy="654860"/>
+            </a:xfrm>
+            <a:prstGeom prst="roundRect">
+              <a:avLst/>
+            </a:prstGeom>
+            <a:ln w="19050"/>
+          </p:spPr>
+          <p:style>
+            <a:lnRef idx="2">
+              <a:schemeClr val="dk1"/>
+            </a:lnRef>
+            <a:fillRef idx="1">
+              <a:schemeClr val="lt1"/>
+            </a:fillRef>
+            <a:effectRef idx="0">
+              <a:schemeClr val="dk1"/>
+            </a:effectRef>
+            <a:fontRef idx="minor">
+              <a:schemeClr val="dk1"/>
+            </a:fontRef>
+          </p:style>
+          <p:txBody>
+            <a:bodyPr rtlCol="0" anchor="ctr"/>
+            <a:lstStyle/>
+            <a:p>
+              <a:pPr algn="ctr"/>
+              <a:r>
+                <a:rPr lang="en-US" altLang="zh-CN" dirty="0" err="1"/>
+                <a:t>prep_input</a:t>
+              </a:r>
+              <a:endParaRPr lang="en-US" altLang="zh-CN" dirty="0"/>
+            </a:p>
+            <a:p>
+              <a:pPr algn="ctr"/>
+              <a:r>
+                <a:rPr lang="zh-CN" altLang="en-US" sz="1200" dirty="0"/>
+                <a:t>输入预处理</a:t>
+              </a:r>
+            </a:p>
+          </p:txBody>
+        </p:sp>
+        <p:cxnSp>
+          <p:nvCxnSpPr>
+            <p:cNvPr id="3" name="连接符: 肘形 2">
+              <a:extLst>
+                <a:ext uri="{FF2B5EF4-FFF2-40B4-BE49-F238E27FC236}">
+                  <a16:creationId xmlns:a16="http://schemas.microsoft.com/office/drawing/2014/main" id="{A6BCA606-4CC8-B40A-23C3-FBBF525676C7}"/>
+                </a:ext>
+              </a:extLst>
+            </p:cNvPr>
+            <p:cNvCxnSpPr>
+              <a:cxnSpLocks/>
+              <a:stCxn id="2" idx="3"/>
+              <a:endCxn id="11" idx="1"/>
+            </p:cNvCxnSpPr>
+            <p:nvPr/>
+          </p:nvCxnSpPr>
+          <p:spPr>
+            <a:xfrm>
+              <a:off x="3905290" y="4827967"/>
+              <a:ext cx="466771" cy="869950"/>
+            </a:xfrm>
+            <a:prstGeom prst="bentConnector3">
+              <a:avLst>
+                <a:gd name="adj1" fmla="val 50000"/>
+              </a:avLst>
+            </a:prstGeom>
+            <a:ln w="38100">
+              <a:tailEnd type="triangle"/>
+            </a:ln>
+          </p:spPr>
+          <p:style>
+            <a:lnRef idx="1">
+              <a:schemeClr val="dk1"/>
+            </a:lnRef>
+            <a:fillRef idx="0">
+              <a:schemeClr val="dk1"/>
+            </a:fillRef>
+            <a:effectRef idx="0">
+              <a:schemeClr val="dk1"/>
+            </a:effectRef>
+            <a:fontRef idx="minor">
+              <a:schemeClr val="tx1"/>
+            </a:fontRef>
+          </p:style>
+        </p:cxnSp>
+        <p:cxnSp>
+          <p:nvCxnSpPr>
+            <p:cNvPr id="4" name="连接符: 肘形 3">
+              <a:extLst>
+                <a:ext uri="{FF2B5EF4-FFF2-40B4-BE49-F238E27FC236}">
+                  <a16:creationId xmlns:a16="http://schemas.microsoft.com/office/drawing/2014/main" id="{3AB5D9AF-B312-4F10-73E1-937D71713FD5}"/>
+                </a:ext>
+              </a:extLst>
+            </p:cNvPr>
+            <p:cNvCxnSpPr>
+              <a:cxnSpLocks/>
+              <a:stCxn id="2" idx="3"/>
+              <a:endCxn id="8" idx="1"/>
+            </p:cNvCxnSpPr>
+            <p:nvPr/>
+          </p:nvCxnSpPr>
+          <p:spPr>
+            <a:xfrm flipV="1">
+              <a:off x="3905290" y="3957134"/>
+              <a:ext cx="466769" cy="870833"/>
+            </a:xfrm>
+            <a:prstGeom prst="bentConnector3">
+              <a:avLst>
+                <a:gd name="adj1" fmla="val 50000"/>
+              </a:avLst>
+            </a:prstGeom>
+            <a:ln w="38100">
+              <a:tailEnd type="triangle"/>
+            </a:ln>
+          </p:spPr>
+          <p:style>
+            <a:lnRef idx="1">
+              <a:schemeClr val="dk1"/>
+            </a:lnRef>
+            <a:fillRef idx="0">
+              <a:schemeClr val="dk1"/>
+            </a:fillRef>
+            <a:effectRef idx="0">
+              <a:schemeClr val="dk1"/>
+            </a:effectRef>
+            <a:fontRef idx="minor">
+              <a:schemeClr val="tx1"/>
+            </a:fontRef>
+          </p:style>
+        </p:cxnSp>
+        <p:cxnSp>
+          <p:nvCxnSpPr>
+            <p:cNvPr id="5" name="连接符: 肘形 4">
+              <a:extLst>
+                <a:ext uri="{FF2B5EF4-FFF2-40B4-BE49-F238E27FC236}">
+                  <a16:creationId xmlns:a16="http://schemas.microsoft.com/office/drawing/2014/main" id="{002C85BC-D91B-4A3E-6998-9737FEDC4D70}"/>
+                </a:ext>
+              </a:extLst>
+            </p:cNvPr>
+            <p:cNvCxnSpPr>
+              <a:cxnSpLocks/>
+              <a:stCxn id="2" idx="3"/>
+              <a:endCxn id="10" idx="1"/>
+            </p:cNvCxnSpPr>
+            <p:nvPr/>
+          </p:nvCxnSpPr>
+          <p:spPr>
+            <a:xfrm flipV="1">
+              <a:off x="3905290" y="4827380"/>
+              <a:ext cx="466770" cy="587"/>
+            </a:xfrm>
+            <a:prstGeom prst="bentConnector3">
+              <a:avLst>
+                <a:gd name="adj1" fmla="val 50000"/>
+              </a:avLst>
+            </a:prstGeom>
+            <a:ln w="38100">
+              <a:tailEnd type="triangle"/>
+            </a:ln>
+          </p:spPr>
+          <p:style>
+            <a:lnRef idx="1">
+              <a:schemeClr val="dk1"/>
+            </a:lnRef>
+            <a:fillRef idx="0">
+              <a:schemeClr val="dk1"/>
+            </a:fillRef>
+            <a:effectRef idx="0">
+              <a:schemeClr val="dk1"/>
+            </a:effectRef>
+            <a:fontRef idx="minor">
+              <a:schemeClr val="tx1"/>
+            </a:fontRef>
+          </p:style>
+        </p:cxnSp>
+        <p:sp>
+          <p:nvSpPr>
+            <p:cNvPr id="8" name="矩形: 圆角 7">
+              <a:extLst>
+                <a:ext uri="{FF2B5EF4-FFF2-40B4-BE49-F238E27FC236}">
+                  <a16:creationId xmlns:a16="http://schemas.microsoft.com/office/drawing/2014/main" id="{DD411304-0641-0500-2F40-661B23ADD868}"/>
+                </a:ext>
+              </a:extLst>
+            </p:cNvPr>
+            <p:cNvSpPr/>
+            <p:nvPr/>
+          </p:nvSpPr>
+          <p:spPr>
+            <a:xfrm>
+              <a:off x="4372059" y="3629704"/>
+              <a:ext cx="1578045" cy="654860"/>
+            </a:xfrm>
+            <a:prstGeom prst="roundRect">
+              <a:avLst/>
+            </a:prstGeom>
+            <a:ln w="19050"/>
+          </p:spPr>
+          <p:style>
+            <a:lnRef idx="2">
+              <a:schemeClr val="dk1"/>
+            </a:lnRef>
+            <a:fillRef idx="1">
+              <a:schemeClr val="lt1"/>
+            </a:fillRef>
+            <a:effectRef idx="0">
+              <a:schemeClr val="dk1"/>
+            </a:effectRef>
+            <a:fontRef idx="minor">
+              <a:schemeClr val="dk1"/>
+            </a:fontRef>
+          </p:style>
+          <p:txBody>
+            <a:bodyPr rtlCol="0" anchor="ctr"/>
+            <a:lstStyle/>
+            <a:p>
+              <a:pPr algn="ctr"/>
+              <a:r>
+                <a:rPr lang="en-US" altLang="zh-CN" dirty="0" err="1"/>
+                <a:t>scan_meta</a:t>
+              </a:r>
+              <a:endParaRPr lang="en-US" altLang="zh-CN" sz="1200" dirty="0"/>
+            </a:p>
+            <a:p>
+              <a:pPr algn="ctr"/>
+              <a:r>
+                <a:rPr lang="zh-CN" altLang="en-US" sz="1200" dirty="0"/>
+                <a:t>元数据识别</a:t>
+              </a:r>
+            </a:p>
+          </p:txBody>
+        </p:sp>
+        <p:sp>
+          <p:nvSpPr>
+            <p:cNvPr id="10" name="矩形: 圆角 9">
+              <a:extLst>
+                <a:ext uri="{FF2B5EF4-FFF2-40B4-BE49-F238E27FC236}">
+                  <a16:creationId xmlns:a16="http://schemas.microsoft.com/office/drawing/2014/main" id="{A9C9C738-F409-4487-FF64-12286DB681D3}"/>
+                </a:ext>
+              </a:extLst>
+            </p:cNvPr>
+            <p:cNvSpPr/>
+            <p:nvPr/>
+          </p:nvSpPr>
+          <p:spPr>
+            <a:xfrm>
+              <a:off x="4372060" y="4499950"/>
+              <a:ext cx="1578045" cy="654860"/>
+            </a:xfrm>
+            <a:prstGeom prst="roundRect">
+              <a:avLst/>
+            </a:prstGeom>
+            <a:ln w="19050"/>
+          </p:spPr>
+          <p:style>
+            <a:lnRef idx="2">
+              <a:schemeClr val="dk1"/>
+            </a:lnRef>
+            <a:fillRef idx="1">
+              <a:schemeClr val="lt1"/>
+            </a:fillRef>
+            <a:effectRef idx="0">
+              <a:schemeClr val="dk1"/>
+            </a:effectRef>
+            <a:fontRef idx="minor">
+              <a:schemeClr val="dk1"/>
+            </a:fontRef>
+          </p:style>
+          <p:txBody>
+            <a:bodyPr rtlCol="0" anchor="ctr"/>
+            <a:lstStyle/>
+            <a:p>
+              <a:pPr algn="ctr"/>
+              <a:r>
+                <a:rPr lang="en-US" altLang="zh-CN" dirty="0" err="1"/>
+                <a:t>extract_tag</a:t>
+              </a:r>
+              <a:endParaRPr lang="en-US" altLang="zh-CN" sz="1200" dirty="0"/>
+            </a:p>
+            <a:p>
+              <a:pPr algn="ctr"/>
+              <a:r>
+                <a:rPr lang="zh-CN" altLang="en-US" sz="1200" dirty="0"/>
+                <a:t>内容标签提取</a:t>
+              </a:r>
+            </a:p>
+          </p:txBody>
+        </p:sp>
+        <p:sp>
+          <p:nvSpPr>
+            <p:cNvPr id="11" name="矩形: 圆角 10">
+              <a:extLst>
+                <a:ext uri="{FF2B5EF4-FFF2-40B4-BE49-F238E27FC236}">
+                  <a16:creationId xmlns:a16="http://schemas.microsoft.com/office/drawing/2014/main" id="{74F65DDB-6D94-D3E4-2EE6-0227AA5CA5C4}"/>
+                </a:ext>
+              </a:extLst>
+            </p:cNvPr>
+            <p:cNvSpPr/>
+            <p:nvPr/>
+          </p:nvSpPr>
+          <p:spPr>
+            <a:xfrm>
+              <a:off x="4372061" y="5370487"/>
+              <a:ext cx="1578045" cy="654860"/>
+            </a:xfrm>
+            <a:prstGeom prst="roundRect">
+              <a:avLst/>
+            </a:prstGeom>
+            <a:ln w="19050"/>
+          </p:spPr>
+          <p:style>
+            <a:lnRef idx="2">
+              <a:schemeClr val="dk1"/>
+            </a:lnRef>
+            <a:fillRef idx="1">
+              <a:schemeClr val="lt1"/>
+            </a:fillRef>
+            <a:effectRef idx="0">
+              <a:schemeClr val="dk1"/>
+            </a:effectRef>
+            <a:fontRef idx="minor">
+              <a:schemeClr val="dk1"/>
+            </a:fontRef>
+          </p:style>
+          <p:txBody>
+            <a:bodyPr rtlCol="0" anchor="ctr"/>
+            <a:lstStyle/>
+            <a:p>
+              <a:pPr algn="ctr"/>
+              <a:r>
+                <a:rPr lang="en-US" altLang="zh-CN" dirty="0" err="1"/>
+                <a:t>check_quality</a:t>
+              </a:r>
+              <a:r>
+                <a:rPr lang="zh-CN" altLang="en-US" sz="1200" dirty="0"/>
+                <a:t>基础质量检查</a:t>
+              </a:r>
+            </a:p>
+          </p:txBody>
+        </p:sp>
+        <p:sp>
+          <p:nvSpPr>
+            <p:cNvPr id="14" name="矩形: 圆角 13">
+              <a:extLst>
+                <a:ext uri="{FF2B5EF4-FFF2-40B4-BE49-F238E27FC236}">
+                  <a16:creationId xmlns:a16="http://schemas.microsoft.com/office/drawing/2014/main" id="{FA4A4A93-D7E9-EDAD-2501-CB04E36BF9A7}"/>
+                </a:ext>
+              </a:extLst>
+            </p:cNvPr>
+            <p:cNvSpPr/>
+            <p:nvPr/>
+          </p:nvSpPr>
+          <p:spPr>
+            <a:xfrm>
+              <a:off x="6329385" y="4499950"/>
+              <a:ext cx="1578045" cy="654860"/>
+            </a:xfrm>
+            <a:prstGeom prst="roundRect">
+              <a:avLst/>
+            </a:prstGeom>
+            <a:ln w="19050"/>
+          </p:spPr>
+          <p:style>
+            <a:lnRef idx="2">
+              <a:schemeClr val="dk1"/>
+            </a:lnRef>
+            <a:fillRef idx="1">
+              <a:schemeClr val="lt1"/>
+            </a:fillRef>
+            <a:effectRef idx="0">
+              <a:schemeClr val="dk1"/>
+            </a:effectRef>
+            <a:fontRef idx="minor">
+              <a:schemeClr val="dk1"/>
+            </a:fontRef>
+          </p:style>
+          <p:txBody>
+            <a:bodyPr rtlCol="0" anchor="ctr"/>
+            <a:lstStyle/>
+            <a:p>
+              <a:pPr algn="ctr"/>
+              <a:r>
+                <a:rPr lang="en-US" altLang="zh-CN" dirty="0" err="1"/>
+                <a:t>merge_signals</a:t>
+              </a:r>
+              <a:endParaRPr lang="en-US" altLang="zh-CN" dirty="0"/>
+            </a:p>
+            <a:p>
+              <a:pPr algn="ctr"/>
+              <a:r>
+                <a:rPr lang="zh-CN" altLang="en-US" sz="1200" dirty="0"/>
+                <a:t>并行结果汇聚</a:t>
+              </a:r>
+            </a:p>
+          </p:txBody>
+        </p:sp>
+        <p:sp>
+          <p:nvSpPr>
+            <p:cNvPr id="15" name="矩形: 圆角 14">
+              <a:extLst>
+                <a:ext uri="{FF2B5EF4-FFF2-40B4-BE49-F238E27FC236}">
+                  <a16:creationId xmlns:a16="http://schemas.microsoft.com/office/drawing/2014/main" id="{3F635D50-E65C-1D3F-D695-FFE8BD9259E8}"/>
+                </a:ext>
+              </a:extLst>
+            </p:cNvPr>
+            <p:cNvSpPr/>
+            <p:nvPr/>
+          </p:nvSpPr>
+          <p:spPr>
+            <a:xfrm>
+              <a:off x="8156905" y="4499950"/>
+              <a:ext cx="1578045" cy="654860"/>
+            </a:xfrm>
+            <a:prstGeom prst="roundRect">
+              <a:avLst/>
+            </a:prstGeom>
+            <a:ln w="19050"/>
+          </p:spPr>
+          <p:style>
+            <a:lnRef idx="2">
+              <a:schemeClr val="dk1"/>
+            </a:lnRef>
+            <a:fillRef idx="1">
+              <a:schemeClr val="lt1"/>
+            </a:fillRef>
+            <a:effectRef idx="0">
+              <a:schemeClr val="dk1"/>
+            </a:effectRef>
+            <a:fontRef idx="minor">
+              <a:schemeClr val="dk1"/>
+            </a:fontRef>
+          </p:style>
+          <p:txBody>
+            <a:bodyPr rtlCol="0" anchor="ctr"/>
+            <a:lstStyle/>
+            <a:p>
+              <a:pPr algn="ctr"/>
+              <a:r>
+                <a:rPr lang="en-US" altLang="zh-CN" dirty="0" err="1"/>
+                <a:t>route_flow</a:t>
+              </a:r>
+              <a:endParaRPr lang="en-US" altLang="zh-CN" sz="1200" dirty="0"/>
+            </a:p>
+            <a:p>
+              <a:pPr algn="ctr"/>
+              <a:r>
+                <a:rPr lang="zh-CN" altLang="en-US" sz="1200" dirty="0"/>
+                <a:t>后续处理路径选择</a:t>
+              </a:r>
+            </a:p>
+          </p:txBody>
+        </p:sp>
+        <p:sp>
+          <p:nvSpPr>
+            <p:cNvPr id="16" name="矩形: 圆角 15">
+              <a:extLst>
+                <a:ext uri="{FF2B5EF4-FFF2-40B4-BE49-F238E27FC236}">
+                  <a16:creationId xmlns:a16="http://schemas.microsoft.com/office/drawing/2014/main" id="{8D07EA8A-A5D3-7657-08D7-5292A3C50A8C}"/>
+                </a:ext>
+              </a:extLst>
+            </p:cNvPr>
+            <p:cNvSpPr/>
+            <p:nvPr/>
+          </p:nvSpPr>
+          <p:spPr>
+            <a:xfrm>
+              <a:off x="10201719" y="3602914"/>
+              <a:ext cx="1637054" cy="654860"/>
+            </a:xfrm>
+            <a:prstGeom prst="roundRect">
+              <a:avLst/>
+            </a:prstGeom>
+            <a:ln w="19050"/>
+          </p:spPr>
+          <p:style>
+            <a:lnRef idx="2">
+              <a:schemeClr val="dk1"/>
+            </a:lnRef>
+            <a:fillRef idx="1">
+              <a:schemeClr val="lt1"/>
+            </a:fillRef>
+            <a:effectRef idx="0">
+              <a:schemeClr val="dk1"/>
+            </a:effectRef>
+            <a:fontRef idx="minor">
+              <a:schemeClr val="dk1"/>
+            </a:fontRef>
+          </p:style>
+          <p:txBody>
+            <a:bodyPr rtlCol="0" anchor="ctr"/>
+            <a:lstStyle/>
+            <a:p>
+              <a:pPr algn="ctr"/>
+              <a:r>
+                <a:rPr lang="en-US" altLang="zh-CN" dirty="0" err="1"/>
+                <a:t>standard_flow</a:t>
+              </a:r>
+              <a:r>
+                <a:rPr lang="zh-CN" altLang="en-US" sz="1200" dirty="0"/>
+                <a:t>常规处理路径</a:t>
+              </a:r>
+            </a:p>
+          </p:txBody>
+        </p:sp>
+        <p:sp>
+          <p:nvSpPr>
+            <p:cNvPr id="17" name="矩形: 圆角 16">
+              <a:extLst>
+                <a:ext uri="{FF2B5EF4-FFF2-40B4-BE49-F238E27FC236}">
+                  <a16:creationId xmlns:a16="http://schemas.microsoft.com/office/drawing/2014/main" id="{33383EB3-8825-AC4D-3C16-5CFB638FB587}"/>
+                </a:ext>
+              </a:extLst>
+            </p:cNvPr>
+            <p:cNvSpPr/>
+            <p:nvPr/>
+          </p:nvSpPr>
+          <p:spPr>
+            <a:xfrm>
+              <a:off x="10210277" y="5369900"/>
+              <a:ext cx="1697941" cy="654860"/>
+            </a:xfrm>
+            <a:prstGeom prst="roundRect">
+              <a:avLst/>
+            </a:prstGeom>
+            <a:ln w="19050"/>
+          </p:spPr>
+          <p:style>
+            <a:lnRef idx="2">
+              <a:schemeClr val="dk1"/>
+            </a:lnRef>
+            <a:fillRef idx="1">
+              <a:schemeClr val="lt1"/>
+            </a:fillRef>
+            <a:effectRef idx="0">
+              <a:schemeClr val="dk1"/>
+            </a:effectRef>
+            <a:fontRef idx="minor">
+              <a:schemeClr val="dk1"/>
+            </a:fontRef>
+          </p:style>
+          <p:txBody>
+            <a:bodyPr rtlCol="0" anchor="ctr"/>
+            <a:lstStyle/>
+            <a:p>
+              <a:pPr algn="ctr"/>
+              <a:r>
+                <a:rPr lang="en-US" altLang="zh-CN" dirty="0" err="1"/>
+                <a:t>enhanced_flow</a:t>
+              </a:r>
+              <a:endParaRPr lang="en-US" altLang="zh-CN" dirty="0"/>
+            </a:p>
+            <a:p>
+              <a:pPr algn="ctr"/>
+              <a:r>
+                <a:rPr lang="zh-CN" altLang="en-US" sz="1200" dirty="0"/>
+                <a:t>增强处理路径</a:t>
+              </a:r>
+            </a:p>
+          </p:txBody>
+        </p:sp>
+        <p:sp>
+          <p:nvSpPr>
+            <p:cNvPr id="18" name="矩形: 圆角 17">
+              <a:extLst>
+                <a:ext uri="{FF2B5EF4-FFF2-40B4-BE49-F238E27FC236}">
+                  <a16:creationId xmlns:a16="http://schemas.microsoft.com/office/drawing/2014/main" id="{310259F9-0654-A068-5E35-1E05F3CDBC4B}"/>
+                </a:ext>
+              </a:extLst>
+            </p:cNvPr>
+            <p:cNvSpPr/>
+            <p:nvPr/>
+          </p:nvSpPr>
+          <p:spPr>
+            <a:xfrm>
+              <a:off x="12218054" y="4499950"/>
+              <a:ext cx="1697941" cy="654860"/>
+            </a:xfrm>
+            <a:prstGeom prst="roundRect">
+              <a:avLst/>
+            </a:prstGeom>
+            <a:ln w="19050"/>
+          </p:spPr>
+          <p:style>
+            <a:lnRef idx="2">
+              <a:schemeClr val="dk1"/>
+            </a:lnRef>
+            <a:fillRef idx="1">
+              <a:schemeClr val="lt1"/>
+            </a:fillRef>
+            <a:effectRef idx="0">
+              <a:schemeClr val="dk1"/>
+            </a:effectRef>
+            <a:fontRef idx="minor">
+              <a:schemeClr val="dk1"/>
+            </a:fontRef>
+          </p:style>
+          <p:txBody>
+            <a:bodyPr rtlCol="0" anchor="ctr"/>
+            <a:lstStyle/>
+            <a:p>
+              <a:pPr algn="ctr"/>
+              <a:r>
+                <a:rPr lang="en-US" altLang="zh-CN" dirty="0" err="1"/>
+                <a:t>emit_result</a:t>
+              </a:r>
+              <a:endParaRPr lang="en-US" altLang="zh-CN" dirty="0"/>
+            </a:p>
+            <a:p>
+              <a:pPr algn="ctr"/>
+              <a:r>
+                <a:rPr lang="zh-CN" altLang="en-US" sz="1200" dirty="0"/>
+                <a:t>最终结果输出</a:t>
+              </a:r>
+            </a:p>
+          </p:txBody>
+        </p:sp>
+        <p:cxnSp>
+          <p:nvCxnSpPr>
+            <p:cNvPr id="26" name="连接符: 肘形 25">
+              <a:extLst>
+                <a:ext uri="{FF2B5EF4-FFF2-40B4-BE49-F238E27FC236}">
+                  <a16:creationId xmlns:a16="http://schemas.microsoft.com/office/drawing/2014/main" id="{A8B0EB7A-9A16-26BD-01F5-F1B0B56F1CDF}"/>
+                </a:ext>
+              </a:extLst>
+            </p:cNvPr>
+            <p:cNvCxnSpPr>
+              <a:cxnSpLocks/>
+              <a:stCxn id="8" idx="3"/>
+              <a:endCxn id="14" idx="1"/>
+            </p:cNvCxnSpPr>
+            <p:nvPr/>
+          </p:nvCxnSpPr>
+          <p:spPr>
+            <a:xfrm>
+              <a:off x="5950104" y="3957134"/>
+              <a:ext cx="379281" cy="870246"/>
+            </a:xfrm>
+            <a:prstGeom prst="bentConnector3">
+              <a:avLst>
+                <a:gd name="adj1" fmla="val 50000"/>
+              </a:avLst>
+            </a:prstGeom>
+            <a:ln w="38100">
+              <a:tailEnd type="triangle"/>
+            </a:ln>
+          </p:spPr>
+          <p:style>
+            <a:lnRef idx="1">
+              <a:schemeClr val="dk1"/>
+            </a:lnRef>
+            <a:fillRef idx="0">
+              <a:schemeClr val="dk1"/>
+            </a:fillRef>
+            <a:effectRef idx="0">
+              <a:schemeClr val="dk1"/>
+            </a:effectRef>
+            <a:fontRef idx="minor">
+              <a:schemeClr val="tx1"/>
+            </a:fontRef>
+          </p:style>
+        </p:cxnSp>
+        <p:cxnSp>
+          <p:nvCxnSpPr>
+            <p:cNvPr id="45" name="直接箭头连接符 44">
+              <a:extLst>
+                <a:ext uri="{FF2B5EF4-FFF2-40B4-BE49-F238E27FC236}">
+                  <a16:creationId xmlns:a16="http://schemas.microsoft.com/office/drawing/2014/main" id="{A206DC7D-1B31-6421-768C-67CF50A4D5FB}"/>
+                </a:ext>
+              </a:extLst>
+            </p:cNvPr>
+            <p:cNvCxnSpPr>
+              <a:cxnSpLocks/>
+              <a:stCxn id="10" idx="3"/>
+              <a:endCxn id="14" idx="1"/>
+            </p:cNvCxnSpPr>
+            <p:nvPr/>
+          </p:nvCxnSpPr>
+          <p:spPr>
+            <a:xfrm>
+              <a:off x="5950105" y="4827380"/>
+              <a:ext cx="379280" cy="0"/>
+            </a:xfrm>
+            <a:prstGeom prst="straightConnector1">
+              <a:avLst/>
+            </a:prstGeom>
+            <a:ln w="38100">
+              <a:tailEnd type="triangle"/>
+            </a:ln>
+          </p:spPr>
+          <p:style>
+            <a:lnRef idx="1">
+              <a:schemeClr val="dk1"/>
+            </a:lnRef>
+            <a:fillRef idx="0">
+              <a:schemeClr val="dk1"/>
+            </a:fillRef>
+            <a:effectRef idx="0">
+              <a:schemeClr val="dk1"/>
+            </a:effectRef>
+            <a:fontRef idx="minor">
+              <a:schemeClr val="tx1"/>
+            </a:fontRef>
+          </p:style>
+        </p:cxnSp>
+        <p:cxnSp>
+          <p:nvCxnSpPr>
+            <p:cNvPr id="49" name="连接符: 肘形 48">
+              <a:extLst>
+                <a:ext uri="{FF2B5EF4-FFF2-40B4-BE49-F238E27FC236}">
+                  <a16:creationId xmlns:a16="http://schemas.microsoft.com/office/drawing/2014/main" id="{774143AB-40BC-8499-ED32-81EDED20D7E8}"/>
+                </a:ext>
+              </a:extLst>
+            </p:cNvPr>
+            <p:cNvCxnSpPr>
+              <a:cxnSpLocks/>
+              <a:stCxn id="11" idx="3"/>
+              <a:endCxn id="14" idx="1"/>
+            </p:cNvCxnSpPr>
+            <p:nvPr/>
+          </p:nvCxnSpPr>
+          <p:spPr>
+            <a:xfrm flipV="1">
+              <a:off x="5950106" y="4827380"/>
+              <a:ext cx="379279" cy="870537"/>
+            </a:xfrm>
+            <a:prstGeom prst="bentConnector3">
+              <a:avLst>
+                <a:gd name="adj1" fmla="val 50000"/>
+              </a:avLst>
+            </a:prstGeom>
+            <a:ln w="38100">
+              <a:tailEnd type="triangle"/>
+            </a:ln>
+          </p:spPr>
+          <p:style>
+            <a:lnRef idx="1">
+              <a:schemeClr val="dk1"/>
+            </a:lnRef>
+            <a:fillRef idx="0">
+              <a:schemeClr val="dk1"/>
+            </a:fillRef>
+            <a:effectRef idx="0">
+              <a:schemeClr val="dk1"/>
+            </a:effectRef>
+            <a:fontRef idx="minor">
+              <a:schemeClr val="tx1"/>
+            </a:fontRef>
+          </p:style>
+        </p:cxnSp>
+        <p:cxnSp>
+          <p:nvCxnSpPr>
+            <p:cNvPr id="52" name="直接箭头连接符 51">
+              <a:extLst>
+                <a:ext uri="{FF2B5EF4-FFF2-40B4-BE49-F238E27FC236}">
+                  <a16:creationId xmlns:a16="http://schemas.microsoft.com/office/drawing/2014/main" id="{F4893255-F31F-27C7-FDC1-17720C1D03F9}"/>
+                </a:ext>
+              </a:extLst>
+            </p:cNvPr>
+            <p:cNvCxnSpPr>
+              <a:cxnSpLocks/>
+            </p:cNvCxnSpPr>
+            <p:nvPr/>
+          </p:nvCxnSpPr>
+          <p:spPr>
+            <a:xfrm>
+              <a:off x="7907430" y="4827380"/>
+              <a:ext cx="252512" cy="0"/>
+            </a:xfrm>
+            <a:prstGeom prst="straightConnector1">
+              <a:avLst/>
+            </a:prstGeom>
+            <a:ln w="38100">
+              <a:tailEnd type="triangle"/>
+            </a:ln>
+          </p:spPr>
+          <p:style>
+            <a:lnRef idx="1">
+              <a:schemeClr val="dk1"/>
+            </a:lnRef>
+            <a:fillRef idx="0">
+              <a:schemeClr val="dk1"/>
+            </a:fillRef>
+            <a:effectRef idx="0">
+              <a:schemeClr val="dk1"/>
+            </a:effectRef>
+            <a:fontRef idx="minor">
+              <a:schemeClr val="tx1"/>
+            </a:fontRef>
+          </p:style>
+        </p:cxnSp>
+        <p:cxnSp>
+          <p:nvCxnSpPr>
+            <p:cNvPr id="54" name="连接符: 肘形 53">
+              <a:extLst>
+                <a:ext uri="{FF2B5EF4-FFF2-40B4-BE49-F238E27FC236}">
+                  <a16:creationId xmlns:a16="http://schemas.microsoft.com/office/drawing/2014/main" id="{734488B4-7F9E-F2F1-6E2A-A7E7D6542B39}"/>
+                </a:ext>
+              </a:extLst>
+            </p:cNvPr>
+            <p:cNvCxnSpPr>
+              <a:cxnSpLocks/>
+            </p:cNvCxnSpPr>
+            <p:nvPr/>
+          </p:nvCxnSpPr>
+          <p:spPr>
+            <a:xfrm flipV="1">
+              <a:off x="9734950" y="3956840"/>
+              <a:ext cx="466769" cy="870833"/>
+            </a:xfrm>
+            <a:prstGeom prst="bentConnector3">
+              <a:avLst>
+                <a:gd name="adj1" fmla="val 50000"/>
+              </a:avLst>
+            </a:prstGeom>
+            <a:ln w="38100">
+              <a:tailEnd type="triangle"/>
+            </a:ln>
+          </p:spPr>
+          <p:style>
+            <a:lnRef idx="1">
+              <a:schemeClr val="dk1"/>
+            </a:lnRef>
+            <a:fillRef idx="0">
+              <a:schemeClr val="dk1"/>
+            </a:fillRef>
+            <a:effectRef idx="0">
+              <a:schemeClr val="dk1"/>
+            </a:effectRef>
+            <a:fontRef idx="minor">
+              <a:schemeClr val="tx1"/>
+            </a:fontRef>
+          </p:style>
+        </p:cxnSp>
+        <p:cxnSp>
+          <p:nvCxnSpPr>
+            <p:cNvPr id="55" name="连接符: 肘形 54">
+              <a:extLst>
+                <a:ext uri="{FF2B5EF4-FFF2-40B4-BE49-F238E27FC236}">
+                  <a16:creationId xmlns:a16="http://schemas.microsoft.com/office/drawing/2014/main" id="{F0168E9E-0958-625E-503B-8E2157432C4B}"/>
+                </a:ext>
+              </a:extLst>
+            </p:cNvPr>
+            <p:cNvCxnSpPr>
+              <a:cxnSpLocks/>
+            </p:cNvCxnSpPr>
+            <p:nvPr/>
+          </p:nvCxnSpPr>
+          <p:spPr>
+            <a:xfrm>
+              <a:off x="9739228" y="4827380"/>
+              <a:ext cx="466771" cy="869950"/>
+            </a:xfrm>
+            <a:prstGeom prst="bentConnector3">
+              <a:avLst>
+                <a:gd name="adj1" fmla="val 50000"/>
+              </a:avLst>
+            </a:prstGeom>
+            <a:ln w="38100">
+              <a:tailEnd type="triangle"/>
+            </a:ln>
+          </p:spPr>
+          <p:style>
+            <a:lnRef idx="1">
+              <a:schemeClr val="dk1"/>
+            </a:lnRef>
+            <a:fillRef idx="0">
+              <a:schemeClr val="dk1"/>
+            </a:fillRef>
+            <a:effectRef idx="0">
+              <a:schemeClr val="dk1"/>
+            </a:effectRef>
+            <a:fontRef idx="minor">
+              <a:schemeClr val="tx1"/>
+            </a:fontRef>
+          </p:style>
+        </p:cxnSp>
+        <p:cxnSp>
+          <p:nvCxnSpPr>
+            <p:cNvPr id="56" name="连接符: 肘形 55">
+              <a:extLst>
+                <a:ext uri="{FF2B5EF4-FFF2-40B4-BE49-F238E27FC236}">
+                  <a16:creationId xmlns:a16="http://schemas.microsoft.com/office/drawing/2014/main" id="{7F7138B0-7E6A-FD0D-49A8-63BFE8EFB34C}"/>
+                </a:ext>
+              </a:extLst>
+            </p:cNvPr>
+            <p:cNvCxnSpPr>
+              <a:cxnSpLocks/>
+            </p:cNvCxnSpPr>
+            <p:nvPr/>
+          </p:nvCxnSpPr>
+          <p:spPr>
+            <a:xfrm>
+              <a:off x="11838773" y="3930048"/>
+              <a:ext cx="379281" cy="870246"/>
+            </a:xfrm>
+            <a:prstGeom prst="bentConnector3">
+              <a:avLst>
+                <a:gd name="adj1" fmla="val 50000"/>
+              </a:avLst>
+            </a:prstGeom>
+            <a:ln w="38100">
+              <a:tailEnd type="triangle"/>
+            </a:ln>
+          </p:spPr>
+          <p:style>
+            <a:lnRef idx="1">
+              <a:schemeClr val="dk1"/>
+            </a:lnRef>
+            <a:fillRef idx="0">
+              <a:schemeClr val="dk1"/>
+            </a:fillRef>
+            <a:effectRef idx="0">
+              <a:schemeClr val="dk1"/>
+            </a:effectRef>
+            <a:fontRef idx="minor">
+              <a:schemeClr val="tx1"/>
+            </a:fontRef>
+          </p:style>
+        </p:cxnSp>
+        <p:cxnSp>
+          <p:nvCxnSpPr>
+            <p:cNvPr id="63" name="连接符: 肘形 62">
+              <a:extLst>
+                <a:ext uri="{FF2B5EF4-FFF2-40B4-BE49-F238E27FC236}">
+                  <a16:creationId xmlns:a16="http://schemas.microsoft.com/office/drawing/2014/main" id="{A47668E4-CD80-3803-AD2F-F1202FECD31C}"/>
+                </a:ext>
+              </a:extLst>
+            </p:cNvPr>
+            <p:cNvCxnSpPr>
+              <a:cxnSpLocks/>
+              <a:stCxn id="17" idx="3"/>
+            </p:cNvCxnSpPr>
+            <p:nvPr/>
+          </p:nvCxnSpPr>
+          <p:spPr>
+            <a:xfrm flipV="1">
+              <a:off x="11908218" y="4365171"/>
+              <a:ext cx="120195" cy="1332159"/>
+            </a:xfrm>
+            <a:prstGeom prst="bentConnector2">
+              <a:avLst/>
+            </a:prstGeom>
+            <a:ln w="38100">
+              <a:tailEnd type="none"/>
+            </a:ln>
+          </p:spPr>
+          <p:style>
+            <a:lnRef idx="1">
+              <a:schemeClr val="dk1"/>
+            </a:lnRef>
+            <a:fillRef idx="0">
+              <a:schemeClr val="dk1"/>
+            </a:fillRef>
+            <a:effectRef idx="0">
+              <a:schemeClr val="dk1"/>
+            </a:effectRef>
+            <a:fontRef idx="minor">
+              <a:schemeClr val="tx1"/>
+            </a:fontRef>
+          </p:style>
+        </p:cxnSp>
+        <p:sp>
+          <p:nvSpPr>
+            <p:cNvPr id="65" name="文本框 64">
+              <a:extLst>
+                <a:ext uri="{FF2B5EF4-FFF2-40B4-BE49-F238E27FC236}">
+                  <a16:creationId xmlns:a16="http://schemas.microsoft.com/office/drawing/2014/main" id="{60A7D5C2-238D-7AB4-ED32-7F4CBB5A5133}"/>
+                </a:ext>
+              </a:extLst>
+            </p:cNvPr>
+            <p:cNvSpPr txBox="1"/>
+            <p:nvPr/>
+          </p:nvSpPr>
+          <p:spPr>
+            <a:xfrm>
+              <a:off x="3490785" y="4115287"/>
+              <a:ext cx="846551" cy="338554"/>
+            </a:xfrm>
+            <a:prstGeom prst="rect">
+              <a:avLst/>
+            </a:prstGeom>
+            <a:noFill/>
+          </p:spPr>
+          <p:txBody>
+            <a:bodyPr wrap="square">
+              <a:spAutoFit/>
+            </a:bodyPr>
+            <a:lstStyle/>
+            <a:p>
+              <a:pPr algn="ctr"/>
+              <a:r>
+                <a:rPr lang="en-US" altLang="zh-CN" sz="1600" dirty="0"/>
+                <a:t>fork</a:t>
+              </a:r>
+              <a:endParaRPr lang="zh-CN" altLang="en-US" sz="1600" dirty="0">
+                <a:solidFill>
+                  <a:schemeClr val="dk1"/>
+                </a:solidFill>
+              </a:endParaRPr>
+            </a:p>
+          </p:txBody>
+        </p:sp>
+        <p:sp>
+          <p:nvSpPr>
+            <p:cNvPr id="66" name="文本框 65">
+              <a:extLst>
+                <a:ext uri="{FF2B5EF4-FFF2-40B4-BE49-F238E27FC236}">
+                  <a16:creationId xmlns:a16="http://schemas.microsoft.com/office/drawing/2014/main" id="{2B098556-0ABB-8EAD-A5B7-447FD8149589}"/>
+                </a:ext>
+              </a:extLst>
+            </p:cNvPr>
+            <p:cNvSpPr txBox="1"/>
+            <p:nvPr/>
+          </p:nvSpPr>
+          <p:spPr>
+            <a:xfrm>
+              <a:off x="5229917" y="4114475"/>
+              <a:ext cx="2295195" cy="338554"/>
+            </a:xfrm>
+            <a:prstGeom prst="rect">
+              <a:avLst/>
+            </a:prstGeom>
+            <a:noFill/>
+          </p:spPr>
+          <p:txBody>
+            <a:bodyPr wrap="square">
+              <a:spAutoFit/>
+            </a:bodyPr>
+            <a:lstStyle/>
+            <a:p>
+              <a:pPr algn="ctr"/>
+              <a:r>
+                <a:rPr lang="en-US" altLang="zh-CN" sz="1600" dirty="0"/>
+                <a:t>join</a:t>
+              </a:r>
+              <a:endParaRPr lang="zh-CN" altLang="en-US" sz="1600" dirty="0">
+                <a:solidFill>
+                  <a:schemeClr val="dk1"/>
+                </a:solidFill>
+              </a:endParaRPr>
+            </a:p>
+          </p:txBody>
+        </p:sp>
+        <p:sp>
+          <p:nvSpPr>
+            <p:cNvPr id="68" name="文本框 67">
+              <a:extLst>
+                <a:ext uri="{FF2B5EF4-FFF2-40B4-BE49-F238E27FC236}">
+                  <a16:creationId xmlns:a16="http://schemas.microsoft.com/office/drawing/2014/main" id="{044A51E6-63A6-E3C3-626A-59DD8C460E5F}"/>
+                </a:ext>
+              </a:extLst>
+            </p:cNvPr>
+            <p:cNvSpPr txBox="1"/>
+            <p:nvPr/>
+          </p:nvSpPr>
+          <p:spPr>
+            <a:xfrm>
+              <a:off x="5380537" y="5165291"/>
+              <a:ext cx="2295195" cy="338554"/>
+            </a:xfrm>
+            <a:prstGeom prst="rect">
+              <a:avLst/>
+            </a:prstGeom>
+            <a:noFill/>
+          </p:spPr>
+          <p:txBody>
+            <a:bodyPr wrap="square">
+              <a:spAutoFit/>
+            </a:bodyPr>
+            <a:lstStyle/>
+            <a:p>
+              <a:pPr algn="ctr"/>
+              <a:r>
+                <a:rPr lang="en-US" altLang="zh-CN" sz="1600" dirty="0"/>
+                <a:t>wait-all</a:t>
+              </a:r>
+              <a:endParaRPr lang="zh-CN" altLang="en-US" sz="1600" dirty="0">
+                <a:solidFill>
+                  <a:schemeClr val="dk1"/>
+                </a:solidFill>
+              </a:endParaRPr>
+            </a:p>
+          </p:txBody>
+        </p:sp>
+      </p:grpSp>
+    </p:spTree>
+    <p:extLst>
+      <p:ext uri="{BB962C8B-B14F-4D97-AF65-F5344CB8AC3E}">
+        <p14:creationId xmlns:p14="http://schemas.microsoft.com/office/powerpoint/2010/main" val="892901885"/>
+      </p:ext>
+    </p:extLst>
   </p:cSld>
   <p:clrMapOvr>
     <a:masterClrMapping/>
@@ -13814,6 +17469,4419 @@
           <a:chExt cx="0" cy="0"/>
         </a:xfrm>
       </p:grpSpPr>
+      <p:grpSp>
+        <p:nvGrpSpPr>
+          <p:cNvPr id="84" name="组合 83">
+            <a:extLst>
+              <a:ext uri="{FF2B5EF4-FFF2-40B4-BE49-F238E27FC236}">
+                <a16:creationId xmlns:a16="http://schemas.microsoft.com/office/drawing/2014/main" id="{38677326-6D13-CB27-5F03-9C1AEF727263}"/>
+              </a:ext>
+            </a:extLst>
+          </p:cNvPr>
+          <p:cNvGrpSpPr/>
+          <p:nvPr/>
+        </p:nvGrpSpPr>
+        <p:grpSpPr>
+          <a:xfrm>
+            <a:off x="3010027" y="730432"/>
+            <a:ext cx="5806440" cy="2468227"/>
+            <a:chOff x="3274850" y="1511590"/>
+            <a:chExt cx="5806440" cy="3749040"/>
+          </a:xfrm>
+        </p:grpSpPr>
+        <p:sp>
+          <p:nvSpPr>
+            <p:cNvPr id="16" name="Shape 12">
+              <a:extLst>
+                <a:ext uri="{FF2B5EF4-FFF2-40B4-BE49-F238E27FC236}">
+                  <a16:creationId xmlns:a16="http://schemas.microsoft.com/office/drawing/2014/main" id="{BE7DAD37-A1A8-2BF6-0C8A-4F2215C8021A}"/>
+                </a:ext>
+              </a:extLst>
+            </p:cNvPr>
+            <p:cNvSpPr/>
+            <p:nvPr/>
+          </p:nvSpPr>
+          <p:spPr>
+            <a:xfrm>
+              <a:off x="3274850" y="1511590"/>
+              <a:ext cx="5806440" cy="3749040"/>
+            </a:xfrm>
+            <a:prstGeom prst="roundRect">
+              <a:avLst/>
+            </a:prstGeom>
+            <a:solidFill>
+              <a:srgbClr val="F8FAFC"/>
+            </a:solidFill>
+            <a:ln w="12700">
+              <a:solidFill>
+                <a:srgbClr val="334155"/>
+              </a:solidFill>
+              <a:prstDash val="solid"/>
+            </a:ln>
+            <a:effectLst>
+              <a:outerShdw blurRad="38100" dist="19050" dir="2700000" algn="bl" rotWithShape="0">
+                <a:srgbClr val="000000">
+                  <a:alpha val="15000"/>
+                </a:srgbClr>
+              </a:outerShdw>
+            </a:effectLst>
+          </p:spPr>
+          <p:txBody>
+            <a:bodyPr/>
+            <a:lstStyle/>
+            <a:p>
+              <a:endParaRPr lang="zh-CN" altLang="en-US"/>
+            </a:p>
+          </p:txBody>
+        </p:sp>
+        <p:sp>
+          <p:nvSpPr>
+            <p:cNvPr id="17" name="Text 13">
+              <a:extLst>
+                <a:ext uri="{FF2B5EF4-FFF2-40B4-BE49-F238E27FC236}">
+                  <a16:creationId xmlns:a16="http://schemas.microsoft.com/office/drawing/2014/main" id="{7797F42C-C1E2-9E40-67A7-1DDEFD6275F5}"/>
+                </a:ext>
+              </a:extLst>
+            </p:cNvPr>
+            <p:cNvSpPr/>
+            <p:nvPr/>
+          </p:nvSpPr>
+          <p:spPr>
+            <a:xfrm>
+              <a:off x="4635624" y="1597370"/>
+              <a:ext cx="3063240" cy="594360"/>
+            </a:xfrm>
+            <a:prstGeom prst="rect">
+              <a:avLst/>
+            </a:prstGeom>
+            <a:noFill/>
+            <a:ln/>
+          </p:spPr>
+          <p:txBody>
+            <a:bodyPr wrap="square" rtlCol="0" anchor="t"/>
+            <a:lstStyle>
+              <a:lvl1pPr marL="0" algn="l" defTabSz="914400" rtl="0" eaLnBrk="1" latinLnBrk="0" hangingPunct="1">
+                <a:defRPr sz="1800" kern="1200">
+                  <a:solidFill>
+                    <a:schemeClr val="tx1"/>
+                  </a:solidFill>
+                  <a:latin typeface="+mn-lt"/>
+                  <a:ea typeface="+mn-ea"/>
+                  <a:cs typeface="+mn-cs"/>
+                </a:defRPr>
+              </a:lvl1pPr>
+              <a:lvl2pPr marL="457200" algn="l" defTabSz="914400" rtl="0" eaLnBrk="1" latinLnBrk="0" hangingPunct="1">
+                <a:defRPr sz="1800" kern="1200">
+                  <a:solidFill>
+                    <a:schemeClr val="tx1"/>
+                  </a:solidFill>
+                  <a:latin typeface="+mn-lt"/>
+                  <a:ea typeface="+mn-ea"/>
+                  <a:cs typeface="+mn-cs"/>
+                </a:defRPr>
+              </a:lvl2pPr>
+              <a:lvl3pPr marL="914400" algn="l" defTabSz="914400" rtl="0" eaLnBrk="1" latinLnBrk="0" hangingPunct="1">
+                <a:defRPr sz="1800" kern="1200">
+                  <a:solidFill>
+                    <a:schemeClr val="tx1"/>
+                  </a:solidFill>
+                  <a:latin typeface="+mn-lt"/>
+                  <a:ea typeface="+mn-ea"/>
+                  <a:cs typeface="+mn-cs"/>
+                </a:defRPr>
+              </a:lvl3pPr>
+              <a:lvl4pPr marL="1371600" algn="l" defTabSz="914400" rtl="0" eaLnBrk="1" latinLnBrk="0" hangingPunct="1">
+                <a:defRPr sz="1800" kern="1200">
+                  <a:solidFill>
+                    <a:schemeClr val="tx1"/>
+                  </a:solidFill>
+                  <a:latin typeface="+mn-lt"/>
+                  <a:ea typeface="+mn-ea"/>
+                  <a:cs typeface="+mn-cs"/>
+                </a:defRPr>
+              </a:lvl4pPr>
+              <a:lvl5pPr marL="1828800" algn="l" defTabSz="914400" rtl="0" eaLnBrk="1" latinLnBrk="0" hangingPunct="1">
+                <a:defRPr sz="1800" kern="1200">
+                  <a:solidFill>
+                    <a:schemeClr val="tx1"/>
+                  </a:solidFill>
+                  <a:latin typeface="+mn-lt"/>
+                  <a:ea typeface="+mn-ea"/>
+                  <a:cs typeface="+mn-cs"/>
+                </a:defRPr>
+              </a:lvl5pPr>
+              <a:lvl6pPr marL="2286000" algn="l" defTabSz="914400" rtl="0" eaLnBrk="1" latinLnBrk="0" hangingPunct="1">
+                <a:defRPr sz="1800" kern="1200">
+                  <a:solidFill>
+                    <a:schemeClr val="tx1"/>
+                  </a:solidFill>
+                  <a:latin typeface="+mn-lt"/>
+                  <a:ea typeface="+mn-ea"/>
+                  <a:cs typeface="+mn-cs"/>
+                </a:defRPr>
+              </a:lvl6pPr>
+              <a:lvl7pPr marL="2743200" algn="l" defTabSz="914400" rtl="0" eaLnBrk="1" latinLnBrk="0" hangingPunct="1">
+                <a:defRPr sz="1800" kern="1200">
+                  <a:solidFill>
+                    <a:schemeClr val="tx1"/>
+                  </a:solidFill>
+                  <a:latin typeface="+mn-lt"/>
+                  <a:ea typeface="+mn-ea"/>
+                  <a:cs typeface="+mn-cs"/>
+                </a:defRPr>
+              </a:lvl7pPr>
+              <a:lvl8pPr marL="3200400" algn="l" defTabSz="914400" rtl="0" eaLnBrk="1" latinLnBrk="0" hangingPunct="1">
+                <a:defRPr sz="1800" kern="1200">
+                  <a:solidFill>
+                    <a:schemeClr val="tx1"/>
+                  </a:solidFill>
+                  <a:latin typeface="+mn-lt"/>
+                  <a:ea typeface="+mn-ea"/>
+                  <a:cs typeface="+mn-cs"/>
+                </a:defRPr>
+              </a:lvl8pPr>
+              <a:lvl9pPr marL="3657600" algn="l" defTabSz="914400" rtl="0" eaLnBrk="1" latinLnBrk="0" hangingPunct="1">
+                <a:defRPr sz="1800" kern="1200">
+                  <a:solidFill>
+                    <a:schemeClr val="tx1"/>
+                  </a:solidFill>
+                  <a:latin typeface="+mn-lt"/>
+                  <a:ea typeface="+mn-ea"/>
+                  <a:cs typeface="+mn-cs"/>
+                </a:defRPr>
+              </a:lvl9pPr>
+            </a:lstStyle>
+            <a:p>
+              <a:pPr indent="0" algn="ctr">
+                <a:buNone/>
+              </a:pPr>
+              <a:r>
+                <a:rPr lang="en-US" sz="2000" dirty="0">
+                  <a:solidFill>
+                    <a:schemeClr val="dk1"/>
+                  </a:solidFill>
+                </a:rPr>
+                <a:t>Controller 𝓒</a:t>
+              </a:r>
+            </a:p>
+          </p:txBody>
+        </p:sp>
+      </p:grpSp>
+      <p:grpSp>
+        <p:nvGrpSpPr>
+          <p:cNvPr id="85" name="组合 84">
+            <a:extLst>
+              <a:ext uri="{FF2B5EF4-FFF2-40B4-BE49-F238E27FC236}">
+                <a16:creationId xmlns:a16="http://schemas.microsoft.com/office/drawing/2014/main" id="{D6A6C37A-6789-B05B-799E-AAB770F4C97C}"/>
+              </a:ext>
+            </a:extLst>
+          </p:cNvPr>
+          <p:cNvGrpSpPr/>
+          <p:nvPr/>
+        </p:nvGrpSpPr>
+        <p:grpSpPr>
+          <a:xfrm>
+            <a:off x="3158470" y="1267440"/>
+            <a:ext cx="2395324" cy="667708"/>
+            <a:chOff x="3489960" y="2446020"/>
+            <a:chExt cx="1325880" cy="960120"/>
+          </a:xfrm>
+        </p:grpSpPr>
+        <p:sp>
+          <p:nvSpPr>
+            <p:cNvPr id="19" name="Shape 15">
+              <a:extLst>
+                <a:ext uri="{FF2B5EF4-FFF2-40B4-BE49-F238E27FC236}">
+                  <a16:creationId xmlns:a16="http://schemas.microsoft.com/office/drawing/2014/main" id="{2984075E-D2FD-C4EF-BCE0-178548926777}"/>
+                </a:ext>
+              </a:extLst>
+            </p:cNvPr>
+            <p:cNvSpPr/>
+            <p:nvPr/>
+          </p:nvSpPr>
+          <p:spPr>
+            <a:xfrm>
+              <a:off x="3489960" y="2446020"/>
+              <a:ext cx="1325880" cy="960120"/>
+            </a:xfrm>
+            <a:prstGeom prst="roundRect">
+              <a:avLst/>
+            </a:prstGeom>
+            <a:solidFill>
+              <a:srgbClr val="EEF2FF"/>
+            </a:solidFill>
+            <a:ln w="12700">
+              <a:solidFill>
+                <a:srgbClr val="334155"/>
+              </a:solidFill>
+              <a:prstDash val="solid"/>
+            </a:ln>
+            <a:effectLst>
+              <a:outerShdw blurRad="38100" dist="19050" dir="2700000" algn="bl" rotWithShape="0">
+                <a:srgbClr val="000000">
+                  <a:alpha val="15000"/>
+                </a:srgbClr>
+              </a:outerShdw>
+            </a:effectLst>
+          </p:spPr>
+          <p:txBody>
+            <a:bodyPr/>
+            <a:lstStyle/>
+            <a:p>
+              <a:endParaRPr lang="zh-CN" altLang="en-US"/>
+            </a:p>
+          </p:txBody>
+        </p:sp>
+        <p:sp>
+          <p:nvSpPr>
+            <p:cNvPr id="20" name="Text 16">
+              <a:extLst>
+                <a:ext uri="{FF2B5EF4-FFF2-40B4-BE49-F238E27FC236}">
+                  <a16:creationId xmlns:a16="http://schemas.microsoft.com/office/drawing/2014/main" id="{256C8D91-6D8A-1018-1BAE-4F548A6805AC}"/>
+                </a:ext>
+              </a:extLst>
+            </p:cNvPr>
+            <p:cNvSpPr/>
+            <p:nvPr/>
+          </p:nvSpPr>
+          <p:spPr>
+            <a:xfrm>
+              <a:off x="3581400" y="2516786"/>
+              <a:ext cx="1143000" cy="868680"/>
+            </a:xfrm>
+            <a:prstGeom prst="rect">
+              <a:avLst/>
+            </a:prstGeom>
+            <a:noFill/>
+            <a:ln/>
+          </p:spPr>
+          <p:txBody>
+            <a:bodyPr wrap="square" rtlCol="0" anchor="ctr"/>
+            <a:lstStyle>
+              <a:lvl1pPr marL="0" algn="l" defTabSz="914400" rtl="0" eaLnBrk="1" latinLnBrk="0" hangingPunct="1">
+                <a:defRPr sz="1800" kern="1200">
+                  <a:solidFill>
+                    <a:schemeClr val="tx1"/>
+                  </a:solidFill>
+                  <a:latin typeface="+mn-lt"/>
+                  <a:ea typeface="+mn-ea"/>
+                  <a:cs typeface="+mn-cs"/>
+                </a:defRPr>
+              </a:lvl1pPr>
+              <a:lvl2pPr marL="457200" algn="l" defTabSz="914400" rtl="0" eaLnBrk="1" latinLnBrk="0" hangingPunct="1">
+                <a:defRPr sz="1800" kern="1200">
+                  <a:solidFill>
+                    <a:schemeClr val="tx1"/>
+                  </a:solidFill>
+                  <a:latin typeface="+mn-lt"/>
+                  <a:ea typeface="+mn-ea"/>
+                  <a:cs typeface="+mn-cs"/>
+                </a:defRPr>
+              </a:lvl2pPr>
+              <a:lvl3pPr marL="914400" algn="l" defTabSz="914400" rtl="0" eaLnBrk="1" latinLnBrk="0" hangingPunct="1">
+                <a:defRPr sz="1800" kern="1200">
+                  <a:solidFill>
+                    <a:schemeClr val="tx1"/>
+                  </a:solidFill>
+                  <a:latin typeface="+mn-lt"/>
+                  <a:ea typeface="+mn-ea"/>
+                  <a:cs typeface="+mn-cs"/>
+                </a:defRPr>
+              </a:lvl3pPr>
+              <a:lvl4pPr marL="1371600" algn="l" defTabSz="914400" rtl="0" eaLnBrk="1" latinLnBrk="0" hangingPunct="1">
+                <a:defRPr sz="1800" kern="1200">
+                  <a:solidFill>
+                    <a:schemeClr val="tx1"/>
+                  </a:solidFill>
+                  <a:latin typeface="+mn-lt"/>
+                  <a:ea typeface="+mn-ea"/>
+                  <a:cs typeface="+mn-cs"/>
+                </a:defRPr>
+              </a:lvl4pPr>
+              <a:lvl5pPr marL="1828800" algn="l" defTabSz="914400" rtl="0" eaLnBrk="1" latinLnBrk="0" hangingPunct="1">
+                <a:defRPr sz="1800" kern="1200">
+                  <a:solidFill>
+                    <a:schemeClr val="tx1"/>
+                  </a:solidFill>
+                  <a:latin typeface="+mn-lt"/>
+                  <a:ea typeface="+mn-ea"/>
+                  <a:cs typeface="+mn-cs"/>
+                </a:defRPr>
+              </a:lvl5pPr>
+              <a:lvl6pPr marL="2286000" algn="l" defTabSz="914400" rtl="0" eaLnBrk="1" latinLnBrk="0" hangingPunct="1">
+                <a:defRPr sz="1800" kern="1200">
+                  <a:solidFill>
+                    <a:schemeClr val="tx1"/>
+                  </a:solidFill>
+                  <a:latin typeface="+mn-lt"/>
+                  <a:ea typeface="+mn-ea"/>
+                  <a:cs typeface="+mn-cs"/>
+                </a:defRPr>
+              </a:lvl6pPr>
+              <a:lvl7pPr marL="2743200" algn="l" defTabSz="914400" rtl="0" eaLnBrk="1" latinLnBrk="0" hangingPunct="1">
+                <a:defRPr sz="1800" kern="1200">
+                  <a:solidFill>
+                    <a:schemeClr val="tx1"/>
+                  </a:solidFill>
+                  <a:latin typeface="+mn-lt"/>
+                  <a:ea typeface="+mn-ea"/>
+                  <a:cs typeface="+mn-cs"/>
+                </a:defRPr>
+              </a:lvl7pPr>
+              <a:lvl8pPr marL="3200400" algn="l" defTabSz="914400" rtl="0" eaLnBrk="1" latinLnBrk="0" hangingPunct="1">
+                <a:defRPr sz="1800" kern="1200">
+                  <a:solidFill>
+                    <a:schemeClr val="tx1"/>
+                  </a:solidFill>
+                  <a:latin typeface="+mn-lt"/>
+                  <a:ea typeface="+mn-ea"/>
+                  <a:cs typeface="+mn-cs"/>
+                </a:defRPr>
+              </a:lvl8pPr>
+              <a:lvl9pPr marL="3657600" algn="l" defTabSz="914400" rtl="0" eaLnBrk="1" latinLnBrk="0" hangingPunct="1">
+                <a:defRPr sz="1800" kern="1200">
+                  <a:solidFill>
+                    <a:schemeClr val="tx1"/>
+                  </a:solidFill>
+                  <a:latin typeface="+mn-lt"/>
+                  <a:ea typeface="+mn-ea"/>
+                  <a:cs typeface="+mn-cs"/>
+                </a:defRPr>
+              </a:lvl9pPr>
+            </a:lstStyle>
+            <a:p>
+              <a:pPr indent="0" algn="ctr">
+                <a:buNone/>
+              </a:pPr>
+              <a:r>
+                <a:rPr lang="en-US" dirty="0">
+                  <a:solidFill>
+                    <a:schemeClr val="dk1"/>
+                  </a:solidFill>
+                </a:rPr>
+                <a:t>Predictor</a:t>
+              </a:r>
+            </a:p>
+            <a:p>
+              <a:pPr indent="0" algn="ctr">
+                <a:buNone/>
+              </a:pPr>
+              <a:r>
+                <a:rPr lang="en-US" dirty="0">
+                  <a:solidFill>
+                    <a:schemeClr val="dk1"/>
+                  </a:solidFill>
+                </a:rPr>
+                <a:t>𝓟</a:t>
+              </a:r>
+            </a:p>
+          </p:txBody>
+        </p:sp>
+      </p:grpSp>
+      <p:sp>
+        <p:nvSpPr>
+          <p:cNvPr id="21" name="Shape 17">
+            <a:extLst>
+              <a:ext uri="{FF2B5EF4-FFF2-40B4-BE49-F238E27FC236}">
+                <a16:creationId xmlns:a16="http://schemas.microsoft.com/office/drawing/2014/main" id="{B2A87D4C-30A9-D198-84D8-5288C3BC6468}"/>
+              </a:ext>
+            </a:extLst>
+          </p:cNvPr>
+          <p:cNvSpPr/>
+          <p:nvPr/>
+        </p:nvSpPr>
+        <p:spPr>
+          <a:xfrm>
+            <a:off x="6318592" y="1270137"/>
+            <a:ext cx="2395324" cy="667708"/>
+          </a:xfrm>
+          <a:prstGeom prst="roundRect">
+            <a:avLst/>
+          </a:prstGeom>
+          <a:solidFill>
+            <a:srgbClr val="ECFDF5"/>
+          </a:solidFill>
+          <a:ln w="12700">
+            <a:solidFill>
+              <a:srgbClr val="334155"/>
+            </a:solidFill>
+            <a:prstDash val="solid"/>
+          </a:ln>
+          <a:effectLst>
+            <a:outerShdw blurRad="38100" dist="19050" dir="2700000" algn="bl" rotWithShape="0">
+              <a:srgbClr val="000000">
+                <a:alpha val="15000"/>
+              </a:srgbClr>
+            </a:outerShdw>
+          </a:effectLst>
+        </p:spPr>
+        <p:txBody>
+          <a:bodyPr/>
+          <a:lstStyle/>
+          <a:p>
+            <a:pPr indent="0" algn="ctr">
+              <a:buNone/>
+            </a:pPr>
+            <a:r>
+              <a:rPr lang="en-US" altLang="zh-CN" dirty="0">
+                <a:solidFill>
+                  <a:schemeClr val="dk1"/>
+                </a:solidFill>
+              </a:rPr>
+              <a:t>Gating &amp; Budgeting</a:t>
+            </a:r>
+          </a:p>
+          <a:p>
+            <a:pPr indent="0" algn="ctr">
+              <a:buNone/>
+            </a:pPr>
+            <a:r>
+              <a:rPr lang="en-US" altLang="zh-CN" dirty="0">
+                <a:solidFill>
+                  <a:schemeClr val="dk1"/>
+                </a:solidFill>
+              </a:rPr>
+              <a:t>𝓖</a:t>
+            </a:r>
+          </a:p>
+        </p:txBody>
+      </p:sp>
+      <p:sp>
+        <p:nvSpPr>
+          <p:cNvPr id="22" name="Text 18">
+            <a:extLst>
+              <a:ext uri="{FF2B5EF4-FFF2-40B4-BE49-F238E27FC236}">
+                <a16:creationId xmlns:a16="http://schemas.microsoft.com/office/drawing/2014/main" id="{BD89ED18-852B-9F68-44E8-B4A56DD14102}"/>
+              </a:ext>
+            </a:extLst>
+          </p:cNvPr>
+          <p:cNvSpPr/>
+          <p:nvPr/>
+        </p:nvSpPr>
+        <p:spPr>
+          <a:xfrm>
+            <a:off x="6050596" y="1454889"/>
+            <a:ext cx="1583255" cy="604117"/>
+          </a:xfrm>
+          <a:prstGeom prst="rect">
+            <a:avLst/>
+          </a:prstGeom>
+          <a:noFill/>
+          <a:ln/>
+        </p:spPr>
+        <p:txBody>
+          <a:bodyPr wrap="square" rtlCol="0" anchor="ctr"/>
+          <a:lstStyle>
+            <a:lvl1pPr marL="0" algn="l" defTabSz="914400" rtl="0" eaLnBrk="1" latinLnBrk="0" hangingPunct="1">
+              <a:defRPr sz="1800" kern="1200">
+                <a:solidFill>
+                  <a:schemeClr val="tx1"/>
+                </a:solidFill>
+                <a:latin typeface="+mn-lt"/>
+                <a:ea typeface="+mn-ea"/>
+                <a:cs typeface="+mn-cs"/>
+              </a:defRPr>
+            </a:lvl1pPr>
+            <a:lvl2pPr marL="457200" algn="l" defTabSz="914400" rtl="0" eaLnBrk="1" latinLnBrk="0" hangingPunct="1">
+              <a:defRPr sz="1800" kern="1200">
+                <a:solidFill>
+                  <a:schemeClr val="tx1"/>
+                </a:solidFill>
+                <a:latin typeface="+mn-lt"/>
+                <a:ea typeface="+mn-ea"/>
+                <a:cs typeface="+mn-cs"/>
+              </a:defRPr>
+            </a:lvl2pPr>
+            <a:lvl3pPr marL="914400" algn="l" defTabSz="914400" rtl="0" eaLnBrk="1" latinLnBrk="0" hangingPunct="1">
+              <a:defRPr sz="1800" kern="1200">
+                <a:solidFill>
+                  <a:schemeClr val="tx1"/>
+                </a:solidFill>
+                <a:latin typeface="+mn-lt"/>
+                <a:ea typeface="+mn-ea"/>
+                <a:cs typeface="+mn-cs"/>
+              </a:defRPr>
+            </a:lvl3pPr>
+            <a:lvl4pPr marL="1371600" algn="l" defTabSz="914400" rtl="0" eaLnBrk="1" latinLnBrk="0" hangingPunct="1">
+              <a:defRPr sz="1800" kern="1200">
+                <a:solidFill>
+                  <a:schemeClr val="tx1"/>
+                </a:solidFill>
+                <a:latin typeface="+mn-lt"/>
+                <a:ea typeface="+mn-ea"/>
+                <a:cs typeface="+mn-cs"/>
+              </a:defRPr>
+            </a:lvl4pPr>
+            <a:lvl5pPr marL="1828800" algn="l" defTabSz="914400" rtl="0" eaLnBrk="1" latinLnBrk="0" hangingPunct="1">
+              <a:defRPr sz="1800" kern="1200">
+                <a:solidFill>
+                  <a:schemeClr val="tx1"/>
+                </a:solidFill>
+                <a:latin typeface="+mn-lt"/>
+                <a:ea typeface="+mn-ea"/>
+                <a:cs typeface="+mn-cs"/>
+              </a:defRPr>
+            </a:lvl5pPr>
+            <a:lvl6pPr marL="2286000" algn="l" defTabSz="914400" rtl="0" eaLnBrk="1" latinLnBrk="0" hangingPunct="1">
+              <a:defRPr sz="1800" kern="1200">
+                <a:solidFill>
+                  <a:schemeClr val="tx1"/>
+                </a:solidFill>
+                <a:latin typeface="+mn-lt"/>
+                <a:ea typeface="+mn-ea"/>
+                <a:cs typeface="+mn-cs"/>
+              </a:defRPr>
+            </a:lvl6pPr>
+            <a:lvl7pPr marL="2743200" algn="l" defTabSz="914400" rtl="0" eaLnBrk="1" latinLnBrk="0" hangingPunct="1">
+              <a:defRPr sz="1800" kern="1200">
+                <a:solidFill>
+                  <a:schemeClr val="tx1"/>
+                </a:solidFill>
+                <a:latin typeface="+mn-lt"/>
+                <a:ea typeface="+mn-ea"/>
+                <a:cs typeface="+mn-cs"/>
+              </a:defRPr>
+            </a:lvl7pPr>
+            <a:lvl8pPr marL="3200400" algn="l" defTabSz="914400" rtl="0" eaLnBrk="1" latinLnBrk="0" hangingPunct="1">
+              <a:defRPr sz="1800" kern="1200">
+                <a:solidFill>
+                  <a:schemeClr val="tx1"/>
+                </a:solidFill>
+                <a:latin typeface="+mn-lt"/>
+                <a:ea typeface="+mn-ea"/>
+                <a:cs typeface="+mn-cs"/>
+              </a:defRPr>
+            </a:lvl8pPr>
+            <a:lvl9pPr marL="3657600" algn="l" defTabSz="914400" rtl="0" eaLnBrk="1" latinLnBrk="0" hangingPunct="1">
+              <a:defRPr sz="1800" kern="1200">
+                <a:solidFill>
+                  <a:schemeClr val="tx1"/>
+                </a:solidFill>
+                <a:latin typeface="+mn-lt"/>
+                <a:ea typeface="+mn-ea"/>
+                <a:cs typeface="+mn-cs"/>
+              </a:defRPr>
+            </a:lvl9pPr>
+          </a:lstStyle>
+          <a:p>
+            <a:pPr indent="0" algn="ctr">
+              <a:buNone/>
+            </a:pPr>
+            <a:endParaRPr lang="en-US" dirty="0">
+              <a:solidFill>
+                <a:schemeClr val="dk1"/>
+              </a:solidFill>
+            </a:endParaRPr>
+          </a:p>
+        </p:txBody>
+      </p:sp>
+      <p:sp>
+        <p:nvSpPr>
+          <p:cNvPr id="23" name="Shape 19">
+            <a:extLst>
+              <a:ext uri="{FF2B5EF4-FFF2-40B4-BE49-F238E27FC236}">
+                <a16:creationId xmlns:a16="http://schemas.microsoft.com/office/drawing/2014/main" id="{275F669F-DB96-ACC1-6498-F2D040AF1415}"/>
+              </a:ext>
+            </a:extLst>
+          </p:cNvPr>
+          <p:cNvSpPr/>
+          <p:nvPr/>
+        </p:nvSpPr>
+        <p:spPr>
+          <a:xfrm>
+            <a:off x="6318592" y="2307030"/>
+            <a:ext cx="2395324" cy="667708"/>
+          </a:xfrm>
+          <a:prstGeom prst="roundRect">
+            <a:avLst/>
+          </a:prstGeom>
+          <a:solidFill>
+            <a:srgbClr val="FFF7ED"/>
+          </a:solidFill>
+          <a:ln w="12700">
+            <a:solidFill>
+              <a:srgbClr val="334155"/>
+            </a:solidFill>
+            <a:prstDash val="solid"/>
+          </a:ln>
+          <a:effectLst>
+            <a:outerShdw blurRad="38100" dist="19050" dir="2700000" algn="bl" rotWithShape="0">
+              <a:srgbClr val="000000">
+                <a:alpha val="15000"/>
+              </a:srgbClr>
+            </a:outerShdw>
+          </a:effectLst>
+        </p:spPr>
+        <p:txBody>
+          <a:bodyPr/>
+          <a:lstStyle/>
+          <a:p>
+            <a:pPr indent="0" algn="ctr">
+              <a:buNone/>
+            </a:pPr>
+            <a:r>
+              <a:rPr lang="en-US" altLang="zh-CN" dirty="0">
+                <a:solidFill>
+                  <a:schemeClr val="dk1"/>
+                </a:solidFill>
+              </a:rPr>
+              <a:t>Buffer</a:t>
+            </a:r>
+          </a:p>
+          <a:p>
+            <a:pPr indent="0" algn="ctr">
+              <a:buNone/>
+            </a:pPr>
+            <a:r>
+              <a:rPr lang="en-US" altLang="zh-CN" dirty="0">
+                <a:solidFill>
+                  <a:schemeClr val="dk1"/>
+                </a:solidFill>
+              </a:rPr>
+              <a:t>𝓑</a:t>
+            </a:r>
+          </a:p>
+        </p:txBody>
+      </p:sp>
+      <p:sp>
+        <p:nvSpPr>
+          <p:cNvPr id="24" name="Text 20">
+            <a:extLst>
+              <a:ext uri="{FF2B5EF4-FFF2-40B4-BE49-F238E27FC236}">
+                <a16:creationId xmlns:a16="http://schemas.microsoft.com/office/drawing/2014/main" id="{9927649A-4D34-2956-6047-7185D0E0B6FB}"/>
+              </a:ext>
+            </a:extLst>
+          </p:cNvPr>
+          <p:cNvSpPr/>
+          <p:nvPr/>
+        </p:nvSpPr>
+        <p:spPr>
+          <a:xfrm>
+            <a:off x="3255537" y="2913475"/>
+            <a:ext cx="1143000" cy="868680"/>
+          </a:xfrm>
+          <a:prstGeom prst="rect">
+            <a:avLst/>
+          </a:prstGeom>
+          <a:noFill/>
+          <a:ln/>
+        </p:spPr>
+        <p:txBody>
+          <a:bodyPr wrap="square" rtlCol="0" anchor="ctr"/>
+          <a:lstStyle>
+            <a:lvl1pPr marL="0" algn="l" defTabSz="914400" rtl="0" eaLnBrk="1" latinLnBrk="0" hangingPunct="1">
+              <a:defRPr sz="1800" kern="1200">
+                <a:solidFill>
+                  <a:schemeClr val="tx1"/>
+                </a:solidFill>
+                <a:latin typeface="+mn-lt"/>
+                <a:ea typeface="+mn-ea"/>
+                <a:cs typeface="+mn-cs"/>
+              </a:defRPr>
+            </a:lvl1pPr>
+            <a:lvl2pPr marL="457200" algn="l" defTabSz="914400" rtl="0" eaLnBrk="1" latinLnBrk="0" hangingPunct="1">
+              <a:defRPr sz="1800" kern="1200">
+                <a:solidFill>
+                  <a:schemeClr val="tx1"/>
+                </a:solidFill>
+                <a:latin typeface="+mn-lt"/>
+                <a:ea typeface="+mn-ea"/>
+                <a:cs typeface="+mn-cs"/>
+              </a:defRPr>
+            </a:lvl2pPr>
+            <a:lvl3pPr marL="914400" algn="l" defTabSz="914400" rtl="0" eaLnBrk="1" latinLnBrk="0" hangingPunct="1">
+              <a:defRPr sz="1800" kern="1200">
+                <a:solidFill>
+                  <a:schemeClr val="tx1"/>
+                </a:solidFill>
+                <a:latin typeface="+mn-lt"/>
+                <a:ea typeface="+mn-ea"/>
+                <a:cs typeface="+mn-cs"/>
+              </a:defRPr>
+            </a:lvl3pPr>
+            <a:lvl4pPr marL="1371600" algn="l" defTabSz="914400" rtl="0" eaLnBrk="1" latinLnBrk="0" hangingPunct="1">
+              <a:defRPr sz="1800" kern="1200">
+                <a:solidFill>
+                  <a:schemeClr val="tx1"/>
+                </a:solidFill>
+                <a:latin typeface="+mn-lt"/>
+                <a:ea typeface="+mn-ea"/>
+                <a:cs typeface="+mn-cs"/>
+              </a:defRPr>
+            </a:lvl4pPr>
+            <a:lvl5pPr marL="1828800" algn="l" defTabSz="914400" rtl="0" eaLnBrk="1" latinLnBrk="0" hangingPunct="1">
+              <a:defRPr sz="1800" kern="1200">
+                <a:solidFill>
+                  <a:schemeClr val="tx1"/>
+                </a:solidFill>
+                <a:latin typeface="+mn-lt"/>
+                <a:ea typeface="+mn-ea"/>
+                <a:cs typeface="+mn-cs"/>
+              </a:defRPr>
+            </a:lvl5pPr>
+            <a:lvl6pPr marL="2286000" algn="l" defTabSz="914400" rtl="0" eaLnBrk="1" latinLnBrk="0" hangingPunct="1">
+              <a:defRPr sz="1800" kern="1200">
+                <a:solidFill>
+                  <a:schemeClr val="tx1"/>
+                </a:solidFill>
+                <a:latin typeface="+mn-lt"/>
+                <a:ea typeface="+mn-ea"/>
+                <a:cs typeface="+mn-cs"/>
+              </a:defRPr>
+            </a:lvl6pPr>
+            <a:lvl7pPr marL="2743200" algn="l" defTabSz="914400" rtl="0" eaLnBrk="1" latinLnBrk="0" hangingPunct="1">
+              <a:defRPr sz="1800" kern="1200">
+                <a:solidFill>
+                  <a:schemeClr val="tx1"/>
+                </a:solidFill>
+                <a:latin typeface="+mn-lt"/>
+                <a:ea typeface="+mn-ea"/>
+                <a:cs typeface="+mn-cs"/>
+              </a:defRPr>
+            </a:lvl7pPr>
+            <a:lvl8pPr marL="3200400" algn="l" defTabSz="914400" rtl="0" eaLnBrk="1" latinLnBrk="0" hangingPunct="1">
+              <a:defRPr sz="1800" kern="1200">
+                <a:solidFill>
+                  <a:schemeClr val="tx1"/>
+                </a:solidFill>
+                <a:latin typeface="+mn-lt"/>
+                <a:ea typeface="+mn-ea"/>
+                <a:cs typeface="+mn-cs"/>
+              </a:defRPr>
+            </a:lvl8pPr>
+            <a:lvl9pPr marL="3657600" algn="l" defTabSz="914400" rtl="0" eaLnBrk="1" latinLnBrk="0" hangingPunct="1">
+              <a:defRPr sz="1800" kern="1200">
+                <a:solidFill>
+                  <a:schemeClr val="tx1"/>
+                </a:solidFill>
+                <a:latin typeface="+mn-lt"/>
+                <a:ea typeface="+mn-ea"/>
+                <a:cs typeface="+mn-cs"/>
+              </a:defRPr>
+            </a:lvl9pPr>
+          </a:lstStyle>
+          <a:p>
+            <a:pPr indent="0" algn="ctr">
+              <a:buNone/>
+            </a:pPr>
+            <a:endParaRPr lang="en-US" dirty="0">
+              <a:solidFill>
+                <a:schemeClr val="dk1"/>
+              </a:solidFill>
+            </a:endParaRPr>
+          </a:p>
+        </p:txBody>
+      </p:sp>
+      <p:sp>
+        <p:nvSpPr>
+          <p:cNvPr id="25" name="Shape 21">
+            <a:extLst>
+              <a:ext uri="{FF2B5EF4-FFF2-40B4-BE49-F238E27FC236}">
+                <a16:creationId xmlns:a16="http://schemas.microsoft.com/office/drawing/2014/main" id="{AEA9170F-F207-2B86-5BCB-C4AA2E34D0AC}"/>
+              </a:ext>
+            </a:extLst>
+          </p:cNvPr>
+          <p:cNvSpPr/>
+          <p:nvPr/>
+        </p:nvSpPr>
+        <p:spPr>
+          <a:xfrm>
+            <a:off x="3158469" y="2308239"/>
+            <a:ext cx="2395325" cy="667708"/>
+          </a:xfrm>
+          <a:prstGeom prst="roundRect">
+            <a:avLst/>
+          </a:prstGeom>
+          <a:solidFill>
+            <a:srgbClr val="FEF2F2"/>
+          </a:solidFill>
+          <a:ln w="12700">
+            <a:solidFill>
+              <a:srgbClr val="334155"/>
+            </a:solidFill>
+            <a:prstDash val="solid"/>
+          </a:ln>
+          <a:effectLst>
+            <a:outerShdw blurRad="38100" dist="19050" dir="2700000" algn="bl" rotWithShape="0">
+              <a:srgbClr val="000000">
+                <a:alpha val="15000"/>
+              </a:srgbClr>
+            </a:outerShdw>
+          </a:effectLst>
+        </p:spPr>
+        <p:txBody>
+          <a:bodyPr/>
+          <a:lstStyle/>
+          <a:p>
+            <a:pPr indent="0" algn="ctr">
+              <a:buNone/>
+            </a:pPr>
+            <a:r>
+              <a:rPr lang="en-US" altLang="zh-CN" dirty="0">
+                <a:solidFill>
+                  <a:schemeClr val="dk1"/>
+                </a:solidFill>
+              </a:rPr>
+              <a:t>Validation  &amp; Recovery</a:t>
+            </a:r>
+          </a:p>
+          <a:p>
+            <a:pPr indent="0" algn="ctr">
+              <a:buNone/>
+            </a:pPr>
+            <a:r>
+              <a:rPr lang="en-US" altLang="zh-CN" dirty="0">
+                <a:solidFill>
+                  <a:schemeClr val="dk1"/>
+                </a:solidFill>
+              </a:rPr>
+              <a:t>𝓡</a:t>
+            </a:r>
+          </a:p>
+          <a:p>
+            <a:endParaRPr lang="zh-CN" altLang="en-US" dirty="0"/>
+          </a:p>
+        </p:txBody>
+      </p:sp>
+      <p:sp>
+        <p:nvSpPr>
+          <p:cNvPr id="26" name="Text 22">
+            <a:extLst>
+              <a:ext uri="{FF2B5EF4-FFF2-40B4-BE49-F238E27FC236}">
+                <a16:creationId xmlns:a16="http://schemas.microsoft.com/office/drawing/2014/main" id="{AE2B91C2-CBD2-9484-57B7-4559BC724F7F}"/>
+              </a:ext>
+            </a:extLst>
+          </p:cNvPr>
+          <p:cNvSpPr/>
+          <p:nvPr/>
+        </p:nvSpPr>
+        <p:spPr>
+          <a:xfrm>
+            <a:off x="5514057" y="3096157"/>
+            <a:ext cx="3388114" cy="868680"/>
+          </a:xfrm>
+          <a:prstGeom prst="rect">
+            <a:avLst/>
+          </a:prstGeom>
+          <a:noFill/>
+          <a:ln/>
+        </p:spPr>
+        <p:txBody>
+          <a:bodyPr wrap="square" rtlCol="0" anchor="ctr"/>
+          <a:lstStyle>
+            <a:lvl1pPr marL="0" algn="l" defTabSz="914400" rtl="0" eaLnBrk="1" latinLnBrk="0" hangingPunct="1">
+              <a:defRPr sz="1800" kern="1200">
+                <a:solidFill>
+                  <a:schemeClr val="tx1"/>
+                </a:solidFill>
+                <a:latin typeface="+mn-lt"/>
+                <a:ea typeface="+mn-ea"/>
+                <a:cs typeface="+mn-cs"/>
+              </a:defRPr>
+            </a:lvl1pPr>
+            <a:lvl2pPr marL="457200" algn="l" defTabSz="914400" rtl="0" eaLnBrk="1" latinLnBrk="0" hangingPunct="1">
+              <a:defRPr sz="1800" kern="1200">
+                <a:solidFill>
+                  <a:schemeClr val="tx1"/>
+                </a:solidFill>
+                <a:latin typeface="+mn-lt"/>
+                <a:ea typeface="+mn-ea"/>
+                <a:cs typeface="+mn-cs"/>
+              </a:defRPr>
+            </a:lvl2pPr>
+            <a:lvl3pPr marL="914400" algn="l" defTabSz="914400" rtl="0" eaLnBrk="1" latinLnBrk="0" hangingPunct="1">
+              <a:defRPr sz="1800" kern="1200">
+                <a:solidFill>
+                  <a:schemeClr val="tx1"/>
+                </a:solidFill>
+                <a:latin typeface="+mn-lt"/>
+                <a:ea typeface="+mn-ea"/>
+                <a:cs typeface="+mn-cs"/>
+              </a:defRPr>
+            </a:lvl3pPr>
+            <a:lvl4pPr marL="1371600" algn="l" defTabSz="914400" rtl="0" eaLnBrk="1" latinLnBrk="0" hangingPunct="1">
+              <a:defRPr sz="1800" kern="1200">
+                <a:solidFill>
+                  <a:schemeClr val="tx1"/>
+                </a:solidFill>
+                <a:latin typeface="+mn-lt"/>
+                <a:ea typeface="+mn-ea"/>
+                <a:cs typeface="+mn-cs"/>
+              </a:defRPr>
+            </a:lvl4pPr>
+            <a:lvl5pPr marL="1828800" algn="l" defTabSz="914400" rtl="0" eaLnBrk="1" latinLnBrk="0" hangingPunct="1">
+              <a:defRPr sz="1800" kern="1200">
+                <a:solidFill>
+                  <a:schemeClr val="tx1"/>
+                </a:solidFill>
+                <a:latin typeface="+mn-lt"/>
+                <a:ea typeface="+mn-ea"/>
+                <a:cs typeface="+mn-cs"/>
+              </a:defRPr>
+            </a:lvl5pPr>
+            <a:lvl6pPr marL="2286000" algn="l" defTabSz="914400" rtl="0" eaLnBrk="1" latinLnBrk="0" hangingPunct="1">
+              <a:defRPr sz="1800" kern="1200">
+                <a:solidFill>
+                  <a:schemeClr val="tx1"/>
+                </a:solidFill>
+                <a:latin typeface="+mn-lt"/>
+                <a:ea typeface="+mn-ea"/>
+                <a:cs typeface="+mn-cs"/>
+              </a:defRPr>
+            </a:lvl6pPr>
+            <a:lvl7pPr marL="2743200" algn="l" defTabSz="914400" rtl="0" eaLnBrk="1" latinLnBrk="0" hangingPunct="1">
+              <a:defRPr sz="1800" kern="1200">
+                <a:solidFill>
+                  <a:schemeClr val="tx1"/>
+                </a:solidFill>
+                <a:latin typeface="+mn-lt"/>
+                <a:ea typeface="+mn-ea"/>
+                <a:cs typeface="+mn-cs"/>
+              </a:defRPr>
+            </a:lvl7pPr>
+            <a:lvl8pPr marL="3200400" algn="l" defTabSz="914400" rtl="0" eaLnBrk="1" latinLnBrk="0" hangingPunct="1">
+              <a:defRPr sz="1800" kern="1200">
+                <a:solidFill>
+                  <a:schemeClr val="tx1"/>
+                </a:solidFill>
+                <a:latin typeface="+mn-lt"/>
+                <a:ea typeface="+mn-ea"/>
+                <a:cs typeface="+mn-cs"/>
+              </a:defRPr>
+            </a:lvl8pPr>
+            <a:lvl9pPr marL="3657600" algn="l" defTabSz="914400" rtl="0" eaLnBrk="1" latinLnBrk="0" hangingPunct="1">
+              <a:defRPr sz="1800" kern="1200">
+                <a:solidFill>
+                  <a:schemeClr val="tx1"/>
+                </a:solidFill>
+                <a:latin typeface="+mn-lt"/>
+                <a:ea typeface="+mn-ea"/>
+                <a:cs typeface="+mn-cs"/>
+              </a:defRPr>
+            </a:lvl9pPr>
+          </a:lstStyle>
+          <a:p>
+            <a:pPr indent="0" algn="ctr">
+              <a:buNone/>
+            </a:pPr>
+            <a:endParaRPr lang="en-US" dirty="0">
+              <a:solidFill>
+                <a:schemeClr val="dk1"/>
+              </a:solidFill>
+            </a:endParaRPr>
+          </a:p>
+        </p:txBody>
+      </p:sp>
+      <p:sp>
+        <p:nvSpPr>
+          <p:cNvPr id="40" name="Shape 36">
+            <a:extLst>
+              <a:ext uri="{FF2B5EF4-FFF2-40B4-BE49-F238E27FC236}">
+                <a16:creationId xmlns:a16="http://schemas.microsoft.com/office/drawing/2014/main" id="{4B412775-9F75-0EB1-2180-4783B5B3E0CF}"/>
+              </a:ext>
+            </a:extLst>
+          </p:cNvPr>
+          <p:cNvSpPr/>
+          <p:nvPr/>
+        </p:nvSpPr>
+        <p:spPr>
+          <a:xfrm>
+            <a:off x="5680361" y="3723895"/>
+            <a:ext cx="3154680" cy="411940"/>
+          </a:xfrm>
+          <a:prstGeom prst="roundRect">
+            <a:avLst/>
+          </a:prstGeom>
+          <a:solidFill>
+            <a:srgbClr val="F1F5F9"/>
+          </a:solidFill>
+          <a:ln w="12700">
+            <a:solidFill>
+              <a:srgbClr val="334155"/>
+            </a:solidFill>
+            <a:prstDash val="solid"/>
+          </a:ln>
+          <a:effectLst>
+            <a:outerShdw blurRad="38100" dist="19050" dir="2700000" algn="bl" rotWithShape="0">
+              <a:srgbClr val="000000">
+                <a:alpha val="15000"/>
+              </a:srgbClr>
+            </a:outerShdw>
+          </a:effectLst>
+        </p:spPr>
+        <p:txBody>
+          <a:bodyPr/>
+          <a:lstStyle/>
+          <a:p>
+            <a:pPr algn="ctr"/>
+            <a:r>
+              <a:rPr lang="en-US" altLang="zh-CN" dirty="0">
+                <a:solidFill>
+                  <a:schemeClr val="dk1"/>
+                </a:solidFill>
+              </a:rPr>
+              <a:t>External State</a:t>
+            </a:r>
+          </a:p>
+        </p:txBody>
+      </p:sp>
+      <p:sp>
+        <p:nvSpPr>
+          <p:cNvPr id="41" name="Text 37">
+            <a:extLst>
+              <a:ext uri="{FF2B5EF4-FFF2-40B4-BE49-F238E27FC236}">
+                <a16:creationId xmlns:a16="http://schemas.microsoft.com/office/drawing/2014/main" id="{315DB343-B753-2A02-9112-7E2D7F44DE51}"/>
+              </a:ext>
+            </a:extLst>
+          </p:cNvPr>
+          <p:cNvSpPr/>
+          <p:nvPr/>
+        </p:nvSpPr>
+        <p:spPr>
+          <a:xfrm>
+            <a:off x="4427347" y="3769012"/>
+            <a:ext cx="2971800" cy="777240"/>
+          </a:xfrm>
+          <a:prstGeom prst="rect">
+            <a:avLst/>
+          </a:prstGeom>
+          <a:noFill/>
+          <a:ln/>
+        </p:spPr>
+        <p:txBody>
+          <a:bodyPr wrap="square" rtlCol="0" anchor="ctr"/>
+          <a:lstStyle>
+            <a:lvl1pPr marL="0" algn="l" defTabSz="914400" rtl="0" eaLnBrk="1" latinLnBrk="0" hangingPunct="1">
+              <a:defRPr sz="1800" kern="1200">
+                <a:solidFill>
+                  <a:schemeClr val="tx1"/>
+                </a:solidFill>
+                <a:latin typeface="+mn-lt"/>
+                <a:ea typeface="+mn-ea"/>
+                <a:cs typeface="+mn-cs"/>
+              </a:defRPr>
+            </a:lvl1pPr>
+            <a:lvl2pPr marL="457200" algn="l" defTabSz="914400" rtl="0" eaLnBrk="1" latinLnBrk="0" hangingPunct="1">
+              <a:defRPr sz="1800" kern="1200">
+                <a:solidFill>
+                  <a:schemeClr val="tx1"/>
+                </a:solidFill>
+                <a:latin typeface="+mn-lt"/>
+                <a:ea typeface="+mn-ea"/>
+                <a:cs typeface="+mn-cs"/>
+              </a:defRPr>
+            </a:lvl2pPr>
+            <a:lvl3pPr marL="914400" algn="l" defTabSz="914400" rtl="0" eaLnBrk="1" latinLnBrk="0" hangingPunct="1">
+              <a:defRPr sz="1800" kern="1200">
+                <a:solidFill>
+                  <a:schemeClr val="tx1"/>
+                </a:solidFill>
+                <a:latin typeface="+mn-lt"/>
+                <a:ea typeface="+mn-ea"/>
+                <a:cs typeface="+mn-cs"/>
+              </a:defRPr>
+            </a:lvl3pPr>
+            <a:lvl4pPr marL="1371600" algn="l" defTabSz="914400" rtl="0" eaLnBrk="1" latinLnBrk="0" hangingPunct="1">
+              <a:defRPr sz="1800" kern="1200">
+                <a:solidFill>
+                  <a:schemeClr val="tx1"/>
+                </a:solidFill>
+                <a:latin typeface="+mn-lt"/>
+                <a:ea typeface="+mn-ea"/>
+                <a:cs typeface="+mn-cs"/>
+              </a:defRPr>
+            </a:lvl4pPr>
+            <a:lvl5pPr marL="1828800" algn="l" defTabSz="914400" rtl="0" eaLnBrk="1" latinLnBrk="0" hangingPunct="1">
+              <a:defRPr sz="1800" kern="1200">
+                <a:solidFill>
+                  <a:schemeClr val="tx1"/>
+                </a:solidFill>
+                <a:latin typeface="+mn-lt"/>
+                <a:ea typeface="+mn-ea"/>
+                <a:cs typeface="+mn-cs"/>
+              </a:defRPr>
+            </a:lvl5pPr>
+            <a:lvl6pPr marL="2286000" algn="l" defTabSz="914400" rtl="0" eaLnBrk="1" latinLnBrk="0" hangingPunct="1">
+              <a:defRPr sz="1800" kern="1200">
+                <a:solidFill>
+                  <a:schemeClr val="tx1"/>
+                </a:solidFill>
+                <a:latin typeface="+mn-lt"/>
+                <a:ea typeface="+mn-ea"/>
+                <a:cs typeface="+mn-cs"/>
+              </a:defRPr>
+            </a:lvl6pPr>
+            <a:lvl7pPr marL="2743200" algn="l" defTabSz="914400" rtl="0" eaLnBrk="1" latinLnBrk="0" hangingPunct="1">
+              <a:defRPr sz="1800" kern="1200">
+                <a:solidFill>
+                  <a:schemeClr val="tx1"/>
+                </a:solidFill>
+                <a:latin typeface="+mn-lt"/>
+                <a:ea typeface="+mn-ea"/>
+                <a:cs typeface="+mn-cs"/>
+              </a:defRPr>
+            </a:lvl7pPr>
+            <a:lvl8pPr marL="3200400" algn="l" defTabSz="914400" rtl="0" eaLnBrk="1" latinLnBrk="0" hangingPunct="1">
+              <a:defRPr sz="1800" kern="1200">
+                <a:solidFill>
+                  <a:schemeClr val="tx1"/>
+                </a:solidFill>
+                <a:latin typeface="+mn-lt"/>
+                <a:ea typeface="+mn-ea"/>
+                <a:cs typeface="+mn-cs"/>
+              </a:defRPr>
+            </a:lvl8pPr>
+            <a:lvl9pPr marL="3657600" algn="l" defTabSz="914400" rtl="0" eaLnBrk="1" latinLnBrk="0" hangingPunct="1">
+              <a:defRPr sz="1800" kern="1200">
+                <a:solidFill>
+                  <a:schemeClr val="tx1"/>
+                </a:solidFill>
+                <a:latin typeface="+mn-lt"/>
+                <a:ea typeface="+mn-ea"/>
+                <a:cs typeface="+mn-cs"/>
+              </a:defRPr>
+            </a:lvl9pPr>
+          </a:lstStyle>
+          <a:p>
+            <a:pPr marL="0" indent="0" algn="ctr">
+              <a:buNone/>
+            </a:pPr>
+            <a:endParaRPr lang="en-US" dirty="0">
+              <a:solidFill>
+                <a:schemeClr val="dk1"/>
+              </a:solidFill>
+            </a:endParaRPr>
+          </a:p>
+        </p:txBody>
+      </p:sp>
+      <p:grpSp>
+        <p:nvGrpSpPr>
+          <p:cNvPr id="129" name="组合 128">
+            <a:extLst>
+              <a:ext uri="{FF2B5EF4-FFF2-40B4-BE49-F238E27FC236}">
+                <a16:creationId xmlns:a16="http://schemas.microsoft.com/office/drawing/2014/main" id="{2AD12AA8-5D3A-9467-EA63-EDF6AE90D9CA}"/>
+              </a:ext>
+            </a:extLst>
+          </p:cNvPr>
+          <p:cNvGrpSpPr/>
+          <p:nvPr/>
+        </p:nvGrpSpPr>
+        <p:grpSpPr>
+          <a:xfrm>
+            <a:off x="9497312" y="360719"/>
+            <a:ext cx="2331720" cy="2948798"/>
+            <a:chOff x="9629503" y="1623659"/>
+            <a:chExt cx="2331720" cy="2948798"/>
+          </a:xfrm>
+        </p:grpSpPr>
+        <p:sp>
+          <p:nvSpPr>
+            <p:cNvPr id="33" name="Text 29">
+              <a:extLst>
+                <a:ext uri="{FF2B5EF4-FFF2-40B4-BE49-F238E27FC236}">
+                  <a16:creationId xmlns:a16="http://schemas.microsoft.com/office/drawing/2014/main" id="{F9930F05-9FFD-4040-FA90-39BA8B55D097}"/>
+                </a:ext>
+              </a:extLst>
+            </p:cNvPr>
+            <p:cNvSpPr/>
+            <p:nvPr/>
+          </p:nvSpPr>
+          <p:spPr>
+            <a:xfrm>
+              <a:off x="9629503" y="1623659"/>
+              <a:ext cx="2331720" cy="274320"/>
+            </a:xfrm>
+            <a:prstGeom prst="rect">
+              <a:avLst/>
+            </a:prstGeom>
+            <a:noFill/>
+            <a:ln/>
+          </p:spPr>
+          <p:txBody>
+            <a:bodyPr wrap="square" rtlCol="0" anchor="ctr"/>
+            <a:lstStyle>
+              <a:lvl1pPr marL="0" algn="l" defTabSz="914400" rtl="0" eaLnBrk="1" latinLnBrk="0" hangingPunct="1">
+                <a:defRPr sz="1800" kern="1200">
+                  <a:solidFill>
+                    <a:schemeClr val="tx1"/>
+                  </a:solidFill>
+                  <a:latin typeface="+mn-lt"/>
+                  <a:ea typeface="+mn-ea"/>
+                  <a:cs typeface="+mn-cs"/>
+                </a:defRPr>
+              </a:lvl1pPr>
+              <a:lvl2pPr marL="457200" algn="l" defTabSz="914400" rtl="0" eaLnBrk="1" latinLnBrk="0" hangingPunct="1">
+                <a:defRPr sz="1800" kern="1200">
+                  <a:solidFill>
+                    <a:schemeClr val="tx1"/>
+                  </a:solidFill>
+                  <a:latin typeface="+mn-lt"/>
+                  <a:ea typeface="+mn-ea"/>
+                  <a:cs typeface="+mn-cs"/>
+                </a:defRPr>
+              </a:lvl2pPr>
+              <a:lvl3pPr marL="914400" algn="l" defTabSz="914400" rtl="0" eaLnBrk="1" latinLnBrk="0" hangingPunct="1">
+                <a:defRPr sz="1800" kern="1200">
+                  <a:solidFill>
+                    <a:schemeClr val="tx1"/>
+                  </a:solidFill>
+                  <a:latin typeface="+mn-lt"/>
+                  <a:ea typeface="+mn-ea"/>
+                  <a:cs typeface="+mn-cs"/>
+                </a:defRPr>
+              </a:lvl3pPr>
+              <a:lvl4pPr marL="1371600" algn="l" defTabSz="914400" rtl="0" eaLnBrk="1" latinLnBrk="0" hangingPunct="1">
+                <a:defRPr sz="1800" kern="1200">
+                  <a:solidFill>
+                    <a:schemeClr val="tx1"/>
+                  </a:solidFill>
+                  <a:latin typeface="+mn-lt"/>
+                  <a:ea typeface="+mn-ea"/>
+                  <a:cs typeface="+mn-cs"/>
+                </a:defRPr>
+              </a:lvl4pPr>
+              <a:lvl5pPr marL="1828800" algn="l" defTabSz="914400" rtl="0" eaLnBrk="1" latinLnBrk="0" hangingPunct="1">
+                <a:defRPr sz="1800" kern="1200">
+                  <a:solidFill>
+                    <a:schemeClr val="tx1"/>
+                  </a:solidFill>
+                  <a:latin typeface="+mn-lt"/>
+                  <a:ea typeface="+mn-ea"/>
+                  <a:cs typeface="+mn-cs"/>
+                </a:defRPr>
+              </a:lvl5pPr>
+              <a:lvl6pPr marL="2286000" algn="l" defTabSz="914400" rtl="0" eaLnBrk="1" latinLnBrk="0" hangingPunct="1">
+                <a:defRPr sz="1800" kern="1200">
+                  <a:solidFill>
+                    <a:schemeClr val="tx1"/>
+                  </a:solidFill>
+                  <a:latin typeface="+mn-lt"/>
+                  <a:ea typeface="+mn-ea"/>
+                  <a:cs typeface="+mn-cs"/>
+                </a:defRPr>
+              </a:lvl6pPr>
+              <a:lvl7pPr marL="2743200" algn="l" defTabSz="914400" rtl="0" eaLnBrk="1" latinLnBrk="0" hangingPunct="1">
+                <a:defRPr sz="1800" kern="1200">
+                  <a:solidFill>
+                    <a:schemeClr val="tx1"/>
+                  </a:solidFill>
+                  <a:latin typeface="+mn-lt"/>
+                  <a:ea typeface="+mn-ea"/>
+                  <a:cs typeface="+mn-cs"/>
+                </a:defRPr>
+              </a:lvl7pPr>
+              <a:lvl8pPr marL="3200400" algn="l" defTabSz="914400" rtl="0" eaLnBrk="1" latinLnBrk="0" hangingPunct="1">
+                <a:defRPr sz="1800" kern="1200">
+                  <a:solidFill>
+                    <a:schemeClr val="tx1"/>
+                  </a:solidFill>
+                  <a:latin typeface="+mn-lt"/>
+                  <a:ea typeface="+mn-ea"/>
+                  <a:cs typeface="+mn-cs"/>
+                </a:defRPr>
+              </a:lvl8pPr>
+              <a:lvl9pPr marL="3657600" algn="l" defTabSz="914400" rtl="0" eaLnBrk="1" latinLnBrk="0" hangingPunct="1">
+                <a:defRPr sz="1800" kern="1200">
+                  <a:solidFill>
+                    <a:schemeClr val="tx1"/>
+                  </a:solidFill>
+                  <a:latin typeface="+mn-lt"/>
+                  <a:ea typeface="+mn-ea"/>
+                  <a:cs typeface="+mn-cs"/>
+                </a:defRPr>
+              </a:lvl9pPr>
+            </a:lstStyle>
+            <a:p>
+              <a:pPr marL="0" indent="0" algn="ctr">
+                <a:buNone/>
+              </a:pPr>
+              <a:r>
+                <a:rPr lang="en-US" sz="1600" b="1" dirty="0">
+                  <a:solidFill>
+                    <a:srgbClr val="334155"/>
+                  </a:solidFill>
+                  <a:latin typeface="Microsoft YaHei" pitchFamily="34" charset="0"/>
+                  <a:ea typeface="Microsoft YaHei" pitchFamily="34" charset="-122"/>
+                  <a:cs typeface="Microsoft YaHei" pitchFamily="34" charset="-120"/>
+                </a:rPr>
+                <a:t>Function Instances</a:t>
+              </a:r>
+              <a:endParaRPr lang="en-US" sz="1600" b="1" dirty="0"/>
+            </a:p>
+          </p:txBody>
+        </p:sp>
+        <p:sp>
+          <p:nvSpPr>
+            <p:cNvPr id="31" name="Shape 27">
+              <a:extLst>
+                <a:ext uri="{FF2B5EF4-FFF2-40B4-BE49-F238E27FC236}">
+                  <a16:creationId xmlns:a16="http://schemas.microsoft.com/office/drawing/2014/main" id="{70BB2613-66AD-8CAE-1856-539DA4978043}"/>
+                </a:ext>
+              </a:extLst>
+            </p:cNvPr>
+            <p:cNvSpPr/>
+            <p:nvPr/>
+          </p:nvSpPr>
+          <p:spPr>
+            <a:xfrm>
+              <a:off x="9629503" y="1966417"/>
+              <a:ext cx="2331720" cy="2606040"/>
+            </a:xfrm>
+            <a:prstGeom prst="roundRect">
+              <a:avLst/>
+            </a:prstGeom>
+            <a:solidFill>
+              <a:srgbClr val="F1F5F9"/>
+            </a:solidFill>
+            <a:ln w="12700">
+              <a:solidFill>
+                <a:srgbClr val="334155"/>
+              </a:solidFill>
+              <a:prstDash val="solid"/>
+            </a:ln>
+            <a:effectLst>
+              <a:outerShdw blurRad="38100" dist="19050" dir="2700000" algn="bl" rotWithShape="0">
+                <a:srgbClr val="000000">
+                  <a:alpha val="15000"/>
+                </a:srgbClr>
+              </a:outerShdw>
+            </a:effectLst>
+          </p:spPr>
+          <p:txBody>
+            <a:bodyPr/>
+            <a:lstStyle/>
+            <a:p>
+              <a:endParaRPr lang="zh-CN" altLang="en-US" dirty="0"/>
+            </a:p>
+          </p:txBody>
+        </p:sp>
+        <p:sp>
+          <p:nvSpPr>
+            <p:cNvPr id="34" name="Shape 30">
+              <a:extLst>
+                <a:ext uri="{FF2B5EF4-FFF2-40B4-BE49-F238E27FC236}">
+                  <a16:creationId xmlns:a16="http://schemas.microsoft.com/office/drawing/2014/main" id="{13E49B70-BC5F-6E6C-9019-81176F445DA3}"/>
+                </a:ext>
+              </a:extLst>
+            </p:cNvPr>
+            <p:cNvSpPr/>
+            <p:nvPr/>
+          </p:nvSpPr>
+          <p:spPr>
+            <a:xfrm>
+              <a:off x="9812383" y="2240737"/>
+              <a:ext cx="1965960" cy="530352"/>
+            </a:xfrm>
+            <a:prstGeom prst="roundRect">
+              <a:avLst/>
+            </a:prstGeom>
+            <a:solidFill>
+              <a:srgbClr val="FFFFFF"/>
+            </a:solidFill>
+            <a:ln w="12700">
+              <a:solidFill>
+                <a:srgbClr val="334155"/>
+              </a:solidFill>
+              <a:prstDash val="solid"/>
+            </a:ln>
+            <a:effectLst>
+              <a:outerShdw blurRad="38100" dist="19050" dir="2700000" algn="bl" rotWithShape="0">
+                <a:srgbClr val="000000">
+                  <a:alpha val="15000"/>
+                </a:srgbClr>
+              </a:outerShdw>
+            </a:effectLst>
+          </p:spPr>
+          <p:txBody>
+            <a:bodyPr/>
+            <a:lstStyle/>
+            <a:p>
+              <a:endParaRPr lang="zh-CN" altLang="en-US"/>
+            </a:p>
+          </p:txBody>
+        </p:sp>
+        <p:sp>
+          <p:nvSpPr>
+            <p:cNvPr id="35" name="Text 31">
+              <a:extLst>
+                <a:ext uri="{FF2B5EF4-FFF2-40B4-BE49-F238E27FC236}">
+                  <a16:creationId xmlns:a16="http://schemas.microsoft.com/office/drawing/2014/main" id="{677EF4C9-2365-83A6-77BB-2DF3C25A5492}"/>
+                </a:ext>
+              </a:extLst>
+            </p:cNvPr>
+            <p:cNvSpPr/>
+            <p:nvPr/>
+          </p:nvSpPr>
+          <p:spPr>
+            <a:xfrm>
+              <a:off x="9903823" y="2286457"/>
+              <a:ext cx="1783080" cy="438912"/>
+            </a:xfrm>
+            <a:prstGeom prst="rect">
+              <a:avLst/>
+            </a:prstGeom>
+            <a:noFill/>
+            <a:ln/>
+          </p:spPr>
+          <p:txBody>
+            <a:bodyPr wrap="square" rtlCol="0" anchor="ctr"/>
+            <a:lstStyle>
+              <a:lvl1pPr marL="0" algn="l" defTabSz="914400" rtl="0" eaLnBrk="1" latinLnBrk="0" hangingPunct="1">
+                <a:defRPr sz="1800" kern="1200">
+                  <a:solidFill>
+                    <a:schemeClr val="tx1"/>
+                  </a:solidFill>
+                  <a:latin typeface="+mn-lt"/>
+                  <a:ea typeface="+mn-ea"/>
+                  <a:cs typeface="+mn-cs"/>
+                </a:defRPr>
+              </a:lvl1pPr>
+              <a:lvl2pPr marL="457200" algn="l" defTabSz="914400" rtl="0" eaLnBrk="1" latinLnBrk="0" hangingPunct="1">
+                <a:defRPr sz="1800" kern="1200">
+                  <a:solidFill>
+                    <a:schemeClr val="tx1"/>
+                  </a:solidFill>
+                  <a:latin typeface="+mn-lt"/>
+                  <a:ea typeface="+mn-ea"/>
+                  <a:cs typeface="+mn-cs"/>
+                </a:defRPr>
+              </a:lvl2pPr>
+              <a:lvl3pPr marL="914400" algn="l" defTabSz="914400" rtl="0" eaLnBrk="1" latinLnBrk="0" hangingPunct="1">
+                <a:defRPr sz="1800" kern="1200">
+                  <a:solidFill>
+                    <a:schemeClr val="tx1"/>
+                  </a:solidFill>
+                  <a:latin typeface="+mn-lt"/>
+                  <a:ea typeface="+mn-ea"/>
+                  <a:cs typeface="+mn-cs"/>
+                </a:defRPr>
+              </a:lvl3pPr>
+              <a:lvl4pPr marL="1371600" algn="l" defTabSz="914400" rtl="0" eaLnBrk="1" latinLnBrk="0" hangingPunct="1">
+                <a:defRPr sz="1800" kern="1200">
+                  <a:solidFill>
+                    <a:schemeClr val="tx1"/>
+                  </a:solidFill>
+                  <a:latin typeface="+mn-lt"/>
+                  <a:ea typeface="+mn-ea"/>
+                  <a:cs typeface="+mn-cs"/>
+                </a:defRPr>
+              </a:lvl4pPr>
+              <a:lvl5pPr marL="1828800" algn="l" defTabSz="914400" rtl="0" eaLnBrk="1" latinLnBrk="0" hangingPunct="1">
+                <a:defRPr sz="1800" kern="1200">
+                  <a:solidFill>
+                    <a:schemeClr val="tx1"/>
+                  </a:solidFill>
+                  <a:latin typeface="+mn-lt"/>
+                  <a:ea typeface="+mn-ea"/>
+                  <a:cs typeface="+mn-cs"/>
+                </a:defRPr>
+              </a:lvl5pPr>
+              <a:lvl6pPr marL="2286000" algn="l" defTabSz="914400" rtl="0" eaLnBrk="1" latinLnBrk="0" hangingPunct="1">
+                <a:defRPr sz="1800" kern="1200">
+                  <a:solidFill>
+                    <a:schemeClr val="tx1"/>
+                  </a:solidFill>
+                  <a:latin typeface="+mn-lt"/>
+                  <a:ea typeface="+mn-ea"/>
+                  <a:cs typeface="+mn-cs"/>
+                </a:defRPr>
+              </a:lvl6pPr>
+              <a:lvl7pPr marL="2743200" algn="l" defTabSz="914400" rtl="0" eaLnBrk="1" latinLnBrk="0" hangingPunct="1">
+                <a:defRPr sz="1800" kern="1200">
+                  <a:solidFill>
+                    <a:schemeClr val="tx1"/>
+                  </a:solidFill>
+                  <a:latin typeface="+mn-lt"/>
+                  <a:ea typeface="+mn-ea"/>
+                  <a:cs typeface="+mn-cs"/>
+                </a:defRPr>
+              </a:lvl7pPr>
+              <a:lvl8pPr marL="3200400" algn="l" defTabSz="914400" rtl="0" eaLnBrk="1" latinLnBrk="0" hangingPunct="1">
+                <a:defRPr sz="1800" kern="1200">
+                  <a:solidFill>
+                    <a:schemeClr val="tx1"/>
+                  </a:solidFill>
+                  <a:latin typeface="+mn-lt"/>
+                  <a:ea typeface="+mn-ea"/>
+                  <a:cs typeface="+mn-cs"/>
+                </a:defRPr>
+              </a:lvl8pPr>
+              <a:lvl9pPr marL="3657600" algn="l" defTabSz="914400" rtl="0" eaLnBrk="1" latinLnBrk="0" hangingPunct="1">
+                <a:defRPr sz="1800" kern="1200">
+                  <a:solidFill>
+                    <a:schemeClr val="tx1"/>
+                  </a:solidFill>
+                  <a:latin typeface="+mn-lt"/>
+                  <a:ea typeface="+mn-ea"/>
+                  <a:cs typeface="+mn-cs"/>
+                </a:defRPr>
+              </a:lvl9pPr>
+            </a:lstStyle>
+            <a:p>
+              <a:pPr marL="0" indent="0" algn="ctr">
+                <a:buNone/>
+              </a:pPr>
+              <a:r>
+                <a:rPr lang="en-US" dirty="0">
+                  <a:solidFill>
+                    <a:schemeClr val="dk1"/>
+                  </a:solidFill>
+                </a:rPr>
+                <a:t>Normal</a:t>
+              </a:r>
+            </a:p>
+          </p:txBody>
+        </p:sp>
+        <p:sp>
+          <p:nvSpPr>
+            <p:cNvPr id="36" name="Shape 32">
+              <a:extLst>
+                <a:ext uri="{FF2B5EF4-FFF2-40B4-BE49-F238E27FC236}">
+                  <a16:creationId xmlns:a16="http://schemas.microsoft.com/office/drawing/2014/main" id="{CE9A3ACE-CD4C-527F-276F-26F49344B259}"/>
+                </a:ext>
+              </a:extLst>
+            </p:cNvPr>
+            <p:cNvSpPr/>
+            <p:nvPr/>
+          </p:nvSpPr>
+          <p:spPr>
+            <a:xfrm>
+              <a:off x="9812383" y="2944825"/>
+              <a:ext cx="1965960" cy="530352"/>
+            </a:xfrm>
+            <a:prstGeom prst="roundRect">
+              <a:avLst/>
+            </a:prstGeom>
+            <a:solidFill>
+              <a:srgbClr val="FFFFFF"/>
+            </a:solidFill>
+            <a:ln w="12700">
+              <a:solidFill>
+                <a:srgbClr val="334155"/>
+              </a:solidFill>
+              <a:prstDash val="solid"/>
+            </a:ln>
+            <a:effectLst>
+              <a:outerShdw blurRad="38100" dist="19050" dir="2700000" algn="bl" rotWithShape="0">
+                <a:srgbClr val="000000">
+                  <a:alpha val="15000"/>
+                </a:srgbClr>
+              </a:outerShdw>
+            </a:effectLst>
+          </p:spPr>
+          <p:txBody>
+            <a:bodyPr/>
+            <a:lstStyle/>
+            <a:p>
+              <a:endParaRPr lang="zh-CN" altLang="en-US" dirty="0"/>
+            </a:p>
+          </p:txBody>
+        </p:sp>
+        <p:sp>
+          <p:nvSpPr>
+            <p:cNvPr id="37" name="Text 33">
+              <a:extLst>
+                <a:ext uri="{FF2B5EF4-FFF2-40B4-BE49-F238E27FC236}">
+                  <a16:creationId xmlns:a16="http://schemas.microsoft.com/office/drawing/2014/main" id="{B58A918D-A321-5480-3757-03E56D2E1A00}"/>
+                </a:ext>
+              </a:extLst>
+            </p:cNvPr>
+            <p:cNvSpPr/>
+            <p:nvPr/>
+          </p:nvSpPr>
+          <p:spPr>
+            <a:xfrm>
+              <a:off x="9903823" y="2990545"/>
+              <a:ext cx="1783080" cy="438912"/>
+            </a:xfrm>
+            <a:prstGeom prst="rect">
+              <a:avLst/>
+            </a:prstGeom>
+            <a:noFill/>
+            <a:ln/>
+          </p:spPr>
+          <p:txBody>
+            <a:bodyPr wrap="square" rtlCol="0" anchor="ctr"/>
+            <a:lstStyle>
+              <a:lvl1pPr marL="0" algn="l" defTabSz="914400" rtl="0" eaLnBrk="1" latinLnBrk="0" hangingPunct="1">
+                <a:defRPr sz="1800" kern="1200">
+                  <a:solidFill>
+                    <a:schemeClr val="tx1"/>
+                  </a:solidFill>
+                  <a:latin typeface="+mn-lt"/>
+                  <a:ea typeface="+mn-ea"/>
+                  <a:cs typeface="+mn-cs"/>
+                </a:defRPr>
+              </a:lvl1pPr>
+              <a:lvl2pPr marL="457200" algn="l" defTabSz="914400" rtl="0" eaLnBrk="1" latinLnBrk="0" hangingPunct="1">
+                <a:defRPr sz="1800" kern="1200">
+                  <a:solidFill>
+                    <a:schemeClr val="tx1"/>
+                  </a:solidFill>
+                  <a:latin typeface="+mn-lt"/>
+                  <a:ea typeface="+mn-ea"/>
+                  <a:cs typeface="+mn-cs"/>
+                </a:defRPr>
+              </a:lvl2pPr>
+              <a:lvl3pPr marL="914400" algn="l" defTabSz="914400" rtl="0" eaLnBrk="1" latinLnBrk="0" hangingPunct="1">
+                <a:defRPr sz="1800" kern="1200">
+                  <a:solidFill>
+                    <a:schemeClr val="tx1"/>
+                  </a:solidFill>
+                  <a:latin typeface="+mn-lt"/>
+                  <a:ea typeface="+mn-ea"/>
+                  <a:cs typeface="+mn-cs"/>
+                </a:defRPr>
+              </a:lvl3pPr>
+              <a:lvl4pPr marL="1371600" algn="l" defTabSz="914400" rtl="0" eaLnBrk="1" latinLnBrk="0" hangingPunct="1">
+                <a:defRPr sz="1800" kern="1200">
+                  <a:solidFill>
+                    <a:schemeClr val="tx1"/>
+                  </a:solidFill>
+                  <a:latin typeface="+mn-lt"/>
+                  <a:ea typeface="+mn-ea"/>
+                  <a:cs typeface="+mn-cs"/>
+                </a:defRPr>
+              </a:lvl4pPr>
+              <a:lvl5pPr marL="1828800" algn="l" defTabSz="914400" rtl="0" eaLnBrk="1" latinLnBrk="0" hangingPunct="1">
+                <a:defRPr sz="1800" kern="1200">
+                  <a:solidFill>
+                    <a:schemeClr val="tx1"/>
+                  </a:solidFill>
+                  <a:latin typeface="+mn-lt"/>
+                  <a:ea typeface="+mn-ea"/>
+                  <a:cs typeface="+mn-cs"/>
+                </a:defRPr>
+              </a:lvl5pPr>
+              <a:lvl6pPr marL="2286000" algn="l" defTabSz="914400" rtl="0" eaLnBrk="1" latinLnBrk="0" hangingPunct="1">
+                <a:defRPr sz="1800" kern="1200">
+                  <a:solidFill>
+                    <a:schemeClr val="tx1"/>
+                  </a:solidFill>
+                  <a:latin typeface="+mn-lt"/>
+                  <a:ea typeface="+mn-ea"/>
+                  <a:cs typeface="+mn-cs"/>
+                </a:defRPr>
+              </a:lvl6pPr>
+              <a:lvl7pPr marL="2743200" algn="l" defTabSz="914400" rtl="0" eaLnBrk="1" latinLnBrk="0" hangingPunct="1">
+                <a:defRPr sz="1800" kern="1200">
+                  <a:solidFill>
+                    <a:schemeClr val="tx1"/>
+                  </a:solidFill>
+                  <a:latin typeface="+mn-lt"/>
+                  <a:ea typeface="+mn-ea"/>
+                  <a:cs typeface="+mn-cs"/>
+                </a:defRPr>
+              </a:lvl7pPr>
+              <a:lvl8pPr marL="3200400" algn="l" defTabSz="914400" rtl="0" eaLnBrk="1" latinLnBrk="0" hangingPunct="1">
+                <a:defRPr sz="1800" kern="1200">
+                  <a:solidFill>
+                    <a:schemeClr val="tx1"/>
+                  </a:solidFill>
+                  <a:latin typeface="+mn-lt"/>
+                  <a:ea typeface="+mn-ea"/>
+                  <a:cs typeface="+mn-cs"/>
+                </a:defRPr>
+              </a:lvl8pPr>
+              <a:lvl9pPr marL="3657600" algn="l" defTabSz="914400" rtl="0" eaLnBrk="1" latinLnBrk="0" hangingPunct="1">
+                <a:defRPr sz="1800" kern="1200">
+                  <a:solidFill>
+                    <a:schemeClr val="tx1"/>
+                  </a:solidFill>
+                  <a:latin typeface="+mn-lt"/>
+                  <a:ea typeface="+mn-ea"/>
+                  <a:cs typeface="+mn-cs"/>
+                </a:defRPr>
+              </a:lvl9pPr>
+            </a:lstStyle>
+            <a:p>
+              <a:pPr marL="0" indent="0" algn="ctr">
+                <a:buNone/>
+              </a:pPr>
+              <a:r>
+                <a:rPr lang="en-US" dirty="0">
+                  <a:solidFill>
+                    <a:schemeClr val="dk1"/>
+                  </a:solidFill>
+                </a:rPr>
+                <a:t>Spec</a:t>
+              </a:r>
+            </a:p>
+          </p:txBody>
+        </p:sp>
+        <p:sp>
+          <p:nvSpPr>
+            <p:cNvPr id="38" name="Shape 34">
+              <a:extLst>
+                <a:ext uri="{FF2B5EF4-FFF2-40B4-BE49-F238E27FC236}">
+                  <a16:creationId xmlns:a16="http://schemas.microsoft.com/office/drawing/2014/main" id="{A1986CEE-1409-4BEB-58CC-B6F12CC40CCE}"/>
+                </a:ext>
+              </a:extLst>
+            </p:cNvPr>
+            <p:cNvSpPr/>
+            <p:nvPr/>
+          </p:nvSpPr>
+          <p:spPr>
+            <a:xfrm>
+              <a:off x="9812383" y="3648913"/>
+              <a:ext cx="1965960" cy="530352"/>
+            </a:xfrm>
+            <a:prstGeom prst="roundRect">
+              <a:avLst/>
+            </a:prstGeom>
+            <a:solidFill>
+              <a:srgbClr val="FFFFFF"/>
+            </a:solidFill>
+            <a:ln w="12700">
+              <a:solidFill>
+                <a:srgbClr val="334155"/>
+              </a:solidFill>
+              <a:prstDash val="solid"/>
+            </a:ln>
+            <a:effectLst>
+              <a:outerShdw blurRad="38100" dist="19050" dir="2700000" algn="bl" rotWithShape="0">
+                <a:srgbClr val="000000">
+                  <a:alpha val="15000"/>
+                </a:srgbClr>
+              </a:outerShdw>
+            </a:effectLst>
+          </p:spPr>
+          <p:txBody>
+            <a:bodyPr/>
+            <a:lstStyle/>
+            <a:p>
+              <a:endParaRPr lang="zh-CN" altLang="en-US"/>
+            </a:p>
+          </p:txBody>
+        </p:sp>
+        <p:sp>
+          <p:nvSpPr>
+            <p:cNvPr id="39" name="Text 35">
+              <a:extLst>
+                <a:ext uri="{FF2B5EF4-FFF2-40B4-BE49-F238E27FC236}">
+                  <a16:creationId xmlns:a16="http://schemas.microsoft.com/office/drawing/2014/main" id="{29B49F60-7EA0-EDE3-C15A-2420B7630F10}"/>
+                </a:ext>
+              </a:extLst>
+            </p:cNvPr>
+            <p:cNvSpPr/>
+            <p:nvPr/>
+          </p:nvSpPr>
+          <p:spPr>
+            <a:xfrm>
+              <a:off x="9903823" y="3694633"/>
+              <a:ext cx="1783080" cy="438912"/>
+            </a:xfrm>
+            <a:prstGeom prst="rect">
+              <a:avLst/>
+            </a:prstGeom>
+            <a:noFill/>
+            <a:ln/>
+          </p:spPr>
+          <p:txBody>
+            <a:bodyPr wrap="square" rtlCol="0" anchor="ctr"/>
+            <a:lstStyle>
+              <a:lvl1pPr marL="0" algn="l" defTabSz="914400" rtl="0" eaLnBrk="1" latinLnBrk="0" hangingPunct="1">
+                <a:defRPr sz="1800" kern="1200">
+                  <a:solidFill>
+                    <a:schemeClr val="tx1"/>
+                  </a:solidFill>
+                  <a:latin typeface="+mn-lt"/>
+                  <a:ea typeface="+mn-ea"/>
+                  <a:cs typeface="+mn-cs"/>
+                </a:defRPr>
+              </a:lvl1pPr>
+              <a:lvl2pPr marL="457200" algn="l" defTabSz="914400" rtl="0" eaLnBrk="1" latinLnBrk="0" hangingPunct="1">
+                <a:defRPr sz="1800" kern="1200">
+                  <a:solidFill>
+                    <a:schemeClr val="tx1"/>
+                  </a:solidFill>
+                  <a:latin typeface="+mn-lt"/>
+                  <a:ea typeface="+mn-ea"/>
+                  <a:cs typeface="+mn-cs"/>
+                </a:defRPr>
+              </a:lvl2pPr>
+              <a:lvl3pPr marL="914400" algn="l" defTabSz="914400" rtl="0" eaLnBrk="1" latinLnBrk="0" hangingPunct="1">
+                <a:defRPr sz="1800" kern="1200">
+                  <a:solidFill>
+                    <a:schemeClr val="tx1"/>
+                  </a:solidFill>
+                  <a:latin typeface="+mn-lt"/>
+                  <a:ea typeface="+mn-ea"/>
+                  <a:cs typeface="+mn-cs"/>
+                </a:defRPr>
+              </a:lvl3pPr>
+              <a:lvl4pPr marL="1371600" algn="l" defTabSz="914400" rtl="0" eaLnBrk="1" latinLnBrk="0" hangingPunct="1">
+                <a:defRPr sz="1800" kern="1200">
+                  <a:solidFill>
+                    <a:schemeClr val="tx1"/>
+                  </a:solidFill>
+                  <a:latin typeface="+mn-lt"/>
+                  <a:ea typeface="+mn-ea"/>
+                  <a:cs typeface="+mn-cs"/>
+                </a:defRPr>
+              </a:lvl4pPr>
+              <a:lvl5pPr marL="1828800" algn="l" defTabSz="914400" rtl="0" eaLnBrk="1" latinLnBrk="0" hangingPunct="1">
+                <a:defRPr sz="1800" kern="1200">
+                  <a:solidFill>
+                    <a:schemeClr val="tx1"/>
+                  </a:solidFill>
+                  <a:latin typeface="+mn-lt"/>
+                  <a:ea typeface="+mn-ea"/>
+                  <a:cs typeface="+mn-cs"/>
+                </a:defRPr>
+              </a:lvl5pPr>
+              <a:lvl6pPr marL="2286000" algn="l" defTabSz="914400" rtl="0" eaLnBrk="1" latinLnBrk="0" hangingPunct="1">
+                <a:defRPr sz="1800" kern="1200">
+                  <a:solidFill>
+                    <a:schemeClr val="tx1"/>
+                  </a:solidFill>
+                  <a:latin typeface="+mn-lt"/>
+                  <a:ea typeface="+mn-ea"/>
+                  <a:cs typeface="+mn-cs"/>
+                </a:defRPr>
+              </a:lvl6pPr>
+              <a:lvl7pPr marL="2743200" algn="l" defTabSz="914400" rtl="0" eaLnBrk="1" latinLnBrk="0" hangingPunct="1">
+                <a:defRPr sz="1800" kern="1200">
+                  <a:solidFill>
+                    <a:schemeClr val="tx1"/>
+                  </a:solidFill>
+                  <a:latin typeface="+mn-lt"/>
+                  <a:ea typeface="+mn-ea"/>
+                  <a:cs typeface="+mn-cs"/>
+                </a:defRPr>
+              </a:lvl7pPr>
+              <a:lvl8pPr marL="3200400" algn="l" defTabSz="914400" rtl="0" eaLnBrk="1" latinLnBrk="0" hangingPunct="1">
+                <a:defRPr sz="1800" kern="1200">
+                  <a:solidFill>
+                    <a:schemeClr val="tx1"/>
+                  </a:solidFill>
+                  <a:latin typeface="+mn-lt"/>
+                  <a:ea typeface="+mn-ea"/>
+                  <a:cs typeface="+mn-cs"/>
+                </a:defRPr>
+              </a:lvl8pPr>
+              <a:lvl9pPr marL="3657600" algn="l" defTabSz="914400" rtl="0" eaLnBrk="1" latinLnBrk="0" hangingPunct="1">
+                <a:defRPr sz="1800" kern="1200">
+                  <a:solidFill>
+                    <a:schemeClr val="tx1"/>
+                  </a:solidFill>
+                  <a:latin typeface="+mn-lt"/>
+                  <a:ea typeface="+mn-ea"/>
+                  <a:cs typeface="+mn-cs"/>
+                </a:defRPr>
+              </a:lvl9pPr>
+            </a:lstStyle>
+            <a:p>
+              <a:pPr marL="0" indent="0" algn="ctr">
+                <a:buNone/>
+              </a:pPr>
+              <a:r>
+                <a:rPr lang="en-US" dirty="0">
+                  <a:solidFill>
+                    <a:schemeClr val="dk1"/>
+                  </a:solidFill>
+                </a:rPr>
+                <a:t>Commit</a:t>
+              </a:r>
+            </a:p>
+          </p:txBody>
+        </p:sp>
+      </p:grpSp>
+      <p:grpSp>
+        <p:nvGrpSpPr>
+          <p:cNvPr id="83" name="组合 82">
+            <a:extLst>
+              <a:ext uri="{FF2B5EF4-FFF2-40B4-BE49-F238E27FC236}">
+                <a16:creationId xmlns:a16="http://schemas.microsoft.com/office/drawing/2014/main" id="{DFCA2AD1-7029-65B0-88D5-DD0D714944FE}"/>
+              </a:ext>
+            </a:extLst>
+          </p:cNvPr>
+          <p:cNvGrpSpPr/>
+          <p:nvPr/>
+        </p:nvGrpSpPr>
+        <p:grpSpPr>
+          <a:xfrm>
+            <a:off x="-206759" y="1007419"/>
+            <a:ext cx="2736669" cy="1828606"/>
+            <a:chOff x="113211" y="1929841"/>
+            <a:chExt cx="2736669" cy="1828606"/>
+          </a:xfrm>
+        </p:grpSpPr>
+        <p:sp>
+          <p:nvSpPr>
+            <p:cNvPr id="5" name="Shape 1">
+              <a:extLst>
+                <a:ext uri="{FF2B5EF4-FFF2-40B4-BE49-F238E27FC236}">
+                  <a16:creationId xmlns:a16="http://schemas.microsoft.com/office/drawing/2014/main" id="{617F978E-4CC9-21DB-A1A5-8479C2B4B4BC}"/>
+                </a:ext>
+              </a:extLst>
+            </p:cNvPr>
+            <p:cNvSpPr/>
+            <p:nvPr/>
+          </p:nvSpPr>
+          <p:spPr>
+            <a:xfrm>
+              <a:off x="113211" y="1929841"/>
+              <a:ext cx="2736669" cy="1828606"/>
+            </a:xfrm>
+            <a:prstGeom prst="roundRect">
+              <a:avLst/>
+            </a:prstGeom>
+            <a:solidFill>
+              <a:srgbClr val="F1F5F9"/>
+            </a:solidFill>
+            <a:ln w="12700">
+              <a:solidFill>
+                <a:srgbClr val="334155"/>
+              </a:solidFill>
+              <a:prstDash val="solid"/>
+            </a:ln>
+            <a:effectLst>
+              <a:outerShdw blurRad="38100" dist="19050" dir="2700000" algn="bl" rotWithShape="0">
+                <a:srgbClr val="000000">
+                  <a:alpha val="15000"/>
+                </a:srgbClr>
+              </a:outerShdw>
+            </a:effectLst>
+          </p:spPr>
+          <p:txBody>
+            <a:bodyPr/>
+            <a:lstStyle/>
+            <a:p>
+              <a:endParaRPr lang="zh-CN" altLang="en-US"/>
+            </a:p>
+          </p:txBody>
+        </p:sp>
+        <p:sp>
+          <p:nvSpPr>
+            <p:cNvPr id="6" name="Text 2">
+              <a:extLst>
+                <a:ext uri="{FF2B5EF4-FFF2-40B4-BE49-F238E27FC236}">
+                  <a16:creationId xmlns:a16="http://schemas.microsoft.com/office/drawing/2014/main" id="{8C97E19C-EDF3-8987-3B47-53F26427482F}"/>
+                </a:ext>
+              </a:extLst>
+            </p:cNvPr>
+            <p:cNvSpPr/>
+            <p:nvPr/>
+          </p:nvSpPr>
+          <p:spPr>
+            <a:xfrm>
+              <a:off x="425591" y="1985337"/>
+              <a:ext cx="2148840" cy="398221"/>
+            </a:xfrm>
+            <a:prstGeom prst="rect">
+              <a:avLst/>
+            </a:prstGeom>
+            <a:noFill/>
+            <a:ln/>
+          </p:spPr>
+          <p:txBody>
+            <a:bodyPr wrap="square" rtlCol="0" anchor="ctr"/>
+            <a:lstStyle>
+              <a:lvl1pPr marL="0" algn="l" defTabSz="914400" rtl="0" eaLnBrk="1" latinLnBrk="0" hangingPunct="1">
+                <a:defRPr sz="1800" kern="1200">
+                  <a:solidFill>
+                    <a:schemeClr val="tx1"/>
+                  </a:solidFill>
+                  <a:latin typeface="+mn-lt"/>
+                  <a:ea typeface="+mn-ea"/>
+                  <a:cs typeface="+mn-cs"/>
+                </a:defRPr>
+              </a:lvl1pPr>
+              <a:lvl2pPr marL="457200" algn="l" defTabSz="914400" rtl="0" eaLnBrk="1" latinLnBrk="0" hangingPunct="1">
+                <a:defRPr sz="1800" kern="1200">
+                  <a:solidFill>
+                    <a:schemeClr val="tx1"/>
+                  </a:solidFill>
+                  <a:latin typeface="+mn-lt"/>
+                  <a:ea typeface="+mn-ea"/>
+                  <a:cs typeface="+mn-cs"/>
+                </a:defRPr>
+              </a:lvl2pPr>
+              <a:lvl3pPr marL="914400" algn="l" defTabSz="914400" rtl="0" eaLnBrk="1" latinLnBrk="0" hangingPunct="1">
+                <a:defRPr sz="1800" kern="1200">
+                  <a:solidFill>
+                    <a:schemeClr val="tx1"/>
+                  </a:solidFill>
+                  <a:latin typeface="+mn-lt"/>
+                  <a:ea typeface="+mn-ea"/>
+                  <a:cs typeface="+mn-cs"/>
+                </a:defRPr>
+              </a:lvl3pPr>
+              <a:lvl4pPr marL="1371600" algn="l" defTabSz="914400" rtl="0" eaLnBrk="1" latinLnBrk="0" hangingPunct="1">
+                <a:defRPr sz="1800" kern="1200">
+                  <a:solidFill>
+                    <a:schemeClr val="tx1"/>
+                  </a:solidFill>
+                  <a:latin typeface="+mn-lt"/>
+                  <a:ea typeface="+mn-ea"/>
+                  <a:cs typeface="+mn-cs"/>
+                </a:defRPr>
+              </a:lvl4pPr>
+              <a:lvl5pPr marL="1828800" algn="l" defTabSz="914400" rtl="0" eaLnBrk="1" latinLnBrk="0" hangingPunct="1">
+                <a:defRPr sz="1800" kern="1200">
+                  <a:solidFill>
+                    <a:schemeClr val="tx1"/>
+                  </a:solidFill>
+                  <a:latin typeface="+mn-lt"/>
+                  <a:ea typeface="+mn-ea"/>
+                  <a:cs typeface="+mn-cs"/>
+                </a:defRPr>
+              </a:lvl5pPr>
+              <a:lvl6pPr marL="2286000" algn="l" defTabSz="914400" rtl="0" eaLnBrk="1" latinLnBrk="0" hangingPunct="1">
+                <a:defRPr sz="1800" kern="1200">
+                  <a:solidFill>
+                    <a:schemeClr val="tx1"/>
+                  </a:solidFill>
+                  <a:latin typeface="+mn-lt"/>
+                  <a:ea typeface="+mn-ea"/>
+                  <a:cs typeface="+mn-cs"/>
+                </a:defRPr>
+              </a:lvl6pPr>
+              <a:lvl7pPr marL="2743200" algn="l" defTabSz="914400" rtl="0" eaLnBrk="1" latinLnBrk="0" hangingPunct="1">
+                <a:defRPr sz="1800" kern="1200">
+                  <a:solidFill>
+                    <a:schemeClr val="tx1"/>
+                  </a:solidFill>
+                  <a:latin typeface="+mn-lt"/>
+                  <a:ea typeface="+mn-ea"/>
+                  <a:cs typeface="+mn-cs"/>
+                </a:defRPr>
+              </a:lvl7pPr>
+              <a:lvl8pPr marL="3200400" algn="l" defTabSz="914400" rtl="0" eaLnBrk="1" latinLnBrk="0" hangingPunct="1">
+                <a:defRPr sz="1800" kern="1200">
+                  <a:solidFill>
+                    <a:schemeClr val="tx1"/>
+                  </a:solidFill>
+                  <a:latin typeface="+mn-lt"/>
+                  <a:ea typeface="+mn-ea"/>
+                  <a:cs typeface="+mn-cs"/>
+                </a:defRPr>
+              </a:lvl8pPr>
+              <a:lvl9pPr marL="3657600" algn="l" defTabSz="914400" rtl="0" eaLnBrk="1" latinLnBrk="0" hangingPunct="1">
+                <a:defRPr sz="1800" kern="1200">
+                  <a:solidFill>
+                    <a:schemeClr val="tx1"/>
+                  </a:solidFill>
+                  <a:latin typeface="+mn-lt"/>
+                  <a:ea typeface="+mn-ea"/>
+                  <a:cs typeface="+mn-cs"/>
+                </a:defRPr>
+              </a:lvl9pPr>
+            </a:lstStyle>
+            <a:p>
+              <a:pPr indent="0" algn="ctr">
+                <a:buNone/>
+              </a:pPr>
+              <a:r>
+                <a:rPr lang="en-US" dirty="0">
+                  <a:solidFill>
+                    <a:schemeClr val="dk1"/>
+                  </a:solidFill>
+                </a:rPr>
+                <a:t>Workflow Spec 𝓦</a:t>
+              </a:r>
+            </a:p>
+          </p:txBody>
+        </p:sp>
+        <p:grpSp>
+          <p:nvGrpSpPr>
+            <p:cNvPr id="82" name="组合 81">
+              <a:extLst>
+                <a:ext uri="{FF2B5EF4-FFF2-40B4-BE49-F238E27FC236}">
+                  <a16:creationId xmlns:a16="http://schemas.microsoft.com/office/drawing/2014/main" id="{069C6B18-A234-1DFE-9D13-FC606F1945DB}"/>
+                </a:ext>
+              </a:extLst>
+            </p:cNvPr>
+            <p:cNvGrpSpPr/>
+            <p:nvPr/>
+          </p:nvGrpSpPr>
+          <p:grpSpPr>
+            <a:xfrm>
+              <a:off x="223563" y="2436876"/>
+              <a:ext cx="2494055" cy="1090159"/>
+              <a:chOff x="755875" y="5441726"/>
+              <a:chExt cx="2494055" cy="1090159"/>
+            </a:xfrm>
+          </p:grpSpPr>
+          <p:sp>
+            <p:nvSpPr>
+              <p:cNvPr id="60" name="矩形: 圆角 59">
+                <a:extLst>
+                  <a:ext uri="{FF2B5EF4-FFF2-40B4-BE49-F238E27FC236}">
+                    <a16:creationId xmlns:a16="http://schemas.microsoft.com/office/drawing/2014/main" id="{81DE4F76-B578-FE61-5EC0-CF69EB9094DC}"/>
+                  </a:ext>
+                </a:extLst>
+              </p:cNvPr>
+              <p:cNvSpPr/>
+              <p:nvPr/>
+            </p:nvSpPr>
+            <p:spPr>
+              <a:xfrm>
+                <a:off x="1764030" y="6207448"/>
+                <a:ext cx="480117" cy="324437"/>
+              </a:xfrm>
+              <a:prstGeom prst="roundRect">
+                <a:avLst/>
+              </a:prstGeom>
+              <a:ln w="19050"/>
+            </p:spPr>
+            <p:style>
+              <a:lnRef idx="2">
+                <a:schemeClr val="dk1"/>
+              </a:lnRef>
+              <a:fillRef idx="1">
+                <a:schemeClr val="lt1"/>
+              </a:fillRef>
+              <a:effectRef idx="0">
+                <a:schemeClr val="dk1"/>
+              </a:effectRef>
+              <a:fontRef idx="minor">
+                <a:schemeClr val="dk1"/>
+              </a:fontRef>
+            </p:style>
+            <p:txBody>
+              <a:bodyPr rtlCol="0" anchor="ctr"/>
+              <a:lstStyle/>
+              <a:p>
+                <a:pPr algn="ctr"/>
+                <a:r>
+                  <a:rPr lang="en-US" altLang="zh-CN" dirty="0"/>
+                  <a:t>B1</a:t>
+                </a:r>
+                <a:endParaRPr lang="zh-CN" altLang="en-US" dirty="0"/>
+              </a:p>
+            </p:txBody>
+          </p:sp>
+          <p:sp>
+            <p:nvSpPr>
+              <p:cNvPr id="61" name="矩形: 圆角 60">
+                <a:extLst>
+                  <a:ext uri="{FF2B5EF4-FFF2-40B4-BE49-F238E27FC236}">
+                    <a16:creationId xmlns:a16="http://schemas.microsoft.com/office/drawing/2014/main" id="{E6FFC25E-84C7-494F-42F4-D73FF6A83187}"/>
+                  </a:ext>
+                </a:extLst>
+              </p:cNvPr>
+              <p:cNvSpPr/>
+              <p:nvPr/>
+            </p:nvSpPr>
+            <p:spPr>
+              <a:xfrm>
+                <a:off x="1764029" y="5441726"/>
+                <a:ext cx="480118" cy="324437"/>
+              </a:xfrm>
+              <a:prstGeom prst="roundRect">
+                <a:avLst/>
+              </a:prstGeom>
+              <a:ln w="19050"/>
+            </p:spPr>
+            <p:style>
+              <a:lnRef idx="2">
+                <a:schemeClr val="dk1"/>
+              </a:lnRef>
+              <a:fillRef idx="1">
+                <a:schemeClr val="lt1"/>
+              </a:fillRef>
+              <a:effectRef idx="0">
+                <a:schemeClr val="dk1"/>
+              </a:effectRef>
+              <a:fontRef idx="minor">
+                <a:schemeClr val="dk1"/>
+              </a:fontRef>
+            </p:style>
+            <p:txBody>
+              <a:bodyPr rtlCol="0" anchor="ctr"/>
+              <a:lstStyle/>
+              <a:p>
+                <a:pPr algn="ctr"/>
+                <a:r>
+                  <a:rPr lang="en-US" altLang="zh-CN" dirty="0"/>
+                  <a:t>B2</a:t>
+                </a:r>
+                <a:endParaRPr lang="zh-CN" altLang="en-US" dirty="0"/>
+              </a:p>
+            </p:txBody>
+          </p:sp>
+          <p:sp>
+            <p:nvSpPr>
+              <p:cNvPr id="69" name="矩形: 圆角 68">
+                <a:extLst>
+                  <a:ext uri="{FF2B5EF4-FFF2-40B4-BE49-F238E27FC236}">
+                    <a16:creationId xmlns:a16="http://schemas.microsoft.com/office/drawing/2014/main" id="{0EAAD55B-06E2-8414-FE66-0089AC9A6A3B}"/>
+                  </a:ext>
+                </a:extLst>
+              </p:cNvPr>
+              <p:cNvSpPr/>
+              <p:nvPr/>
+            </p:nvSpPr>
+            <p:spPr>
+              <a:xfrm>
+                <a:off x="2769812" y="5831673"/>
+                <a:ext cx="480118" cy="324437"/>
+              </a:xfrm>
+              <a:prstGeom prst="roundRect">
+                <a:avLst/>
+              </a:prstGeom>
+              <a:ln w="19050"/>
+            </p:spPr>
+            <p:style>
+              <a:lnRef idx="2">
+                <a:schemeClr val="dk1"/>
+              </a:lnRef>
+              <a:fillRef idx="1">
+                <a:schemeClr val="lt1"/>
+              </a:fillRef>
+              <a:effectRef idx="0">
+                <a:schemeClr val="dk1"/>
+              </a:effectRef>
+              <a:fontRef idx="minor">
+                <a:schemeClr val="dk1"/>
+              </a:fontRef>
+            </p:style>
+            <p:txBody>
+              <a:bodyPr rtlCol="0" anchor="ctr"/>
+              <a:lstStyle/>
+              <a:p>
+                <a:pPr algn="ctr"/>
+                <a:r>
+                  <a:rPr lang="en-US" altLang="zh-CN" dirty="0"/>
+                  <a:t>C</a:t>
+                </a:r>
+                <a:endParaRPr lang="zh-CN" altLang="en-US" dirty="0"/>
+              </a:p>
+            </p:txBody>
+          </p:sp>
+          <p:sp>
+            <p:nvSpPr>
+              <p:cNvPr id="70" name="矩形: 圆角 69">
+                <a:extLst>
+                  <a:ext uri="{FF2B5EF4-FFF2-40B4-BE49-F238E27FC236}">
+                    <a16:creationId xmlns:a16="http://schemas.microsoft.com/office/drawing/2014/main" id="{872A5504-6B00-01EC-7F66-6070EEBB8412}"/>
+                  </a:ext>
+                </a:extLst>
+              </p:cNvPr>
+              <p:cNvSpPr/>
+              <p:nvPr/>
+            </p:nvSpPr>
+            <p:spPr>
+              <a:xfrm>
+                <a:off x="755875" y="5818828"/>
+                <a:ext cx="480118" cy="324437"/>
+              </a:xfrm>
+              <a:prstGeom prst="roundRect">
+                <a:avLst/>
+              </a:prstGeom>
+              <a:ln w="19050"/>
+            </p:spPr>
+            <p:style>
+              <a:lnRef idx="2">
+                <a:schemeClr val="dk1"/>
+              </a:lnRef>
+              <a:fillRef idx="1">
+                <a:schemeClr val="lt1"/>
+              </a:fillRef>
+              <a:effectRef idx="0">
+                <a:schemeClr val="dk1"/>
+              </a:effectRef>
+              <a:fontRef idx="minor">
+                <a:schemeClr val="dk1"/>
+              </a:fontRef>
+            </p:style>
+            <p:txBody>
+              <a:bodyPr rtlCol="0" anchor="ctr"/>
+              <a:lstStyle/>
+              <a:p>
+                <a:pPr algn="ctr"/>
+                <a:r>
+                  <a:rPr lang="en-US" altLang="zh-CN" dirty="0"/>
+                  <a:t>A</a:t>
+                </a:r>
+                <a:endParaRPr lang="zh-CN" altLang="en-US" dirty="0"/>
+              </a:p>
+            </p:txBody>
+          </p:sp>
+          <p:cxnSp>
+            <p:nvCxnSpPr>
+              <p:cNvPr id="72" name="连接符: 肘形 71">
+                <a:extLst>
+                  <a:ext uri="{FF2B5EF4-FFF2-40B4-BE49-F238E27FC236}">
+                    <a16:creationId xmlns:a16="http://schemas.microsoft.com/office/drawing/2014/main" id="{DF2154C1-5460-B2E1-811B-E546659058E0}"/>
+                  </a:ext>
+                </a:extLst>
+              </p:cNvPr>
+              <p:cNvCxnSpPr>
+                <a:stCxn id="70" idx="3"/>
+                <a:endCxn id="61" idx="1"/>
+              </p:cNvCxnSpPr>
+              <p:nvPr/>
+            </p:nvCxnSpPr>
+            <p:spPr>
+              <a:xfrm flipV="1">
+                <a:off x="1235993" y="5603945"/>
+                <a:ext cx="528036" cy="377102"/>
+              </a:xfrm>
+              <a:prstGeom prst="bentConnector3">
+                <a:avLst/>
+              </a:prstGeom>
+              <a:ln w="38100">
+                <a:tailEnd type="triangle"/>
+              </a:ln>
+            </p:spPr>
+            <p:style>
+              <a:lnRef idx="1">
+                <a:schemeClr val="dk1"/>
+              </a:lnRef>
+              <a:fillRef idx="0">
+                <a:schemeClr val="dk1"/>
+              </a:fillRef>
+              <a:effectRef idx="0">
+                <a:schemeClr val="dk1"/>
+              </a:effectRef>
+              <a:fontRef idx="minor">
+                <a:schemeClr val="tx1"/>
+              </a:fontRef>
+            </p:style>
+          </p:cxnSp>
+          <p:cxnSp>
+            <p:nvCxnSpPr>
+              <p:cNvPr id="73" name="连接符: 肘形 72">
+                <a:extLst>
+                  <a:ext uri="{FF2B5EF4-FFF2-40B4-BE49-F238E27FC236}">
+                    <a16:creationId xmlns:a16="http://schemas.microsoft.com/office/drawing/2014/main" id="{FE8BDA60-FD45-1BD4-19B0-FD98D144DAD4}"/>
+                  </a:ext>
+                </a:extLst>
+              </p:cNvPr>
+              <p:cNvCxnSpPr>
+                <a:cxnSpLocks/>
+                <a:stCxn id="70" idx="3"/>
+                <a:endCxn id="60" idx="1"/>
+              </p:cNvCxnSpPr>
+              <p:nvPr/>
+            </p:nvCxnSpPr>
+            <p:spPr>
+              <a:xfrm>
+                <a:off x="1235993" y="5981047"/>
+                <a:ext cx="528037" cy="388620"/>
+              </a:xfrm>
+              <a:prstGeom prst="bentConnector3">
+                <a:avLst/>
+              </a:prstGeom>
+              <a:ln w="38100">
+                <a:tailEnd type="triangle"/>
+              </a:ln>
+            </p:spPr>
+            <p:style>
+              <a:lnRef idx="1">
+                <a:schemeClr val="dk1"/>
+              </a:lnRef>
+              <a:fillRef idx="0">
+                <a:schemeClr val="dk1"/>
+              </a:fillRef>
+              <a:effectRef idx="0">
+                <a:schemeClr val="dk1"/>
+              </a:effectRef>
+              <a:fontRef idx="minor">
+                <a:schemeClr val="tx1"/>
+              </a:fontRef>
+            </p:style>
+          </p:cxnSp>
+          <p:cxnSp>
+            <p:nvCxnSpPr>
+              <p:cNvPr id="76" name="连接符: 肘形 75">
+                <a:extLst>
+                  <a:ext uri="{FF2B5EF4-FFF2-40B4-BE49-F238E27FC236}">
+                    <a16:creationId xmlns:a16="http://schemas.microsoft.com/office/drawing/2014/main" id="{90ECA90B-17E3-FBC4-1499-8F57B4665D84}"/>
+                  </a:ext>
+                </a:extLst>
+              </p:cNvPr>
+              <p:cNvCxnSpPr>
+                <a:cxnSpLocks/>
+                <a:stCxn id="61" idx="3"/>
+                <a:endCxn id="69" idx="1"/>
+              </p:cNvCxnSpPr>
+              <p:nvPr/>
+            </p:nvCxnSpPr>
+            <p:spPr>
+              <a:xfrm>
+                <a:off x="2244147" y="5603945"/>
+                <a:ext cx="525665" cy="389947"/>
+              </a:xfrm>
+              <a:prstGeom prst="bentConnector3">
+                <a:avLst>
+                  <a:gd name="adj1" fmla="val 50000"/>
+                </a:avLst>
+              </a:prstGeom>
+              <a:ln w="38100">
+                <a:tailEnd type="triangle"/>
+              </a:ln>
+            </p:spPr>
+            <p:style>
+              <a:lnRef idx="1">
+                <a:schemeClr val="dk1"/>
+              </a:lnRef>
+              <a:fillRef idx="0">
+                <a:schemeClr val="dk1"/>
+              </a:fillRef>
+              <a:effectRef idx="0">
+                <a:schemeClr val="dk1"/>
+              </a:effectRef>
+              <a:fontRef idx="minor">
+                <a:schemeClr val="tx1"/>
+              </a:fontRef>
+            </p:style>
+          </p:cxnSp>
+          <p:cxnSp>
+            <p:nvCxnSpPr>
+              <p:cNvPr id="79" name="连接符: 肘形 78">
+                <a:extLst>
+                  <a:ext uri="{FF2B5EF4-FFF2-40B4-BE49-F238E27FC236}">
+                    <a16:creationId xmlns:a16="http://schemas.microsoft.com/office/drawing/2014/main" id="{7C1116C9-71F2-DBEC-1FB9-E80570F5DC6F}"/>
+                  </a:ext>
+                </a:extLst>
+              </p:cNvPr>
+              <p:cNvCxnSpPr>
+                <a:cxnSpLocks/>
+                <a:stCxn id="60" idx="3"/>
+                <a:endCxn id="69" idx="1"/>
+              </p:cNvCxnSpPr>
+              <p:nvPr/>
+            </p:nvCxnSpPr>
+            <p:spPr>
+              <a:xfrm flipV="1">
+                <a:off x="2244147" y="5993892"/>
+                <a:ext cx="525665" cy="375775"/>
+              </a:xfrm>
+              <a:prstGeom prst="bentConnector3">
+                <a:avLst>
+                  <a:gd name="adj1" fmla="val 50000"/>
+                </a:avLst>
+              </a:prstGeom>
+              <a:ln w="38100">
+                <a:tailEnd type="triangle"/>
+              </a:ln>
+            </p:spPr>
+            <p:style>
+              <a:lnRef idx="1">
+                <a:schemeClr val="dk1"/>
+              </a:lnRef>
+              <a:fillRef idx="0">
+                <a:schemeClr val="dk1"/>
+              </a:fillRef>
+              <a:effectRef idx="0">
+                <a:schemeClr val="dk1"/>
+              </a:effectRef>
+              <a:fontRef idx="minor">
+                <a:schemeClr val="tx1"/>
+              </a:fontRef>
+            </p:style>
+          </p:cxnSp>
+        </p:grpSp>
+      </p:grpSp>
+      <p:cxnSp>
+        <p:nvCxnSpPr>
+          <p:cNvPr id="99" name="直接箭头连接符 98">
+            <a:extLst>
+              <a:ext uri="{FF2B5EF4-FFF2-40B4-BE49-F238E27FC236}">
+                <a16:creationId xmlns:a16="http://schemas.microsoft.com/office/drawing/2014/main" id="{E91F3F0E-CBC7-E59A-6F87-219828956E1A}"/>
+              </a:ext>
+            </a:extLst>
+          </p:cNvPr>
+          <p:cNvCxnSpPr>
+            <a:cxnSpLocks/>
+            <a:stCxn id="19" idx="3"/>
+            <a:endCxn id="21" idx="1"/>
+          </p:cNvCxnSpPr>
+          <p:nvPr/>
+        </p:nvCxnSpPr>
+        <p:spPr>
+          <a:xfrm>
+            <a:off x="5553794" y="1601294"/>
+            <a:ext cx="764798" cy="2697"/>
+          </a:xfrm>
+          <a:prstGeom prst="straightConnector1">
+            <a:avLst/>
+          </a:prstGeom>
+          <a:ln w="38100">
+            <a:solidFill>
+              <a:schemeClr val="accent1"/>
+            </a:solidFill>
+            <a:tailEnd type="triangle"/>
+          </a:ln>
+        </p:spPr>
+        <p:style>
+          <a:lnRef idx="1">
+            <a:schemeClr val="dk1"/>
+          </a:lnRef>
+          <a:fillRef idx="0">
+            <a:schemeClr val="dk1"/>
+          </a:fillRef>
+          <a:effectRef idx="0">
+            <a:schemeClr val="dk1"/>
+          </a:effectRef>
+          <a:fontRef idx="minor">
+            <a:schemeClr val="tx1"/>
+          </a:fontRef>
+        </p:style>
+      </p:cxnSp>
+      <p:grpSp>
+        <p:nvGrpSpPr>
+          <p:cNvPr id="117" name="组合 116">
+            <a:extLst>
+              <a:ext uri="{FF2B5EF4-FFF2-40B4-BE49-F238E27FC236}">
+                <a16:creationId xmlns:a16="http://schemas.microsoft.com/office/drawing/2014/main" id="{EFDBF507-3ED8-AED5-6A87-7EC8218B4368}"/>
+              </a:ext>
+            </a:extLst>
+          </p:cNvPr>
+          <p:cNvGrpSpPr/>
+          <p:nvPr/>
+        </p:nvGrpSpPr>
+        <p:grpSpPr>
+          <a:xfrm>
+            <a:off x="8090829" y="5154815"/>
+            <a:ext cx="3361606" cy="1083275"/>
+            <a:chOff x="8508697" y="5161222"/>
+            <a:chExt cx="3361606" cy="1083275"/>
+          </a:xfrm>
+        </p:grpSpPr>
+        <p:cxnSp>
+          <p:nvCxnSpPr>
+            <p:cNvPr id="110" name="直接箭头连接符 109">
+              <a:extLst>
+                <a:ext uri="{FF2B5EF4-FFF2-40B4-BE49-F238E27FC236}">
+                  <a16:creationId xmlns:a16="http://schemas.microsoft.com/office/drawing/2014/main" id="{348F08A3-F506-64D8-F1B8-E2071A0DC33B}"/>
+                </a:ext>
+              </a:extLst>
+            </p:cNvPr>
+            <p:cNvCxnSpPr>
+              <a:cxnSpLocks/>
+            </p:cNvCxnSpPr>
+            <p:nvPr/>
+          </p:nvCxnSpPr>
+          <p:spPr>
+            <a:xfrm>
+              <a:off x="8508697" y="5722716"/>
+              <a:ext cx="1275806" cy="0"/>
+            </a:xfrm>
+            <a:prstGeom prst="straightConnector1">
+              <a:avLst/>
+            </a:prstGeom>
+            <a:ln w="38100">
+              <a:solidFill>
+                <a:schemeClr val="accent2"/>
+              </a:solidFill>
+              <a:prstDash val="sysDash"/>
+              <a:tailEnd type="triangle"/>
+            </a:ln>
+          </p:spPr>
+          <p:style>
+            <a:lnRef idx="1">
+              <a:schemeClr val="dk1"/>
+            </a:lnRef>
+            <a:fillRef idx="0">
+              <a:schemeClr val="dk1"/>
+            </a:fillRef>
+            <a:effectRef idx="0">
+              <a:schemeClr val="dk1"/>
+            </a:effectRef>
+            <a:fontRef idx="minor">
+              <a:schemeClr val="tx1"/>
+            </a:fontRef>
+          </p:style>
+        </p:cxnSp>
+        <p:sp>
+          <p:nvSpPr>
+            <p:cNvPr id="111" name="文本框 110">
+              <a:extLst>
+                <a:ext uri="{FF2B5EF4-FFF2-40B4-BE49-F238E27FC236}">
+                  <a16:creationId xmlns:a16="http://schemas.microsoft.com/office/drawing/2014/main" id="{0FEBDADE-40E3-1E6A-1554-18E106C6DE72}"/>
+                </a:ext>
+              </a:extLst>
+            </p:cNvPr>
+            <p:cNvSpPr txBox="1"/>
+            <p:nvPr/>
+          </p:nvSpPr>
+          <p:spPr>
+            <a:xfrm>
+              <a:off x="9146600" y="5522236"/>
+              <a:ext cx="2631743" cy="369332"/>
+            </a:xfrm>
+            <a:prstGeom prst="rect">
+              <a:avLst/>
+            </a:prstGeom>
+            <a:noFill/>
+          </p:spPr>
+          <p:txBody>
+            <a:bodyPr wrap="square">
+              <a:spAutoFit/>
+            </a:bodyPr>
+            <a:lstStyle/>
+            <a:p>
+              <a:pPr algn="ctr"/>
+              <a:r>
+                <a:rPr lang="en-US" altLang="zh-CN" dirty="0"/>
+                <a:t>Data / State</a:t>
+              </a:r>
+              <a:endParaRPr lang="zh-CN" altLang="en-US" dirty="0">
+                <a:solidFill>
+                  <a:schemeClr val="dk1"/>
+                </a:solidFill>
+              </a:endParaRPr>
+            </a:p>
+          </p:txBody>
+        </p:sp>
+        <p:sp>
+          <p:nvSpPr>
+            <p:cNvPr id="112" name="文本框 111">
+              <a:extLst>
+                <a:ext uri="{FF2B5EF4-FFF2-40B4-BE49-F238E27FC236}">
+                  <a16:creationId xmlns:a16="http://schemas.microsoft.com/office/drawing/2014/main" id="{D0F9BB25-C330-90B2-F766-CC2543E94878}"/>
+                </a:ext>
+              </a:extLst>
+            </p:cNvPr>
+            <p:cNvSpPr txBox="1"/>
+            <p:nvPr/>
+          </p:nvSpPr>
+          <p:spPr>
+            <a:xfrm>
+              <a:off x="9663060" y="5161222"/>
+              <a:ext cx="1895143" cy="369332"/>
+            </a:xfrm>
+            <a:prstGeom prst="rect">
+              <a:avLst/>
+            </a:prstGeom>
+            <a:noFill/>
+          </p:spPr>
+          <p:txBody>
+            <a:bodyPr wrap="square">
+              <a:spAutoFit/>
+            </a:bodyPr>
+            <a:lstStyle/>
+            <a:p>
+              <a:pPr algn="ctr"/>
+              <a:r>
+                <a:rPr lang="en-US" altLang="zh-CN" dirty="0"/>
+                <a:t>Control / Event</a:t>
+              </a:r>
+              <a:endParaRPr lang="zh-CN" altLang="en-US" dirty="0">
+                <a:solidFill>
+                  <a:schemeClr val="dk1"/>
+                </a:solidFill>
+              </a:endParaRPr>
+            </a:p>
+          </p:txBody>
+        </p:sp>
+        <p:cxnSp>
+          <p:nvCxnSpPr>
+            <p:cNvPr id="113" name="直接箭头连接符 112">
+              <a:extLst>
+                <a:ext uri="{FF2B5EF4-FFF2-40B4-BE49-F238E27FC236}">
+                  <a16:creationId xmlns:a16="http://schemas.microsoft.com/office/drawing/2014/main" id="{5F964473-4D41-0918-D06F-14D36E892B06}"/>
+                </a:ext>
+              </a:extLst>
+            </p:cNvPr>
+            <p:cNvCxnSpPr>
+              <a:cxnSpLocks/>
+            </p:cNvCxnSpPr>
+            <p:nvPr/>
+          </p:nvCxnSpPr>
+          <p:spPr>
+            <a:xfrm>
+              <a:off x="8508697" y="5370019"/>
+              <a:ext cx="1275806" cy="0"/>
+            </a:xfrm>
+            <a:prstGeom prst="straightConnector1">
+              <a:avLst/>
+            </a:prstGeom>
+            <a:ln w="38100">
+              <a:solidFill>
+                <a:schemeClr val="accent1"/>
+              </a:solidFill>
+              <a:tailEnd type="triangle"/>
+            </a:ln>
+          </p:spPr>
+          <p:style>
+            <a:lnRef idx="1">
+              <a:schemeClr val="dk1"/>
+            </a:lnRef>
+            <a:fillRef idx="0">
+              <a:schemeClr val="dk1"/>
+            </a:fillRef>
+            <a:effectRef idx="0">
+              <a:schemeClr val="dk1"/>
+            </a:effectRef>
+            <a:fontRef idx="minor">
+              <a:schemeClr val="tx1"/>
+            </a:fontRef>
+          </p:style>
+        </p:cxnSp>
+        <p:cxnSp>
+          <p:nvCxnSpPr>
+            <p:cNvPr id="114" name="直接箭头连接符 113">
+              <a:extLst>
+                <a:ext uri="{FF2B5EF4-FFF2-40B4-BE49-F238E27FC236}">
+                  <a16:creationId xmlns:a16="http://schemas.microsoft.com/office/drawing/2014/main" id="{BC1D6D44-AA16-534D-92D3-2DE45659BA45}"/>
+                </a:ext>
+              </a:extLst>
+            </p:cNvPr>
+            <p:cNvCxnSpPr>
+              <a:cxnSpLocks/>
+            </p:cNvCxnSpPr>
+            <p:nvPr/>
+          </p:nvCxnSpPr>
+          <p:spPr>
+            <a:xfrm>
+              <a:off x="8522637" y="6064747"/>
+              <a:ext cx="1247926" cy="0"/>
+            </a:xfrm>
+            <a:prstGeom prst="straightConnector1">
+              <a:avLst/>
+            </a:prstGeom>
+            <a:ln w="38100">
+              <a:solidFill>
+                <a:srgbClr val="00B050"/>
+              </a:solidFill>
+              <a:prstDash val="dashDot"/>
+              <a:tailEnd type="triangle"/>
+            </a:ln>
+          </p:spPr>
+          <p:style>
+            <a:lnRef idx="1">
+              <a:schemeClr val="dk1"/>
+            </a:lnRef>
+            <a:fillRef idx="0">
+              <a:schemeClr val="dk1"/>
+            </a:fillRef>
+            <a:effectRef idx="0">
+              <a:schemeClr val="dk1"/>
+            </a:effectRef>
+            <a:fontRef idx="minor">
+              <a:schemeClr val="tx1"/>
+            </a:fontRef>
+          </p:style>
+        </p:cxnSp>
+        <p:sp>
+          <p:nvSpPr>
+            <p:cNvPr id="115" name="文本框 114">
+              <a:extLst>
+                <a:ext uri="{FF2B5EF4-FFF2-40B4-BE49-F238E27FC236}">
+                  <a16:creationId xmlns:a16="http://schemas.microsoft.com/office/drawing/2014/main" id="{215D147F-D085-9566-335C-0789785AD547}"/>
+                </a:ext>
+              </a:extLst>
+            </p:cNvPr>
+            <p:cNvSpPr txBox="1"/>
+            <p:nvPr/>
+          </p:nvSpPr>
+          <p:spPr>
+            <a:xfrm>
+              <a:off x="9238560" y="5875165"/>
+              <a:ext cx="2631743" cy="369332"/>
+            </a:xfrm>
+            <a:prstGeom prst="rect">
+              <a:avLst/>
+            </a:prstGeom>
+            <a:noFill/>
+          </p:spPr>
+          <p:txBody>
+            <a:bodyPr wrap="square">
+              <a:spAutoFit/>
+            </a:bodyPr>
+            <a:lstStyle/>
+            <a:p>
+              <a:pPr algn="ctr"/>
+              <a:r>
+                <a:rPr lang="en-US" altLang="zh-CN" dirty="0"/>
+                <a:t>Static / Config</a:t>
+              </a:r>
+              <a:endParaRPr lang="zh-CN" altLang="en-US" dirty="0">
+                <a:solidFill>
+                  <a:schemeClr val="dk1"/>
+                </a:solidFill>
+              </a:endParaRPr>
+            </a:p>
+          </p:txBody>
+        </p:sp>
+      </p:grpSp>
+      <p:cxnSp>
+        <p:nvCxnSpPr>
+          <p:cNvPr id="118" name="直接箭头连接符 117">
+            <a:extLst>
+              <a:ext uri="{FF2B5EF4-FFF2-40B4-BE49-F238E27FC236}">
+                <a16:creationId xmlns:a16="http://schemas.microsoft.com/office/drawing/2014/main" id="{DC96C169-D42A-B064-2437-31B24CB8D112}"/>
+              </a:ext>
+            </a:extLst>
+          </p:cNvPr>
+          <p:cNvCxnSpPr>
+            <a:cxnSpLocks/>
+          </p:cNvCxnSpPr>
+          <p:nvPr/>
+        </p:nvCxnSpPr>
+        <p:spPr>
+          <a:xfrm>
+            <a:off x="2529910" y="1964545"/>
+            <a:ext cx="480117" cy="0"/>
+          </a:xfrm>
+          <a:prstGeom prst="straightConnector1">
+            <a:avLst/>
+          </a:prstGeom>
+          <a:ln w="38100">
+            <a:solidFill>
+              <a:srgbClr val="00B050"/>
+            </a:solidFill>
+            <a:prstDash val="dashDot"/>
+            <a:tailEnd type="triangle"/>
+          </a:ln>
+        </p:spPr>
+        <p:style>
+          <a:lnRef idx="1">
+            <a:schemeClr val="dk1"/>
+          </a:lnRef>
+          <a:fillRef idx="0">
+            <a:schemeClr val="dk1"/>
+          </a:fillRef>
+          <a:effectRef idx="0">
+            <a:schemeClr val="dk1"/>
+          </a:effectRef>
+          <a:fontRef idx="minor">
+            <a:schemeClr val="tx1"/>
+          </a:fontRef>
+        </p:style>
+      </p:cxnSp>
+      <p:sp>
+        <p:nvSpPr>
+          <p:cNvPr id="125" name="Text 2">
+            <a:extLst>
+              <a:ext uri="{FF2B5EF4-FFF2-40B4-BE49-F238E27FC236}">
+                <a16:creationId xmlns:a16="http://schemas.microsoft.com/office/drawing/2014/main" id="{E0D9D341-BED4-1A37-58A4-F3AADCD5E8DA}"/>
+              </a:ext>
+            </a:extLst>
+          </p:cNvPr>
+          <p:cNvSpPr/>
+          <p:nvPr/>
+        </p:nvSpPr>
+        <p:spPr>
+          <a:xfrm>
+            <a:off x="1696751" y="1585080"/>
+            <a:ext cx="2148840" cy="398221"/>
+          </a:xfrm>
+          <a:prstGeom prst="rect">
+            <a:avLst/>
+          </a:prstGeom>
+          <a:noFill/>
+          <a:ln/>
+        </p:spPr>
+        <p:txBody>
+          <a:bodyPr wrap="square" rtlCol="0" anchor="ctr"/>
+          <a:lstStyle>
+            <a:lvl1pPr marL="0" algn="l" defTabSz="914400" rtl="0" eaLnBrk="1" latinLnBrk="0" hangingPunct="1">
+              <a:defRPr sz="1800" kern="1200">
+                <a:solidFill>
+                  <a:schemeClr val="tx1"/>
+                </a:solidFill>
+                <a:latin typeface="+mn-lt"/>
+                <a:ea typeface="+mn-ea"/>
+                <a:cs typeface="+mn-cs"/>
+              </a:defRPr>
+            </a:lvl1pPr>
+            <a:lvl2pPr marL="457200" algn="l" defTabSz="914400" rtl="0" eaLnBrk="1" latinLnBrk="0" hangingPunct="1">
+              <a:defRPr sz="1800" kern="1200">
+                <a:solidFill>
+                  <a:schemeClr val="tx1"/>
+                </a:solidFill>
+                <a:latin typeface="+mn-lt"/>
+                <a:ea typeface="+mn-ea"/>
+                <a:cs typeface="+mn-cs"/>
+              </a:defRPr>
+            </a:lvl2pPr>
+            <a:lvl3pPr marL="914400" algn="l" defTabSz="914400" rtl="0" eaLnBrk="1" latinLnBrk="0" hangingPunct="1">
+              <a:defRPr sz="1800" kern="1200">
+                <a:solidFill>
+                  <a:schemeClr val="tx1"/>
+                </a:solidFill>
+                <a:latin typeface="+mn-lt"/>
+                <a:ea typeface="+mn-ea"/>
+                <a:cs typeface="+mn-cs"/>
+              </a:defRPr>
+            </a:lvl3pPr>
+            <a:lvl4pPr marL="1371600" algn="l" defTabSz="914400" rtl="0" eaLnBrk="1" latinLnBrk="0" hangingPunct="1">
+              <a:defRPr sz="1800" kern="1200">
+                <a:solidFill>
+                  <a:schemeClr val="tx1"/>
+                </a:solidFill>
+                <a:latin typeface="+mn-lt"/>
+                <a:ea typeface="+mn-ea"/>
+                <a:cs typeface="+mn-cs"/>
+              </a:defRPr>
+            </a:lvl4pPr>
+            <a:lvl5pPr marL="1828800" algn="l" defTabSz="914400" rtl="0" eaLnBrk="1" latinLnBrk="0" hangingPunct="1">
+              <a:defRPr sz="1800" kern="1200">
+                <a:solidFill>
+                  <a:schemeClr val="tx1"/>
+                </a:solidFill>
+                <a:latin typeface="+mn-lt"/>
+                <a:ea typeface="+mn-ea"/>
+                <a:cs typeface="+mn-cs"/>
+              </a:defRPr>
+            </a:lvl5pPr>
+            <a:lvl6pPr marL="2286000" algn="l" defTabSz="914400" rtl="0" eaLnBrk="1" latinLnBrk="0" hangingPunct="1">
+              <a:defRPr sz="1800" kern="1200">
+                <a:solidFill>
+                  <a:schemeClr val="tx1"/>
+                </a:solidFill>
+                <a:latin typeface="+mn-lt"/>
+                <a:ea typeface="+mn-ea"/>
+                <a:cs typeface="+mn-cs"/>
+              </a:defRPr>
+            </a:lvl6pPr>
+            <a:lvl7pPr marL="2743200" algn="l" defTabSz="914400" rtl="0" eaLnBrk="1" latinLnBrk="0" hangingPunct="1">
+              <a:defRPr sz="1800" kern="1200">
+                <a:solidFill>
+                  <a:schemeClr val="tx1"/>
+                </a:solidFill>
+                <a:latin typeface="+mn-lt"/>
+                <a:ea typeface="+mn-ea"/>
+                <a:cs typeface="+mn-cs"/>
+              </a:defRPr>
+            </a:lvl7pPr>
+            <a:lvl8pPr marL="3200400" algn="l" defTabSz="914400" rtl="0" eaLnBrk="1" latinLnBrk="0" hangingPunct="1">
+              <a:defRPr sz="1800" kern="1200">
+                <a:solidFill>
+                  <a:schemeClr val="tx1"/>
+                </a:solidFill>
+                <a:latin typeface="+mn-lt"/>
+                <a:ea typeface="+mn-ea"/>
+                <a:cs typeface="+mn-cs"/>
+              </a:defRPr>
+            </a:lvl8pPr>
+            <a:lvl9pPr marL="3657600" algn="l" defTabSz="914400" rtl="0" eaLnBrk="1" latinLnBrk="0" hangingPunct="1">
+              <a:defRPr sz="1800" kern="1200">
+                <a:solidFill>
+                  <a:schemeClr val="tx1"/>
+                </a:solidFill>
+                <a:latin typeface="+mn-lt"/>
+                <a:ea typeface="+mn-ea"/>
+                <a:cs typeface="+mn-cs"/>
+              </a:defRPr>
+            </a:lvl9pPr>
+          </a:lstStyle>
+          <a:p>
+            <a:pPr indent="0" algn="ctr">
+              <a:buNone/>
+            </a:pPr>
+            <a:r>
+              <a:rPr lang="en-US" dirty="0">
+                <a:solidFill>
+                  <a:schemeClr val="dk1"/>
+                </a:solidFill>
+              </a:rPr>
+              <a:t>load</a:t>
+            </a:r>
+          </a:p>
+        </p:txBody>
+      </p:sp>
+      <p:cxnSp>
+        <p:nvCxnSpPr>
+          <p:cNvPr id="126" name="直接箭头连接符 125">
+            <a:extLst>
+              <a:ext uri="{FF2B5EF4-FFF2-40B4-BE49-F238E27FC236}">
+                <a16:creationId xmlns:a16="http://schemas.microsoft.com/office/drawing/2014/main" id="{5BD68205-9BBB-99F6-E4C1-33F369F0653B}"/>
+              </a:ext>
+            </a:extLst>
+          </p:cNvPr>
+          <p:cNvCxnSpPr>
+            <a:cxnSpLocks/>
+          </p:cNvCxnSpPr>
+          <p:nvPr/>
+        </p:nvCxnSpPr>
+        <p:spPr>
+          <a:xfrm>
+            <a:off x="8722849" y="1585080"/>
+            <a:ext cx="774463" cy="0"/>
+          </a:xfrm>
+          <a:prstGeom prst="straightConnector1">
+            <a:avLst/>
+          </a:prstGeom>
+          <a:ln w="38100">
+            <a:solidFill>
+              <a:schemeClr val="accent1"/>
+            </a:solidFill>
+            <a:tailEnd type="triangle"/>
+          </a:ln>
+        </p:spPr>
+        <p:style>
+          <a:lnRef idx="1">
+            <a:schemeClr val="dk1"/>
+          </a:lnRef>
+          <a:fillRef idx="0">
+            <a:schemeClr val="dk1"/>
+          </a:fillRef>
+          <a:effectRef idx="0">
+            <a:schemeClr val="dk1"/>
+          </a:effectRef>
+          <a:fontRef idx="minor">
+            <a:schemeClr val="tx1"/>
+          </a:fontRef>
+        </p:style>
+      </p:cxnSp>
+      <p:sp>
+        <p:nvSpPr>
+          <p:cNvPr id="128" name="Text 2">
+            <a:extLst>
+              <a:ext uri="{FF2B5EF4-FFF2-40B4-BE49-F238E27FC236}">
+                <a16:creationId xmlns:a16="http://schemas.microsoft.com/office/drawing/2014/main" id="{D364B490-E458-4CDB-F740-930506A8EACA}"/>
+              </a:ext>
+            </a:extLst>
+          </p:cNvPr>
+          <p:cNvSpPr/>
+          <p:nvPr/>
+        </p:nvSpPr>
+        <p:spPr>
+          <a:xfrm>
+            <a:off x="8612572" y="1230983"/>
+            <a:ext cx="1074420" cy="323978"/>
+          </a:xfrm>
+          <a:prstGeom prst="rect">
+            <a:avLst/>
+          </a:prstGeom>
+          <a:noFill/>
+          <a:ln/>
+        </p:spPr>
+        <p:txBody>
+          <a:bodyPr wrap="square" rtlCol="0" anchor="ctr"/>
+          <a:lstStyle>
+            <a:lvl1pPr marL="0" algn="l" defTabSz="914400" rtl="0" eaLnBrk="1" latinLnBrk="0" hangingPunct="1">
+              <a:defRPr sz="1800" kern="1200">
+                <a:solidFill>
+                  <a:schemeClr val="tx1"/>
+                </a:solidFill>
+                <a:latin typeface="+mn-lt"/>
+                <a:ea typeface="+mn-ea"/>
+                <a:cs typeface="+mn-cs"/>
+              </a:defRPr>
+            </a:lvl1pPr>
+            <a:lvl2pPr marL="457200" algn="l" defTabSz="914400" rtl="0" eaLnBrk="1" latinLnBrk="0" hangingPunct="1">
+              <a:defRPr sz="1800" kern="1200">
+                <a:solidFill>
+                  <a:schemeClr val="tx1"/>
+                </a:solidFill>
+                <a:latin typeface="+mn-lt"/>
+                <a:ea typeface="+mn-ea"/>
+                <a:cs typeface="+mn-cs"/>
+              </a:defRPr>
+            </a:lvl2pPr>
+            <a:lvl3pPr marL="914400" algn="l" defTabSz="914400" rtl="0" eaLnBrk="1" latinLnBrk="0" hangingPunct="1">
+              <a:defRPr sz="1800" kern="1200">
+                <a:solidFill>
+                  <a:schemeClr val="tx1"/>
+                </a:solidFill>
+                <a:latin typeface="+mn-lt"/>
+                <a:ea typeface="+mn-ea"/>
+                <a:cs typeface="+mn-cs"/>
+              </a:defRPr>
+            </a:lvl3pPr>
+            <a:lvl4pPr marL="1371600" algn="l" defTabSz="914400" rtl="0" eaLnBrk="1" latinLnBrk="0" hangingPunct="1">
+              <a:defRPr sz="1800" kern="1200">
+                <a:solidFill>
+                  <a:schemeClr val="tx1"/>
+                </a:solidFill>
+                <a:latin typeface="+mn-lt"/>
+                <a:ea typeface="+mn-ea"/>
+                <a:cs typeface="+mn-cs"/>
+              </a:defRPr>
+            </a:lvl4pPr>
+            <a:lvl5pPr marL="1828800" algn="l" defTabSz="914400" rtl="0" eaLnBrk="1" latinLnBrk="0" hangingPunct="1">
+              <a:defRPr sz="1800" kern="1200">
+                <a:solidFill>
+                  <a:schemeClr val="tx1"/>
+                </a:solidFill>
+                <a:latin typeface="+mn-lt"/>
+                <a:ea typeface="+mn-ea"/>
+                <a:cs typeface="+mn-cs"/>
+              </a:defRPr>
+            </a:lvl5pPr>
+            <a:lvl6pPr marL="2286000" algn="l" defTabSz="914400" rtl="0" eaLnBrk="1" latinLnBrk="0" hangingPunct="1">
+              <a:defRPr sz="1800" kern="1200">
+                <a:solidFill>
+                  <a:schemeClr val="tx1"/>
+                </a:solidFill>
+                <a:latin typeface="+mn-lt"/>
+                <a:ea typeface="+mn-ea"/>
+                <a:cs typeface="+mn-cs"/>
+              </a:defRPr>
+            </a:lvl6pPr>
+            <a:lvl7pPr marL="2743200" algn="l" defTabSz="914400" rtl="0" eaLnBrk="1" latinLnBrk="0" hangingPunct="1">
+              <a:defRPr sz="1800" kern="1200">
+                <a:solidFill>
+                  <a:schemeClr val="tx1"/>
+                </a:solidFill>
+                <a:latin typeface="+mn-lt"/>
+                <a:ea typeface="+mn-ea"/>
+                <a:cs typeface="+mn-cs"/>
+              </a:defRPr>
+            </a:lvl7pPr>
+            <a:lvl8pPr marL="3200400" algn="l" defTabSz="914400" rtl="0" eaLnBrk="1" latinLnBrk="0" hangingPunct="1">
+              <a:defRPr sz="1800" kern="1200">
+                <a:solidFill>
+                  <a:schemeClr val="tx1"/>
+                </a:solidFill>
+                <a:latin typeface="+mn-lt"/>
+                <a:ea typeface="+mn-ea"/>
+                <a:cs typeface="+mn-cs"/>
+              </a:defRPr>
+            </a:lvl8pPr>
+            <a:lvl9pPr marL="3657600" algn="l" defTabSz="914400" rtl="0" eaLnBrk="1" latinLnBrk="0" hangingPunct="1">
+              <a:defRPr sz="1800" kern="1200">
+                <a:solidFill>
+                  <a:schemeClr val="tx1"/>
+                </a:solidFill>
+                <a:latin typeface="+mn-lt"/>
+                <a:ea typeface="+mn-ea"/>
+                <a:cs typeface="+mn-cs"/>
+              </a:defRPr>
+            </a:lvl9pPr>
+          </a:lstStyle>
+          <a:p>
+            <a:pPr indent="0" algn="ctr">
+              <a:buNone/>
+            </a:pPr>
+            <a:r>
+              <a:rPr lang="en-US" dirty="0">
+                <a:solidFill>
+                  <a:schemeClr val="dk1"/>
+                </a:solidFill>
+              </a:rPr>
+              <a:t>invoke</a:t>
+            </a:r>
+          </a:p>
+        </p:txBody>
+      </p:sp>
+      <p:cxnSp>
+        <p:nvCxnSpPr>
+          <p:cNvPr id="149" name="直接箭头连接符 148">
+            <a:extLst>
+              <a:ext uri="{FF2B5EF4-FFF2-40B4-BE49-F238E27FC236}">
+                <a16:creationId xmlns:a16="http://schemas.microsoft.com/office/drawing/2014/main" id="{9A8BB600-4DC1-A936-36BA-88885DA17C7A}"/>
+              </a:ext>
+            </a:extLst>
+          </p:cNvPr>
+          <p:cNvCxnSpPr>
+            <a:cxnSpLocks/>
+          </p:cNvCxnSpPr>
+          <p:nvPr/>
+        </p:nvCxnSpPr>
+        <p:spPr>
+          <a:xfrm flipH="1">
+            <a:off x="8722849" y="2734779"/>
+            <a:ext cx="774463" cy="0"/>
+          </a:xfrm>
+          <a:prstGeom prst="straightConnector1">
+            <a:avLst/>
+          </a:prstGeom>
+          <a:ln w="38100">
+            <a:solidFill>
+              <a:schemeClr val="accent2"/>
+            </a:solidFill>
+            <a:prstDash val="sysDash"/>
+            <a:headEnd type="triangle" w="med" len="med"/>
+            <a:tailEnd type="triangle" w="med" len="med"/>
+          </a:ln>
+        </p:spPr>
+        <p:style>
+          <a:lnRef idx="1">
+            <a:schemeClr val="dk1"/>
+          </a:lnRef>
+          <a:fillRef idx="0">
+            <a:schemeClr val="dk1"/>
+          </a:fillRef>
+          <a:effectRef idx="0">
+            <a:schemeClr val="dk1"/>
+          </a:effectRef>
+          <a:fontRef idx="minor">
+            <a:schemeClr val="tx1"/>
+          </a:fontRef>
+        </p:style>
+      </p:cxnSp>
+      <p:sp>
+        <p:nvSpPr>
+          <p:cNvPr id="154" name="Text 2">
+            <a:extLst>
+              <a:ext uri="{FF2B5EF4-FFF2-40B4-BE49-F238E27FC236}">
+                <a16:creationId xmlns:a16="http://schemas.microsoft.com/office/drawing/2014/main" id="{20A89689-6BE9-A6D1-9802-4866BF893AEE}"/>
+              </a:ext>
+            </a:extLst>
+          </p:cNvPr>
+          <p:cNvSpPr/>
+          <p:nvPr/>
+        </p:nvSpPr>
+        <p:spPr>
+          <a:xfrm>
+            <a:off x="8459964" y="2324978"/>
+            <a:ext cx="1384662" cy="398221"/>
+          </a:xfrm>
+          <a:prstGeom prst="rect">
+            <a:avLst/>
+          </a:prstGeom>
+          <a:noFill/>
+          <a:ln/>
+        </p:spPr>
+        <p:txBody>
+          <a:bodyPr wrap="square" rtlCol="0" anchor="ctr"/>
+          <a:lstStyle>
+            <a:lvl1pPr marL="0" algn="l" defTabSz="914400" rtl="0" eaLnBrk="1" latinLnBrk="0" hangingPunct="1">
+              <a:defRPr sz="1800" kern="1200">
+                <a:solidFill>
+                  <a:schemeClr val="tx1"/>
+                </a:solidFill>
+                <a:latin typeface="+mn-lt"/>
+                <a:ea typeface="+mn-ea"/>
+                <a:cs typeface="+mn-cs"/>
+              </a:defRPr>
+            </a:lvl1pPr>
+            <a:lvl2pPr marL="457200" algn="l" defTabSz="914400" rtl="0" eaLnBrk="1" latinLnBrk="0" hangingPunct="1">
+              <a:defRPr sz="1800" kern="1200">
+                <a:solidFill>
+                  <a:schemeClr val="tx1"/>
+                </a:solidFill>
+                <a:latin typeface="+mn-lt"/>
+                <a:ea typeface="+mn-ea"/>
+                <a:cs typeface="+mn-cs"/>
+              </a:defRPr>
+            </a:lvl2pPr>
+            <a:lvl3pPr marL="914400" algn="l" defTabSz="914400" rtl="0" eaLnBrk="1" latinLnBrk="0" hangingPunct="1">
+              <a:defRPr sz="1800" kern="1200">
+                <a:solidFill>
+                  <a:schemeClr val="tx1"/>
+                </a:solidFill>
+                <a:latin typeface="+mn-lt"/>
+                <a:ea typeface="+mn-ea"/>
+                <a:cs typeface="+mn-cs"/>
+              </a:defRPr>
+            </a:lvl3pPr>
+            <a:lvl4pPr marL="1371600" algn="l" defTabSz="914400" rtl="0" eaLnBrk="1" latinLnBrk="0" hangingPunct="1">
+              <a:defRPr sz="1800" kern="1200">
+                <a:solidFill>
+                  <a:schemeClr val="tx1"/>
+                </a:solidFill>
+                <a:latin typeface="+mn-lt"/>
+                <a:ea typeface="+mn-ea"/>
+                <a:cs typeface="+mn-cs"/>
+              </a:defRPr>
+            </a:lvl4pPr>
+            <a:lvl5pPr marL="1828800" algn="l" defTabSz="914400" rtl="0" eaLnBrk="1" latinLnBrk="0" hangingPunct="1">
+              <a:defRPr sz="1800" kern="1200">
+                <a:solidFill>
+                  <a:schemeClr val="tx1"/>
+                </a:solidFill>
+                <a:latin typeface="+mn-lt"/>
+                <a:ea typeface="+mn-ea"/>
+                <a:cs typeface="+mn-cs"/>
+              </a:defRPr>
+            </a:lvl5pPr>
+            <a:lvl6pPr marL="2286000" algn="l" defTabSz="914400" rtl="0" eaLnBrk="1" latinLnBrk="0" hangingPunct="1">
+              <a:defRPr sz="1800" kern="1200">
+                <a:solidFill>
+                  <a:schemeClr val="tx1"/>
+                </a:solidFill>
+                <a:latin typeface="+mn-lt"/>
+                <a:ea typeface="+mn-ea"/>
+                <a:cs typeface="+mn-cs"/>
+              </a:defRPr>
+            </a:lvl6pPr>
+            <a:lvl7pPr marL="2743200" algn="l" defTabSz="914400" rtl="0" eaLnBrk="1" latinLnBrk="0" hangingPunct="1">
+              <a:defRPr sz="1800" kern="1200">
+                <a:solidFill>
+                  <a:schemeClr val="tx1"/>
+                </a:solidFill>
+                <a:latin typeface="+mn-lt"/>
+                <a:ea typeface="+mn-ea"/>
+                <a:cs typeface="+mn-cs"/>
+              </a:defRPr>
+            </a:lvl7pPr>
+            <a:lvl8pPr marL="3200400" algn="l" defTabSz="914400" rtl="0" eaLnBrk="1" latinLnBrk="0" hangingPunct="1">
+              <a:defRPr sz="1800" kern="1200">
+                <a:solidFill>
+                  <a:schemeClr val="tx1"/>
+                </a:solidFill>
+                <a:latin typeface="+mn-lt"/>
+                <a:ea typeface="+mn-ea"/>
+                <a:cs typeface="+mn-cs"/>
+              </a:defRPr>
+            </a:lvl8pPr>
+            <a:lvl9pPr marL="3657600" algn="l" defTabSz="914400" rtl="0" eaLnBrk="1" latinLnBrk="0" hangingPunct="1">
+              <a:defRPr sz="1800" kern="1200">
+                <a:solidFill>
+                  <a:schemeClr val="tx1"/>
+                </a:solidFill>
+                <a:latin typeface="+mn-lt"/>
+                <a:ea typeface="+mn-ea"/>
+                <a:cs typeface="+mn-cs"/>
+              </a:defRPr>
+            </a:lvl9pPr>
+          </a:lstStyle>
+          <a:p>
+            <a:pPr indent="0" algn="ctr">
+              <a:buNone/>
+            </a:pPr>
+            <a:r>
+              <a:rPr lang="en-US" dirty="0">
+                <a:solidFill>
+                  <a:schemeClr val="dk1"/>
+                </a:solidFill>
+              </a:rPr>
+              <a:t>read</a:t>
+            </a:r>
+          </a:p>
+        </p:txBody>
+      </p:sp>
+      <p:cxnSp>
+        <p:nvCxnSpPr>
+          <p:cNvPr id="155" name="直接箭头连接符 154">
+            <a:extLst>
+              <a:ext uri="{FF2B5EF4-FFF2-40B4-BE49-F238E27FC236}">
+                <a16:creationId xmlns:a16="http://schemas.microsoft.com/office/drawing/2014/main" id="{C67E0791-DBC1-5A92-DB1B-E82D47BA621B}"/>
+              </a:ext>
+            </a:extLst>
+          </p:cNvPr>
+          <p:cNvCxnSpPr>
+            <a:cxnSpLocks/>
+          </p:cNvCxnSpPr>
+          <p:nvPr/>
+        </p:nvCxnSpPr>
+        <p:spPr>
+          <a:xfrm flipV="1">
+            <a:off x="7342074" y="2989315"/>
+            <a:ext cx="0" cy="717174"/>
+          </a:xfrm>
+          <a:prstGeom prst="straightConnector1">
+            <a:avLst/>
+          </a:prstGeom>
+          <a:ln w="38100">
+            <a:solidFill>
+              <a:schemeClr val="accent2"/>
+            </a:solidFill>
+            <a:prstDash val="sysDash"/>
+            <a:headEnd type="arrow" w="med" len="med"/>
+            <a:tailEnd type="arrow" w="med" len="med"/>
+          </a:ln>
+        </p:spPr>
+        <p:style>
+          <a:lnRef idx="1">
+            <a:schemeClr val="dk1"/>
+          </a:lnRef>
+          <a:fillRef idx="0">
+            <a:schemeClr val="dk1"/>
+          </a:fillRef>
+          <a:effectRef idx="0">
+            <a:schemeClr val="dk1"/>
+          </a:effectRef>
+          <a:fontRef idx="minor">
+            <a:schemeClr val="tx1"/>
+          </a:fontRef>
+        </p:style>
+      </p:cxnSp>
+      <p:sp>
+        <p:nvSpPr>
+          <p:cNvPr id="159" name="Text 2">
+            <a:extLst>
+              <a:ext uri="{FF2B5EF4-FFF2-40B4-BE49-F238E27FC236}">
+                <a16:creationId xmlns:a16="http://schemas.microsoft.com/office/drawing/2014/main" id="{ADA6D317-7FEF-6674-0292-73ECB71FC655}"/>
+              </a:ext>
+            </a:extLst>
+          </p:cNvPr>
+          <p:cNvSpPr/>
+          <p:nvPr/>
+        </p:nvSpPr>
+        <p:spPr>
+          <a:xfrm>
+            <a:off x="7342074" y="3184652"/>
+            <a:ext cx="1713140" cy="398221"/>
+          </a:xfrm>
+          <a:prstGeom prst="rect">
+            <a:avLst/>
+          </a:prstGeom>
+          <a:noFill/>
+          <a:ln/>
+        </p:spPr>
+        <p:txBody>
+          <a:bodyPr wrap="square" rtlCol="0" anchor="ctr"/>
+          <a:lstStyle>
+            <a:lvl1pPr marL="0" algn="l" defTabSz="914400" rtl="0" eaLnBrk="1" latinLnBrk="0" hangingPunct="1">
+              <a:defRPr sz="1800" kern="1200">
+                <a:solidFill>
+                  <a:schemeClr val="tx1"/>
+                </a:solidFill>
+                <a:latin typeface="+mn-lt"/>
+                <a:ea typeface="+mn-ea"/>
+                <a:cs typeface="+mn-cs"/>
+              </a:defRPr>
+            </a:lvl1pPr>
+            <a:lvl2pPr marL="457200" algn="l" defTabSz="914400" rtl="0" eaLnBrk="1" latinLnBrk="0" hangingPunct="1">
+              <a:defRPr sz="1800" kern="1200">
+                <a:solidFill>
+                  <a:schemeClr val="tx1"/>
+                </a:solidFill>
+                <a:latin typeface="+mn-lt"/>
+                <a:ea typeface="+mn-ea"/>
+                <a:cs typeface="+mn-cs"/>
+              </a:defRPr>
+            </a:lvl2pPr>
+            <a:lvl3pPr marL="914400" algn="l" defTabSz="914400" rtl="0" eaLnBrk="1" latinLnBrk="0" hangingPunct="1">
+              <a:defRPr sz="1800" kern="1200">
+                <a:solidFill>
+                  <a:schemeClr val="tx1"/>
+                </a:solidFill>
+                <a:latin typeface="+mn-lt"/>
+                <a:ea typeface="+mn-ea"/>
+                <a:cs typeface="+mn-cs"/>
+              </a:defRPr>
+            </a:lvl3pPr>
+            <a:lvl4pPr marL="1371600" algn="l" defTabSz="914400" rtl="0" eaLnBrk="1" latinLnBrk="0" hangingPunct="1">
+              <a:defRPr sz="1800" kern="1200">
+                <a:solidFill>
+                  <a:schemeClr val="tx1"/>
+                </a:solidFill>
+                <a:latin typeface="+mn-lt"/>
+                <a:ea typeface="+mn-ea"/>
+                <a:cs typeface="+mn-cs"/>
+              </a:defRPr>
+            </a:lvl4pPr>
+            <a:lvl5pPr marL="1828800" algn="l" defTabSz="914400" rtl="0" eaLnBrk="1" latinLnBrk="0" hangingPunct="1">
+              <a:defRPr sz="1800" kern="1200">
+                <a:solidFill>
+                  <a:schemeClr val="tx1"/>
+                </a:solidFill>
+                <a:latin typeface="+mn-lt"/>
+                <a:ea typeface="+mn-ea"/>
+                <a:cs typeface="+mn-cs"/>
+              </a:defRPr>
+            </a:lvl5pPr>
+            <a:lvl6pPr marL="2286000" algn="l" defTabSz="914400" rtl="0" eaLnBrk="1" latinLnBrk="0" hangingPunct="1">
+              <a:defRPr sz="1800" kern="1200">
+                <a:solidFill>
+                  <a:schemeClr val="tx1"/>
+                </a:solidFill>
+                <a:latin typeface="+mn-lt"/>
+                <a:ea typeface="+mn-ea"/>
+                <a:cs typeface="+mn-cs"/>
+              </a:defRPr>
+            </a:lvl6pPr>
+            <a:lvl7pPr marL="2743200" algn="l" defTabSz="914400" rtl="0" eaLnBrk="1" latinLnBrk="0" hangingPunct="1">
+              <a:defRPr sz="1800" kern="1200">
+                <a:solidFill>
+                  <a:schemeClr val="tx1"/>
+                </a:solidFill>
+                <a:latin typeface="+mn-lt"/>
+                <a:ea typeface="+mn-ea"/>
+                <a:cs typeface="+mn-cs"/>
+              </a:defRPr>
+            </a:lvl7pPr>
+            <a:lvl8pPr marL="3200400" algn="l" defTabSz="914400" rtl="0" eaLnBrk="1" latinLnBrk="0" hangingPunct="1">
+              <a:defRPr sz="1800" kern="1200">
+                <a:solidFill>
+                  <a:schemeClr val="tx1"/>
+                </a:solidFill>
+                <a:latin typeface="+mn-lt"/>
+                <a:ea typeface="+mn-ea"/>
+                <a:cs typeface="+mn-cs"/>
+              </a:defRPr>
+            </a:lvl8pPr>
+            <a:lvl9pPr marL="3657600" algn="l" defTabSz="914400" rtl="0" eaLnBrk="1" latinLnBrk="0" hangingPunct="1">
+              <a:defRPr sz="1800" kern="1200">
+                <a:solidFill>
+                  <a:schemeClr val="tx1"/>
+                </a:solidFill>
+                <a:latin typeface="+mn-lt"/>
+                <a:ea typeface="+mn-ea"/>
+                <a:cs typeface="+mn-cs"/>
+              </a:defRPr>
+            </a:lvl9pPr>
+          </a:lstStyle>
+          <a:p>
+            <a:pPr indent="0">
+              <a:buNone/>
+            </a:pPr>
+            <a:r>
+              <a:rPr lang="en-US" dirty="0">
+                <a:solidFill>
+                  <a:schemeClr val="dk1"/>
+                </a:solidFill>
+              </a:rPr>
+              <a:t>write-commit</a:t>
+            </a:r>
+          </a:p>
+        </p:txBody>
+      </p:sp>
+      <p:sp>
+        <p:nvSpPr>
+          <p:cNvPr id="161" name="Text 2">
+            <a:extLst>
+              <a:ext uri="{FF2B5EF4-FFF2-40B4-BE49-F238E27FC236}">
+                <a16:creationId xmlns:a16="http://schemas.microsoft.com/office/drawing/2014/main" id="{DB2CA0F5-0762-62E8-CA50-490F934CBDCB}"/>
+              </a:ext>
+            </a:extLst>
+          </p:cNvPr>
+          <p:cNvSpPr/>
+          <p:nvPr/>
+        </p:nvSpPr>
+        <p:spPr>
+          <a:xfrm>
+            <a:off x="8464559" y="2667813"/>
+            <a:ext cx="1384662" cy="398221"/>
+          </a:xfrm>
+          <a:prstGeom prst="rect">
+            <a:avLst/>
+          </a:prstGeom>
+          <a:noFill/>
+          <a:ln/>
+        </p:spPr>
+        <p:txBody>
+          <a:bodyPr wrap="square" rtlCol="0" anchor="ctr"/>
+          <a:lstStyle>
+            <a:lvl1pPr marL="0" algn="l" defTabSz="914400" rtl="0" eaLnBrk="1" latinLnBrk="0" hangingPunct="1">
+              <a:defRPr sz="1800" kern="1200">
+                <a:solidFill>
+                  <a:schemeClr val="tx1"/>
+                </a:solidFill>
+                <a:latin typeface="+mn-lt"/>
+                <a:ea typeface="+mn-ea"/>
+                <a:cs typeface="+mn-cs"/>
+              </a:defRPr>
+            </a:lvl1pPr>
+            <a:lvl2pPr marL="457200" algn="l" defTabSz="914400" rtl="0" eaLnBrk="1" latinLnBrk="0" hangingPunct="1">
+              <a:defRPr sz="1800" kern="1200">
+                <a:solidFill>
+                  <a:schemeClr val="tx1"/>
+                </a:solidFill>
+                <a:latin typeface="+mn-lt"/>
+                <a:ea typeface="+mn-ea"/>
+                <a:cs typeface="+mn-cs"/>
+              </a:defRPr>
+            </a:lvl2pPr>
+            <a:lvl3pPr marL="914400" algn="l" defTabSz="914400" rtl="0" eaLnBrk="1" latinLnBrk="0" hangingPunct="1">
+              <a:defRPr sz="1800" kern="1200">
+                <a:solidFill>
+                  <a:schemeClr val="tx1"/>
+                </a:solidFill>
+                <a:latin typeface="+mn-lt"/>
+                <a:ea typeface="+mn-ea"/>
+                <a:cs typeface="+mn-cs"/>
+              </a:defRPr>
+            </a:lvl3pPr>
+            <a:lvl4pPr marL="1371600" algn="l" defTabSz="914400" rtl="0" eaLnBrk="1" latinLnBrk="0" hangingPunct="1">
+              <a:defRPr sz="1800" kern="1200">
+                <a:solidFill>
+                  <a:schemeClr val="tx1"/>
+                </a:solidFill>
+                <a:latin typeface="+mn-lt"/>
+                <a:ea typeface="+mn-ea"/>
+                <a:cs typeface="+mn-cs"/>
+              </a:defRPr>
+            </a:lvl4pPr>
+            <a:lvl5pPr marL="1828800" algn="l" defTabSz="914400" rtl="0" eaLnBrk="1" latinLnBrk="0" hangingPunct="1">
+              <a:defRPr sz="1800" kern="1200">
+                <a:solidFill>
+                  <a:schemeClr val="tx1"/>
+                </a:solidFill>
+                <a:latin typeface="+mn-lt"/>
+                <a:ea typeface="+mn-ea"/>
+                <a:cs typeface="+mn-cs"/>
+              </a:defRPr>
+            </a:lvl5pPr>
+            <a:lvl6pPr marL="2286000" algn="l" defTabSz="914400" rtl="0" eaLnBrk="1" latinLnBrk="0" hangingPunct="1">
+              <a:defRPr sz="1800" kern="1200">
+                <a:solidFill>
+                  <a:schemeClr val="tx1"/>
+                </a:solidFill>
+                <a:latin typeface="+mn-lt"/>
+                <a:ea typeface="+mn-ea"/>
+                <a:cs typeface="+mn-cs"/>
+              </a:defRPr>
+            </a:lvl6pPr>
+            <a:lvl7pPr marL="2743200" algn="l" defTabSz="914400" rtl="0" eaLnBrk="1" latinLnBrk="0" hangingPunct="1">
+              <a:defRPr sz="1800" kern="1200">
+                <a:solidFill>
+                  <a:schemeClr val="tx1"/>
+                </a:solidFill>
+                <a:latin typeface="+mn-lt"/>
+                <a:ea typeface="+mn-ea"/>
+                <a:cs typeface="+mn-cs"/>
+              </a:defRPr>
+            </a:lvl7pPr>
+            <a:lvl8pPr marL="3200400" algn="l" defTabSz="914400" rtl="0" eaLnBrk="1" latinLnBrk="0" hangingPunct="1">
+              <a:defRPr sz="1800" kern="1200">
+                <a:solidFill>
+                  <a:schemeClr val="tx1"/>
+                </a:solidFill>
+                <a:latin typeface="+mn-lt"/>
+                <a:ea typeface="+mn-ea"/>
+                <a:cs typeface="+mn-cs"/>
+              </a:defRPr>
+            </a:lvl8pPr>
+            <a:lvl9pPr marL="3657600" algn="l" defTabSz="914400" rtl="0" eaLnBrk="1" latinLnBrk="0" hangingPunct="1">
+              <a:defRPr sz="1800" kern="1200">
+                <a:solidFill>
+                  <a:schemeClr val="tx1"/>
+                </a:solidFill>
+                <a:latin typeface="+mn-lt"/>
+                <a:ea typeface="+mn-ea"/>
+                <a:cs typeface="+mn-cs"/>
+              </a:defRPr>
+            </a:lvl9pPr>
+          </a:lstStyle>
+          <a:p>
+            <a:pPr indent="0" algn="ctr">
+              <a:buNone/>
+            </a:pPr>
+            <a:r>
+              <a:rPr lang="en-US" dirty="0">
+                <a:solidFill>
+                  <a:schemeClr val="dk1"/>
+                </a:solidFill>
+              </a:rPr>
+              <a:t>write</a:t>
+            </a:r>
+          </a:p>
+        </p:txBody>
+      </p:sp>
+      <p:sp>
+        <p:nvSpPr>
+          <p:cNvPr id="164" name="文本框 163">
+            <a:extLst>
+              <a:ext uri="{FF2B5EF4-FFF2-40B4-BE49-F238E27FC236}">
+                <a16:creationId xmlns:a16="http://schemas.microsoft.com/office/drawing/2014/main" id="{932E8876-EAAE-1E41-12EF-79FD6B84937B}"/>
+              </a:ext>
+            </a:extLst>
+          </p:cNvPr>
+          <p:cNvSpPr txBox="1"/>
+          <p:nvPr/>
+        </p:nvSpPr>
+        <p:spPr>
+          <a:xfrm>
+            <a:off x="6224115" y="3207172"/>
+            <a:ext cx="1236215" cy="369332"/>
+          </a:xfrm>
+          <a:prstGeom prst="rect">
+            <a:avLst/>
+          </a:prstGeom>
+          <a:noFill/>
+        </p:spPr>
+        <p:txBody>
+          <a:bodyPr wrap="square">
+            <a:spAutoFit/>
+          </a:bodyPr>
+          <a:lstStyle/>
+          <a:p>
+            <a:pPr indent="0">
+              <a:buNone/>
+            </a:pPr>
+            <a:r>
+              <a:rPr lang="en-US" altLang="zh-CN" dirty="0">
+                <a:solidFill>
+                  <a:schemeClr val="dk1"/>
+                </a:solidFill>
+              </a:rPr>
+              <a:t>read-miss</a:t>
+            </a:r>
+          </a:p>
+        </p:txBody>
+      </p:sp>
+      <p:cxnSp>
+        <p:nvCxnSpPr>
+          <p:cNvPr id="166" name="直接箭头连接符 165">
+            <a:extLst>
+              <a:ext uri="{FF2B5EF4-FFF2-40B4-BE49-F238E27FC236}">
+                <a16:creationId xmlns:a16="http://schemas.microsoft.com/office/drawing/2014/main" id="{F0EAC08F-5C7A-1611-949B-54AB9CEB8429}"/>
+              </a:ext>
+            </a:extLst>
+          </p:cNvPr>
+          <p:cNvCxnSpPr>
+            <a:cxnSpLocks/>
+            <a:stCxn id="25" idx="3"/>
+            <a:endCxn id="23" idx="1"/>
+          </p:cNvCxnSpPr>
+          <p:nvPr/>
+        </p:nvCxnSpPr>
+        <p:spPr>
+          <a:xfrm flipV="1">
+            <a:off x="5553794" y="2640884"/>
+            <a:ext cx="764798" cy="1209"/>
+          </a:xfrm>
+          <a:prstGeom prst="straightConnector1">
+            <a:avLst/>
+          </a:prstGeom>
+          <a:ln w="38100">
+            <a:solidFill>
+              <a:schemeClr val="accent1"/>
+            </a:solidFill>
+            <a:tailEnd type="triangle"/>
+          </a:ln>
+        </p:spPr>
+        <p:style>
+          <a:lnRef idx="1">
+            <a:schemeClr val="dk1"/>
+          </a:lnRef>
+          <a:fillRef idx="0">
+            <a:schemeClr val="dk1"/>
+          </a:fillRef>
+          <a:effectRef idx="0">
+            <a:schemeClr val="dk1"/>
+          </a:effectRef>
+          <a:fontRef idx="minor">
+            <a:schemeClr val="tx1"/>
+          </a:fontRef>
+        </p:style>
+      </p:cxnSp>
+      <p:sp>
+        <p:nvSpPr>
+          <p:cNvPr id="168" name="Text 2">
+            <a:extLst>
+              <a:ext uri="{FF2B5EF4-FFF2-40B4-BE49-F238E27FC236}">
+                <a16:creationId xmlns:a16="http://schemas.microsoft.com/office/drawing/2014/main" id="{6375F318-46BF-1AC1-E728-618B2E6D2900}"/>
+              </a:ext>
+            </a:extLst>
+          </p:cNvPr>
+          <p:cNvSpPr/>
+          <p:nvPr/>
+        </p:nvSpPr>
+        <p:spPr>
+          <a:xfrm>
+            <a:off x="5401138" y="2300661"/>
+            <a:ext cx="1074420" cy="398221"/>
+          </a:xfrm>
+          <a:prstGeom prst="rect">
+            <a:avLst/>
+          </a:prstGeom>
+          <a:noFill/>
+          <a:ln/>
+        </p:spPr>
+        <p:txBody>
+          <a:bodyPr wrap="square" rtlCol="0" anchor="ctr"/>
+          <a:lstStyle>
+            <a:lvl1pPr marL="0" algn="l" defTabSz="914400" rtl="0" eaLnBrk="1" latinLnBrk="0" hangingPunct="1">
+              <a:defRPr sz="1800" kern="1200">
+                <a:solidFill>
+                  <a:schemeClr val="tx1"/>
+                </a:solidFill>
+                <a:latin typeface="+mn-lt"/>
+                <a:ea typeface="+mn-ea"/>
+                <a:cs typeface="+mn-cs"/>
+              </a:defRPr>
+            </a:lvl1pPr>
+            <a:lvl2pPr marL="457200" algn="l" defTabSz="914400" rtl="0" eaLnBrk="1" latinLnBrk="0" hangingPunct="1">
+              <a:defRPr sz="1800" kern="1200">
+                <a:solidFill>
+                  <a:schemeClr val="tx1"/>
+                </a:solidFill>
+                <a:latin typeface="+mn-lt"/>
+                <a:ea typeface="+mn-ea"/>
+                <a:cs typeface="+mn-cs"/>
+              </a:defRPr>
+            </a:lvl2pPr>
+            <a:lvl3pPr marL="914400" algn="l" defTabSz="914400" rtl="0" eaLnBrk="1" latinLnBrk="0" hangingPunct="1">
+              <a:defRPr sz="1800" kern="1200">
+                <a:solidFill>
+                  <a:schemeClr val="tx1"/>
+                </a:solidFill>
+                <a:latin typeface="+mn-lt"/>
+                <a:ea typeface="+mn-ea"/>
+                <a:cs typeface="+mn-cs"/>
+              </a:defRPr>
+            </a:lvl3pPr>
+            <a:lvl4pPr marL="1371600" algn="l" defTabSz="914400" rtl="0" eaLnBrk="1" latinLnBrk="0" hangingPunct="1">
+              <a:defRPr sz="1800" kern="1200">
+                <a:solidFill>
+                  <a:schemeClr val="tx1"/>
+                </a:solidFill>
+                <a:latin typeface="+mn-lt"/>
+                <a:ea typeface="+mn-ea"/>
+                <a:cs typeface="+mn-cs"/>
+              </a:defRPr>
+            </a:lvl4pPr>
+            <a:lvl5pPr marL="1828800" algn="l" defTabSz="914400" rtl="0" eaLnBrk="1" latinLnBrk="0" hangingPunct="1">
+              <a:defRPr sz="1800" kern="1200">
+                <a:solidFill>
+                  <a:schemeClr val="tx1"/>
+                </a:solidFill>
+                <a:latin typeface="+mn-lt"/>
+                <a:ea typeface="+mn-ea"/>
+                <a:cs typeface="+mn-cs"/>
+              </a:defRPr>
+            </a:lvl5pPr>
+            <a:lvl6pPr marL="2286000" algn="l" defTabSz="914400" rtl="0" eaLnBrk="1" latinLnBrk="0" hangingPunct="1">
+              <a:defRPr sz="1800" kern="1200">
+                <a:solidFill>
+                  <a:schemeClr val="tx1"/>
+                </a:solidFill>
+                <a:latin typeface="+mn-lt"/>
+                <a:ea typeface="+mn-ea"/>
+                <a:cs typeface="+mn-cs"/>
+              </a:defRPr>
+            </a:lvl6pPr>
+            <a:lvl7pPr marL="2743200" algn="l" defTabSz="914400" rtl="0" eaLnBrk="1" latinLnBrk="0" hangingPunct="1">
+              <a:defRPr sz="1800" kern="1200">
+                <a:solidFill>
+                  <a:schemeClr val="tx1"/>
+                </a:solidFill>
+                <a:latin typeface="+mn-lt"/>
+                <a:ea typeface="+mn-ea"/>
+                <a:cs typeface="+mn-cs"/>
+              </a:defRPr>
+            </a:lvl7pPr>
+            <a:lvl8pPr marL="3200400" algn="l" defTabSz="914400" rtl="0" eaLnBrk="1" latinLnBrk="0" hangingPunct="1">
+              <a:defRPr sz="1800" kern="1200">
+                <a:solidFill>
+                  <a:schemeClr val="tx1"/>
+                </a:solidFill>
+                <a:latin typeface="+mn-lt"/>
+                <a:ea typeface="+mn-ea"/>
+                <a:cs typeface="+mn-cs"/>
+              </a:defRPr>
+            </a:lvl8pPr>
+            <a:lvl9pPr marL="3657600" algn="l" defTabSz="914400" rtl="0" eaLnBrk="1" latinLnBrk="0" hangingPunct="1">
+              <a:defRPr sz="1800" kern="1200">
+                <a:solidFill>
+                  <a:schemeClr val="tx1"/>
+                </a:solidFill>
+                <a:latin typeface="+mn-lt"/>
+                <a:ea typeface="+mn-ea"/>
+                <a:cs typeface="+mn-cs"/>
+              </a:defRPr>
+            </a:lvl9pPr>
+          </a:lstStyle>
+          <a:p>
+            <a:pPr indent="0" algn="ctr">
+              <a:buNone/>
+            </a:pPr>
+            <a:r>
+              <a:rPr lang="en-US" dirty="0">
+                <a:solidFill>
+                  <a:schemeClr val="dk1"/>
+                </a:solidFill>
+              </a:rPr>
+              <a:t>commit</a:t>
+            </a:r>
+          </a:p>
+        </p:txBody>
+      </p:sp>
+      <p:cxnSp>
+        <p:nvCxnSpPr>
+          <p:cNvPr id="177" name="连接符: 肘形 176">
+            <a:extLst>
+              <a:ext uri="{FF2B5EF4-FFF2-40B4-BE49-F238E27FC236}">
+                <a16:creationId xmlns:a16="http://schemas.microsoft.com/office/drawing/2014/main" id="{4E919181-429C-1FA0-D8F8-9FF0809FE6AB}"/>
+              </a:ext>
+            </a:extLst>
+          </p:cNvPr>
+          <p:cNvCxnSpPr>
+            <a:stCxn id="31" idx="2"/>
+            <a:endCxn id="25" idx="2"/>
+          </p:cNvCxnSpPr>
+          <p:nvPr/>
+        </p:nvCxnSpPr>
+        <p:spPr>
+          <a:xfrm rot="5400000" flipH="1">
+            <a:off x="7342867" y="-10788"/>
+            <a:ext cx="333570" cy="6307040"/>
+          </a:xfrm>
+          <a:prstGeom prst="bentConnector3">
+            <a:avLst>
+              <a:gd name="adj1" fmla="val -371374"/>
+            </a:avLst>
+          </a:prstGeom>
+          <a:ln w="38100">
+            <a:solidFill>
+              <a:schemeClr val="accent1"/>
+            </a:solidFill>
+            <a:tailEnd type="triangle"/>
+          </a:ln>
+        </p:spPr>
+        <p:style>
+          <a:lnRef idx="1">
+            <a:schemeClr val="dk1"/>
+          </a:lnRef>
+          <a:fillRef idx="0">
+            <a:schemeClr val="dk1"/>
+          </a:fillRef>
+          <a:effectRef idx="0">
+            <a:schemeClr val="dk1"/>
+          </a:effectRef>
+          <a:fontRef idx="minor">
+            <a:schemeClr val="tx1"/>
+          </a:fontRef>
+        </p:style>
+      </p:cxnSp>
+      <p:sp>
+        <p:nvSpPr>
+          <p:cNvPr id="179" name="Text 2">
+            <a:extLst>
+              <a:ext uri="{FF2B5EF4-FFF2-40B4-BE49-F238E27FC236}">
+                <a16:creationId xmlns:a16="http://schemas.microsoft.com/office/drawing/2014/main" id="{26FE387D-B03C-CD93-71BF-8DDB721E723D}"/>
+              </a:ext>
+            </a:extLst>
+          </p:cNvPr>
+          <p:cNvSpPr/>
+          <p:nvPr/>
+        </p:nvSpPr>
+        <p:spPr>
+          <a:xfrm>
+            <a:off x="6923120" y="4193148"/>
+            <a:ext cx="1074420" cy="398221"/>
+          </a:xfrm>
+          <a:prstGeom prst="rect">
+            <a:avLst/>
+          </a:prstGeom>
+          <a:noFill/>
+          <a:ln/>
+        </p:spPr>
+        <p:txBody>
+          <a:bodyPr wrap="square" rtlCol="0" anchor="ctr"/>
+          <a:lstStyle>
+            <a:lvl1pPr marL="0" algn="l" defTabSz="914400" rtl="0" eaLnBrk="1" latinLnBrk="0" hangingPunct="1">
+              <a:defRPr sz="1800" kern="1200">
+                <a:solidFill>
+                  <a:schemeClr val="tx1"/>
+                </a:solidFill>
+                <a:latin typeface="+mn-lt"/>
+                <a:ea typeface="+mn-ea"/>
+                <a:cs typeface="+mn-cs"/>
+              </a:defRPr>
+            </a:lvl1pPr>
+            <a:lvl2pPr marL="457200" algn="l" defTabSz="914400" rtl="0" eaLnBrk="1" latinLnBrk="0" hangingPunct="1">
+              <a:defRPr sz="1800" kern="1200">
+                <a:solidFill>
+                  <a:schemeClr val="tx1"/>
+                </a:solidFill>
+                <a:latin typeface="+mn-lt"/>
+                <a:ea typeface="+mn-ea"/>
+                <a:cs typeface="+mn-cs"/>
+              </a:defRPr>
+            </a:lvl2pPr>
+            <a:lvl3pPr marL="914400" algn="l" defTabSz="914400" rtl="0" eaLnBrk="1" latinLnBrk="0" hangingPunct="1">
+              <a:defRPr sz="1800" kern="1200">
+                <a:solidFill>
+                  <a:schemeClr val="tx1"/>
+                </a:solidFill>
+                <a:latin typeface="+mn-lt"/>
+                <a:ea typeface="+mn-ea"/>
+                <a:cs typeface="+mn-cs"/>
+              </a:defRPr>
+            </a:lvl3pPr>
+            <a:lvl4pPr marL="1371600" algn="l" defTabSz="914400" rtl="0" eaLnBrk="1" latinLnBrk="0" hangingPunct="1">
+              <a:defRPr sz="1800" kern="1200">
+                <a:solidFill>
+                  <a:schemeClr val="tx1"/>
+                </a:solidFill>
+                <a:latin typeface="+mn-lt"/>
+                <a:ea typeface="+mn-ea"/>
+                <a:cs typeface="+mn-cs"/>
+              </a:defRPr>
+            </a:lvl4pPr>
+            <a:lvl5pPr marL="1828800" algn="l" defTabSz="914400" rtl="0" eaLnBrk="1" latinLnBrk="0" hangingPunct="1">
+              <a:defRPr sz="1800" kern="1200">
+                <a:solidFill>
+                  <a:schemeClr val="tx1"/>
+                </a:solidFill>
+                <a:latin typeface="+mn-lt"/>
+                <a:ea typeface="+mn-ea"/>
+                <a:cs typeface="+mn-cs"/>
+              </a:defRPr>
+            </a:lvl5pPr>
+            <a:lvl6pPr marL="2286000" algn="l" defTabSz="914400" rtl="0" eaLnBrk="1" latinLnBrk="0" hangingPunct="1">
+              <a:defRPr sz="1800" kern="1200">
+                <a:solidFill>
+                  <a:schemeClr val="tx1"/>
+                </a:solidFill>
+                <a:latin typeface="+mn-lt"/>
+                <a:ea typeface="+mn-ea"/>
+                <a:cs typeface="+mn-cs"/>
+              </a:defRPr>
+            </a:lvl6pPr>
+            <a:lvl7pPr marL="2743200" algn="l" defTabSz="914400" rtl="0" eaLnBrk="1" latinLnBrk="0" hangingPunct="1">
+              <a:defRPr sz="1800" kern="1200">
+                <a:solidFill>
+                  <a:schemeClr val="tx1"/>
+                </a:solidFill>
+                <a:latin typeface="+mn-lt"/>
+                <a:ea typeface="+mn-ea"/>
+                <a:cs typeface="+mn-cs"/>
+              </a:defRPr>
+            </a:lvl7pPr>
+            <a:lvl8pPr marL="3200400" algn="l" defTabSz="914400" rtl="0" eaLnBrk="1" latinLnBrk="0" hangingPunct="1">
+              <a:defRPr sz="1800" kern="1200">
+                <a:solidFill>
+                  <a:schemeClr val="tx1"/>
+                </a:solidFill>
+                <a:latin typeface="+mn-lt"/>
+                <a:ea typeface="+mn-ea"/>
+                <a:cs typeface="+mn-cs"/>
+              </a:defRPr>
+            </a:lvl8pPr>
+            <a:lvl9pPr marL="3657600" algn="l" defTabSz="914400" rtl="0" eaLnBrk="1" latinLnBrk="0" hangingPunct="1">
+              <a:defRPr sz="1800" kern="1200">
+                <a:solidFill>
+                  <a:schemeClr val="tx1"/>
+                </a:solidFill>
+                <a:latin typeface="+mn-lt"/>
+                <a:ea typeface="+mn-ea"/>
+                <a:cs typeface="+mn-cs"/>
+              </a:defRPr>
+            </a:lvl9pPr>
+          </a:lstStyle>
+          <a:p>
+            <a:pPr indent="0" algn="ctr">
+              <a:buNone/>
+            </a:pPr>
+            <a:r>
+              <a:rPr lang="en-US" dirty="0">
+                <a:solidFill>
+                  <a:schemeClr val="dk1"/>
+                </a:solidFill>
+              </a:rPr>
+              <a:t>events</a:t>
+            </a:r>
+          </a:p>
+        </p:txBody>
+      </p:sp>
+      <p:cxnSp>
+        <p:nvCxnSpPr>
+          <p:cNvPr id="181" name="连接符: 肘形 180">
+            <a:extLst>
+              <a:ext uri="{FF2B5EF4-FFF2-40B4-BE49-F238E27FC236}">
+                <a16:creationId xmlns:a16="http://schemas.microsoft.com/office/drawing/2014/main" id="{2F4DC391-A4D0-5704-7E40-FF4310CA44F6}"/>
+              </a:ext>
+            </a:extLst>
+          </p:cNvPr>
+          <p:cNvCxnSpPr>
+            <a:cxnSpLocks/>
+          </p:cNvCxnSpPr>
+          <p:nvPr/>
+        </p:nvCxnSpPr>
+        <p:spPr>
+          <a:xfrm>
+            <a:off x="4102391" y="3002896"/>
+            <a:ext cx="6893572" cy="313810"/>
+          </a:xfrm>
+          <a:prstGeom prst="bentConnector4">
+            <a:avLst>
+              <a:gd name="adj1" fmla="val 234"/>
+              <a:gd name="adj2" fmla="val 608539"/>
+            </a:avLst>
+          </a:prstGeom>
+          <a:ln w="38100">
+            <a:solidFill>
+              <a:schemeClr val="accent1"/>
+            </a:solidFill>
+            <a:tailEnd type="triangle"/>
+          </a:ln>
+        </p:spPr>
+        <p:style>
+          <a:lnRef idx="1">
+            <a:schemeClr val="dk1"/>
+          </a:lnRef>
+          <a:fillRef idx="0">
+            <a:schemeClr val="dk1"/>
+          </a:fillRef>
+          <a:effectRef idx="0">
+            <a:schemeClr val="dk1"/>
+          </a:effectRef>
+          <a:fontRef idx="minor">
+            <a:schemeClr val="tx1"/>
+          </a:fontRef>
+        </p:style>
+      </p:cxnSp>
+      <p:sp>
+        <p:nvSpPr>
+          <p:cNvPr id="192" name="Text 2">
+            <a:extLst>
+              <a:ext uri="{FF2B5EF4-FFF2-40B4-BE49-F238E27FC236}">
+                <a16:creationId xmlns:a16="http://schemas.microsoft.com/office/drawing/2014/main" id="{10257C9B-6124-6ABB-FF34-A6307B8E7807}"/>
+              </a:ext>
+            </a:extLst>
+          </p:cNvPr>
+          <p:cNvSpPr/>
+          <p:nvPr/>
+        </p:nvSpPr>
+        <p:spPr>
+          <a:xfrm>
+            <a:off x="7096641" y="4860407"/>
+            <a:ext cx="1074420" cy="398221"/>
+          </a:xfrm>
+          <a:prstGeom prst="rect">
+            <a:avLst/>
+          </a:prstGeom>
+          <a:noFill/>
+          <a:ln/>
+        </p:spPr>
+        <p:txBody>
+          <a:bodyPr wrap="square" rtlCol="0" anchor="ctr"/>
+          <a:lstStyle>
+            <a:lvl1pPr marL="0" algn="l" defTabSz="914400" rtl="0" eaLnBrk="1" latinLnBrk="0" hangingPunct="1">
+              <a:defRPr sz="1800" kern="1200">
+                <a:solidFill>
+                  <a:schemeClr val="tx1"/>
+                </a:solidFill>
+                <a:latin typeface="+mn-lt"/>
+                <a:ea typeface="+mn-ea"/>
+                <a:cs typeface="+mn-cs"/>
+              </a:defRPr>
+            </a:lvl1pPr>
+            <a:lvl2pPr marL="457200" algn="l" defTabSz="914400" rtl="0" eaLnBrk="1" latinLnBrk="0" hangingPunct="1">
+              <a:defRPr sz="1800" kern="1200">
+                <a:solidFill>
+                  <a:schemeClr val="tx1"/>
+                </a:solidFill>
+                <a:latin typeface="+mn-lt"/>
+                <a:ea typeface="+mn-ea"/>
+                <a:cs typeface="+mn-cs"/>
+              </a:defRPr>
+            </a:lvl2pPr>
+            <a:lvl3pPr marL="914400" algn="l" defTabSz="914400" rtl="0" eaLnBrk="1" latinLnBrk="0" hangingPunct="1">
+              <a:defRPr sz="1800" kern="1200">
+                <a:solidFill>
+                  <a:schemeClr val="tx1"/>
+                </a:solidFill>
+                <a:latin typeface="+mn-lt"/>
+                <a:ea typeface="+mn-ea"/>
+                <a:cs typeface="+mn-cs"/>
+              </a:defRPr>
+            </a:lvl3pPr>
+            <a:lvl4pPr marL="1371600" algn="l" defTabSz="914400" rtl="0" eaLnBrk="1" latinLnBrk="0" hangingPunct="1">
+              <a:defRPr sz="1800" kern="1200">
+                <a:solidFill>
+                  <a:schemeClr val="tx1"/>
+                </a:solidFill>
+                <a:latin typeface="+mn-lt"/>
+                <a:ea typeface="+mn-ea"/>
+                <a:cs typeface="+mn-cs"/>
+              </a:defRPr>
+            </a:lvl4pPr>
+            <a:lvl5pPr marL="1828800" algn="l" defTabSz="914400" rtl="0" eaLnBrk="1" latinLnBrk="0" hangingPunct="1">
+              <a:defRPr sz="1800" kern="1200">
+                <a:solidFill>
+                  <a:schemeClr val="tx1"/>
+                </a:solidFill>
+                <a:latin typeface="+mn-lt"/>
+                <a:ea typeface="+mn-ea"/>
+                <a:cs typeface="+mn-cs"/>
+              </a:defRPr>
+            </a:lvl5pPr>
+            <a:lvl6pPr marL="2286000" algn="l" defTabSz="914400" rtl="0" eaLnBrk="1" latinLnBrk="0" hangingPunct="1">
+              <a:defRPr sz="1800" kern="1200">
+                <a:solidFill>
+                  <a:schemeClr val="tx1"/>
+                </a:solidFill>
+                <a:latin typeface="+mn-lt"/>
+                <a:ea typeface="+mn-ea"/>
+                <a:cs typeface="+mn-cs"/>
+              </a:defRPr>
+            </a:lvl6pPr>
+            <a:lvl7pPr marL="2743200" algn="l" defTabSz="914400" rtl="0" eaLnBrk="1" latinLnBrk="0" hangingPunct="1">
+              <a:defRPr sz="1800" kern="1200">
+                <a:solidFill>
+                  <a:schemeClr val="tx1"/>
+                </a:solidFill>
+                <a:latin typeface="+mn-lt"/>
+                <a:ea typeface="+mn-ea"/>
+                <a:cs typeface="+mn-cs"/>
+              </a:defRPr>
+            </a:lvl7pPr>
+            <a:lvl8pPr marL="3200400" algn="l" defTabSz="914400" rtl="0" eaLnBrk="1" latinLnBrk="0" hangingPunct="1">
+              <a:defRPr sz="1800" kern="1200">
+                <a:solidFill>
+                  <a:schemeClr val="tx1"/>
+                </a:solidFill>
+                <a:latin typeface="+mn-lt"/>
+                <a:ea typeface="+mn-ea"/>
+                <a:cs typeface="+mn-cs"/>
+              </a:defRPr>
+            </a:lvl8pPr>
+            <a:lvl9pPr marL="3657600" algn="l" defTabSz="914400" rtl="0" eaLnBrk="1" latinLnBrk="0" hangingPunct="1">
+              <a:defRPr sz="1800" kern="1200">
+                <a:solidFill>
+                  <a:schemeClr val="tx1"/>
+                </a:solidFill>
+                <a:latin typeface="+mn-lt"/>
+                <a:ea typeface="+mn-ea"/>
+                <a:cs typeface="+mn-cs"/>
+              </a:defRPr>
+            </a:lvl9pPr>
+          </a:lstStyle>
+          <a:p>
+            <a:pPr indent="0" algn="ctr">
+              <a:buNone/>
+            </a:pPr>
+            <a:r>
+              <a:rPr lang="en-US" dirty="0">
+                <a:solidFill>
+                  <a:schemeClr val="dk1"/>
+                </a:solidFill>
+              </a:rPr>
+              <a:t>squash</a:t>
+            </a:r>
+          </a:p>
+        </p:txBody>
+      </p:sp>
+      <p:sp>
+        <p:nvSpPr>
+          <p:cNvPr id="2" name="Text 2">
+            <a:extLst>
+              <a:ext uri="{FF2B5EF4-FFF2-40B4-BE49-F238E27FC236}">
+                <a16:creationId xmlns:a16="http://schemas.microsoft.com/office/drawing/2014/main" id="{1012463B-9937-91D0-8F75-0F586A33F105}"/>
+              </a:ext>
+            </a:extLst>
+          </p:cNvPr>
+          <p:cNvSpPr/>
+          <p:nvPr/>
+        </p:nvSpPr>
+        <p:spPr>
+          <a:xfrm>
+            <a:off x="5370860" y="1247576"/>
+            <a:ext cx="1074420" cy="398221"/>
+          </a:xfrm>
+          <a:prstGeom prst="rect">
+            <a:avLst/>
+          </a:prstGeom>
+          <a:noFill/>
+          <a:ln/>
+        </p:spPr>
+        <p:txBody>
+          <a:bodyPr wrap="square" rtlCol="0" anchor="ctr"/>
+          <a:lstStyle>
+            <a:lvl1pPr marL="0" algn="l" defTabSz="914400" rtl="0" eaLnBrk="1" latinLnBrk="0" hangingPunct="1">
+              <a:defRPr sz="1800" kern="1200">
+                <a:solidFill>
+                  <a:schemeClr val="tx1"/>
+                </a:solidFill>
+                <a:latin typeface="+mn-lt"/>
+                <a:ea typeface="+mn-ea"/>
+                <a:cs typeface="+mn-cs"/>
+              </a:defRPr>
+            </a:lvl1pPr>
+            <a:lvl2pPr marL="457200" algn="l" defTabSz="914400" rtl="0" eaLnBrk="1" latinLnBrk="0" hangingPunct="1">
+              <a:defRPr sz="1800" kern="1200">
+                <a:solidFill>
+                  <a:schemeClr val="tx1"/>
+                </a:solidFill>
+                <a:latin typeface="+mn-lt"/>
+                <a:ea typeface="+mn-ea"/>
+                <a:cs typeface="+mn-cs"/>
+              </a:defRPr>
+            </a:lvl2pPr>
+            <a:lvl3pPr marL="914400" algn="l" defTabSz="914400" rtl="0" eaLnBrk="1" latinLnBrk="0" hangingPunct="1">
+              <a:defRPr sz="1800" kern="1200">
+                <a:solidFill>
+                  <a:schemeClr val="tx1"/>
+                </a:solidFill>
+                <a:latin typeface="+mn-lt"/>
+                <a:ea typeface="+mn-ea"/>
+                <a:cs typeface="+mn-cs"/>
+              </a:defRPr>
+            </a:lvl3pPr>
+            <a:lvl4pPr marL="1371600" algn="l" defTabSz="914400" rtl="0" eaLnBrk="1" latinLnBrk="0" hangingPunct="1">
+              <a:defRPr sz="1800" kern="1200">
+                <a:solidFill>
+                  <a:schemeClr val="tx1"/>
+                </a:solidFill>
+                <a:latin typeface="+mn-lt"/>
+                <a:ea typeface="+mn-ea"/>
+                <a:cs typeface="+mn-cs"/>
+              </a:defRPr>
+            </a:lvl4pPr>
+            <a:lvl5pPr marL="1828800" algn="l" defTabSz="914400" rtl="0" eaLnBrk="1" latinLnBrk="0" hangingPunct="1">
+              <a:defRPr sz="1800" kern="1200">
+                <a:solidFill>
+                  <a:schemeClr val="tx1"/>
+                </a:solidFill>
+                <a:latin typeface="+mn-lt"/>
+                <a:ea typeface="+mn-ea"/>
+                <a:cs typeface="+mn-cs"/>
+              </a:defRPr>
+            </a:lvl5pPr>
+            <a:lvl6pPr marL="2286000" algn="l" defTabSz="914400" rtl="0" eaLnBrk="1" latinLnBrk="0" hangingPunct="1">
+              <a:defRPr sz="1800" kern="1200">
+                <a:solidFill>
+                  <a:schemeClr val="tx1"/>
+                </a:solidFill>
+                <a:latin typeface="+mn-lt"/>
+                <a:ea typeface="+mn-ea"/>
+                <a:cs typeface="+mn-cs"/>
+              </a:defRPr>
+            </a:lvl6pPr>
+            <a:lvl7pPr marL="2743200" algn="l" defTabSz="914400" rtl="0" eaLnBrk="1" latinLnBrk="0" hangingPunct="1">
+              <a:defRPr sz="1800" kern="1200">
+                <a:solidFill>
+                  <a:schemeClr val="tx1"/>
+                </a:solidFill>
+                <a:latin typeface="+mn-lt"/>
+                <a:ea typeface="+mn-ea"/>
+                <a:cs typeface="+mn-cs"/>
+              </a:defRPr>
+            </a:lvl7pPr>
+            <a:lvl8pPr marL="3200400" algn="l" defTabSz="914400" rtl="0" eaLnBrk="1" latinLnBrk="0" hangingPunct="1">
+              <a:defRPr sz="1800" kern="1200">
+                <a:solidFill>
+                  <a:schemeClr val="tx1"/>
+                </a:solidFill>
+                <a:latin typeface="+mn-lt"/>
+                <a:ea typeface="+mn-ea"/>
+                <a:cs typeface="+mn-cs"/>
+              </a:defRPr>
+            </a:lvl8pPr>
+            <a:lvl9pPr marL="3657600" algn="l" defTabSz="914400" rtl="0" eaLnBrk="1" latinLnBrk="0" hangingPunct="1">
+              <a:defRPr sz="1800" kern="1200">
+                <a:solidFill>
+                  <a:schemeClr val="tx1"/>
+                </a:solidFill>
+                <a:latin typeface="+mn-lt"/>
+                <a:ea typeface="+mn-ea"/>
+                <a:cs typeface="+mn-cs"/>
+              </a:defRPr>
+            </a:lvl9pPr>
+          </a:lstStyle>
+          <a:p>
+            <a:pPr indent="0" algn="ctr">
+              <a:buNone/>
+            </a:pPr>
+            <a:r>
+              <a:rPr lang="en-US" dirty="0">
+                <a:solidFill>
+                  <a:schemeClr val="dk1"/>
+                </a:solidFill>
+              </a:rPr>
+              <a:t>result</a:t>
+            </a:r>
+          </a:p>
+        </p:txBody>
+      </p:sp>
+    </p:spTree>
+    <p:extLst>
+      <p:ext uri="{BB962C8B-B14F-4D97-AF65-F5344CB8AC3E}">
+        <p14:creationId xmlns:p14="http://schemas.microsoft.com/office/powerpoint/2010/main" val="967428071"/>
+      </p:ext>
+    </p:extLst>
+  </p:cSld>
+  <p:clrMapOvr>
+    <a:masterClrMapping/>
+  </p:clrMapOvr>
+</p:sld>
+</file>
+
+<file path=ppt/slides/slide6.xml><?xml version="1.0" encoding="utf-8"?>
+<p:sld xmlns:a="http://schemas.openxmlformats.org/drawingml/2006/main" xmlns:r="http://schemas.openxmlformats.org/officeDocument/2006/relationships" xmlns:p="http://schemas.openxmlformats.org/presentationml/2006/main">
+  <p:cSld>
+    <p:spTree>
+      <p:nvGrpSpPr>
+        <p:cNvPr id="1" name=""/>
+        <p:cNvGrpSpPr/>
+        <p:nvPr/>
+      </p:nvGrpSpPr>
+      <p:grpSpPr>
+        <a:xfrm>
+          <a:off x="0" y="0"/>
+          <a:ext cx="0" cy="0"/>
+          <a:chOff x="0" y="0"/>
+          <a:chExt cx="0" cy="0"/>
+        </a:xfrm>
+      </p:grpSpPr>
       <p:graphicFrame>
         <p:nvGraphicFramePr>
           <p:cNvPr id="2" name="Chart 0">
@@ -14704,7 +22772,7 @@
 </p:sld>
 </file>
 
-<file path=ppt/slides/slide6.xml><?xml version="1.0" encoding="utf-8"?>
+<file path=ppt/slides/slide7.xml><?xml version="1.0" encoding="utf-8"?>
 <p:sld xmlns:a="http://schemas.openxmlformats.org/drawingml/2006/main" xmlns:r="http://schemas.openxmlformats.org/officeDocument/2006/relationships" xmlns:p="http://schemas.openxmlformats.org/presentationml/2006/main">
   <p:cSld>
     <p:spTree>
@@ -15982,7 +24050,7 @@
 </p:sld>
 </file>
 
-<file path=ppt/slides/slide7.xml><?xml version="1.0" encoding="utf-8"?>
+<file path=ppt/slides/slide8.xml><?xml version="1.0" encoding="utf-8"?>
 <p:sld xmlns:a="http://schemas.openxmlformats.org/drawingml/2006/main" xmlns:r="http://schemas.openxmlformats.org/officeDocument/2006/relationships" xmlns:p="http://schemas.openxmlformats.org/presentationml/2006/main">
   <p:cSld>
     <p:spTree>
@@ -17566,7 +25634,7 @@
 </p:sld>
 </file>
 
-<file path=ppt/slides/slide8.xml><?xml version="1.0" encoding="utf-8"?>
+<file path=ppt/slides/slide9.xml><?xml version="1.0" encoding="utf-8"?>
 <p:sld xmlns:a="http://schemas.openxmlformats.org/drawingml/2006/main" xmlns:r="http://schemas.openxmlformats.org/officeDocument/2006/relationships" xmlns:p="http://schemas.openxmlformats.org/presentationml/2006/main">
   <p:cSld>
     <p:spTree>
@@ -18381,256 +26449,6 @@
 </p:sld>
 </file>
 
-<file path=ppt/slides/slide9.xml><?xml version="1.0" encoding="utf-8"?>
-<p:sld xmlns:a="http://schemas.openxmlformats.org/drawingml/2006/main" xmlns:r="http://schemas.openxmlformats.org/officeDocument/2006/relationships" xmlns:p="http://schemas.openxmlformats.org/presentationml/2006/main">
-  <p:cSld>
-    <p:spTree>
-      <p:nvGrpSpPr>
-        <p:cNvPr id="1" name=""/>
-        <p:cNvGrpSpPr/>
-        <p:nvPr/>
-      </p:nvGrpSpPr>
-      <p:grpSpPr>
-        <a:xfrm>
-          <a:off x="0" y="0"/>
-          <a:ext cx="0" cy="0"/>
-          <a:chOff x="0" y="0"/>
-          <a:chExt cx="0" cy="0"/>
-        </a:xfrm>
-      </p:grpSpPr>
-      <p:grpSp>
-        <p:nvGrpSpPr>
-          <p:cNvPr id="3" name="组合 2">
-            <a:extLst>
-              <a:ext uri="{FF2B5EF4-FFF2-40B4-BE49-F238E27FC236}">
-                <a16:creationId xmlns:a16="http://schemas.microsoft.com/office/drawing/2014/main" id="{77180E39-A75E-C53B-4DDE-E50E30C52B33}"/>
-              </a:ext>
-            </a:extLst>
-          </p:cNvPr>
-          <p:cNvGrpSpPr/>
-          <p:nvPr/>
-        </p:nvGrpSpPr>
-        <p:grpSpPr>
-          <a:xfrm>
-            <a:off x="319155" y="1963552"/>
-            <a:ext cx="10571346" cy="4185184"/>
-            <a:chOff x="319155" y="1963552"/>
-            <a:chExt cx="10571346" cy="4185184"/>
-          </a:xfrm>
-        </p:grpSpPr>
-        <p:pic>
-          <p:nvPicPr>
-            <p:cNvPr id="13" name="图片 12">
-              <a:extLst>
-                <a:ext uri="{FF2B5EF4-FFF2-40B4-BE49-F238E27FC236}">
-                  <a16:creationId xmlns:a16="http://schemas.microsoft.com/office/drawing/2014/main" id="{B0619AAE-D481-C95E-E765-275544AE48D4}"/>
-                </a:ext>
-              </a:extLst>
-            </p:cNvPr>
-            <p:cNvPicPr>
-              <a:picLocks noChangeAspect="1"/>
-            </p:cNvPicPr>
-            <p:nvPr/>
-          </p:nvPicPr>
-          <p:blipFill>
-            <a:blip r:embed="rId3"/>
-            <a:stretch>
-              <a:fillRect/>
-            </a:stretch>
-          </p:blipFill>
-          <p:spPr>
-            <a:xfrm>
-              <a:off x="9213331" y="3217559"/>
-              <a:ext cx="1677170" cy="1677170"/>
-            </a:xfrm>
-            <a:prstGeom prst="rect">
-              <a:avLst/>
-            </a:prstGeom>
-          </p:spPr>
-        </p:pic>
-        <p:pic>
-          <p:nvPicPr>
-            <p:cNvPr id="7" name="图片 6">
-              <a:extLst>
-                <a:ext uri="{FF2B5EF4-FFF2-40B4-BE49-F238E27FC236}">
-                  <a16:creationId xmlns:a16="http://schemas.microsoft.com/office/drawing/2014/main" id="{B407AFCE-2210-3FFA-2435-41CA9ABC2070}"/>
-                </a:ext>
-              </a:extLst>
-            </p:cNvPr>
-            <p:cNvPicPr>
-              <a:picLocks noChangeAspect="1"/>
-            </p:cNvPicPr>
-            <p:nvPr/>
-          </p:nvPicPr>
-          <p:blipFill>
-            <a:blip r:embed="rId4"/>
-            <a:srcRect r="10060" b="2210"/>
-            <a:stretch/>
-          </p:blipFill>
-          <p:spPr>
-            <a:xfrm>
-              <a:off x="319155" y="1963552"/>
-              <a:ext cx="7722048" cy="4185184"/>
-            </a:xfrm>
-            <a:prstGeom prst="rect">
-              <a:avLst/>
-            </a:prstGeom>
-          </p:spPr>
-        </p:pic>
-        <p:sp>
-          <p:nvSpPr>
-            <p:cNvPr id="8" name="矩形 7">
-              <a:extLst>
-                <a:ext uri="{FF2B5EF4-FFF2-40B4-BE49-F238E27FC236}">
-                  <a16:creationId xmlns:a16="http://schemas.microsoft.com/office/drawing/2014/main" id="{EE2A0F62-9619-18AA-B76A-C04BDFE27075}"/>
-                </a:ext>
-              </a:extLst>
-            </p:cNvPr>
-            <p:cNvSpPr/>
-            <p:nvPr/>
-          </p:nvSpPr>
-          <p:spPr>
-            <a:xfrm>
-              <a:off x="319155" y="1963552"/>
-              <a:ext cx="7722048" cy="4185184"/>
-            </a:xfrm>
-            <a:prstGeom prst="rect">
-              <a:avLst/>
-            </a:prstGeom>
-            <a:noFill/>
-            <a:ln w="38100">
-              <a:solidFill>
-                <a:schemeClr val="accent1"/>
-              </a:solidFill>
-            </a:ln>
-          </p:spPr>
-          <p:style>
-            <a:lnRef idx="2">
-              <a:schemeClr val="accent1">
-                <a:shade val="15000"/>
-              </a:schemeClr>
-            </a:lnRef>
-            <a:fillRef idx="1">
-              <a:schemeClr val="accent1"/>
-            </a:fillRef>
-            <a:effectRef idx="0">
-              <a:schemeClr val="accent1"/>
-            </a:effectRef>
-            <a:fontRef idx="minor">
-              <a:schemeClr val="lt1"/>
-            </a:fontRef>
-          </p:style>
-          <p:txBody>
-            <a:bodyPr rtlCol="0" anchor="ctr"/>
-            <a:lstStyle/>
-            <a:p>
-              <a:pPr algn="ctr"/>
-              <a:endParaRPr lang="zh-CN" altLang="en-US"/>
-            </a:p>
-          </p:txBody>
-        </p:sp>
-        <p:sp>
-          <p:nvSpPr>
-            <p:cNvPr id="10" name="文本框 9">
-              <a:extLst>
-                <a:ext uri="{FF2B5EF4-FFF2-40B4-BE49-F238E27FC236}">
-                  <a16:creationId xmlns:a16="http://schemas.microsoft.com/office/drawing/2014/main" id="{35577BB5-862E-0885-8F0C-20A8F09C22CA}"/>
-                </a:ext>
-              </a:extLst>
-            </p:cNvPr>
-            <p:cNvSpPr txBox="1"/>
-            <p:nvPr/>
-          </p:nvSpPr>
-          <p:spPr>
-            <a:xfrm>
-              <a:off x="8349593" y="3640645"/>
-              <a:ext cx="490840" cy="830997"/>
-            </a:xfrm>
-            <a:prstGeom prst="rect">
-              <a:avLst/>
-            </a:prstGeom>
-            <a:noFill/>
-          </p:spPr>
-          <p:txBody>
-            <a:bodyPr wrap="none" rtlCol="0">
-              <a:spAutoFit/>
-            </a:bodyPr>
-            <a:lstStyle/>
-            <a:p>
-              <a:r>
-                <a:rPr lang="en-US" altLang="zh-CN" sz="4800" b="1" dirty="0"/>
-                <a:t>+</a:t>
-              </a:r>
-              <a:endParaRPr lang="zh-CN" altLang="en-US" sz="4800" b="1" dirty="0"/>
-            </a:p>
-          </p:txBody>
-        </p:sp>
-        <p:sp>
-          <p:nvSpPr>
-            <p:cNvPr id="17" name="矩形 16">
-              <a:extLst>
-                <a:ext uri="{FF2B5EF4-FFF2-40B4-BE49-F238E27FC236}">
-                  <a16:creationId xmlns:a16="http://schemas.microsoft.com/office/drawing/2014/main" id="{614BE567-6868-9755-CE5B-4279745D59D1}"/>
-                </a:ext>
-              </a:extLst>
-            </p:cNvPr>
-            <p:cNvSpPr/>
-            <p:nvPr/>
-          </p:nvSpPr>
-          <p:spPr>
-            <a:xfrm>
-              <a:off x="9213330" y="3217559"/>
-              <a:ext cx="1677170" cy="1677169"/>
-            </a:xfrm>
-            <a:prstGeom prst="rect">
-              <a:avLst/>
-            </a:prstGeom>
-            <a:noFill/>
-            <a:ln w="38100">
-              <a:solidFill>
-                <a:schemeClr val="accent1"/>
-              </a:solidFill>
-            </a:ln>
-          </p:spPr>
-          <p:style>
-            <a:lnRef idx="2">
-              <a:schemeClr val="accent1">
-                <a:shade val="15000"/>
-              </a:schemeClr>
-            </a:lnRef>
-            <a:fillRef idx="1">
-              <a:schemeClr val="accent1"/>
-            </a:fillRef>
-            <a:effectRef idx="0">
-              <a:schemeClr val="accent1"/>
-            </a:effectRef>
-            <a:fontRef idx="minor">
-              <a:schemeClr val="lt1"/>
-            </a:fontRef>
-          </p:style>
-          <p:txBody>
-            <a:bodyPr rtlCol="0" anchor="ctr"/>
-            <a:lstStyle/>
-            <a:p>
-              <a:pPr algn="ctr"/>
-              <a:endParaRPr lang="zh-CN" altLang="en-US"/>
-            </a:p>
-          </p:txBody>
-        </p:sp>
-      </p:grpSp>
-    </p:spTree>
-    <p:extLst>
-      <p:ext uri="{BB962C8B-B14F-4D97-AF65-F5344CB8AC3E}">
-        <p14:creationId xmlns:p14="http://schemas.microsoft.com/office/powerpoint/2010/main" val="531027728"/>
-      </p:ext>
-    </p:extLst>
-  </p:cSld>
-  <p:clrMapOvr>
-    <a:masterClrMapping/>
-  </p:clrMapOvr>
-</p:sld>
-</file>
-
 <file path=ppt/theme/theme1.xml><?xml version="1.0" encoding="utf-8"?>
 <a:theme xmlns:a="http://schemas.openxmlformats.org/drawingml/2006/main" name="WPS">
   <a:themeElements>
